--- a/documents/meetings/KCARC Meeting 20260922.pptx
+++ b/documents/meetings/KCARC Meeting 20260922.pptx
@@ -4,13 +4,19 @@
   <p:sldMasterIdLst>
     <p:sldMasterId id="2147483648" r:id="rId2"/>
     <p:sldMasterId id="2147483650" r:id="rId3"/>
-    <p:sldMasterId id="2147483652" r:id="rId4"/>
+    <p:sldMasterId id="2147483653" r:id="rId4"/>
   </p:sldMasterIdLst>
   <p:sldIdLst>
     <p:sldId id="256" r:id="rId5"/>
     <p:sldId id="257" r:id="rId6"/>
     <p:sldId id="258" r:id="rId7"/>
     <p:sldId id="259" r:id="rId8"/>
+    <p:sldId id="260" r:id="rId9"/>
+    <p:sldId id="261" r:id="rId10"/>
+    <p:sldId id="262" r:id="rId11"/>
+    <p:sldId id="263" r:id="rId12"/>
+    <p:sldId id="264" r:id="rId13"/>
+    <p:sldId id="265" r:id="rId14"/>
   </p:sldIdLst>
   <p:sldSz cx="12192000" cy="6858000"/>
   <p:notesSz cx="7772400" cy="10058400"/>
@@ -148,7 +154,7 @@
         <p:txBody>
           <a:bodyPr/>
           <a:p>
-            <a:fld id="{E29B13C7-D7F6-438B-90A8-C10669DFCC9C}" type="slidenum">
+            <a:fld id="{3D065408-0121-4C4A-9F22-F6C5E0E404E1}" type="slidenum">
               <a:t>&lt;#&gt;</a:t>
             </a:fld>
           </a:p>
@@ -181,6 +187,221 @@
 </file>
 
 <file path=ppt/slideLayouts/slideLayout2.xml><?xml version="1.0" encoding="utf-8"?>
+<p:sldLayout xmlns:a="http://schemas.openxmlformats.org/drawingml/2006/main" xmlns:p="http://schemas.openxmlformats.org/presentationml/2006/main" xmlns:r="http://schemas.openxmlformats.org/officeDocument/2006/relationships" xmlns:p14="http://schemas.microsoft.com/office/powerpoint/2010/main" xmlns:p15="http://schemas.microsoft.com/office/powerpoint/2012/main" xmlns:mc="http://schemas.openxmlformats.org/markup-compatibility/2006" type="twoObj" preserve="1">
+  <p:cSld name="Title and Content">
+    <p:spTree>
+      <p:nvGrpSpPr>
+        <p:cNvPr id="1" name=""/>
+        <p:cNvGrpSpPr/>
+        <p:nvPr/>
+      </p:nvGrpSpPr>
+      <p:grpSpPr>
+        <a:xfrm>
+          <a:off x="0" y="0"/>
+          <a:ext cx="0" cy="0"/>
+          <a:chOff x="0" y="0"/>
+          <a:chExt cx="0" cy="0"/>
+        </a:xfrm>
+      </p:grpSpPr>
+      <p:sp>
+        <p:nvSpPr>
+          <p:cNvPr id="20" name="PlaceHolder 1"/>
+          <p:cNvSpPr>
+            <a:spLocks noGrp="1"/>
+          </p:cNvSpPr>
+          <p:nvPr>
+            <p:ph type="title"/>
+          </p:nvPr>
+        </p:nvSpPr>
+        <p:spPr>
+          <a:xfrm>
+            <a:off x="838080" y="365040"/>
+            <a:ext cx="10514160" cy="1324080"/>
+          </a:xfrm>
+          <a:prstGeom prst="rect">
+            <a:avLst/>
+          </a:prstGeom>
+          <a:noFill/>
+          <a:ln w="0">
+            <a:noFill/>
+          </a:ln>
+        </p:spPr>
+        <p:txBody>
+          <a:bodyPr lIns="0" rIns="0" tIns="0" bIns="0" anchor="ctr">
+            <a:noAutofit/>
+          </a:bodyPr>
+          <a:p>
+            <a:pPr indent="0">
+              <a:buNone/>
+            </a:pPr>
+            <a:endParaRPr b="0" lang="en-US" sz="1800" spc="-1" strike="noStrike">
+              <a:solidFill>
+                <a:schemeClr val="dk1"/>
+              </a:solidFill>
+              <a:latin typeface="Aptos"/>
+            </a:endParaRPr>
+          </a:p>
+        </p:txBody>
+      </p:sp>
+      <p:sp>
+        <p:nvSpPr>
+          <p:cNvPr id="21" name="PlaceHolder 2"/>
+          <p:cNvSpPr>
+            <a:spLocks noGrp="1"/>
+          </p:cNvSpPr>
+          <p:nvPr>
+            <p:ph/>
+          </p:nvPr>
+        </p:nvSpPr>
+        <p:spPr>
+          <a:xfrm>
+            <a:off x="838080" y="1825560"/>
+            <a:ext cx="5130720" cy="4349880"/>
+          </a:xfrm>
+          <a:prstGeom prst="rect">
+            <a:avLst/>
+          </a:prstGeom>
+          <a:noFill/>
+          <a:ln w="0">
+            <a:noFill/>
+          </a:ln>
+        </p:spPr>
+        <p:txBody>
+          <a:bodyPr lIns="0" rIns="0" tIns="0" bIns="0" anchor="t">
+            <a:normAutofit/>
+          </a:bodyPr>
+          <a:p>
+            <a:pPr indent="0">
+              <a:lnSpc>
+                <a:spcPct val="90000"/>
+              </a:lnSpc>
+              <a:spcBef>
+                <a:spcPts val="1417"/>
+              </a:spcBef>
+              <a:buNone/>
+            </a:pPr>
+            <a:endParaRPr b="0" lang="en-US" sz="2800" spc="-1" strike="noStrike">
+              <a:solidFill>
+                <a:schemeClr val="dk1"/>
+              </a:solidFill>
+              <a:latin typeface="Aptos"/>
+            </a:endParaRPr>
+          </a:p>
+        </p:txBody>
+      </p:sp>
+      <p:sp>
+        <p:nvSpPr>
+          <p:cNvPr id="22" name="PlaceHolder 3"/>
+          <p:cNvSpPr>
+            <a:spLocks noGrp="1"/>
+          </p:cNvSpPr>
+          <p:nvPr>
+            <p:ph/>
+          </p:nvPr>
+        </p:nvSpPr>
+        <p:spPr>
+          <a:xfrm>
+            <a:off x="6225840" y="1825560"/>
+            <a:ext cx="5130720" cy="4349880"/>
+          </a:xfrm>
+          <a:prstGeom prst="rect">
+            <a:avLst/>
+          </a:prstGeom>
+          <a:noFill/>
+          <a:ln w="0">
+            <a:noFill/>
+          </a:ln>
+        </p:spPr>
+        <p:txBody>
+          <a:bodyPr lIns="0" rIns="0" tIns="0" bIns="0" anchor="t">
+            <a:normAutofit/>
+          </a:bodyPr>
+          <a:p>
+            <a:pPr indent="0">
+              <a:lnSpc>
+                <a:spcPct val="90000"/>
+              </a:lnSpc>
+              <a:spcBef>
+                <a:spcPts val="1417"/>
+              </a:spcBef>
+              <a:buNone/>
+            </a:pPr>
+            <a:endParaRPr b="0" lang="en-US" sz="2800" spc="-1" strike="noStrike">
+              <a:solidFill>
+                <a:schemeClr val="dk1"/>
+              </a:solidFill>
+              <a:latin typeface="Aptos"/>
+            </a:endParaRPr>
+          </a:p>
+        </p:txBody>
+      </p:sp>
+      <p:sp>
+        <p:nvSpPr>
+          <p:cNvPr id="5" name="PlaceHolder 4"/>
+          <p:cNvSpPr>
+            <a:spLocks noGrp="1"/>
+          </p:cNvSpPr>
+          <p:nvPr>
+            <p:ph type="ftr" idx="4"/>
+          </p:nvPr>
+        </p:nvSpPr>
+        <p:spPr/>
+        <p:txBody>
+          <a:bodyPr/>
+          <a:p>
+            <a:r>
+              <a:t>Footer</a:t>
+            </a:r>
+          </a:p>
+        </p:txBody>
+      </p:sp>
+      <p:sp>
+        <p:nvSpPr>
+          <p:cNvPr id="6" name="PlaceHolder 5"/>
+          <p:cNvSpPr>
+            <a:spLocks noGrp="1"/>
+          </p:cNvSpPr>
+          <p:nvPr>
+            <p:ph type="sldNum" idx="5"/>
+          </p:nvPr>
+        </p:nvSpPr>
+        <p:spPr/>
+        <p:txBody>
+          <a:bodyPr/>
+          <a:p>
+            <a:fld id="{3EE8C50C-4E33-4A84-9EE5-2302A35A168E}" type="slidenum">
+              <a:t>&lt;#&gt;</a:t>
+            </a:fld>
+          </a:p>
+        </p:txBody>
+      </p:sp>
+      <p:sp>
+        <p:nvSpPr>
+          <p:cNvPr id="7" name="PlaceHolder 6"/>
+          <p:cNvSpPr>
+            <a:spLocks noGrp="1"/>
+          </p:cNvSpPr>
+          <p:nvPr>
+            <p:ph type="dt" idx="6"/>
+          </p:nvPr>
+        </p:nvSpPr>
+        <p:spPr/>
+        <p:txBody>
+          <a:bodyPr/>
+          <a:p>
+            <a:r>
+              <a:rPr lang="en-US"/>
+              <a:t/>
+            </a:r>
+          </a:p>
+        </p:txBody>
+      </p:sp>
+    </p:spTree>
+  </p:cSld>
+</p:sldLayout>
+</file>
+
+<file path=ppt/slideLayouts/slideLayout3.xml><?xml version="1.0" encoding="utf-8"?>
 <p:sldLayout xmlns:a="http://schemas.openxmlformats.org/drawingml/2006/main" xmlns:p="http://schemas.openxmlformats.org/presentationml/2006/main" xmlns:r="http://schemas.openxmlformats.org/officeDocument/2006/relationships" xmlns:p14="http://schemas.microsoft.com/office/powerpoint/2010/main" xmlns:p15="http://schemas.microsoft.com/office/powerpoint/2012/main" xmlns:mc="http://schemas.openxmlformats.org/markup-compatibility/2006" type="tx" preserve="1">
   <p:cSld name="Title and Content">
     <p:spTree>
@@ -199,7 +420,7 @@
       </p:grpSpPr>
       <p:sp>
         <p:nvSpPr>
-          <p:cNvPr id="20" name="PlaceHolder 1"/>
+          <p:cNvPr id="23" name="PlaceHolder 1"/>
           <p:cNvSpPr>
             <a:spLocks noGrp="1"/>
           </p:cNvSpPr>
@@ -239,7 +460,7 @@
       </p:sp>
       <p:sp>
         <p:nvSpPr>
-          <p:cNvPr id="21" name="PlaceHolder 2"/>
+          <p:cNvPr id="24" name="PlaceHolder 2"/>
           <p:cNvSpPr>
             <a:spLocks noGrp="1"/>
           </p:cNvSpPr>
@@ -317,7 +538,7 @@
         <p:txBody>
           <a:bodyPr/>
           <a:p>
-            <a:fld id="{E65AA33C-63C4-4CE3-A01E-D69DB28131BC}" type="slidenum">
+            <a:fld id="{10DC6539-0531-4731-A1BE-CF991DE85379}" type="slidenum">
               <a:t>&lt;#&gt;</a:t>
             </a:fld>
           </a:p>
@@ -349,7 +570,7 @@
 </p:sldLayout>
 </file>
 
-<file path=ppt/slideLayouts/slideLayout3.xml><?xml version="1.0" encoding="utf-8"?>
+<file path=ppt/slideLayouts/slideLayout4.xml><?xml version="1.0" encoding="utf-8"?>
 <p:sldLayout xmlns:a="http://schemas.openxmlformats.org/drawingml/2006/main" xmlns:p="http://schemas.openxmlformats.org/presentationml/2006/main" xmlns:r="http://schemas.openxmlformats.org/officeDocument/2006/relationships" xmlns:p14="http://schemas.microsoft.com/office/powerpoint/2010/main" xmlns:p15="http://schemas.microsoft.com/office/powerpoint/2012/main" xmlns:mc="http://schemas.openxmlformats.org/markup-compatibility/2006" type="obj" preserve="1">
   <p:cSld name="Default">
     <p:spTree>
@@ -368,7 +589,7 @@
       </p:grpSpPr>
       <p:sp>
         <p:nvSpPr>
-          <p:cNvPr id="32" name="PlaceHolder 1"/>
+          <p:cNvPr id="35" name="PlaceHolder 1"/>
           <p:cNvSpPr>
             <a:spLocks noGrp="1"/>
           </p:cNvSpPr>
@@ -408,7 +629,7 @@
       </p:sp>
       <p:sp>
         <p:nvSpPr>
-          <p:cNvPr id="33" name="PlaceHolder 2"/>
+          <p:cNvPr id="36" name="PlaceHolder 2"/>
           <p:cNvSpPr>
             <a:spLocks noGrp="1"/>
           </p:cNvSpPr>
@@ -486,7 +707,7 @@
         <p:txBody>
           <a:bodyPr/>
           <a:p>
-            <a:fld id="{1DF46461-BA6D-4DBB-8A4A-A60FADA67C23}" type="slidenum">
+            <a:fld id="{77B09A96-1613-449C-956E-E3D1A0BA1964}" type="slidenum">
               <a:t>&lt;#&gt;</a:t>
             </a:fld>
           </a:p>
@@ -715,7 +936,70 @@
                 </a:solidFill>
                 <a:latin typeface="Aptos"/>
               </a:rPr>
-              <a:t>Click to edit the title text format</a:t>
+              <a:t>Click </a:t>
+            </a:r>
+            <a:r>
+              <a:rPr b="0" lang="en-US" sz="4400" spc="-1" strike="noStrike">
+                <a:solidFill>
+                  <a:schemeClr val="dk1"/>
+                </a:solidFill>
+                <a:latin typeface="Aptos"/>
+              </a:rPr>
+              <a:t>to </a:t>
+            </a:r>
+            <a:r>
+              <a:rPr b="0" lang="en-US" sz="4400" spc="-1" strike="noStrike">
+                <a:solidFill>
+                  <a:schemeClr val="dk1"/>
+                </a:solidFill>
+                <a:latin typeface="Aptos"/>
+              </a:rPr>
+              <a:t>edit </a:t>
+            </a:r>
+            <a:r>
+              <a:rPr b="0" lang="en-US" sz="4400" spc="-1" strike="noStrike">
+                <a:solidFill>
+                  <a:schemeClr val="dk1"/>
+                </a:solidFill>
+                <a:latin typeface="Aptos"/>
+              </a:rPr>
+              <a:t>the </a:t>
+            </a:r>
+            <a:r>
+              <a:rPr b="0" lang="en-US" sz="4400" spc="-1" strike="noStrike">
+                <a:solidFill>
+                  <a:schemeClr val="dk1"/>
+                </a:solidFill>
+                <a:latin typeface="Aptos"/>
+              </a:rPr>
+              <a:t>title </a:t>
+            </a:r>
+            <a:r>
+              <a:rPr b="0" lang="en-US" sz="4400" spc="-1" strike="noStrike">
+                <a:solidFill>
+                  <a:schemeClr val="dk1"/>
+                </a:solidFill>
+                <a:latin typeface="Aptos"/>
+              </a:rPr>
+              <a:t>text </a:t>
+            </a:r>
+            <a:r>
+              <a:rPr b="0" lang="en-US" sz="4400" spc="-1" strike="noStrike">
+                <a:solidFill>
+                  <a:schemeClr val="dk1"/>
+                </a:solidFill>
+                <a:latin typeface="Aptos"/>
+              </a:rPr>
+              <a:t>form</a:t>
+            </a:r>
+            <a:r>
+              <a:rPr b="0" lang="en-US" sz="4400" spc="-1" strike="noStrike">
+                <a:solidFill>
+                  <a:schemeClr val="dk1"/>
+                </a:solidFill>
+                <a:latin typeface="Aptos"/>
+              </a:rPr>
+              <a:t>at</a:t>
             </a:r>
             <a:endParaRPr b="0" lang="en-US" sz="4400" spc="-1" strike="noStrike">
               <a:solidFill>
@@ -858,7 +1142,7 @@
                 <a:tab algn="l" pos="0"/>
               </a:tabLst>
             </a:pPr>
-            <a:fld id="{6A3CF4E6-089F-4B42-B83C-245900145EC2}" type="slidenum">
+            <a:fld id="{FBC8DDC2-63ED-4D69-AB9E-86A9696109BD}" type="slidenum">
               <a:rPr b="0" lang="en-US" sz="1200" spc="-1" strike="noStrike">
                 <a:solidFill>
                   <a:schemeClr val="dk1">
@@ -1833,7 +2117,7 @@
                 <a:tab algn="l" pos="0"/>
               </a:tabLst>
             </a:pPr>
-            <a:fld id="{E5028C25-CBD2-4263-98A5-86401E21DDE2}" type="slidenum">
+            <a:fld id="{91D92FAB-4EAF-4921-A84A-D1F12305F3FE}" type="slidenum">
               <a:rPr b="0" lang="en-US" sz="1200" spc="-1" strike="noStrike">
                 <a:solidFill>
                   <a:schemeClr val="dk1">
@@ -1918,6 +2202,7 @@
   <p:clrMap bg1="lt1" bg2="lt2" tx1="dk1" tx2="dk2" accent1="accent1" accent2="accent2" accent3="accent3" accent4="accent4" accent5="accent5" accent6="accent6" hlink="hlink" folHlink="folHlink"/>
   <p:sldLayoutIdLst>
     <p:sldLayoutId id="2147483651" r:id="rId6"/>
+    <p:sldLayoutId id="2147483652" r:id="rId7"/>
   </p:sldLayoutIdLst>
 </p:sldMaster>
 </file>
@@ -1948,7 +2233,7 @@
       </p:grpSpPr>
       <p:pic>
         <p:nvPicPr>
-          <p:cNvPr id="22" name="Picture 19" descr=""/>
+          <p:cNvPr id="25" name="Picture 19" descr=""/>
           <p:cNvPicPr/>
           <p:nvPr/>
         </p:nvPicPr>
@@ -1973,7 +2258,7 @@
       </p:pic>
       <p:sp>
         <p:nvSpPr>
-          <p:cNvPr id="23" name="Rectangle 11"/>
+          <p:cNvPr id="26" name="Rectangle 11"/>
           <p:cNvSpPr/>
           <p:nvPr/>
         </p:nvSpPr>
@@ -2029,7 +2314,7 @@
       </p:sp>
       <p:sp>
         <p:nvSpPr>
-          <p:cNvPr id="24" name="Rectangle 13"/>
+          <p:cNvPr id="27" name="Rectangle 13"/>
           <p:cNvSpPr/>
           <p:nvPr/>
         </p:nvSpPr>
@@ -2083,7 +2368,7 @@
       </p:sp>
       <p:pic>
         <p:nvPicPr>
-          <p:cNvPr id="25" name="Picture 8" descr=""/>
+          <p:cNvPr id="28" name="Picture 8" descr=""/>
           <p:cNvPicPr/>
           <p:nvPr/>
         </p:nvPicPr>
@@ -2108,7 +2393,7 @@
       </p:pic>
       <p:pic>
         <p:nvPicPr>
-          <p:cNvPr id="26" name="Graphic 16" descr=""/>
+          <p:cNvPr id="29" name="Graphic 16" descr=""/>
           <p:cNvPicPr/>
           <p:nvPr/>
         </p:nvPicPr>
@@ -2137,7 +2422,7 @@
       </p:pic>
       <p:sp>
         <p:nvSpPr>
-          <p:cNvPr id="27" name="PlaceHolder 1"/>
+          <p:cNvPr id="30" name="PlaceHolder 1"/>
           <p:cNvSpPr>
             <a:spLocks noGrp="1"/>
           </p:cNvSpPr>
@@ -2186,7 +2471,7 @@
       </p:sp>
       <p:sp>
         <p:nvSpPr>
-          <p:cNvPr id="28" name="PlaceHolder 2"/>
+          <p:cNvPr id="31" name="PlaceHolder 2"/>
           <p:cNvSpPr>
             <a:spLocks noGrp="1"/>
           </p:cNvSpPr>
@@ -2432,7 +2717,7 @@
       </p:sp>
       <p:sp>
         <p:nvSpPr>
-          <p:cNvPr id="29" name="PlaceHolder 3"/>
+          <p:cNvPr id="32" name="PlaceHolder 3"/>
           <p:cNvSpPr>
             <a:spLocks noGrp="1"/>
           </p:cNvSpPr>
@@ -2508,7 +2793,7 @@
       </p:sp>
       <p:sp>
         <p:nvSpPr>
-          <p:cNvPr id="30" name="PlaceHolder 4"/>
+          <p:cNvPr id="33" name="PlaceHolder 4"/>
           <p:cNvSpPr>
             <a:spLocks noGrp="1"/>
           </p:cNvSpPr>
@@ -2562,7 +2847,7 @@
                 <a:tab algn="l" pos="0"/>
               </a:tabLst>
             </a:pPr>
-            <a:fld id="{3E497741-F934-405C-8869-6C0C266E5957}" type="slidenum">
+            <a:fld id="{2086F42C-E471-4DD4-85E6-E6D36D3B8C85}" type="slidenum">
               <a:rPr b="0" lang="en-US" sz="1200" spc="-1" strike="noStrike">
                 <a:solidFill>
                   <a:schemeClr val="dk1">
@@ -2584,7 +2869,7 @@
       </p:sp>
       <p:sp>
         <p:nvSpPr>
-          <p:cNvPr id="31" name="PlaceHolder 5"/>
+          <p:cNvPr id="34" name="PlaceHolder 5"/>
           <p:cNvSpPr>
             <a:spLocks noGrp="1"/>
           </p:cNvSpPr>
@@ -2646,7 +2931,7 @@
   </p:cSld>
   <p:clrMap bg1="lt1" bg2="lt2" tx1="dk1" tx2="dk2" accent1="accent1" accent2="accent2" accent3="accent3" accent4="accent4" accent5="accent5" accent6="accent6" hlink="hlink" folHlink="folHlink"/>
   <p:sldLayoutIdLst>
-    <p:sldLayoutId id="2147483653" r:id="rId6"/>
+    <p:sldLayoutId id="2147483654" r:id="rId6"/>
   </p:sldLayoutIdLst>
 </p:sldMaster>
 </file>
@@ -2677,7 +2962,7 @@
       </p:grpSpPr>
       <p:sp>
         <p:nvSpPr>
-          <p:cNvPr id="34" name="PlaceHolder 1"/>
+          <p:cNvPr id="37" name="PlaceHolder 1"/>
           <p:cNvSpPr>
             <a:spLocks noGrp="1"/>
           </p:cNvSpPr>
@@ -2744,7 +3029,7 @@
       </p:sp>
       <p:sp>
         <p:nvSpPr>
-          <p:cNvPr id="35" name="PlaceHolder 2"/>
+          <p:cNvPr id="38" name="PlaceHolder 2"/>
           <p:cNvSpPr>
             <a:spLocks noGrp="1"/>
           </p:cNvSpPr>
@@ -2802,7 +3087,7 @@
       </p:sp>
       <p:pic>
         <p:nvPicPr>
-          <p:cNvPr id="36" name="Graphic 4" descr=""/>
+          <p:cNvPr id="39" name="Graphic 4" descr=""/>
           <p:cNvPicPr/>
           <p:nvPr/>
         </p:nvPicPr>
@@ -2829,6 +3114,233 @@
           </a:ln>
         </p:spPr>
       </p:pic>
+    </p:spTree>
+  </p:cSld>
+  <mc:AlternateContent>
+    <mc:Choice Requires="p14">
+      <p:transition spd="slow" p14:dur="2000"/>
+    </mc:Choice>
+    <mc:Fallback>
+      <p:transition spd="slow"/>
+    </mc:Fallback>
+  </mc:AlternateContent>
+</p:sld>
+</file>
+
+<file path=ppt/slides/slide10.xml><?xml version="1.0" encoding="utf-8"?>
+<p:sld xmlns:a="http://schemas.openxmlformats.org/drawingml/2006/main" xmlns:p="http://schemas.openxmlformats.org/presentationml/2006/main" xmlns:r="http://schemas.openxmlformats.org/officeDocument/2006/relationships" xmlns:p14="http://schemas.microsoft.com/office/powerpoint/2010/main" xmlns:p15="http://schemas.microsoft.com/office/powerpoint/2012/main" xmlns:mc="http://schemas.openxmlformats.org/markup-compatibility/2006">
+  <p:cSld>
+    <p:spTree>
+      <p:nvGrpSpPr>
+        <p:cNvPr id="1" name=""/>
+        <p:cNvGrpSpPr/>
+        <p:nvPr/>
+      </p:nvGrpSpPr>
+      <p:grpSpPr>
+        <a:xfrm>
+          <a:off x="0" y="0"/>
+          <a:ext cx="0" cy="0"/>
+          <a:chOff x="0" y="0"/>
+          <a:chExt cx="0" cy="0"/>
+        </a:xfrm>
+      </p:grpSpPr>
+      <p:sp>
+        <p:nvSpPr>
+          <p:cNvPr id="75" name="PlaceHolder 1"/>
+          <p:cNvSpPr>
+            <a:spLocks noGrp="1"/>
+          </p:cNvSpPr>
+          <p:nvPr>
+            <p:ph type="title"/>
+          </p:nvPr>
+        </p:nvSpPr>
+        <p:spPr>
+          <a:xfrm>
+            <a:off x="838080" y="365040"/>
+            <a:ext cx="10514160" cy="1324080"/>
+          </a:xfrm>
+          <a:prstGeom prst="rect">
+            <a:avLst/>
+          </a:prstGeom>
+          <a:noFill/>
+          <a:ln w="0">
+            <a:noFill/>
+          </a:ln>
+        </p:spPr>
+        <p:txBody>
+          <a:bodyPr lIns="0" rIns="0" tIns="0" bIns="0" anchor="ctr">
+            <a:noAutofit/>
+          </a:bodyPr>
+          <a:p>
+            <a:pPr indent="0" defTabSz="914400">
+              <a:lnSpc>
+                <a:spcPct val="90000"/>
+              </a:lnSpc>
+              <a:buNone/>
+              <a:tabLst>
+                <a:tab algn="l" pos="0"/>
+              </a:tabLst>
+            </a:pPr>
+            <a:r>
+              <a:rPr b="0" lang="en-US" sz="4400" spc="-1" strike="noStrike">
+                <a:solidFill>
+                  <a:schemeClr val="dk1"/>
+                </a:solidFill>
+                <a:latin typeface="Aptos Display"/>
+              </a:rPr>
+              <a:t>Radiograms</a:t>
+            </a:r>
+            <a:endParaRPr b="0" lang="en-US" sz="4400" spc="-1" strike="noStrike">
+              <a:solidFill>
+                <a:schemeClr val="dk1"/>
+              </a:solidFill>
+              <a:latin typeface="Aptos"/>
+            </a:endParaRPr>
+          </a:p>
+        </p:txBody>
+      </p:sp>
+      <p:sp>
+        <p:nvSpPr>
+          <p:cNvPr id="76" name="PlaceHolder 2"/>
+          <p:cNvSpPr>
+            <a:spLocks noGrp="1"/>
+          </p:cNvSpPr>
+          <p:nvPr>
+            <p:ph/>
+          </p:nvPr>
+        </p:nvSpPr>
+        <p:spPr>
+          <a:xfrm>
+            <a:off x="838080" y="1825560"/>
+            <a:ext cx="10514160" cy="4349880"/>
+          </a:xfrm>
+          <a:prstGeom prst="rect">
+            <a:avLst/>
+          </a:prstGeom>
+          <a:noFill/>
+          <a:ln w="0">
+            <a:noFill/>
+          </a:ln>
+        </p:spPr>
+        <p:txBody>
+          <a:bodyPr lIns="0" rIns="0" tIns="0" bIns="0" anchor="t">
+            <a:normAutofit/>
+          </a:bodyPr>
+          <a:p>
+            <a:pPr marL="432000" indent="0">
+              <a:lnSpc>
+                <a:spcPct val="90000"/>
+              </a:lnSpc>
+              <a:spcBef>
+                <a:spcPts val="1417"/>
+              </a:spcBef>
+              <a:buNone/>
+            </a:pPr>
+            <a:r>
+              <a:rPr b="0" lang="en-US" sz="2800" spc="-1" strike="noStrike">
+                <a:solidFill>
+                  <a:schemeClr val="dk1"/>
+                </a:solidFill>
+                <a:latin typeface="Aptos"/>
+              </a:rPr>
+              <a:t>By using Radiograms correctly you can play the game telephone over different modes, different nets, a vast number of times, and come out with the correct password in the end.</a:t>
+            </a:r>
+            <a:endParaRPr b="0" lang="en-US" sz="2800" spc="-1" strike="noStrike">
+              <a:solidFill>
+                <a:schemeClr val="dk1"/>
+              </a:solidFill>
+              <a:latin typeface="Aptos"/>
+            </a:endParaRPr>
+          </a:p>
+          <a:p>
+            <a:pPr marL="432000" indent="0">
+              <a:lnSpc>
+                <a:spcPct val="90000"/>
+              </a:lnSpc>
+              <a:spcBef>
+                <a:spcPts val="1417"/>
+              </a:spcBef>
+              <a:buNone/>
+            </a:pPr>
+            <a:r>
+              <a:rPr b="0" lang="en-US" sz="2800" spc="-1" strike="noStrike">
+                <a:solidFill>
+                  <a:schemeClr val="dk1"/>
+                </a:solidFill>
+                <a:latin typeface="Aptos"/>
+              </a:rPr>
+              <a:t>By practicing these operators and traffic handlers can copy accurately and move traffic across various nets as a practical  preparation for public service and emergency communications.</a:t>
+            </a:r>
+            <a:endParaRPr b="0" lang="en-US" sz="2800" spc="-1" strike="noStrike">
+              <a:solidFill>
+                <a:schemeClr val="dk1"/>
+              </a:solidFill>
+              <a:latin typeface="Aptos"/>
+            </a:endParaRPr>
+          </a:p>
+        </p:txBody>
+      </p:sp>
+      <p:sp>
+        <p:nvSpPr>
+          <p:cNvPr id="4" name="PlaceHolder 3"/>
+          <p:cNvSpPr>
+            <a:spLocks noGrp="1"/>
+          </p:cNvSpPr>
+          <p:nvPr>
+            <p:ph type="ftr" idx="4"/>
+          </p:nvPr>
+        </p:nvSpPr>
+        <p:spPr/>
+        <p:txBody>
+          <a:bodyPr/>
+          <a:p>
+            <a:r>
+              <a:t>Warren County KY ARES • KQ4TIV Emergency Coordinator</a:t>
+            </a:r>
+          </a:p>
+        </p:txBody>
+      </p:sp>
+      <p:sp>
+        <p:nvSpPr>
+          <p:cNvPr id="5" name="PlaceHolder 4"/>
+          <p:cNvSpPr>
+            <a:spLocks noGrp="1"/>
+          </p:cNvSpPr>
+          <p:nvPr>
+            <p:ph type="sldNum" idx="5"/>
+          </p:nvPr>
+        </p:nvSpPr>
+        <p:spPr/>
+        <p:txBody>
+          <a:bodyPr/>
+          <a:p>
+            <a:fld id="{280FA7BA-0365-49BD-96E4-C598A8375FD6}" type="slidenum">
+              <a:t>10</a:t>
+            </a:fld>
+          </a:p>
+        </p:txBody>
+      </p:sp>
+      <p:sp>
+        <p:nvSpPr>
+          <p:cNvPr id="6" name="PlaceHolder 5"/>
+          <p:cNvSpPr>
+            <a:spLocks noGrp="1"/>
+          </p:cNvSpPr>
+          <p:nvPr>
+            <p:ph type="dt" idx="6"/>
+          </p:nvPr>
+        </p:nvSpPr>
+        <p:spPr/>
+        <p:txBody>
+          <a:bodyPr/>
+          <a:p>
+            <a:fld id="{08CE262F-3388-4EDA-A52A-691DAAA1B4FF}" type="datetime1">
+              <a:rPr lang="en-US"/>
+              <a:t>09/21/2026</a:t>
+            </a:fld>
+          </a:p>
+        </p:txBody>
+      </p:sp>
     </p:spTree>
   </p:cSld>
   <mc:AlternateContent>
@@ -2861,7 +3373,7 @@
       </p:grpSpPr>
       <p:sp>
         <p:nvSpPr>
-          <p:cNvPr id="37" name="PlaceHolder 1"/>
+          <p:cNvPr id="40" name="PlaceHolder 1"/>
           <p:cNvSpPr>
             <a:spLocks noGrp="1"/>
           </p:cNvSpPr>
@@ -2916,7 +3428,7 @@
       </p:sp>
       <p:sp>
         <p:nvSpPr>
-          <p:cNvPr id="38" name="PlaceHolder 2"/>
+          <p:cNvPr id="41" name="PlaceHolder 2"/>
           <p:cNvSpPr>
             <a:spLocks noGrp="1"/>
           </p:cNvSpPr>
@@ -3022,7 +3534,7 @@
                 </a:solidFill>
                 <a:latin typeface="Aptos"/>
               </a:rPr>
-              <a:t>Radiogram Practice</a:t>
+              <a:t>Radiograms</a:t>
             </a:r>
             <a:endParaRPr b="0" lang="en-US" sz="2800" spc="-1" strike="noStrike">
               <a:solidFill>
@@ -3067,7 +3579,7 @@
         <p:txBody>
           <a:bodyPr/>
           <a:p>
-            <a:fld id="{54401682-7923-42AA-9757-B494617449A3}" type="slidenum">
+            <a:fld id="{C20AFD5F-741B-404E-86F9-00F4B1A7AD3E}" type="slidenum">
               <a:t>2</a:t>
             </a:fld>
           </a:p>
@@ -3087,7 +3599,7 @@
         <p:txBody>
           <a:bodyPr/>
           <a:p>
-            <a:fld id="{80BEB1A0-62EC-4E2E-A3DC-6E3CD42067E7}" type="datetime1">
+            <a:fld id="{975789AB-7171-49DC-8F2E-A29D4A65DB23}" type="datetime1">
               <a:rPr lang="en-US"/>
               <a:t>09/21/2026</a:t>
             </a:fld>
@@ -3126,7 +3638,7 @@
       </p:grpSpPr>
       <p:sp>
         <p:nvSpPr>
-          <p:cNvPr id="39" name="PlaceHolder 1"/>
+          <p:cNvPr id="42" name="PlaceHolder 1"/>
           <p:cNvSpPr>
             <a:spLocks noGrp="1"/>
           </p:cNvSpPr>
@@ -3156,66 +3668,179 @@
               <a:buNone/>
             </a:pPr>
             <a:r>
+              <a:rPr b="1" lang="en-US" sz="4000" spc="-1" strike="noStrike">
+                <a:solidFill>
+                  <a:schemeClr val="dk1"/>
+                </a:solidFill>
+                <a:latin typeface="Aptos"/>
+              </a:rPr>
+              <a:t>General Updates</a:t>
+            </a:r>
+            <a:endParaRPr b="1" lang="en-US" sz="4000" spc="-1" strike="noStrike">
+              <a:solidFill>
+                <a:schemeClr val="dk1"/>
+              </a:solidFill>
+              <a:latin typeface="Aptos"/>
+            </a:endParaRPr>
+          </a:p>
+        </p:txBody>
+      </p:sp>
+      <p:sp>
+        <p:nvSpPr>
+          <p:cNvPr id="43" name=""/>
+          <p:cNvSpPr txBox="1"/>
+          <p:nvPr/>
+        </p:nvSpPr>
+        <p:spPr>
+          <a:xfrm>
+            <a:off x="838080" y="1371600"/>
+            <a:ext cx="5105520" cy="544680"/>
+          </a:xfrm>
+          <a:prstGeom prst="rect">
+            <a:avLst/>
+          </a:prstGeom>
+          <a:noFill/>
+          <a:ln w="73080">
+            <a:noFill/>
+          </a:ln>
+        </p:spPr>
+        <p:txBody>
+          <a:bodyPr lIns="90000" rIns="90000" tIns="45000" bIns="45000" anchor="t">
+            <a:noAutofit/>
+          </a:bodyPr>
+          <a:p>
+            <a:r>
               <a:rPr b="0" lang="en-US" sz="1800" spc="-1" strike="noStrike">
                 <a:solidFill>
-                  <a:schemeClr val="dk1"/>
-                </a:solidFill>
-                <a:latin typeface="Aptos"/>
-              </a:rPr>
-              <a:t>General Updates</a:t>
+                  <a:srgbClr val="000000"/>
+                </a:solidFill>
+                <a:latin typeface="Arial"/>
+              </a:rPr>
+              <a:t>ARES Calendar Added </a:t>
+            </a:r>
+            <a:r>
+              <a:rPr b="0" i="1" lang="en-US" sz="1400" spc="-1" strike="noStrike">
+                <a:solidFill>
+                  <a:srgbClr val="000000"/>
+                </a:solidFill>
+                <a:latin typeface="Arial"/>
+              </a:rPr>
+              <a:t>https://nathanielbutts.github.io/calendar/calendar.html</a:t>
+            </a:r>
+            <a:endParaRPr b="0" lang="en-US" sz="1400" spc="-1" strike="noStrike">
+              <a:solidFill>
+                <a:srgbClr val="000000"/>
+              </a:solidFill>
+              <a:latin typeface="Arial"/>
+            </a:endParaRPr>
+          </a:p>
+        </p:txBody>
+      </p:sp>
+      <p:pic>
+        <p:nvPicPr>
+          <p:cNvPr id="44" name="" descr=""/>
+          <p:cNvPicPr/>
+          <p:nvPr/>
+        </p:nvPicPr>
+        <p:blipFill>
+          <a:blip r:embed="rId1"/>
+          <a:stretch/>
+        </p:blipFill>
+        <p:spPr>
+          <a:xfrm>
+            <a:off x="1143000" y="2043720"/>
+            <a:ext cx="4695840" cy="4357080"/>
+          </a:xfrm>
+          <a:prstGeom prst="rect">
+            <a:avLst/>
+          </a:prstGeom>
+          <a:ln w="73080">
+            <a:noFill/>
+          </a:ln>
+        </p:spPr>
+      </p:pic>
+      <p:pic>
+        <p:nvPicPr>
+          <p:cNvPr id="45" name="" descr=""/>
+          <p:cNvPicPr/>
+          <p:nvPr/>
+        </p:nvPicPr>
+        <p:blipFill>
+          <a:blip r:embed="rId2"/>
+          <a:stretch/>
+        </p:blipFill>
+        <p:spPr>
+          <a:xfrm>
+            <a:off x="6169680" y="2057400"/>
+            <a:ext cx="5651640" cy="4114800"/>
+          </a:xfrm>
+          <a:prstGeom prst="rect">
+            <a:avLst/>
+          </a:prstGeom>
+          <a:ln w="73080">
+            <a:noFill/>
+          </a:ln>
+        </p:spPr>
+      </p:pic>
+      <p:sp>
+        <p:nvSpPr>
+          <p:cNvPr id="46" name=""/>
+          <p:cNvSpPr txBox="1"/>
+          <p:nvPr/>
+        </p:nvSpPr>
+        <p:spPr>
+          <a:xfrm>
+            <a:off x="6172200" y="1371600"/>
+            <a:ext cx="5105520" cy="457200"/>
+          </a:xfrm>
+          <a:prstGeom prst="rect">
+            <a:avLst/>
+          </a:prstGeom>
+          <a:noFill/>
+          <a:ln w="73080">
+            <a:noFill/>
+          </a:ln>
+        </p:spPr>
+        <p:txBody>
+          <a:bodyPr lIns="90000" rIns="90000" tIns="45000" bIns="45000" anchor="t">
+            <a:noAutofit/>
+          </a:bodyPr>
+          <a:p>
+            <a:r>
+              <a:rPr b="0" lang="en-US" sz="1800" spc="-1" strike="noStrike">
+                <a:solidFill>
+                  <a:srgbClr val="000000"/>
+                </a:solidFill>
+                <a:latin typeface="Arial"/>
+              </a:rPr>
+              <a:t>News Section Added</a:t>
             </a:r>
             <a:endParaRPr b="0" lang="en-US" sz="1800" spc="-1" strike="noStrike">
               <a:solidFill>
-                <a:schemeClr val="dk1"/>
-              </a:solidFill>
-              <a:latin typeface="Aptos"/>
-            </a:endParaRPr>
-          </a:p>
-        </p:txBody>
-      </p:sp>
-      <p:sp>
-        <p:nvSpPr>
-          <p:cNvPr id="40" name="PlaceHolder 2"/>
-          <p:cNvSpPr>
-            <a:spLocks noGrp="1"/>
-          </p:cNvSpPr>
-          <p:nvPr>
-            <p:ph/>
-          </p:nvPr>
-        </p:nvSpPr>
-        <p:spPr>
-          <a:xfrm>
-            <a:off x="838080" y="1825560"/>
-            <a:ext cx="10514160" cy="4349880"/>
-          </a:xfrm>
-          <a:prstGeom prst="rect">
-            <a:avLst/>
-          </a:prstGeom>
-          <a:noFill/>
-          <a:ln w="0">
-            <a:noFill/>
-          </a:ln>
-        </p:spPr>
-        <p:txBody>
-          <a:bodyPr lIns="0" rIns="0" tIns="0" bIns="0" anchor="t">
-            <a:normAutofit/>
-          </a:bodyPr>
-          <a:p>
-            <a:pPr indent="0">
-              <a:lnSpc>
-                <a:spcPct val="90000"/>
-              </a:lnSpc>
-              <a:spcBef>
-                <a:spcPts val="1417"/>
-              </a:spcBef>
-              <a:buNone/>
-            </a:pPr>
-            <a:endParaRPr b="0" lang="en-US" sz="2800" spc="-1" strike="noStrike">
-              <a:solidFill>
-                <a:schemeClr val="dk1"/>
-              </a:solidFill>
-              <a:latin typeface="Aptos"/>
-            </a:endParaRPr>
+                <a:srgbClr val="000000"/>
+              </a:solidFill>
+              <a:latin typeface="Arial"/>
+            </a:endParaRPr>
+          </a:p>
+        </p:txBody>
+      </p:sp>
+      <p:sp>
+        <p:nvSpPr>
+          <p:cNvPr id="3" name="PlaceHolder 2"/>
+          <p:cNvSpPr>
+            <a:spLocks noGrp="1"/>
+          </p:cNvSpPr>
+          <p:nvPr>
+            <p:ph type="ftr" idx="4"/>
+          </p:nvPr>
+        </p:nvSpPr>
+        <p:spPr/>
+        <p:txBody>
+          <a:bodyPr/>
+          <a:p>
+            <a:r>
+              <a:t>Warren County KY ARES • KQ4TIV Emergency Coordinator</a:t>
+            </a:r>
           </a:p>
         </p:txBody>
       </p:sp>
@@ -3226,34 +3851,14 @@
             <a:spLocks noGrp="1"/>
           </p:cNvSpPr>
           <p:nvPr>
-            <p:ph type="ftr" idx="4"/>
+            <p:ph type="sldNum" idx="5"/>
           </p:nvPr>
         </p:nvSpPr>
         <p:spPr/>
         <p:txBody>
           <a:bodyPr/>
           <a:p>
-            <a:r>
-              <a:t>Warren County KY ARES • KQ4TIV Emergency Coordinator</a:t>
-            </a:r>
-          </a:p>
-        </p:txBody>
-      </p:sp>
-      <p:sp>
-        <p:nvSpPr>
-          <p:cNvPr id="5" name="PlaceHolder 4"/>
-          <p:cNvSpPr>
-            <a:spLocks noGrp="1"/>
-          </p:cNvSpPr>
-          <p:nvPr>
-            <p:ph type="sldNum" idx="5"/>
-          </p:nvPr>
-        </p:nvSpPr>
-        <p:spPr/>
-        <p:txBody>
-          <a:bodyPr/>
-          <a:p>
-            <a:fld id="{21EB54C3-9EA9-437F-A81E-B765A6A5EC06}" type="slidenum">
+            <a:fld id="{7271D153-B64E-4E58-BA46-983BAC0885E8}" type="slidenum">
               <a:t>3</a:t>
             </a:fld>
           </a:p>
@@ -3261,7 +3866,7 @@
       </p:sp>
       <p:sp>
         <p:nvSpPr>
-          <p:cNvPr id="6" name="PlaceHolder 5"/>
+          <p:cNvPr id="5" name="PlaceHolder 4"/>
           <p:cNvSpPr>
             <a:spLocks noGrp="1"/>
           </p:cNvSpPr>
@@ -3273,7 +3878,7 @@
         <p:txBody>
           <a:bodyPr/>
           <a:p>
-            <a:fld id="{5F0CA713-D733-4724-B693-3B7640F56B7A}" type="datetime1">
+            <a:fld id="{271621F6-6654-491D-98E8-3382DE62E9EA}" type="datetime1">
               <a:rPr lang="en-US"/>
               <a:t>09/21/2026</a:t>
             </a:fld>
@@ -3312,7 +3917,7 @@
       </p:grpSpPr>
       <p:sp>
         <p:nvSpPr>
-          <p:cNvPr id="41" name="PlaceHolder 1"/>
+          <p:cNvPr id="47" name="PlaceHolder 1"/>
           <p:cNvSpPr>
             <a:spLocks noGrp="1"/>
           </p:cNvSpPr>
@@ -3367,7 +3972,7 @@
       </p:sp>
       <p:sp>
         <p:nvSpPr>
-          <p:cNvPr id="42" name="PlaceHolder 2"/>
+          <p:cNvPr id="48" name="PlaceHolder 2"/>
           <p:cNvSpPr>
             <a:spLocks noGrp="1"/>
           </p:cNvSpPr>
@@ -3390,7 +3995,7 @@
         </p:spPr>
         <p:txBody>
           <a:bodyPr lIns="0" rIns="0" tIns="0" bIns="0" anchor="t">
-            <a:normAutofit fontScale="89999"/>
+            <a:normAutofit fontScale="81111"/>
           </a:bodyPr>
           <a:p>
             <a:pPr marL="432000" indent="-324000" defTabSz="914400">
@@ -3445,7 +4050,7 @@
                 </a:solidFill>
                 <a:latin typeface="Aptos"/>
               </a:rPr>
-              <a:t>Ed Fong WB6IQN Design</a:t>
+              <a:t>Ed Fong WB6IQN (UC Santa Cruz) Design</a:t>
             </a:r>
             <a:endParaRPr b="0" lang="en-US" sz="2800" spc="-1" strike="noStrike">
               <a:solidFill>
@@ -3520,7 +4125,7 @@
       </p:sp>
       <p:pic>
         <p:nvPicPr>
-          <p:cNvPr id="43" name="Picture 123" descr=""/>
+          <p:cNvPr id="49" name="Picture 123" descr=""/>
           <p:cNvPicPr/>
           <p:nvPr/>
         </p:nvPicPr>
@@ -3543,7 +4148,7 @@
       </p:pic>
       <p:sp>
         <p:nvSpPr>
-          <p:cNvPr id="44" name="Rectangle 1"/>
+          <p:cNvPr id="50" name="Rectangle 1"/>
           <p:cNvSpPr/>
           <p:nvPr/>
         </p:nvSpPr>
@@ -3597,7 +4202,7 @@
       </p:sp>
       <p:sp>
         <p:nvSpPr>
-          <p:cNvPr id="45" name="Rectangle 6"/>
+          <p:cNvPr id="51" name="Rectangle 6"/>
           <p:cNvSpPr/>
           <p:nvPr/>
         </p:nvSpPr>
@@ -3683,7 +4288,7 @@
         <p:txBody>
           <a:bodyPr/>
           <a:p>
-            <a:fld id="{17FB08D0-B99E-4E0A-8C76-208598798DF8}" type="slidenum">
+            <a:fld id="{939BFCDA-3973-4B86-BC4C-C83E0D2B419D}" type="slidenum">
               <a:t>4</a:t>
             </a:fld>
           </a:p>
@@ -3703,7 +4308,2483 @@
         <p:txBody>
           <a:bodyPr/>
           <a:p>
-            <a:fld id="{8FD4D73F-9DA6-47E4-B80B-B920686E412A}" type="datetime1">
+            <a:fld id="{211A93EA-A6A3-4159-8AF0-14F961C148E9}" type="datetime1">
+              <a:rPr lang="en-US"/>
+              <a:t>09/21/2026</a:t>
+            </a:fld>
+          </a:p>
+        </p:txBody>
+      </p:sp>
+    </p:spTree>
+  </p:cSld>
+  <mc:AlternateContent>
+    <mc:Choice Requires="p14">
+      <p:transition spd="slow" p14:dur="2000"/>
+    </mc:Choice>
+    <mc:Fallback>
+      <p:transition spd="slow"/>
+    </mc:Fallback>
+  </mc:AlternateContent>
+</p:sld>
+</file>
+
+<file path=ppt/slides/slide5.xml><?xml version="1.0" encoding="utf-8"?>
+<p:sld xmlns:a="http://schemas.openxmlformats.org/drawingml/2006/main" xmlns:p="http://schemas.openxmlformats.org/presentationml/2006/main" xmlns:r="http://schemas.openxmlformats.org/officeDocument/2006/relationships" xmlns:p14="http://schemas.microsoft.com/office/powerpoint/2010/main" xmlns:p15="http://schemas.microsoft.com/office/powerpoint/2012/main" xmlns:mc="http://schemas.openxmlformats.org/markup-compatibility/2006">
+  <p:cSld>
+    <p:spTree>
+      <p:nvGrpSpPr>
+        <p:cNvPr id="1" name=""/>
+        <p:cNvGrpSpPr/>
+        <p:nvPr/>
+      </p:nvGrpSpPr>
+      <p:grpSpPr>
+        <a:xfrm>
+          <a:off x="0" y="0"/>
+          <a:ext cx="0" cy="0"/>
+          <a:chOff x="0" y="0"/>
+          <a:chExt cx="0" cy="0"/>
+        </a:xfrm>
+      </p:grpSpPr>
+      <p:sp>
+        <p:nvSpPr>
+          <p:cNvPr id="52" name="PlaceHolder 1"/>
+          <p:cNvSpPr>
+            <a:spLocks noGrp="1"/>
+          </p:cNvSpPr>
+          <p:nvPr>
+            <p:ph type="title"/>
+          </p:nvPr>
+        </p:nvSpPr>
+        <p:spPr>
+          <a:xfrm>
+            <a:off x="838080" y="365040"/>
+            <a:ext cx="10514160" cy="1324080"/>
+          </a:xfrm>
+          <a:prstGeom prst="rect">
+            <a:avLst/>
+          </a:prstGeom>
+          <a:noFill/>
+          <a:ln w="0">
+            <a:noFill/>
+          </a:ln>
+        </p:spPr>
+        <p:txBody>
+          <a:bodyPr lIns="0" rIns="0" tIns="0" bIns="0" anchor="ctr">
+            <a:noAutofit/>
+          </a:bodyPr>
+          <a:p>
+            <a:pPr indent="0" defTabSz="914400">
+              <a:lnSpc>
+                <a:spcPct val="90000"/>
+              </a:lnSpc>
+              <a:buNone/>
+              <a:tabLst>
+                <a:tab algn="l" pos="0"/>
+              </a:tabLst>
+            </a:pPr>
+            <a:r>
+              <a:rPr b="0" lang="en-US" sz="4400" spc="-1" strike="noStrike">
+                <a:solidFill>
+                  <a:schemeClr val="dk1"/>
+                </a:solidFill>
+                <a:latin typeface="Aptos Display"/>
+              </a:rPr>
+              <a:t>Radiograms</a:t>
+            </a:r>
+            <a:endParaRPr b="0" lang="en-US" sz="4400" spc="-1" strike="noStrike">
+              <a:solidFill>
+                <a:schemeClr val="dk1"/>
+              </a:solidFill>
+              <a:latin typeface="Aptos"/>
+            </a:endParaRPr>
+          </a:p>
+        </p:txBody>
+      </p:sp>
+      <p:sp>
+        <p:nvSpPr>
+          <p:cNvPr id="53" name="PlaceHolder 2"/>
+          <p:cNvSpPr>
+            <a:spLocks noGrp="1"/>
+          </p:cNvSpPr>
+          <p:nvPr>
+            <p:ph/>
+          </p:nvPr>
+        </p:nvSpPr>
+        <p:spPr>
+          <a:xfrm>
+            <a:off x="838080" y="1825560"/>
+            <a:ext cx="10514160" cy="4349880"/>
+          </a:xfrm>
+          <a:prstGeom prst="rect">
+            <a:avLst/>
+          </a:prstGeom>
+          <a:noFill/>
+          <a:ln w="0">
+            <a:noFill/>
+          </a:ln>
+        </p:spPr>
+        <p:txBody>
+          <a:bodyPr lIns="0" rIns="0" tIns="0" bIns="0" anchor="t">
+            <a:normAutofit/>
+          </a:bodyPr>
+          <a:p>
+            <a:pPr marL="432000" indent="-324000">
+              <a:lnSpc>
+                <a:spcPct val="90000"/>
+              </a:lnSpc>
+              <a:spcBef>
+                <a:spcPts val="1417"/>
+              </a:spcBef>
+              <a:buClr>
+                <a:srgbClr val="000000"/>
+              </a:buClr>
+              <a:buSzPct val="45000"/>
+              <a:buFont typeface="Wingdings" charset="2"/>
+              <a:buChar char=""/>
+            </a:pPr>
+            <a:r>
+              <a:rPr b="0" lang="en-US" sz="2800" spc="-1" strike="noStrike">
+                <a:solidFill>
+                  <a:schemeClr val="dk1"/>
+                </a:solidFill>
+                <a:latin typeface="Aptos"/>
+              </a:rPr>
+              <a:t>What is a Radiogram?</a:t>
+            </a:r>
+            <a:endParaRPr b="0" lang="en-US" sz="2800" spc="-1" strike="noStrike">
+              <a:solidFill>
+                <a:schemeClr val="dk1"/>
+              </a:solidFill>
+              <a:latin typeface="Aptos"/>
+            </a:endParaRPr>
+          </a:p>
+          <a:p>
+            <a:pPr lvl="1" marL="864000" indent="-324000">
+              <a:lnSpc>
+                <a:spcPct val="90000"/>
+              </a:lnSpc>
+              <a:spcBef>
+                <a:spcPts val="1134"/>
+              </a:spcBef>
+              <a:buClr>
+                <a:srgbClr val="000000"/>
+              </a:buClr>
+              <a:buSzPct val="75000"/>
+              <a:buFont typeface="Symbol" charset="2"/>
+              <a:buChar char=""/>
+            </a:pPr>
+            <a:r>
+              <a:rPr b="0" lang="en-US" sz="2000" spc="-1" strike="noStrike">
+                <a:solidFill>
+                  <a:schemeClr val="dk1"/>
+                </a:solidFill>
+                <a:latin typeface="Aptos"/>
+              </a:rPr>
+              <a:t>Radiograms are a method of communicating formal messages using a standardized format and handling procedure.  They are used when exact wording, reliable relay through multiple operators, documented delivery, or accountability is important.  Each relay operator copies and forwards the message without altering its content.</a:t>
+            </a:r>
+            <a:endParaRPr b="0" lang="en-US" sz="2000" spc="-1" strike="noStrike">
+              <a:solidFill>
+                <a:schemeClr val="dk1"/>
+              </a:solidFill>
+              <a:latin typeface="Aptos"/>
+            </a:endParaRPr>
+          </a:p>
+          <a:p>
+            <a:pPr lvl="1" marL="864000" indent="-324000">
+              <a:lnSpc>
+                <a:spcPct val="90000"/>
+              </a:lnSpc>
+              <a:spcBef>
+                <a:spcPts val="1134"/>
+              </a:spcBef>
+              <a:buClr>
+                <a:srgbClr val="000000"/>
+              </a:buClr>
+              <a:buSzPct val="75000"/>
+              <a:buFont typeface="Symbol" charset="2"/>
+              <a:buChar char=""/>
+            </a:pPr>
+            <a:r>
+              <a:rPr b="0" lang="en-US" sz="2000" spc="-1" strike="noStrike">
+                <a:solidFill>
+                  <a:schemeClr val="dk1"/>
+                </a:solidFill>
+                <a:latin typeface="Aptos"/>
+              </a:rPr>
+              <a:t>Created in 1914 as a method of transmitting messages from ship to shore and beyond.  Amateurs started utilizing the method in the 20s and 40s to transmit messages for the general public, but amateur radios of the time were very power limited, requiring messages to be passed through relay stations.  Hence, the method puts the </a:t>
+            </a:r>
+            <a:r>
+              <a:rPr b="1" lang="en-US" sz="2000" spc="-1" strike="noStrike">
+                <a:solidFill>
+                  <a:schemeClr val="dk1"/>
+                </a:solidFill>
+                <a:latin typeface="Aptos"/>
+              </a:rPr>
+              <a:t>RELAY</a:t>
+            </a:r>
+            <a:r>
+              <a:rPr b="0" lang="en-US" sz="2000" spc="-1" strike="noStrike">
+                <a:solidFill>
+                  <a:schemeClr val="dk1"/>
+                </a:solidFill>
+                <a:latin typeface="Aptos"/>
+              </a:rPr>
+              <a:t> in American Radio Relay League.</a:t>
+            </a:r>
+            <a:endParaRPr b="0" lang="en-US" sz="2000" spc="-1" strike="noStrike">
+              <a:solidFill>
+                <a:schemeClr val="dk1"/>
+              </a:solidFill>
+              <a:latin typeface="Aptos"/>
+            </a:endParaRPr>
+          </a:p>
+        </p:txBody>
+      </p:sp>
+      <p:sp>
+        <p:nvSpPr>
+          <p:cNvPr id="4" name="PlaceHolder 3"/>
+          <p:cNvSpPr>
+            <a:spLocks noGrp="1"/>
+          </p:cNvSpPr>
+          <p:nvPr>
+            <p:ph type="ftr" idx="4"/>
+          </p:nvPr>
+        </p:nvSpPr>
+        <p:spPr/>
+        <p:txBody>
+          <a:bodyPr/>
+          <a:p>
+            <a:r>
+              <a:t>Warren County KY ARES • KQ4TIV Emergency Coordinator</a:t>
+            </a:r>
+          </a:p>
+        </p:txBody>
+      </p:sp>
+      <p:sp>
+        <p:nvSpPr>
+          <p:cNvPr id="5" name="PlaceHolder 4"/>
+          <p:cNvSpPr>
+            <a:spLocks noGrp="1"/>
+          </p:cNvSpPr>
+          <p:nvPr>
+            <p:ph type="sldNum" idx="5"/>
+          </p:nvPr>
+        </p:nvSpPr>
+        <p:spPr/>
+        <p:txBody>
+          <a:bodyPr/>
+          <a:p>
+            <a:fld id="{EBD91418-2D96-48E0-8F6F-27674B1DA9EE}" type="slidenum">
+              <a:t>5</a:t>
+            </a:fld>
+          </a:p>
+        </p:txBody>
+      </p:sp>
+      <p:sp>
+        <p:nvSpPr>
+          <p:cNvPr id="6" name="PlaceHolder 5"/>
+          <p:cNvSpPr>
+            <a:spLocks noGrp="1"/>
+          </p:cNvSpPr>
+          <p:nvPr>
+            <p:ph type="dt" idx="6"/>
+          </p:nvPr>
+        </p:nvSpPr>
+        <p:spPr/>
+        <p:txBody>
+          <a:bodyPr/>
+          <a:p>
+            <a:fld id="{B5F58C5F-5152-4DD7-94CB-765AB26AC138}" type="datetime1">
+              <a:rPr lang="en-US"/>
+              <a:t>09/21/2026</a:t>
+            </a:fld>
+          </a:p>
+        </p:txBody>
+      </p:sp>
+    </p:spTree>
+  </p:cSld>
+  <mc:AlternateContent>
+    <mc:Choice Requires="p14">
+      <p:transition spd="slow" p14:dur="2000"/>
+    </mc:Choice>
+    <mc:Fallback>
+      <p:transition spd="slow"/>
+    </mc:Fallback>
+  </mc:AlternateContent>
+</p:sld>
+</file>
+
+<file path=ppt/slides/slide6.xml><?xml version="1.0" encoding="utf-8"?>
+<p:sld xmlns:a="http://schemas.openxmlformats.org/drawingml/2006/main" xmlns:p="http://schemas.openxmlformats.org/presentationml/2006/main" xmlns:r="http://schemas.openxmlformats.org/officeDocument/2006/relationships" xmlns:p14="http://schemas.microsoft.com/office/powerpoint/2010/main" xmlns:p15="http://schemas.microsoft.com/office/powerpoint/2012/main" xmlns:mc="http://schemas.openxmlformats.org/markup-compatibility/2006">
+  <p:cSld>
+    <p:spTree>
+      <p:nvGrpSpPr>
+        <p:cNvPr id="1" name=""/>
+        <p:cNvGrpSpPr/>
+        <p:nvPr/>
+      </p:nvGrpSpPr>
+      <p:grpSpPr>
+        <a:xfrm>
+          <a:off x="0" y="0"/>
+          <a:ext cx="0" cy="0"/>
+          <a:chOff x="0" y="0"/>
+          <a:chExt cx="0" cy="0"/>
+        </a:xfrm>
+      </p:grpSpPr>
+      <p:sp>
+        <p:nvSpPr>
+          <p:cNvPr id="54" name="PlaceHolder 1"/>
+          <p:cNvSpPr>
+            <a:spLocks noGrp="1"/>
+          </p:cNvSpPr>
+          <p:nvPr>
+            <p:ph type="title"/>
+          </p:nvPr>
+        </p:nvSpPr>
+        <p:spPr>
+          <a:xfrm>
+            <a:off x="838080" y="365040"/>
+            <a:ext cx="10514160" cy="1324080"/>
+          </a:xfrm>
+          <a:prstGeom prst="rect">
+            <a:avLst/>
+          </a:prstGeom>
+          <a:noFill/>
+          <a:ln w="0">
+            <a:noFill/>
+          </a:ln>
+        </p:spPr>
+        <p:txBody>
+          <a:bodyPr lIns="0" rIns="0" tIns="0" bIns="0" anchor="ctr">
+            <a:noAutofit/>
+          </a:bodyPr>
+          <a:p>
+            <a:pPr indent="0" defTabSz="914400">
+              <a:lnSpc>
+                <a:spcPct val="90000"/>
+              </a:lnSpc>
+              <a:buNone/>
+              <a:tabLst>
+                <a:tab algn="l" pos="0"/>
+              </a:tabLst>
+            </a:pPr>
+            <a:r>
+              <a:rPr b="0" lang="en-US" sz="4400" spc="-1" strike="noStrike">
+                <a:solidFill>
+                  <a:schemeClr val="dk1"/>
+                </a:solidFill>
+                <a:latin typeface="Aptos Display"/>
+              </a:rPr>
+              <a:t>Radiograms</a:t>
+            </a:r>
+            <a:endParaRPr b="0" lang="en-US" sz="4400" spc="-1" strike="noStrike">
+              <a:solidFill>
+                <a:schemeClr val="dk1"/>
+              </a:solidFill>
+              <a:latin typeface="Aptos"/>
+            </a:endParaRPr>
+          </a:p>
+        </p:txBody>
+      </p:sp>
+      <p:sp>
+        <p:nvSpPr>
+          <p:cNvPr id="55" name="PlaceHolder 2"/>
+          <p:cNvSpPr>
+            <a:spLocks noGrp="1"/>
+          </p:cNvSpPr>
+          <p:nvPr>
+            <p:ph/>
+          </p:nvPr>
+        </p:nvSpPr>
+        <p:spPr>
+          <a:xfrm>
+            <a:off x="838080" y="1825560"/>
+            <a:ext cx="10514160" cy="4349880"/>
+          </a:xfrm>
+          <a:prstGeom prst="rect">
+            <a:avLst/>
+          </a:prstGeom>
+          <a:noFill/>
+          <a:ln w="0">
+            <a:noFill/>
+          </a:ln>
+        </p:spPr>
+        <p:txBody>
+          <a:bodyPr lIns="0" rIns="0" tIns="0" bIns="0" anchor="t">
+            <a:normAutofit fontScale="66770"/>
+          </a:bodyPr>
+          <a:p>
+            <a:pPr marL="432000" indent="-324000">
+              <a:lnSpc>
+                <a:spcPct val="90000"/>
+              </a:lnSpc>
+              <a:spcBef>
+                <a:spcPts val="1417"/>
+              </a:spcBef>
+              <a:buClr>
+                <a:srgbClr val="000000"/>
+              </a:buClr>
+              <a:buSzPct val="45000"/>
+              <a:buFont typeface="Wingdings" charset="2"/>
+              <a:buChar char=""/>
+            </a:pPr>
+            <a:r>
+              <a:rPr b="0" lang="en-US" sz="2800" spc="-1" strike="noStrike">
+                <a:solidFill>
+                  <a:schemeClr val="dk1"/>
+                </a:solidFill>
+                <a:latin typeface="Aptos"/>
+              </a:rPr>
+              <a:t>When to use them</a:t>
+            </a:r>
+            <a:endParaRPr b="0" lang="en-US" sz="2800" spc="-1" strike="noStrike">
+              <a:solidFill>
+                <a:schemeClr val="dk1"/>
+              </a:solidFill>
+              <a:latin typeface="Aptos"/>
+            </a:endParaRPr>
+          </a:p>
+          <a:p>
+            <a:pPr lvl="1" marL="864000" indent="-324000">
+              <a:lnSpc>
+                <a:spcPct val="90000"/>
+              </a:lnSpc>
+              <a:spcBef>
+                <a:spcPts val="1134"/>
+              </a:spcBef>
+              <a:buClr>
+                <a:srgbClr val="000000"/>
+              </a:buClr>
+              <a:buSzPct val="75000"/>
+              <a:buFont typeface="Symbol" charset="2"/>
+              <a:buChar char=""/>
+            </a:pPr>
+            <a:r>
+              <a:rPr b="0" lang="en-US" sz="2000" spc="-1" strike="noStrike">
+                <a:solidFill>
+                  <a:schemeClr val="dk1"/>
+                </a:solidFill>
+                <a:latin typeface="Aptos"/>
+              </a:rPr>
+              <a:t>Exact wording must be preserved</a:t>
+            </a:r>
+            <a:endParaRPr b="0" lang="en-US" sz="2000" spc="-1" strike="noStrike">
+              <a:solidFill>
+                <a:schemeClr val="dk1"/>
+              </a:solidFill>
+              <a:latin typeface="Aptos"/>
+            </a:endParaRPr>
+          </a:p>
+          <a:p>
+            <a:pPr lvl="1" marL="864000" indent="-324000">
+              <a:lnSpc>
+                <a:spcPct val="90000"/>
+              </a:lnSpc>
+              <a:spcBef>
+                <a:spcPts val="1134"/>
+              </a:spcBef>
+              <a:buClr>
+                <a:srgbClr val="000000"/>
+              </a:buClr>
+              <a:buSzPct val="75000"/>
+              <a:buFont typeface="Symbol" charset="2"/>
+              <a:buChar char=""/>
+            </a:pPr>
+            <a:r>
+              <a:rPr b="0" lang="en-US" sz="2000" spc="-1" strike="noStrike">
+                <a:solidFill>
+                  <a:schemeClr val="dk1"/>
+                </a:solidFill>
+                <a:latin typeface="Aptos"/>
+              </a:rPr>
+              <a:t>Message may pass through multiple operators or nets</a:t>
+            </a:r>
+            <a:endParaRPr b="0" lang="en-US" sz="2000" spc="-1" strike="noStrike">
+              <a:solidFill>
+                <a:schemeClr val="dk1"/>
+              </a:solidFill>
+              <a:latin typeface="Aptos"/>
+            </a:endParaRPr>
+          </a:p>
+          <a:p>
+            <a:pPr lvl="1" marL="864000" indent="-324000">
+              <a:lnSpc>
+                <a:spcPct val="90000"/>
+              </a:lnSpc>
+              <a:spcBef>
+                <a:spcPts val="1134"/>
+              </a:spcBef>
+              <a:buClr>
+                <a:srgbClr val="000000"/>
+              </a:buClr>
+              <a:buSzPct val="75000"/>
+              <a:buFont typeface="Symbol" charset="2"/>
+              <a:buChar char=""/>
+            </a:pPr>
+            <a:r>
+              <a:rPr b="0" lang="en-US" sz="2000" spc="-1" strike="noStrike">
+                <a:solidFill>
+                  <a:schemeClr val="dk1"/>
+                </a:solidFill>
+                <a:latin typeface="Aptos"/>
+              </a:rPr>
+              <a:t>Recipient is not immediately available</a:t>
+            </a:r>
+            <a:endParaRPr b="0" lang="en-US" sz="2000" spc="-1" strike="noStrike">
+              <a:solidFill>
+                <a:schemeClr val="dk1"/>
+              </a:solidFill>
+              <a:latin typeface="Aptos"/>
+            </a:endParaRPr>
+          </a:p>
+          <a:p>
+            <a:pPr lvl="1" marL="864000" indent="-324000">
+              <a:lnSpc>
+                <a:spcPct val="90000"/>
+              </a:lnSpc>
+              <a:spcBef>
+                <a:spcPts val="1134"/>
+              </a:spcBef>
+              <a:buClr>
+                <a:srgbClr val="000000"/>
+              </a:buClr>
+              <a:buSzPct val="75000"/>
+              <a:buFont typeface="Symbol" charset="2"/>
+              <a:buChar char=""/>
+            </a:pPr>
+            <a:r>
+              <a:rPr b="0" lang="en-US" sz="2000" spc="-1" strike="noStrike">
+                <a:solidFill>
+                  <a:schemeClr val="dk1"/>
+                </a:solidFill>
+                <a:latin typeface="Aptos"/>
+              </a:rPr>
+              <a:t>Delivery and acknowledgment must be documented</a:t>
+            </a:r>
+            <a:endParaRPr b="0" lang="en-US" sz="2000" spc="-1" strike="noStrike">
+              <a:solidFill>
+                <a:schemeClr val="dk1"/>
+              </a:solidFill>
+              <a:latin typeface="Aptos"/>
+            </a:endParaRPr>
+          </a:p>
+          <a:p>
+            <a:pPr lvl="1" marL="864000" indent="-324000">
+              <a:lnSpc>
+                <a:spcPct val="90000"/>
+              </a:lnSpc>
+              <a:spcBef>
+                <a:spcPts val="1134"/>
+              </a:spcBef>
+              <a:buClr>
+                <a:srgbClr val="000000"/>
+              </a:buClr>
+              <a:buSzPct val="75000"/>
+              <a:buFont typeface="Symbol" charset="2"/>
+              <a:buChar char=""/>
+            </a:pPr>
+            <a:r>
+              <a:rPr b="0" lang="en-US" sz="2000" spc="-1" strike="noStrike">
+                <a:solidFill>
+                  <a:schemeClr val="dk1"/>
+                </a:solidFill>
+                <a:latin typeface="Aptos"/>
+              </a:rPr>
+              <a:t>Message is a formal report, request, notification, or welfare inquiry</a:t>
+            </a:r>
+            <a:endParaRPr b="0" lang="en-US" sz="2000" spc="-1" strike="noStrike">
+              <a:solidFill>
+                <a:schemeClr val="dk1"/>
+              </a:solidFill>
+              <a:latin typeface="Aptos"/>
+            </a:endParaRPr>
+          </a:p>
+          <a:p>
+            <a:pPr lvl="1" marL="864000" indent="-324000">
+              <a:lnSpc>
+                <a:spcPct val="90000"/>
+              </a:lnSpc>
+              <a:spcBef>
+                <a:spcPts val="1134"/>
+              </a:spcBef>
+              <a:buClr>
+                <a:srgbClr val="000000"/>
+              </a:buClr>
+              <a:buSzPct val="75000"/>
+              <a:buFont typeface="Symbol" charset="2"/>
+              <a:buChar char=""/>
+            </a:pPr>
+            <a:r>
+              <a:rPr b="0" lang="en-US" sz="2000" spc="-1" strike="noStrike">
+                <a:solidFill>
+                  <a:schemeClr val="dk1"/>
+                </a:solidFill>
+                <a:latin typeface="Aptos"/>
+              </a:rPr>
+              <a:t>Traffic may need to move outside the local ARES network through NTS</a:t>
+            </a:r>
+            <a:endParaRPr b="0" lang="en-US" sz="2000" spc="-1" strike="noStrike">
+              <a:solidFill>
+                <a:schemeClr val="dk1"/>
+              </a:solidFill>
+              <a:latin typeface="Aptos"/>
+            </a:endParaRPr>
+          </a:p>
+          <a:p>
+            <a:pPr marL="432000" indent="-324000">
+              <a:lnSpc>
+                <a:spcPct val="90000"/>
+              </a:lnSpc>
+              <a:spcBef>
+                <a:spcPts val="1417"/>
+              </a:spcBef>
+              <a:buClr>
+                <a:srgbClr val="000000"/>
+              </a:buClr>
+              <a:buSzPct val="45000"/>
+              <a:buFont typeface="Wingdings" charset="2"/>
+              <a:buChar char=""/>
+            </a:pPr>
+            <a:r>
+              <a:rPr b="0" lang="en-US" sz="2800" spc="-1" strike="noStrike">
+                <a:solidFill>
+                  <a:schemeClr val="dk1"/>
+                </a:solidFill>
+                <a:latin typeface="Aptos"/>
+              </a:rPr>
+              <a:t>Examples</a:t>
+            </a:r>
+            <a:endParaRPr b="0" lang="en-US" sz="2800" spc="-1" strike="noStrike">
+              <a:solidFill>
+                <a:schemeClr val="dk1"/>
+              </a:solidFill>
+              <a:latin typeface="Aptos"/>
+            </a:endParaRPr>
+          </a:p>
+          <a:p>
+            <a:pPr lvl="1" marL="864000" indent="-324000">
+              <a:lnSpc>
+                <a:spcPct val="90000"/>
+              </a:lnSpc>
+              <a:spcBef>
+                <a:spcPts val="1134"/>
+              </a:spcBef>
+              <a:buClr>
+                <a:srgbClr val="000000"/>
+              </a:buClr>
+              <a:buSzPct val="75000"/>
+              <a:buFont typeface="Symbol" charset="2"/>
+              <a:buChar char=""/>
+            </a:pPr>
+            <a:r>
+              <a:rPr b="0" lang="en-US" sz="2000" spc="-1" strike="noStrike">
+                <a:solidFill>
+                  <a:schemeClr val="dk1"/>
+                </a:solidFill>
+                <a:latin typeface="Aptos"/>
+              </a:rPr>
+              <a:t>Monthly ARES net reports to Section Traffic Manager</a:t>
+            </a:r>
+            <a:endParaRPr b="0" lang="en-US" sz="2000" spc="-1" strike="noStrike">
+              <a:solidFill>
+                <a:schemeClr val="dk1"/>
+              </a:solidFill>
+              <a:latin typeface="Aptos"/>
+            </a:endParaRPr>
+          </a:p>
+          <a:p>
+            <a:pPr lvl="1" marL="864000" indent="-324000">
+              <a:lnSpc>
+                <a:spcPct val="90000"/>
+              </a:lnSpc>
+              <a:spcBef>
+                <a:spcPts val="1134"/>
+              </a:spcBef>
+              <a:buClr>
+                <a:srgbClr val="000000"/>
+              </a:buClr>
+              <a:buSzPct val="75000"/>
+              <a:buFont typeface="Symbol" charset="2"/>
+              <a:buChar char=""/>
+            </a:pPr>
+            <a:r>
+              <a:rPr b="0" lang="en-US" sz="2000" spc="-1" strike="noStrike">
+                <a:solidFill>
+                  <a:schemeClr val="dk1"/>
+                </a:solidFill>
+                <a:latin typeface="Aptos"/>
+              </a:rPr>
+              <a:t>Formal request for supplies</a:t>
+            </a:r>
+            <a:endParaRPr b="0" lang="en-US" sz="2000" spc="-1" strike="noStrike">
+              <a:solidFill>
+                <a:schemeClr val="dk1"/>
+              </a:solidFill>
+              <a:latin typeface="Aptos"/>
+            </a:endParaRPr>
+          </a:p>
+          <a:p>
+            <a:pPr lvl="1" marL="864000" indent="-324000">
+              <a:lnSpc>
+                <a:spcPct val="90000"/>
+              </a:lnSpc>
+              <a:spcBef>
+                <a:spcPts val="1134"/>
+              </a:spcBef>
+              <a:buClr>
+                <a:srgbClr val="000000"/>
+              </a:buClr>
+              <a:buSzPct val="75000"/>
+              <a:buFont typeface="Symbol" charset="2"/>
+              <a:buChar char=""/>
+            </a:pPr>
+            <a:r>
+              <a:rPr b="0" lang="en-US" sz="2000" spc="-1" strike="noStrike">
+                <a:solidFill>
+                  <a:schemeClr val="dk1"/>
+                </a:solidFill>
+                <a:latin typeface="Aptos"/>
+              </a:rPr>
+              <a:t>Welfare traffic outside the affected area</a:t>
+            </a:r>
+            <a:endParaRPr b="0" lang="en-US" sz="2000" spc="-1" strike="noStrike">
+              <a:solidFill>
+                <a:schemeClr val="dk1"/>
+              </a:solidFill>
+              <a:latin typeface="Aptos"/>
+            </a:endParaRPr>
+          </a:p>
+          <a:p>
+            <a:pPr lvl="1" marL="864000" indent="-324000">
+              <a:lnSpc>
+                <a:spcPct val="90000"/>
+              </a:lnSpc>
+              <a:spcBef>
+                <a:spcPts val="1134"/>
+              </a:spcBef>
+              <a:buClr>
+                <a:srgbClr val="000000"/>
+              </a:buClr>
+              <a:buSzPct val="75000"/>
+              <a:buFont typeface="Symbol" charset="2"/>
+              <a:buChar char=""/>
+            </a:pPr>
+            <a:r>
+              <a:rPr b="0" lang="en-US" sz="2000" spc="-1" strike="noStrike">
+                <a:solidFill>
+                  <a:schemeClr val="dk1"/>
+                </a:solidFill>
+                <a:latin typeface="Aptos"/>
+              </a:rPr>
+              <a:t>Official notifications requiring verbatim repeating</a:t>
+            </a:r>
+            <a:endParaRPr b="0" lang="en-US" sz="2000" spc="-1" strike="noStrike">
+              <a:solidFill>
+                <a:schemeClr val="dk1"/>
+              </a:solidFill>
+              <a:latin typeface="Aptos"/>
+            </a:endParaRPr>
+          </a:p>
+        </p:txBody>
+      </p:sp>
+      <p:sp>
+        <p:nvSpPr>
+          <p:cNvPr id="4" name="PlaceHolder 3"/>
+          <p:cNvSpPr>
+            <a:spLocks noGrp="1"/>
+          </p:cNvSpPr>
+          <p:nvPr>
+            <p:ph type="ftr" idx="4"/>
+          </p:nvPr>
+        </p:nvSpPr>
+        <p:spPr/>
+        <p:txBody>
+          <a:bodyPr/>
+          <a:p>
+            <a:r>
+              <a:t>Warren County KY ARES • KQ4TIV Emergency Coordinator</a:t>
+            </a:r>
+          </a:p>
+        </p:txBody>
+      </p:sp>
+      <p:sp>
+        <p:nvSpPr>
+          <p:cNvPr id="5" name="PlaceHolder 4"/>
+          <p:cNvSpPr>
+            <a:spLocks noGrp="1"/>
+          </p:cNvSpPr>
+          <p:nvPr>
+            <p:ph type="sldNum" idx="5"/>
+          </p:nvPr>
+        </p:nvSpPr>
+        <p:spPr/>
+        <p:txBody>
+          <a:bodyPr/>
+          <a:p>
+            <a:fld id="{FEBC8001-82F9-44EF-BDDF-B3F82011F167}" type="slidenum">
+              <a:t>6</a:t>
+            </a:fld>
+          </a:p>
+        </p:txBody>
+      </p:sp>
+      <p:sp>
+        <p:nvSpPr>
+          <p:cNvPr id="6" name="PlaceHolder 5"/>
+          <p:cNvSpPr>
+            <a:spLocks noGrp="1"/>
+          </p:cNvSpPr>
+          <p:nvPr>
+            <p:ph type="dt" idx="6"/>
+          </p:nvPr>
+        </p:nvSpPr>
+        <p:spPr/>
+        <p:txBody>
+          <a:bodyPr/>
+          <a:p>
+            <a:fld id="{E406AF52-EE2F-42B5-AF2E-B43AFD5A0EB4}" type="datetime1">
+              <a:rPr lang="en-US"/>
+              <a:t>09/21/2026</a:t>
+            </a:fld>
+          </a:p>
+        </p:txBody>
+      </p:sp>
+    </p:spTree>
+  </p:cSld>
+  <mc:AlternateContent>
+    <mc:Choice Requires="p14">
+      <p:transition spd="slow" p14:dur="2000"/>
+    </mc:Choice>
+    <mc:Fallback>
+      <p:transition spd="slow"/>
+    </mc:Fallback>
+  </mc:AlternateContent>
+</p:sld>
+</file>
+
+<file path=ppt/slides/slide7.xml><?xml version="1.0" encoding="utf-8"?>
+<p:sld xmlns:a="http://schemas.openxmlformats.org/drawingml/2006/main" xmlns:p="http://schemas.openxmlformats.org/presentationml/2006/main" xmlns:r="http://schemas.openxmlformats.org/officeDocument/2006/relationships" xmlns:p14="http://schemas.microsoft.com/office/powerpoint/2010/main" xmlns:p15="http://schemas.microsoft.com/office/powerpoint/2012/main" xmlns:mc="http://schemas.openxmlformats.org/markup-compatibility/2006">
+  <p:cSld>
+    <p:spTree>
+      <p:nvGrpSpPr>
+        <p:cNvPr id="1" name=""/>
+        <p:cNvGrpSpPr/>
+        <p:nvPr/>
+      </p:nvGrpSpPr>
+      <p:grpSpPr>
+        <a:xfrm>
+          <a:off x="0" y="0"/>
+          <a:ext cx="0" cy="0"/>
+          <a:chOff x="0" y="0"/>
+          <a:chExt cx="0" cy="0"/>
+        </a:xfrm>
+      </p:grpSpPr>
+      <p:sp>
+        <p:nvSpPr>
+          <p:cNvPr id="56" name="PlaceHolder 1"/>
+          <p:cNvSpPr>
+            <a:spLocks noGrp="1"/>
+          </p:cNvSpPr>
+          <p:nvPr>
+            <p:ph type="title"/>
+          </p:nvPr>
+        </p:nvSpPr>
+        <p:spPr>
+          <a:xfrm>
+            <a:off x="838080" y="365040"/>
+            <a:ext cx="10514160" cy="1324080"/>
+          </a:xfrm>
+          <a:prstGeom prst="rect">
+            <a:avLst/>
+          </a:prstGeom>
+          <a:noFill/>
+          <a:ln w="0">
+            <a:noFill/>
+          </a:ln>
+        </p:spPr>
+        <p:txBody>
+          <a:bodyPr lIns="0" rIns="0" tIns="0" bIns="0" anchor="ctr">
+            <a:noAutofit/>
+          </a:bodyPr>
+          <a:p>
+            <a:pPr indent="0" defTabSz="914400">
+              <a:lnSpc>
+                <a:spcPct val="90000"/>
+              </a:lnSpc>
+              <a:buNone/>
+              <a:tabLst>
+                <a:tab algn="l" pos="0"/>
+              </a:tabLst>
+            </a:pPr>
+            <a:r>
+              <a:rPr b="0" lang="en-US" sz="4400" spc="-1" strike="noStrike">
+                <a:solidFill>
+                  <a:schemeClr val="dk1"/>
+                </a:solidFill>
+                <a:latin typeface="Aptos Display"/>
+              </a:rPr>
+              <a:t>Radiograms</a:t>
+            </a:r>
+            <a:endParaRPr b="0" lang="en-US" sz="4400" spc="-1" strike="noStrike">
+              <a:solidFill>
+                <a:schemeClr val="dk1"/>
+              </a:solidFill>
+              <a:latin typeface="Aptos"/>
+            </a:endParaRPr>
+          </a:p>
+        </p:txBody>
+      </p:sp>
+      <p:sp>
+        <p:nvSpPr>
+          <p:cNvPr id="57" name="PlaceHolder 2"/>
+          <p:cNvSpPr>
+            <a:spLocks noGrp="1"/>
+          </p:cNvSpPr>
+          <p:nvPr>
+            <p:ph/>
+          </p:nvPr>
+        </p:nvSpPr>
+        <p:spPr>
+          <a:xfrm>
+            <a:off x="838080" y="1825560"/>
+            <a:ext cx="10514160" cy="4349880"/>
+          </a:xfrm>
+          <a:prstGeom prst="rect">
+            <a:avLst/>
+          </a:prstGeom>
+          <a:noFill/>
+          <a:ln w="0">
+            <a:noFill/>
+          </a:ln>
+        </p:spPr>
+        <p:txBody>
+          <a:bodyPr lIns="0" rIns="0" tIns="0" bIns="0" anchor="t">
+            <a:normAutofit fontScale="90336"/>
+          </a:bodyPr>
+          <a:p>
+            <a:pPr marL="432000" indent="-324000">
+              <a:lnSpc>
+                <a:spcPct val="90000"/>
+              </a:lnSpc>
+              <a:spcBef>
+                <a:spcPts val="1417"/>
+              </a:spcBef>
+              <a:buClr>
+                <a:srgbClr val="000000"/>
+              </a:buClr>
+              <a:buSzPct val="45000"/>
+              <a:buFont typeface="Wingdings" charset="2"/>
+              <a:buChar char=""/>
+            </a:pPr>
+            <a:r>
+              <a:rPr b="0" lang="en-US" sz="2800" spc="-1" strike="noStrike">
+                <a:solidFill>
+                  <a:schemeClr val="dk1"/>
+                </a:solidFill>
+                <a:latin typeface="Aptos"/>
+              </a:rPr>
+              <a:t>When NOT to use them</a:t>
+            </a:r>
+            <a:endParaRPr b="0" lang="en-US" sz="2800" spc="-1" strike="noStrike">
+              <a:solidFill>
+                <a:schemeClr val="dk1"/>
+              </a:solidFill>
+              <a:latin typeface="Aptos"/>
+            </a:endParaRPr>
+          </a:p>
+          <a:p>
+            <a:pPr lvl="1" marL="864000" indent="-324000">
+              <a:lnSpc>
+                <a:spcPct val="90000"/>
+              </a:lnSpc>
+              <a:spcBef>
+                <a:spcPts val="1134"/>
+              </a:spcBef>
+              <a:buClr>
+                <a:srgbClr val="000000"/>
+              </a:buClr>
+              <a:buSzPct val="75000"/>
+              <a:buFont typeface="Symbol" charset="2"/>
+              <a:buChar char=""/>
+            </a:pPr>
+            <a:r>
+              <a:rPr b="0" lang="en-US" sz="2000" spc="-1" strike="noStrike">
+                <a:solidFill>
+                  <a:schemeClr val="dk1"/>
+                </a:solidFill>
+                <a:latin typeface="Aptos"/>
+              </a:rPr>
+              <a:t>Life-safety message</a:t>
+            </a:r>
+            <a:endParaRPr b="0" lang="en-US" sz="2000" spc="-1" strike="noStrike">
+              <a:solidFill>
+                <a:schemeClr val="dk1"/>
+              </a:solidFill>
+              <a:latin typeface="Aptos"/>
+            </a:endParaRPr>
+          </a:p>
+          <a:p>
+            <a:pPr lvl="1" marL="864000" indent="-324000">
+              <a:lnSpc>
+                <a:spcPct val="90000"/>
+              </a:lnSpc>
+              <a:spcBef>
+                <a:spcPts val="1134"/>
+              </a:spcBef>
+              <a:buClr>
+                <a:srgbClr val="000000"/>
+              </a:buClr>
+              <a:buSzPct val="75000"/>
+              <a:buFont typeface="Symbol" charset="2"/>
+              <a:buChar char=""/>
+            </a:pPr>
+            <a:r>
+              <a:rPr b="0" lang="en-US" sz="2000" spc="-1" strike="noStrike">
+                <a:solidFill>
+                  <a:schemeClr val="dk1"/>
+                </a:solidFill>
+                <a:latin typeface="Aptos"/>
+              </a:rPr>
+              <a:t>Requires parties to ask questions/conversation</a:t>
+            </a:r>
+            <a:endParaRPr b="0" lang="en-US" sz="2000" spc="-1" strike="noStrike">
+              <a:solidFill>
+                <a:schemeClr val="dk1"/>
+              </a:solidFill>
+              <a:latin typeface="Aptos"/>
+            </a:endParaRPr>
+          </a:p>
+          <a:p>
+            <a:pPr lvl="1" marL="864000" indent="-324000">
+              <a:lnSpc>
+                <a:spcPct val="90000"/>
+              </a:lnSpc>
+              <a:spcBef>
+                <a:spcPts val="1134"/>
+              </a:spcBef>
+              <a:buClr>
+                <a:srgbClr val="000000"/>
+              </a:buClr>
+              <a:buSzPct val="75000"/>
+              <a:buFont typeface="Symbol" charset="2"/>
+              <a:buChar char=""/>
+            </a:pPr>
+            <a:r>
+              <a:rPr b="0" lang="en-US" sz="2000" spc="-1" strike="noStrike">
+                <a:solidFill>
+                  <a:schemeClr val="dk1"/>
+                </a:solidFill>
+                <a:latin typeface="Aptos"/>
+              </a:rPr>
+              <a:t>Exact wording not important</a:t>
+            </a:r>
+            <a:endParaRPr b="0" lang="en-US" sz="2000" spc="-1" strike="noStrike">
+              <a:solidFill>
+                <a:schemeClr val="dk1"/>
+              </a:solidFill>
+              <a:latin typeface="Aptos"/>
+            </a:endParaRPr>
+          </a:p>
+          <a:p>
+            <a:pPr lvl="1" marL="864000" indent="-324000">
+              <a:lnSpc>
+                <a:spcPct val="90000"/>
+              </a:lnSpc>
+              <a:spcBef>
+                <a:spcPts val="1134"/>
+              </a:spcBef>
+              <a:buClr>
+                <a:srgbClr val="000000"/>
+              </a:buClr>
+              <a:buSzPct val="75000"/>
+              <a:buFont typeface="Symbol" charset="2"/>
+              <a:buChar char=""/>
+            </a:pPr>
+            <a:r>
+              <a:rPr b="0" lang="en-US" sz="2000" spc="-1" strike="noStrike">
+                <a:solidFill>
+                  <a:schemeClr val="dk1"/>
+                </a:solidFill>
+                <a:latin typeface="Aptos"/>
+              </a:rPr>
+              <a:t>Recipient is available in real time</a:t>
+            </a:r>
+            <a:endParaRPr b="0" lang="en-US" sz="2000" spc="-1" strike="noStrike">
+              <a:solidFill>
+                <a:schemeClr val="dk1"/>
+              </a:solidFill>
+              <a:latin typeface="Aptos"/>
+            </a:endParaRPr>
+          </a:p>
+          <a:p>
+            <a:pPr lvl="1" marL="864000" indent="-324000">
+              <a:lnSpc>
+                <a:spcPct val="90000"/>
+              </a:lnSpc>
+              <a:spcBef>
+                <a:spcPts val="1134"/>
+              </a:spcBef>
+              <a:buClr>
+                <a:srgbClr val="000000"/>
+              </a:buClr>
+              <a:buSzPct val="75000"/>
+              <a:buFont typeface="Symbol" charset="2"/>
+              <a:buChar char=""/>
+            </a:pPr>
+            <a:r>
+              <a:rPr b="0" lang="en-US" sz="2000" spc="-1" strike="noStrike">
+                <a:solidFill>
+                  <a:schemeClr val="dk1"/>
+                </a:solidFill>
+                <a:latin typeface="Aptos"/>
+              </a:rPr>
+              <a:t>Delaying message delivery would be harmful</a:t>
+            </a:r>
+            <a:endParaRPr b="0" lang="en-US" sz="2000" spc="-1" strike="noStrike">
+              <a:solidFill>
+                <a:schemeClr val="dk1"/>
+              </a:solidFill>
+              <a:latin typeface="Aptos"/>
+            </a:endParaRPr>
+          </a:p>
+          <a:p>
+            <a:pPr marL="432000" indent="-324000">
+              <a:lnSpc>
+                <a:spcPct val="90000"/>
+              </a:lnSpc>
+              <a:spcBef>
+                <a:spcPts val="1417"/>
+              </a:spcBef>
+              <a:buClr>
+                <a:srgbClr val="000000"/>
+              </a:buClr>
+              <a:buSzPct val="45000"/>
+              <a:buFont typeface="Wingdings" charset="2"/>
+              <a:buChar char=""/>
+            </a:pPr>
+            <a:r>
+              <a:rPr b="0" lang="en-US" sz="2800" spc="-1" strike="noStrike">
+                <a:solidFill>
+                  <a:schemeClr val="dk1"/>
+                </a:solidFill>
+                <a:latin typeface="Aptos"/>
+              </a:rPr>
+              <a:t>Examples</a:t>
+            </a:r>
+            <a:endParaRPr b="0" lang="en-US" sz="2800" spc="-1" strike="noStrike">
+              <a:solidFill>
+                <a:schemeClr val="dk1"/>
+              </a:solidFill>
+              <a:latin typeface="Aptos"/>
+            </a:endParaRPr>
+          </a:p>
+          <a:p>
+            <a:pPr lvl="1" marL="864000" indent="-324000">
+              <a:lnSpc>
+                <a:spcPct val="90000"/>
+              </a:lnSpc>
+              <a:spcBef>
+                <a:spcPts val="1134"/>
+              </a:spcBef>
+              <a:buClr>
+                <a:srgbClr val="000000"/>
+              </a:buClr>
+              <a:buSzPct val="75000"/>
+              <a:buFont typeface="Symbol" charset="2"/>
+              <a:buChar char=""/>
+            </a:pPr>
+            <a:r>
+              <a:rPr b="0" lang="en-US" sz="2000" spc="-1" strike="noStrike">
+                <a:solidFill>
+                  <a:schemeClr val="dk1"/>
+                </a:solidFill>
+                <a:latin typeface="Aptos"/>
+              </a:rPr>
+              <a:t>“</a:t>
+            </a:r>
+            <a:r>
+              <a:rPr b="0" lang="en-US" sz="2000" spc="-1" strike="noStrike">
+                <a:solidFill>
+                  <a:schemeClr val="dk1"/>
+                </a:solidFill>
+                <a:latin typeface="Aptos"/>
+              </a:rPr>
+              <a:t>Send another shelter worker to the west entrance”</a:t>
+            </a:r>
+            <a:endParaRPr b="0" lang="en-US" sz="2000" spc="-1" strike="noStrike">
+              <a:solidFill>
+                <a:schemeClr val="dk1"/>
+              </a:solidFill>
+              <a:latin typeface="Aptos"/>
+            </a:endParaRPr>
+          </a:p>
+          <a:p>
+            <a:pPr lvl="1" marL="864000" indent="-324000">
+              <a:lnSpc>
+                <a:spcPct val="90000"/>
+              </a:lnSpc>
+              <a:spcBef>
+                <a:spcPts val="1134"/>
+              </a:spcBef>
+              <a:buClr>
+                <a:srgbClr val="000000"/>
+              </a:buClr>
+              <a:buSzPct val="75000"/>
+              <a:buFont typeface="Symbol" charset="2"/>
+              <a:buChar char=""/>
+            </a:pPr>
+            <a:r>
+              <a:rPr b="0" lang="en-US" sz="2000" spc="-1" strike="noStrike">
+                <a:solidFill>
+                  <a:schemeClr val="dk1"/>
+                </a:solidFill>
+                <a:latin typeface="Aptos"/>
+              </a:rPr>
+              <a:t>“</a:t>
+            </a:r>
+            <a:r>
+              <a:rPr b="0" lang="en-US" sz="2000" spc="-1" strike="noStrike">
+                <a:solidFill>
+                  <a:schemeClr val="dk1"/>
+                </a:solidFill>
+                <a:latin typeface="Aptos"/>
+              </a:rPr>
+              <a:t>Supply truck has arrived”</a:t>
+            </a:r>
+            <a:endParaRPr b="0" lang="en-US" sz="2000" spc="-1" strike="noStrike">
+              <a:solidFill>
+                <a:schemeClr val="dk1"/>
+              </a:solidFill>
+              <a:latin typeface="Aptos"/>
+            </a:endParaRPr>
+          </a:p>
+          <a:p>
+            <a:pPr lvl="1" marL="864000" indent="-324000">
+              <a:lnSpc>
+                <a:spcPct val="90000"/>
+              </a:lnSpc>
+              <a:spcBef>
+                <a:spcPts val="1134"/>
+              </a:spcBef>
+              <a:buClr>
+                <a:srgbClr val="000000"/>
+              </a:buClr>
+              <a:buSzPct val="75000"/>
+              <a:buFont typeface="Symbol" charset="2"/>
+              <a:buChar char=""/>
+            </a:pPr>
+            <a:r>
+              <a:rPr b="0" lang="en-US" sz="2000" spc="-1" strike="noStrike">
+                <a:solidFill>
+                  <a:schemeClr val="dk1"/>
+                </a:solidFill>
+                <a:latin typeface="Aptos"/>
+              </a:rPr>
+              <a:t>Coordinating frequencies, assignments, arrival times, or equipment</a:t>
+            </a:r>
+            <a:endParaRPr b="0" lang="en-US" sz="2000" spc="-1" strike="noStrike">
+              <a:solidFill>
+                <a:schemeClr val="dk1"/>
+              </a:solidFill>
+              <a:latin typeface="Aptos"/>
+            </a:endParaRPr>
+          </a:p>
+        </p:txBody>
+      </p:sp>
+      <p:sp>
+        <p:nvSpPr>
+          <p:cNvPr id="4" name="PlaceHolder 3"/>
+          <p:cNvSpPr>
+            <a:spLocks noGrp="1"/>
+          </p:cNvSpPr>
+          <p:nvPr>
+            <p:ph type="ftr" idx="4"/>
+          </p:nvPr>
+        </p:nvSpPr>
+        <p:spPr/>
+        <p:txBody>
+          <a:bodyPr/>
+          <a:p>
+            <a:r>
+              <a:t>Warren County KY ARES • KQ4TIV Emergency Coordinator</a:t>
+            </a:r>
+          </a:p>
+        </p:txBody>
+      </p:sp>
+      <p:sp>
+        <p:nvSpPr>
+          <p:cNvPr id="5" name="PlaceHolder 4"/>
+          <p:cNvSpPr>
+            <a:spLocks noGrp="1"/>
+          </p:cNvSpPr>
+          <p:nvPr>
+            <p:ph type="sldNum" idx="5"/>
+          </p:nvPr>
+        </p:nvSpPr>
+        <p:spPr/>
+        <p:txBody>
+          <a:bodyPr/>
+          <a:p>
+            <a:fld id="{DBE70D15-EF94-4850-8950-68B89E0100C7}" type="slidenum">
+              <a:t>7</a:t>
+            </a:fld>
+          </a:p>
+        </p:txBody>
+      </p:sp>
+      <p:sp>
+        <p:nvSpPr>
+          <p:cNvPr id="6" name="PlaceHolder 5"/>
+          <p:cNvSpPr>
+            <a:spLocks noGrp="1"/>
+          </p:cNvSpPr>
+          <p:nvPr>
+            <p:ph type="dt" idx="6"/>
+          </p:nvPr>
+        </p:nvSpPr>
+        <p:spPr/>
+        <p:txBody>
+          <a:bodyPr/>
+          <a:p>
+            <a:fld id="{ED07E94D-1AC9-4315-AC85-1FEC71479138}" type="datetime1">
+              <a:rPr lang="en-US"/>
+              <a:t>09/21/2026</a:t>
+            </a:fld>
+          </a:p>
+        </p:txBody>
+      </p:sp>
+    </p:spTree>
+  </p:cSld>
+  <mc:AlternateContent>
+    <mc:Choice Requires="p14">
+      <p:transition spd="slow" p14:dur="2000"/>
+    </mc:Choice>
+    <mc:Fallback>
+      <p:transition spd="slow"/>
+    </mc:Fallback>
+  </mc:AlternateContent>
+</p:sld>
+</file>
+
+<file path=ppt/slides/slide8.xml><?xml version="1.0" encoding="utf-8"?>
+<p:sld xmlns:a="http://schemas.openxmlformats.org/drawingml/2006/main" xmlns:p="http://schemas.openxmlformats.org/presentationml/2006/main" xmlns:r="http://schemas.openxmlformats.org/officeDocument/2006/relationships" xmlns:p14="http://schemas.microsoft.com/office/powerpoint/2010/main" xmlns:p15="http://schemas.microsoft.com/office/powerpoint/2012/main" xmlns:mc="http://schemas.openxmlformats.org/markup-compatibility/2006">
+  <p:cSld>
+    <p:spTree>
+      <p:nvGrpSpPr>
+        <p:cNvPr id="1" name=""/>
+        <p:cNvGrpSpPr/>
+        <p:nvPr/>
+      </p:nvGrpSpPr>
+      <p:grpSpPr>
+        <a:xfrm>
+          <a:off x="0" y="0"/>
+          <a:ext cx="0" cy="0"/>
+          <a:chOff x="0" y="0"/>
+          <a:chExt cx="0" cy="0"/>
+        </a:xfrm>
+      </p:grpSpPr>
+      <p:sp>
+        <p:nvSpPr>
+          <p:cNvPr id="58" name="PlaceHolder 1"/>
+          <p:cNvSpPr>
+            <a:spLocks noGrp="1"/>
+          </p:cNvSpPr>
+          <p:nvPr>
+            <p:ph type="title"/>
+          </p:nvPr>
+        </p:nvSpPr>
+        <p:spPr>
+          <a:xfrm>
+            <a:off x="838080" y="365040"/>
+            <a:ext cx="10514160" cy="1324080"/>
+          </a:xfrm>
+          <a:prstGeom prst="rect">
+            <a:avLst/>
+          </a:prstGeom>
+          <a:noFill/>
+          <a:ln w="0">
+            <a:noFill/>
+          </a:ln>
+        </p:spPr>
+        <p:txBody>
+          <a:bodyPr lIns="0" rIns="0" tIns="0" bIns="0" anchor="ctr">
+            <a:noAutofit/>
+          </a:bodyPr>
+          <a:p>
+            <a:pPr indent="0" defTabSz="914400">
+              <a:lnSpc>
+                <a:spcPct val="90000"/>
+              </a:lnSpc>
+              <a:buNone/>
+              <a:tabLst>
+                <a:tab algn="l" pos="0"/>
+              </a:tabLst>
+            </a:pPr>
+            <a:r>
+              <a:rPr b="0" lang="en-US" sz="4400" spc="-1" strike="noStrike">
+                <a:solidFill>
+                  <a:schemeClr val="dk1"/>
+                </a:solidFill>
+                <a:latin typeface="Aptos Display"/>
+              </a:rPr>
+              <a:t>Radiograms</a:t>
+            </a:r>
+            <a:endParaRPr b="0" lang="en-US" sz="4400" spc="-1" strike="noStrike">
+              <a:solidFill>
+                <a:schemeClr val="dk1"/>
+              </a:solidFill>
+              <a:latin typeface="Aptos"/>
+            </a:endParaRPr>
+          </a:p>
+        </p:txBody>
+      </p:sp>
+      <p:sp>
+        <p:nvSpPr>
+          <p:cNvPr id="59" name="PlaceHolder 2"/>
+          <p:cNvSpPr>
+            <a:spLocks noGrp="1"/>
+          </p:cNvSpPr>
+          <p:nvPr>
+            <p:ph/>
+          </p:nvPr>
+        </p:nvSpPr>
+        <p:spPr>
+          <a:xfrm>
+            <a:off x="687240" y="1593720"/>
+            <a:ext cx="10514160" cy="4349880"/>
+          </a:xfrm>
+          <a:prstGeom prst="rect">
+            <a:avLst/>
+          </a:prstGeom>
+          <a:noFill/>
+          <a:ln w="0">
+            <a:noFill/>
+          </a:ln>
+        </p:spPr>
+        <p:txBody>
+          <a:bodyPr lIns="0" rIns="0" tIns="0" bIns="0" anchor="t">
+            <a:normAutofit/>
+          </a:bodyPr>
+          <a:p>
+            <a:pPr marL="432000" indent="0">
+              <a:lnSpc>
+                <a:spcPct val="90000"/>
+              </a:lnSpc>
+              <a:spcBef>
+                <a:spcPts val="1417"/>
+              </a:spcBef>
+              <a:buNone/>
+            </a:pPr>
+            <a:r>
+              <a:rPr b="0" lang="en-US" sz="2800" spc="-1" strike="noStrike">
+                <a:solidFill>
+                  <a:schemeClr val="dk1"/>
+                </a:solidFill>
+                <a:latin typeface="Aptos"/>
+              </a:rPr>
+              <a:t>The Document</a:t>
+            </a:r>
+            <a:endParaRPr b="0" lang="en-US" sz="2800" spc="-1" strike="noStrike">
+              <a:solidFill>
+                <a:schemeClr val="dk1"/>
+              </a:solidFill>
+              <a:latin typeface="Aptos"/>
+            </a:endParaRPr>
+          </a:p>
+        </p:txBody>
+      </p:sp>
+      <p:pic>
+        <p:nvPicPr>
+          <p:cNvPr id="60" name="" descr=""/>
+          <p:cNvPicPr/>
+          <p:nvPr/>
+        </p:nvPicPr>
+        <p:blipFill>
+          <a:blip r:embed="rId1"/>
+          <a:stretch/>
+        </p:blipFill>
+        <p:spPr>
+          <a:xfrm>
+            <a:off x="3167640" y="2057400"/>
+            <a:ext cx="6433560" cy="4285080"/>
+          </a:xfrm>
+          <a:prstGeom prst="rect">
+            <a:avLst/>
+          </a:prstGeom>
+          <a:ln w="73080">
+            <a:noFill/>
+          </a:ln>
+        </p:spPr>
+      </p:pic>
+      <p:sp>
+        <p:nvSpPr>
+          <p:cNvPr id="61" name=""/>
+          <p:cNvSpPr/>
+          <p:nvPr/>
+        </p:nvSpPr>
+        <p:spPr>
+          <a:xfrm>
+            <a:off x="3108960" y="2904480"/>
+            <a:ext cx="6492240" cy="351000"/>
+          </a:xfrm>
+          <a:prstGeom prst="rect">
+            <a:avLst/>
+          </a:prstGeom>
+          <a:noFill/>
+          <a:ln w="36720">
+            <a:solidFill>
+              <a:srgbClr val="800080"/>
+            </a:solidFill>
+            <a:round/>
+          </a:ln>
+        </p:spPr>
+        <p:style>
+          <a:lnRef idx="0"/>
+          <a:fillRef idx="0"/>
+          <a:effectRef idx="0"/>
+          <a:fontRef idx="minor"/>
+        </p:style>
+        <p:txBody>
+          <a:bodyPr lIns="72000" rIns="72000" tIns="27000" bIns="27000" anchor="ctr">
+            <a:noAutofit/>
+          </a:bodyPr>
+          <a:p>
+            <a:endParaRPr b="0" lang="en-US" sz="1800" spc="-1" strike="noStrike">
+              <a:solidFill>
+                <a:srgbClr val="000000"/>
+              </a:solidFill>
+              <a:latin typeface="Arial"/>
+            </a:endParaRPr>
+          </a:p>
+        </p:txBody>
+      </p:sp>
+      <p:sp>
+        <p:nvSpPr>
+          <p:cNvPr id="62" name=""/>
+          <p:cNvSpPr/>
+          <p:nvPr/>
+        </p:nvSpPr>
+        <p:spPr>
+          <a:xfrm>
+            <a:off x="3108960" y="3315600"/>
+            <a:ext cx="2817000" cy="798840"/>
+          </a:xfrm>
+          <a:prstGeom prst="rect">
+            <a:avLst/>
+          </a:prstGeom>
+          <a:noFill/>
+          <a:ln w="36720">
+            <a:solidFill>
+              <a:srgbClr val="ff8000"/>
+            </a:solidFill>
+            <a:round/>
+          </a:ln>
+        </p:spPr>
+        <p:style>
+          <a:lnRef idx="0"/>
+          <a:fillRef idx="0"/>
+          <a:effectRef idx="0"/>
+          <a:fontRef idx="minor"/>
+        </p:style>
+        <p:txBody>
+          <a:bodyPr lIns="72000" rIns="72000" tIns="27000" bIns="27000" anchor="ctr">
+            <a:noAutofit/>
+          </a:bodyPr>
+          <a:p>
+            <a:endParaRPr b="0" lang="en-US" sz="1800" spc="-1" strike="noStrike">
+              <a:solidFill>
+                <a:srgbClr val="000000"/>
+              </a:solidFill>
+              <a:latin typeface="Arial"/>
+            </a:endParaRPr>
+          </a:p>
+        </p:txBody>
+      </p:sp>
+      <p:sp>
+        <p:nvSpPr>
+          <p:cNvPr id="63" name=""/>
+          <p:cNvSpPr/>
+          <p:nvPr/>
+        </p:nvSpPr>
+        <p:spPr>
+          <a:xfrm>
+            <a:off x="5980680" y="3294720"/>
+            <a:ext cx="3333600" cy="796320"/>
+          </a:xfrm>
+          <a:prstGeom prst="rect">
+            <a:avLst/>
+          </a:prstGeom>
+          <a:noFill/>
+          <a:ln w="36720">
+            <a:solidFill>
+              <a:srgbClr val="5eb91e"/>
+            </a:solidFill>
+            <a:round/>
+          </a:ln>
+        </p:spPr>
+        <p:style>
+          <a:lnRef idx="0"/>
+          <a:fillRef idx="0"/>
+          <a:effectRef idx="0"/>
+          <a:fontRef idx="minor"/>
+        </p:style>
+        <p:txBody>
+          <a:bodyPr lIns="72000" rIns="72000" tIns="27000" bIns="27000" anchor="ctr">
+            <a:noAutofit/>
+          </a:bodyPr>
+          <a:p>
+            <a:endParaRPr b="0" lang="en-US" sz="1800" spc="-1" strike="noStrike">
+              <a:solidFill>
+                <a:srgbClr val="000000"/>
+              </a:solidFill>
+              <a:latin typeface="Arial"/>
+            </a:endParaRPr>
+          </a:p>
+        </p:txBody>
+      </p:sp>
+      <p:sp>
+        <p:nvSpPr>
+          <p:cNvPr id="64" name=""/>
+          <p:cNvSpPr/>
+          <p:nvPr/>
+        </p:nvSpPr>
+        <p:spPr>
+          <a:xfrm>
+            <a:off x="3108960" y="4114440"/>
+            <a:ext cx="6166440" cy="1171080"/>
+          </a:xfrm>
+          <a:prstGeom prst="rect">
+            <a:avLst/>
+          </a:prstGeom>
+          <a:noFill/>
+          <a:ln w="36720">
+            <a:solidFill>
+              <a:srgbClr val="e16173"/>
+            </a:solidFill>
+            <a:round/>
+          </a:ln>
+        </p:spPr>
+        <p:style>
+          <a:lnRef idx="0"/>
+          <a:fillRef idx="0"/>
+          <a:effectRef idx="0"/>
+          <a:fontRef idx="minor"/>
+        </p:style>
+        <p:txBody>
+          <a:bodyPr lIns="72000" rIns="72000" tIns="27000" bIns="27000" anchor="ctr">
+            <a:noAutofit/>
+          </a:bodyPr>
+          <a:p>
+            <a:endParaRPr b="0" lang="en-US" sz="1800" spc="-1" strike="noStrike">
+              <a:solidFill>
+                <a:srgbClr val="000000"/>
+              </a:solidFill>
+              <a:latin typeface="Arial"/>
+            </a:endParaRPr>
+          </a:p>
+        </p:txBody>
+      </p:sp>
+      <p:sp>
+        <p:nvSpPr>
+          <p:cNvPr id="65" name=""/>
+          <p:cNvSpPr/>
+          <p:nvPr/>
+        </p:nvSpPr>
+        <p:spPr>
+          <a:xfrm>
+            <a:off x="3099600" y="5321520"/>
+            <a:ext cx="6175800" cy="346680"/>
+          </a:xfrm>
+          <a:prstGeom prst="rect">
+            <a:avLst/>
+          </a:prstGeom>
+          <a:noFill/>
+          <a:ln w="36720">
+            <a:solidFill>
+              <a:srgbClr val="3465a4"/>
+            </a:solidFill>
+            <a:round/>
+          </a:ln>
+        </p:spPr>
+        <p:style>
+          <a:lnRef idx="0"/>
+          <a:fillRef idx="0"/>
+          <a:effectRef idx="0"/>
+          <a:fontRef idx="minor"/>
+        </p:style>
+        <p:txBody>
+          <a:bodyPr lIns="72000" rIns="72000" tIns="27000" bIns="27000" anchor="ctr">
+            <a:noAutofit/>
+          </a:bodyPr>
+          <a:p>
+            <a:endParaRPr b="0" lang="en-US" sz="1800" spc="-1" strike="noStrike">
+              <a:solidFill>
+                <a:srgbClr val="000000"/>
+              </a:solidFill>
+              <a:latin typeface="Arial"/>
+            </a:endParaRPr>
+          </a:p>
+        </p:txBody>
+      </p:sp>
+      <p:sp>
+        <p:nvSpPr>
+          <p:cNvPr id="66" name=""/>
+          <p:cNvSpPr/>
+          <p:nvPr/>
+        </p:nvSpPr>
+        <p:spPr>
+          <a:xfrm>
+            <a:off x="3425400" y="5168520"/>
+            <a:ext cx="2242800" cy="117000"/>
+          </a:xfrm>
+          <a:prstGeom prst="rect">
+            <a:avLst/>
+          </a:prstGeom>
+          <a:noFill/>
+          <a:ln w="36720">
+            <a:solidFill>
+              <a:srgbClr val="ff0000"/>
+            </a:solidFill>
+            <a:round/>
+          </a:ln>
+        </p:spPr>
+        <p:style>
+          <a:lnRef idx="0"/>
+          <a:fillRef idx="0"/>
+          <a:effectRef idx="0"/>
+          <a:fontRef idx="minor"/>
+        </p:style>
+        <p:txBody>
+          <a:bodyPr lIns="72000" rIns="72000" tIns="27000" bIns="27000" anchor="ctr">
+            <a:noAutofit/>
+          </a:bodyPr>
+          <a:p>
+            <a:endParaRPr b="0" lang="en-US" sz="1800" spc="-1" strike="noStrike">
+              <a:solidFill>
+                <a:srgbClr val="000000"/>
+              </a:solidFill>
+              <a:latin typeface="Arial"/>
+            </a:endParaRPr>
+          </a:p>
+        </p:txBody>
+      </p:sp>
+      <p:sp>
+        <p:nvSpPr>
+          <p:cNvPr id="67" name=""/>
+          <p:cNvSpPr txBox="1"/>
+          <p:nvPr/>
+        </p:nvSpPr>
+        <p:spPr>
+          <a:xfrm>
+            <a:off x="1015200" y="2857320"/>
+            <a:ext cx="1779840" cy="382680"/>
+          </a:xfrm>
+          <a:prstGeom prst="rect">
+            <a:avLst/>
+          </a:prstGeom>
+          <a:noFill/>
+          <a:ln w="73080">
+            <a:noFill/>
+          </a:ln>
+        </p:spPr>
+        <p:txBody>
+          <a:bodyPr lIns="90000" rIns="90000" tIns="45000" bIns="45000" anchor="t">
+            <a:noAutofit/>
+          </a:bodyPr>
+          <a:p>
+            <a:r>
+              <a:rPr b="0" lang="en-US" sz="1800" spc="-1" strike="noStrike">
+                <a:solidFill>
+                  <a:srgbClr val="55308d"/>
+                </a:solidFill>
+                <a:latin typeface="Arial"/>
+              </a:rPr>
+              <a:t>Preamble</a:t>
+            </a:r>
+            <a:endParaRPr b="0" lang="en-US" sz="1800" spc="-1" strike="noStrike">
+              <a:solidFill>
+                <a:srgbClr val="55308d"/>
+              </a:solidFill>
+              <a:latin typeface="Arial"/>
+            </a:endParaRPr>
+          </a:p>
+        </p:txBody>
+      </p:sp>
+      <p:sp>
+        <p:nvSpPr>
+          <p:cNvPr id="68" name=""/>
+          <p:cNvSpPr txBox="1"/>
+          <p:nvPr/>
+        </p:nvSpPr>
+        <p:spPr>
+          <a:xfrm>
+            <a:off x="968400" y="3482280"/>
+            <a:ext cx="1779840" cy="382680"/>
+          </a:xfrm>
+          <a:prstGeom prst="rect">
+            <a:avLst/>
+          </a:prstGeom>
+          <a:noFill/>
+          <a:ln w="73080">
+            <a:noFill/>
+          </a:ln>
+        </p:spPr>
+        <p:txBody>
+          <a:bodyPr lIns="90000" rIns="90000" tIns="45000" bIns="45000" anchor="t">
+            <a:noAutofit/>
+          </a:bodyPr>
+          <a:p>
+            <a:r>
+              <a:rPr b="0" lang="en-US" sz="1800" spc="-1" strike="noStrike">
+                <a:solidFill>
+                  <a:srgbClr val="ff860d"/>
+                </a:solidFill>
+                <a:latin typeface="Arial"/>
+              </a:rPr>
+              <a:t>Addressee</a:t>
+            </a:r>
+            <a:endParaRPr b="0" lang="en-US" sz="1800" spc="-1" strike="noStrike">
+              <a:solidFill>
+                <a:srgbClr val="ff860d"/>
+              </a:solidFill>
+              <a:latin typeface="Arial"/>
+            </a:endParaRPr>
+          </a:p>
+        </p:txBody>
+      </p:sp>
+      <p:sp>
+        <p:nvSpPr>
+          <p:cNvPr id="69" name=""/>
+          <p:cNvSpPr txBox="1"/>
+          <p:nvPr/>
+        </p:nvSpPr>
+        <p:spPr>
+          <a:xfrm>
+            <a:off x="1054080" y="3992760"/>
+            <a:ext cx="1779840" cy="941400"/>
+          </a:xfrm>
+          <a:prstGeom prst="rect">
+            <a:avLst/>
+          </a:prstGeom>
+          <a:noFill/>
+          <a:ln w="73080">
+            <a:noFill/>
+          </a:ln>
+        </p:spPr>
+        <p:txBody>
+          <a:bodyPr lIns="90000" rIns="90000" tIns="45000" bIns="45000" anchor="t">
+            <a:noAutofit/>
+          </a:bodyPr>
+          <a:p>
+            <a:r>
+              <a:rPr b="0" lang="en-US" sz="1800" spc="-1" strike="noStrike">
+                <a:solidFill>
+                  <a:srgbClr val="e16173"/>
+                </a:solidFill>
+                <a:latin typeface="Arial"/>
+              </a:rPr>
+              <a:t>Message Text</a:t>
+            </a:r>
+            <a:endParaRPr b="0" lang="en-US" sz="1800" spc="-1" strike="noStrike">
+              <a:solidFill>
+                <a:srgbClr val="e16173"/>
+              </a:solidFill>
+              <a:latin typeface="Arial"/>
+            </a:endParaRPr>
+          </a:p>
+          <a:p>
+            <a:r>
+              <a:rPr b="0" i="1" lang="en-US" sz="1400" spc="-1" strike="noStrike">
+                <a:solidFill>
+                  <a:srgbClr val="e16173"/>
+                </a:solidFill>
+                <a:latin typeface="Arial"/>
+              </a:rPr>
+              <a:t>(1 word/line, 25 words, includes punctuation)</a:t>
+            </a:r>
+            <a:endParaRPr b="0" lang="en-US" sz="1400" spc="-1" strike="noStrike">
+              <a:solidFill>
+                <a:srgbClr val="e16173"/>
+              </a:solidFill>
+              <a:latin typeface="Arial"/>
+            </a:endParaRPr>
+          </a:p>
+        </p:txBody>
+      </p:sp>
+      <p:sp>
+        <p:nvSpPr>
+          <p:cNvPr id="70" name=""/>
+          <p:cNvSpPr txBox="1"/>
+          <p:nvPr/>
+        </p:nvSpPr>
+        <p:spPr>
+          <a:xfrm>
+            <a:off x="1030680" y="4982040"/>
+            <a:ext cx="1779840" cy="382680"/>
+          </a:xfrm>
+          <a:prstGeom prst="rect">
+            <a:avLst/>
+          </a:prstGeom>
+          <a:noFill/>
+          <a:ln w="73080">
+            <a:noFill/>
+          </a:ln>
+        </p:spPr>
+        <p:txBody>
+          <a:bodyPr lIns="90000" rIns="90000" tIns="45000" bIns="45000" anchor="t">
+            <a:noAutofit/>
+          </a:bodyPr>
+          <a:p>
+            <a:r>
+              <a:rPr b="0" lang="en-US" sz="1800" spc="-1" strike="noStrike">
+                <a:solidFill>
+                  <a:srgbClr val="ff0000"/>
+                </a:solidFill>
+                <a:latin typeface="Arial"/>
+              </a:rPr>
+              <a:t>Signature</a:t>
+            </a:r>
+            <a:endParaRPr b="0" lang="en-US" sz="1800" spc="-1" strike="noStrike">
+              <a:solidFill>
+                <a:srgbClr val="ff0000"/>
+              </a:solidFill>
+              <a:latin typeface="Arial"/>
+            </a:endParaRPr>
+          </a:p>
+        </p:txBody>
+      </p:sp>
+      <p:sp>
+        <p:nvSpPr>
+          <p:cNvPr id="71" name=""/>
+          <p:cNvSpPr txBox="1"/>
+          <p:nvPr/>
+        </p:nvSpPr>
+        <p:spPr>
+          <a:xfrm>
+            <a:off x="9720000" y="5341320"/>
+            <a:ext cx="1779840" cy="602280"/>
+          </a:xfrm>
+          <a:prstGeom prst="rect">
+            <a:avLst/>
+          </a:prstGeom>
+          <a:noFill/>
+          <a:ln w="73080">
+            <a:noFill/>
+          </a:ln>
+        </p:spPr>
+        <p:txBody>
+          <a:bodyPr lIns="90000" rIns="90000" tIns="45000" bIns="45000" anchor="t">
+            <a:noAutofit/>
+          </a:bodyPr>
+          <a:p>
+            <a:r>
+              <a:rPr b="0" lang="en-US" sz="1800" spc="-1" strike="noStrike">
+                <a:solidFill>
+                  <a:srgbClr val="3465a4"/>
+                </a:solidFill>
+                <a:latin typeface="Arial"/>
+              </a:rPr>
+              <a:t>Received and Sent by</a:t>
+            </a:r>
+            <a:endParaRPr b="0" lang="en-US" sz="1800" spc="-1" strike="noStrike">
+              <a:solidFill>
+                <a:srgbClr val="3465a4"/>
+              </a:solidFill>
+              <a:latin typeface="Arial"/>
+            </a:endParaRPr>
+          </a:p>
+        </p:txBody>
+      </p:sp>
+      <p:sp>
+        <p:nvSpPr>
+          <p:cNvPr id="72" name=""/>
+          <p:cNvSpPr txBox="1"/>
+          <p:nvPr/>
+        </p:nvSpPr>
+        <p:spPr>
+          <a:xfrm>
+            <a:off x="9462600" y="3358440"/>
+            <a:ext cx="1779840" cy="800640"/>
+          </a:xfrm>
+          <a:prstGeom prst="rect">
+            <a:avLst/>
+          </a:prstGeom>
+          <a:noFill/>
+          <a:ln w="73080">
+            <a:noFill/>
+          </a:ln>
+        </p:spPr>
+        <p:txBody>
+          <a:bodyPr lIns="90000" rIns="90000" tIns="45000" bIns="45000" anchor="t">
+            <a:noAutofit/>
+          </a:bodyPr>
+          <a:p>
+            <a:r>
+              <a:rPr b="0" lang="en-US" sz="1800" spc="-1" strike="noStrike">
+                <a:solidFill>
+                  <a:srgbClr val="00a933"/>
+                </a:solidFill>
+                <a:latin typeface="Arial"/>
+              </a:rPr>
+              <a:t>Message received at</a:t>
+            </a:r>
+            <a:endParaRPr b="0" lang="en-US" sz="1800" spc="-1" strike="noStrike">
+              <a:solidFill>
+                <a:srgbClr val="00a933"/>
+              </a:solidFill>
+              <a:latin typeface="Arial"/>
+            </a:endParaRPr>
+          </a:p>
+          <a:p>
+            <a:r>
+              <a:rPr b="0" i="1" lang="en-US" sz="1400" spc="-1" strike="noStrike">
+                <a:solidFill>
+                  <a:srgbClr val="00a933"/>
+                </a:solidFill>
+                <a:latin typeface="Arial"/>
+              </a:rPr>
+              <a:t>(almost never used)</a:t>
+            </a:r>
+            <a:endParaRPr b="0" lang="en-US" sz="1400" spc="-1" strike="noStrike">
+              <a:solidFill>
+                <a:srgbClr val="00a933"/>
+              </a:solidFill>
+              <a:latin typeface="Arial"/>
+            </a:endParaRPr>
+          </a:p>
+        </p:txBody>
+      </p:sp>
+      <p:sp>
+        <p:nvSpPr>
+          <p:cNvPr id="4" name="PlaceHolder 3"/>
+          <p:cNvSpPr>
+            <a:spLocks noGrp="1"/>
+          </p:cNvSpPr>
+          <p:nvPr>
+            <p:ph type="ftr" idx="4"/>
+          </p:nvPr>
+        </p:nvSpPr>
+        <p:spPr/>
+        <p:txBody>
+          <a:bodyPr/>
+          <a:p>
+            <a:r>
+              <a:t>Warren County KY ARES • KQ4TIV Emergency Coordinator</a:t>
+            </a:r>
+          </a:p>
+        </p:txBody>
+      </p:sp>
+      <p:sp>
+        <p:nvSpPr>
+          <p:cNvPr id="5" name="PlaceHolder 4"/>
+          <p:cNvSpPr>
+            <a:spLocks noGrp="1"/>
+          </p:cNvSpPr>
+          <p:nvPr>
+            <p:ph type="sldNum" idx="5"/>
+          </p:nvPr>
+        </p:nvSpPr>
+        <p:spPr/>
+        <p:txBody>
+          <a:bodyPr/>
+          <a:p>
+            <a:fld id="{F53BC375-3761-4E49-9DDC-3CD4A44AEDFE}" type="slidenum">
+              <a:t>8</a:t>
+            </a:fld>
+          </a:p>
+        </p:txBody>
+      </p:sp>
+      <p:sp>
+        <p:nvSpPr>
+          <p:cNvPr id="6" name="PlaceHolder 5"/>
+          <p:cNvSpPr>
+            <a:spLocks noGrp="1"/>
+          </p:cNvSpPr>
+          <p:nvPr>
+            <p:ph type="dt" idx="6"/>
+          </p:nvPr>
+        </p:nvSpPr>
+        <p:spPr/>
+        <p:txBody>
+          <a:bodyPr/>
+          <a:p>
+            <a:fld id="{C278394A-BF8E-4FE8-B766-FD8AEAFBB1DB}" type="datetime1">
+              <a:rPr lang="en-US"/>
+              <a:t>09/21/2026</a:t>
+            </a:fld>
+          </a:p>
+        </p:txBody>
+      </p:sp>
+    </p:spTree>
+  </p:cSld>
+  <mc:AlternateContent>
+    <mc:Choice Requires="p14">
+      <p:transition spd="slow" p14:dur="2000"/>
+    </mc:Choice>
+    <mc:Fallback>
+      <p:transition spd="slow"/>
+    </mc:Fallback>
+  </mc:AlternateContent>
+</p:sld>
+</file>
+
+<file path=ppt/slides/slide9.xml><?xml version="1.0" encoding="utf-8"?>
+<p:sld xmlns:a="http://schemas.openxmlformats.org/drawingml/2006/main" xmlns:p="http://schemas.openxmlformats.org/presentationml/2006/main" xmlns:r="http://schemas.openxmlformats.org/officeDocument/2006/relationships" xmlns:p14="http://schemas.microsoft.com/office/powerpoint/2010/main" xmlns:p15="http://schemas.microsoft.com/office/powerpoint/2012/main" xmlns:mc="http://schemas.openxmlformats.org/markup-compatibility/2006">
+  <p:cSld>
+    <p:spTree>
+      <p:nvGrpSpPr>
+        <p:cNvPr id="1" name=""/>
+        <p:cNvGrpSpPr/>
+        <p:nvPr/>
+      </p:nvGrpSpPr>
+      <p:grpSpPr>
+        <a:xfrm>
+          <a:off x="0" y="0"/>
+          <a:ext cx="0" cy="0"/>
+          <a:chOff x="0" y="0"/>
+          <a:chExt cx="0" cy="0"/>
+        </a:xfrm>
+      </p:grpSpPr>
+      <p:sp>
+        <p:nvSpPr>
+          <p:cNvPr id="73" name="PlaceHolder 1"/>
+          <p:cNvSpPr>
+            <a:spLocks noGrp="1"/>
+          </p:cNvSpPr>
+          <p:nvPr>
+            <p:ph type="title"/>
+          </p:nvPr>
+        </p:nvSpPr>
+        <p:spPr>
+          <a:xfrm>
+            <a:off x="838080" y="365040"/>
+            <a:ext cx="10514160" cy="1324080"/>
+          </a:xfrm>
+          <a:prstGeom prst="rect">
+            <a:avLst/>
+          </a:prstGeom>
+          <a:noFill/>
+          <a:ln w="0">
+            <a:noFill/>
+          </a:ln>
+        </p:spPr>
+        <p:txBody>
+          <a:bodyPr lIns="0" rIns="0" tIns="0" bIns="0" anchor="ctr">
+            <a:noAutofit/>
+          </a:bodyPr>
+          <a:p>
+            <a:pPr indent="0" defTabSz="914400">
+              <a:lnSpc>
+                <a:spcPct val="90000"/>
+              </a:lnSpc>
+              <a:buNone/>
+              <a:tabLst>
+                <a:tab algn="l" pos="0"/>
+              </a:tabLst>
+            </a:pPr>
+            <a:r>
+              <a:rPr b="0" lang="en-US" sz="4400" spc="-1" strike="noStrike">
+                <a:solidFill>
+                  <a:schemeClr val="dk1"/>
+                </a:solidFill>
+                <a:latin typeface="Aptos Display"/>
+              </a:rPr>
+              <a:t>Radiograms</a:t>
+            </a:r>
+            <a:endParaRPr b="0" lang="en-US" sz="4400" spc="-1" strike="noStrike">
+              <a:solidFill>
+                <a:schemeClr val="dk1"/>
+              </a:solidFill>
+              <a:latin typeface="Aptos"/>
+            </a:endParaRPr>
+          </a:p>
+        </p:txBody>
+      </p:sp>
+      <p:sp>
+        <p:nvSpPr>
+          <p:cNvPr id="74" name="PlaceHolder 2"/>
+          <p:cNvSpPr>
+            <a:spLocks noGrp="1"/>
+          </p:cNvSpPr>
+          <p:nvPr>
+            <p:ph/>
+          </p:nvPr>
+        </p:nvSpPr>
+        <p:spPr>
+          <a:xfrm>
+            <a:off x="838080" y="1825560"/>
+            <a:ext cx="10514160" cy="4349880"/>
+          </a:xfrm>
+          <a:prstGeom prst="rect">
+            <a:avLst/>
+          </a:prstGeom>
+          <a:noFill/>
+          <a:ln w="0">
+            <a:noFill/>
+          </a:ln>
+        </p:spPr>
+        <p:txBody>
+          <a:bodyPr lIns="0" rIns="0" tIns="0" bIns="0" anchor="t">
+            <a:normAutofit/>
+          </a:bodyPr>
+          <a:p>
+            <a:pPr marL="432000" indent="0">
+              <a:lnSpc>
+                <a:spcPct val="90000"/>
+              </a:lnSpc>
+              <a:spcBef>
+                <a:spcPts val="1417"/>
+              </a:spcBef>
+              <a:buNone/>
+            </a:pPr>
+            <a:r>
+              <a:rPr b="0" lang="en-US" sz="2800" spc="-1" strike="noStrike">
+                <a:solidFill>
+                  <a:schemeClr val="dk1"/>
+                </a:solidFill>
+                <a:latin typeface="Aptos"/>
+              </a:rPr>
+              <a:t>When reading a Radiogram over phone, you will use very specific conventions which are designed to transmit the information correctly the first time</a:t>
+            </a:r>
+            <a:endParaRPr b="0" lang="en-US" sz="2800" spc="-1" strike="noStrike">
+              <a:solidFill>
+                <a:schemeClr val="dk1"/>
+              </a:solidFill>
+              <a:latin typeface="Aptos"/>
+            </a:endParaRPr>
+          </a:p>
+          <a:p>
+            <a:pPr marL="432000" indent="-324000">
+              <a:lnSpc>
+                <a:spcPct val="90000"/>
+              </a:lnSpc>
+              <a:spcBef>
+                <a:spcPts val="1417"/>
+              </a:spcBef>
+              <a:buClr>
+                <a:srgbClr val="000000"/>
+              </a:buClr>
+              <a:buSzPct val="45000"/>
+              <a:buFont typeface="Wingdings" charset="2"/>
+              <a:buChar char=""/>
+            </a:pPr>
+            <a:r>
+              <a:rPr b="0" lang="en-US" sz="2800" spc="-1" strike="noStrike">
+                <a:solidFill>
+                  <a:schemeClr val="dk1"/>
+                </a:solidFill>
+                <a:latin typeface="Aptos"/>
+              </a:rPr>
+              <a:t>Complicated/specific words and names</a:t>
+            </a:r>
+            <a:endParaRPr b="0" lang="en-US" sz="2800" spc="-1" strike="noStrike">
+              <a:solidFill>
+                <a:schemeClr val="dk1"/>
+              </a:solidFill>
+              <a:latin typeface="Aptos"/>
+            </a:endParaRPr>
+          </a:p>
+          <a:p>
+            <a:pPr lvl="1" marL="864000" indent="-324000">
+              <a:lnSpc>
+                <a:spcPct val="90000"/>
+              </a:lnSpc>
+              <a:spcBef>
+                <a:spcPts val="1134"/>
+              </a:spcBef>
+              <a:buClr>
+                <a:srgbClr val="000000"/>
+              </a:buClr>
+              <a:buSzPct val="75000"/>
+              <a:buFont typeface="Symbol" charset="2"/>
+              <a:buChar char=""/>
+            </a:pPr>
+            <a:r>
+              <a:rPr b="0" lang="en-US" sz="2000" spc="-1" strike="noStrike">
+                <a:solidFill>
+                  <a:schemeClr val="dk1"/>
+                </a:solidFill>
+                <a:latin typeface="Aptos"/>
+              </a:rPr>
+              <a:t>“</a:t>
+            </a:r>
+            <a:r>
+              <a:rPr b="0" lang="en-US" sz="2000" spc="-1" strike="noStrike">
+                <a:solidFill>
+                  <a:schemeClr val="dk1"/>
+                </a:solidFill>
+                <a:latin typeface="Aptos"/>
+              </a:rPr>
+              <a:t>RADIOGRAM </a:t>
+            </a:r>
+            <a:r>
+              <a:rPr b="0" i="1" lang="en-US" sz="2000" spc="-1" strike="noStrike">
+                <a:solidFill>
+                  <a:schemeClr val="dk1"/>
+                </a:solidFill>
+                <a:latin typeface="Aptos"/>
+              </a:rPr>
+              <a:t>I SPELL RADIO ALPHA DELTA INDIA OSCAR GERMANY RADIO ALPHA MIKE”</a:t>
+            </a:r>
+            <a:endParaRPr b="0" lang="en-US" sz="2000" spc="-1" strike="noStrike">
+              <a:solidFill>
+                <a:schemeClr val="dk1"/>
+              </a:solidFill>
+              <a:latin typeface="Aptos"/>
+            </a:endParaRPr>
+          </a:p>
+          <a:p>
+            <a:pPr marL="432000" indent="-324000">
+              <a:lnSpc>
+                <a:spcPct val="90000"/>
+              </a:lnSpc>
+              <a:spcBef>
+                <a:spcPts val="1417"/>
+              </a:spcBef>
+              <a:buClr>
+                <a:srgbClr val="000000"/>
+              </a:buClr>
+              <a:buSzPct val="45000"/>
+              <a:buFont typeface="Wingdings" charset="2"/>
+              <a:buChar char=""/>
+            </a:pPr>
+            <a:r>
+              <a:rPr b="0" lang="en-US" sz="2800" spc="-1" strike="noStrike">
+                <a:solidFill>
+                  <a:schemeClr val="dk1"/>
+                </a:solidFill>
+                <a:latin typeface="Aptos"/>
+              </a:rPr>
+              <a:t>Numbers/Initials/Mixed Groups</a:t>
+            </a:r>
+            <a:endParaRPr b="0" lang="en-US" sz="2800" spc="-1" strike="noStrike">
+              <a:solidFill>
+                <a:schemeClr val="dk1"/>
+              </a:solidFill>
+              <a:latin typeface="Aptos"/>
+            </a:endParaRPr>
+          </a:p>
+          <a:p>
+            <a:pPr lvl="1" marL="864000" indent="-324000">
+              <a:lnSpc>
+                <a:spcPct val="90000"/>
+              </a:lnSpc>
+              <a:spcBef>
+                <a:spcPts val="1134"/>
+              </a:spcBef>
+              <a:buClr>
+                <a:srgbClr val="000000"/>
+              </a:buClr>
+              <a:buSzPct val="75000"/>
+              <a:buFont typeface="Symbol" charset="2"/>
+              <a:buChar char=""/>
+            </a:pPr>
+            <a:r>
+              <a:rPr b="0" lang="en-US" sz="2000" spc="-1" strike="noStrike">
+                <a:solidFill>
+                  <a:schemeClr val="dk1"/>
+                </a:solidFill>
+                <a:latin typeface="Aptos"/>
+              </a:rPr>
+              <a:t>123 Somewhere St read </a:t>
+            </a:r>
+            <a:r>
+              <a:rPr b="0" i="1" lang="en-US" sz="2000" spc="-1" strike="noStrike">
+                <a:solidFill>
+                  <a:schemeClr val="dk1"/>
+                </a:solidFill>
+                <a:latin typeface="Aptos"/>
+              </a:rPr>
+              <a:t>“FIGURES ONE TWO THREE SOMEWHERE INTIALS SIERRA TANGO”</a:t>
+            </a:r>
+            <a:endParaRPr b="0" lang="en-US" sz="2000" spc="-1" strike="noStrike">
+              <a:solidFill>
+                <a:schemeClr val="dk1"/>
+              </a:solidFill>
+              <a:latin typeface="Aptos"/>
+            </a:endParaRPr>
+          </a:p>
+          <a:p>
+            <a:pPr marL="432000" indent="0">
+              <a:lnSpc>
+                <a:spcPct val="90000"/>
+              </a:lnSpc>
+              <a:spcBef>
+                <a:spcPts val="1417"/>
+              </a:spcBef>
+              <a:buNone/>
+            </a:pPr>
+            <a:r>
+              <a:rPr b="0" i="1" lang="en-US" sz="2800" spc="-1" strike="noStrike">
+                <a:solidFill>
+                  <a:schemeClr val="dk1"/>
+                </a:solidFill>
+                <a:latin typeface="Aptos"/>
+              </a:rPr>
+              <a:t> </a:t>
+            </a:r>
+            <a:endParaRPr b="0" lang="en-US" sz="2800" spc="-1" strike="noStrike">
+              <a:solidFill>
+                <a:schemeClr val="dk1"/>
+              </a:solidFill>
+              <a:latin typeface="Aptos"/>
+            </a:endParaRPr>
+          </a:p>
+        </p:txBody>
+      </p:sp>
+      <p:sp>
+        <p:nvSpPr>
+          <p:cNvPr id="4" name="PlaceHolder 3"/>
+          <p:cNvSpPr>
+            <a:spLocks noGrp="1"/>
+          </p:cNvSpPr>
+          <p:nvPr>
+            <p:ph type="ftr" idx="4"/>
+          </p:nvPr>
+        </p:nvSpPr>
+        <p:spPr/>
+        <p:txBody>
+          <a:bodyPr/>
+          <a:p>
+            <a:r>
+              <a:t>Warren County KY ARES • KQ4TIV Emergency Coordinator</a:t>
+            </a:r>
+          </a:p>
+        </p:txBody>
+      </p:sp>
+      <p:sp>
+        <p:nvSpPr>
+          <p:cNvPr id="5" name="PlaceHolder 4"/>
+          <p:cNvSpPr>
+            <a:spLocks noGrp="1"/>
+          </p:cNvSpPr>
+          <p:nvPr>
+            <p:ph type="sldNum" idx="5"/>
+          </p:nvPr>
+        </p:nvSpPr>
+        <p:spPr/>
+        <p:txBody>
+          <a:bodyPr/>
+          <a:p>
+            <a:fld id="{6CC1FA02-0020-4FB4-B3DF-522DBE6EC7F8}" type="slidenum">
+              <a:t>9</a:t>
+            </a:fld>
+          </a:p>
+        </p:txBody>
+      </p:sp>
+      <p:sp>
+        <p:nvSpPr>
+          <p:cNvPr id="6" name="PlaceHolder 5"/>
+          <p:cNvSpPr>
+            <a:spLocks noGrp="1"/>
+          </p:cNvSpPr>
+          <p:nvPr>
+            <p:ph type="dt" idx="6"/>
+          </p:nvPr>
+        </p:nvSpPr>
+        <p:spPr/>
+        <p:txBody>
+          <a:bodyPr/>
+          <a:p>
+            <a:fld id="{2BD86942-F6AD-448F-8D54-9BD9FBD988FE}" type="datetime1">
               <a:rPr lang="en-US"/>
               <a:t>09/21/2026</a:t>
             </a:fld>

--- a/documents/meetings/KCARC Meeting 20260922.pptx
+++ b/documents/meetings/KCARC Meeting 20260922.pptx
@@ -1,30 +1,125 @@
 
 <file path=ppt/presentation.xml><?xml version="1.0" encoding="utf-8"?>
-<p:presentation xmlns:a="http://schemas.openxmlformats.org/drawingml/2006/main" xmlns:p="http://schemas.openxmlformats.org/presentationml/2006/main" xmlns:r="http://schemas.openxmlformats.org/officeDocument/2006/relationships" xmlns:p14="http://schemas.microsoft.com/office/powerpoint/2010/main" xmlns:p15="http://schemas.microsoft.com/office/powerpoint/2012/main" xmlns:mc="http://schemas.openxmlformats.org/markup-compatibility/2006">
+<p:presentation xmlns:a="http://schemas.openxmlformats.org/drawingml/2006/main" xmlns:r="http://schemas.openxmlformats.org/officeDocument/2006/relationships" xmlns:p="http://schemas.openxmlformats.org/presentationml/2006/main">
   <p:sldMasterIdLst>
-    <p:sldMasterId id="2147483648" r:id="rId2"/>
-    <p:sldMasterId id="2147483650" r:id="rId3"/>
-    <p:sldMasterId id="2147483653" r:id="rId4"/>
+    <p:sldMasterId id="2147483648" r:id="rId1"/>
+    <p:sldMasterId id="2147483650" r:id="rId2"/>
+    <p:sldMasterId id="2147483653" r:id="rId3"/>
   </p:sldMasterIdLst>
   <p:sldIdLst>
-    <p:sldId id="256" r:id="rId5"/>
-    <p:sldId id="257" r:id="rId6"/>
-    <p:sldId id="258" r:id="rId7"/>
-    <p:sldId id="259" r:id="rId8"/>
-    <p:sldId id="260" r:id="rId9"/>
-    <p:sldId id="261" r:id="rId10"/>
-    <p:sldId id="262" r:id="rId11"/>
-    <p:sldId id="263" r:id="rId12"/>
-    <p:sldId id="264" r:id="rId13"/>
-    <p:sldId id="265" r:id="rId14"/>
+    <p:sldId id="256" r:id="rId4"/>
+    <p:sldId id="257" r:id="rId5"/>
+    <p:sldId id="258" r:id="rId6"/>
+    <p:sldId id="259" r:id="rId7"/>
+    <p:sldId id="260" r:id="rId8"/>
+    <p:sldId id="261" r:id="rId9"/>
+    <p:sldId id="262" r:id="rId10"/>
+    <p:sldId id="263" r:id="rId11"/>
+    <p:sldId id="264" r:id="rId12"/>
+    <p:sldId id="265" r:id="rId13"/>
   </p:sldIdLst>
   <p:sldSz cx="12192000" cy="6858000"/>
   <p:notesSz cx="7772400" cy="10058400"/>
+  <p:defaultTextStyle>
+    <a:defPPr>
+      <a:defRPr lang="en-US"/>
+    </a:defPPr>
+    <a:lvl1pPr marL="0" algn="l" defTabSz="914400" rtl="0" eaLnBrk="1" latinLnBrk="0" hangingPunct="1">
+      <a:defRPr sz="1800" kern="1200">
+        <a:solidFill>
+          <a:schemeClr val="tx1"/>
+        </a:solidFill>
+        <a:latin typeface="+mn-lt"/>
+        <a:ea typeface="+mn-ea"/>
+        <a:cs typeface="+mn-cs"/>
+      </a:defRPr>
+    </a:lvl1pPr>
+    <a:lvl2pPr marL="457200" algn="l" defTabSz="914400" rtl="0" eaLnBrk="1" latinLnBrk="0" hangingPunct="1">
+      <a:defRPr sz="1800" kern="1200">
+        <a:solidFill>
+          <a:schemeClr val="tx1"/>
+        </a:solidFill>
+        <a:latin typeface="+mn-lt"/>
+        <a:ea typeface="+mn-ea"/>
+        <a:cs typeface="+mn-cs"/>
+      </a:defRPr>
+    </a:lvl2pPr>
+    <a:lvl3pPr marL="914400" algn="l" defTabSz="914400" rtl="0" eaLnBrk="1" latinLnBrk="0" hangingPunct="1">
+      <a:defRPr sz="1800" kern="1200">
+        <a:solidFill>
+          <a:schemeClr val="tx1"/>
+        </a:solidFill>
+        <a:latin typeface="+mn-lt"/>
+        <a:ea typeface="+mn-ea"/>
+        <a:cs typeface="+mn-cs"/>
+      </a:defRPr>
+    </a:lvl3pPr>
+    <a:lvl4pPr marL="1371600" algn="l" defTabSz="914400" rtl="0" eaLnBrk="1" latinLnBrk="0" hangingPunct="1">
+      <a:defRPr sz="1800" kern="1200">
+        <a:solidFill>
+          <a:schemeClr val="tx1"/>
+        </a:solidFill>
+        <a:latin typeface="+mn-lt"/>
+        <a:ea typeface="+mn-ea"/>
+        <a:cs typeface="+mn-cs"/>
+      </a:defRPr>
+    </a:lvl4pPr>
+    <a:lvl5pPr marL="1828800" algn="l" defTabSz="914400" rtl="0" eaLnBrk="1" latinLnBrk="0" hangingPunct="1">
+      <a:defRPr sz="1800" kern="1200">
+        <a:solidFill>
+          <a:schemeClr val="tx1"/>
+        </a:solidFill>
+        <a:latin typeface="+mn-lt"/>
+        <a:ea typeface="+mn-ea"/>
+        <a:cs typeface="+mn-cs"/>
+      </a:defRPr>
+    </a:lvl5pPr>
+    <a:lvl6pPr marL="2286000" algn="l" defTabSz="914400" rtl="0" eaLnBrk="1" latinLnBrk="0" hangingPunct="1">
+      <a:defRPr sz="1800" kern="1200">
+        <a:solidFill>
+          <a:schemeClr val="tx1"/>
+        </a:solidFill>
+        <a:latin typeface="+mn-lt"/>
+        <a:ea typeface="+mn-ea"/>
+        <a:cs typeface="+mn-cs"/>
+      </a:defRPr>
+    </a:lvl6pPr>
+    <a:lvl7pPr marL="2743200" algn="l" defTabSz="914400" rtl="0" eaLnBrk="1" latinLnBrk="0" hangingPunct="1">
+      <a:defRPr sz="1800" kern="1200">
+        <a:solidFill>
+          <a:schemeClr val="tx1"/>
+        </a:solidFill>
+        <a:latin typeface="+mn-lt"/>
+        <a:ea typeface="+mn-ea"/>
+        <a:cs typeface="+mn-cs"/>
+      </a:defRPr>
+    </a:lvl7pPr>
+    <a:lvl8pPr marL="3200400" algn="l" defTabSz="914400" rtl="0" eaLnBrk="1" latinLnBrk="0" hangingPunct="1">
+      <a:defRPr sz="1800" kern="1200">
+        <a:solidFill>
+          <a:schemeClr val="tx1"/>
+        </a:solidFill>
+        <a:latin typeface="+mn-lt"/>
+        <a:ea typeface="+mn-ea"/>
+        <a:cs typeface="+mn-cs"/>
+      </a:defRPr>
+    </a:lvl8pPr>
+    <a:lvl9pPr marL="3657600" algn="l" defTabSz="914400" rtl="0" eaLnBrk="1" latinLnBrk="0" hangingPunct="1">
+      <a:defRPr sz="1800" kern="1200">
+        <a:solidFill>
+          <a:schemeClr val="tx1"/>
+        </a:solidFill>
+        <a:latin typeface="+mn-lt"/>
+        <a:ea typeface="+mn-ea"/>
+        <a:cs typeface="+mn-cs"/>
+      </a:defRPr>
+    </a:lvl9pPr>
+  </p:defaultTextStyle>
 </p:presentation>
 </file>
 
 <file path=ppt/slideLayouts/slideLayout1.xml><?xml version="1.0" encoding="utf-8"?>
-<p:sldLayout xmlns:a="http://schemas.openxmlformats.org/drawingml/2006/main" xmlns:p="http://schemas.openxmlformats.org/presentationml/2006/main" xmlns:r="http://schemas.openxmlformats.org/officeDocument/2006/relationships" xmlns:p14="http://schemas.microsoft.com/office/powerpoint/2010/main" xmlns:p15="http://schemas.microsoft.com/office/powerpoint/2012/main" xmlns:mc="http://schemas.openxmlformats.org/markup-compatibility/2006" type="title" preserve="1">
+<p:sldLayout xmlns:a="http://schemas.openxmlformats.org/drawingml/2006/main" xmlns:r="http://schemas.openxmlformats.org/officeDocument/2006/relationships" xmlns:p="http://schemas.openxmlformats.org/presentationml/2006/main" type="title" preserve="1">
   <p:cSld name="Title Slide">
     <p:spTree>
       <p:nvGrpSpPr>
@@ -64,14 +159,15 @@
           </a:ln>
         </p:spPr>
         <p:txBody>
-          <a:bodyPr lIns="0" rIns="0" tIns="0" bIns="0" anchor="ctr">
+          <a:bodyPr lIns="0" tIns="0" rIns="0" bIns="0" anchor="ctr">
             <a:noAutofit/>
           </a:bodyPr>
+          <a:lstStyle/>
           <a:p>
             <a:pPr indent="0">
               <a:buNone/>
             </a:pPr>
-            <a:endParaRPr b="0" lang="en-US" sz="1800" spc="-1" strike="noStrike">
+            <a:endParaRPr lang="en-US" sz="1800" b="0" strike="noStrike" spc="-1">
               <a:solidFill>
                 <a:schemeClr val="dk1"/>
               </a:solidFill>
@@ -104,14 +200,15 @@
           </a:ln>
         </p:spPr>
         <p:txBody>
-          <a:bodyPr lIns="0" rIns="0" tIns="0" bIns="0" anchor="ctr">
+          <a:bodyPr lIns="0" tIns="0" rIns="0" bIns="0" anchor="ctr">
             <a:noAutofit/>
           </a:bodyPr>
+          <a:lstStyle/>
           <a:p>
             <a:pPr indent="0" algn="ctr">
               <a:buNone/>
             </a:pPr>
-            <a:endParaRPr b="0" lang="en-US" sz="3200" spc="-1" strike="noStrike">
+            <a:endParaRPr lang="en-US" sz="3200" b="0" strike="noStrike" spc="-1">
               <a:solidFill>
                 <a:srgbClr val="000000"/>
               </a:solidFill>
@@ -133,6 +230,7 @@
         <p:spPr/>
         <p:txBody>
           <a:bodyPr/>
+          <a:lstStyle/>
           <a:p>
             <a:r>
               <a:t>Footer</a:t>
@@ -153,10 +251,12 @@
         <p:spPr/>
         <p:txBody>
           <a:bodyPr/>
+          <a:lstStyle/>
           <a:p>
             <a:fld id="{3D065408-0121-4C4A-9F22-F6C5E0E404E1}" type="slidenum">
-              <a:t>&lt;#&gt;</a:t>
+              <a:t>‹#›</a:t>
             </a:fld>
+            <a:endParaRPr/>
           </a:p>
         </p:txBody>
       </p:sp>
@@ -173,21 +273,22 @@
         <p:spPr/>
         <p:txBody>
           <a:bodyPr/>
-          <a:p>
-            <a:r>
-              <a:rPr lang="en-US"/>
-              <a:t/>
-            </a:r>
+          <a:lstStyle/>
+          <a:p>
+            <a:endParaRPr/>
           </a:p>
         </p:txBody>
       </p:sp>
     </p:spTree>
   </p:cSld>
+  <p:clrMapOvr>
+    <a:masterClrMapping/>
+  </p:clrMapOvr>
 </p:sldLayout>
 </file>
 
 <file path=ppt/slideLayouts/slideLayout2.xml><?xml version="1.0" encoding="utf-8"?>
-<p:sldLayout xmlns:a="http://schemas.openxmlformats.org/drawingml/2006/main" xmlns:p="http://schemas.openxmlformats.org/presentationml/2006/main" xmlns:r="http://schemas.openxmlformats.org/officeDocument/2006/relationships" xmlns:p14="http://schemas.microsoft.com/office/powerpoint/2010/main" xmlns:p15="http://schemas.microsoft.com/office/powerpoint/2012/main" xmlns:mc="http://schemas.openxmlformats.org/markup-compatibility/2006" type="twoObj" preserve="1">
+<p:sldLayout xmlns:a="http://schemas.openxmlformats.org/drawingml/2006/main" xmlns:r="http://schemas.openxmlformats.org/officeDocument/2006/relationships" xmlns:p="http://schemas.openxmlformats.org/presentationml/2006/main" type="twoObj" preserve="1">
   <p:cSld name="Title and Content">
     <p:spTree>
       <p:nvGrpSpPr>
@@ -227,14 +328,15 @@
           </a:ln>
         </p:spPr>
         <p:txBody>
-          <a:bodyPr lIns="0" rIns="0" tIns="0" bIns="0" anchor="ctr">
+          <a:bodyPr lIns="0" tIns="0" rIns="0" bIns="0" anchor="ctr">
             <a:noAutofit/>
           </a:bodyPr>
+          <a:lstStyle/>
           <a:p>
             <a:pPr indent="0">
               <a:buNone/>
             </a:pPr>
-            <a:endParaRPr b="0" lang="en-US" sz="1800" spc="-1" strike="noStrike">
+            <a:endParaRPr lang="en-US" sz="1800" b="0" strike="noStrike" spc="-1">
               <a:solidFill>
                 <a:schemeClr val="dk1"/>
               </a:solidFill>
@@ -267,9 +369,10 @@
           </a:ln>
         </p:spPr>
         <p:txBody>
-          <a:bodyPr lIns="0" rIns="0" tIns="0" bIns="0" anchor="t">
+          <a:bodyPr lIns="0" tIns="0" rIns="0" bIns="0" anchor="t">
             <a:normAutofit/>
           </a:bodyPr>
+          <a:lstStyle/>
           <a:p>
             <a:pPr indent="0">
               <a:lnSpc>
@@ -280,7 +383,7 @@
               </a:spcBef>
               <a:buNone/>
             </a:pPr>
-            <a:endParaRPr b="0" lang="en-US" sz="2800" spc="-1" strike="noStrike">
+            <a:endParaRPr lang="en-US" sz="2800" b="0" strike="noStrike" spc="-1">
               <a:solidFill>
                 <a:schemeClr val="dk1"/>
               </a:solidFill>
@@ -313,9 +416,10 @@
           </a:ln>
         </p:spPr>
         <p:txBody>
-          <a:bodyPr lIns="0" rIns="0" tIns="0" bIns="0" anchor="t">
+          <a:bodyPr lIns="0" tIns="0" rIns="0" bIns="0" anchor="t">
             <a:normAutofit/>
           </a:bodyPr>
+          <a:lstStyle/>
           <a:p>
             <a:pPr indent="0">
               <a:lnSpc>
@@ -326,7 +430,7 @@
               </a:spcBef>
               <a:buNone/>
             </a:pPr>
-            <a:endParaRPr b="0" lang="en-US" sz="2800" spc="-1" strike="noStrike">
+            <a:endParaRPr lang="en-US" sz="2800" b="0" strike="noStrike" spc="-1">
               <a:solidFill>
                 <a:schemeClr val="dk1"/>
               </a:solidFill>
@@ -348,6 +452,7 @@
         <p:spPr/>
         <p:txBody>
           <a:bodyPr/>
+          <a:lstStyle/>
           <a:p>
             <a:r>
               <a:t>Footer</a:t>
@@ -368,10 +473,12 @@
         <p:spPr/>
         <p:txBody>
           <a:bodyPr/>
+          <a:lstStyle/>
           <a:p>
             <a:fld id="{3EE8C50C-4E33-4A84-9EE5-2302A35A168E}" type="slidenum">
-              <a:t>&lt;#&gt;</a:t>
+              <a:t>‹#›</a:t>
             </a:fld>
+            <a:endParaRPr/>
           </a:p>
         </p:txBody>
       </p:sp>
@@ -388,21 +495,22 @@
         <p:spPr/>
         <p:txBody>
           <a:bodyPr/>
-          <a:p>
-            <a:r>
-              <a:rPr lang="en-US"/>
-              <a:t/>
-            </a:r>
+          <a:lstStyle/>
+          <a:p>
+            <a:endParaRPr/>
           </a:p>
         </p:txBody>
       </p:sp>
     </p:spTree>
   </p:cSld>
+  <p:clrMapOvr>
+    <a:masterClrMapping/>
+  </p:clrMapOvr>
 </p:sldLayout>
 </file>
 
 <file path=ppt/slideLayouts/slideLayout3.xml><?xml version="1.0" encoding="utf-8"?>
-<p:sldLayout xmlns:a="http://schemas.openxmlformats.org/drawingml/2006/main" xmlns:p="http://schemas.openxmlformats.org/presentationml/2006/main" xmlns:r="http://schemas.openxmlformats.org/officeDocument/2006/relationships" xmlns:p14="http://schemas.microsoft.com/office/powerpoint/2010/main" xmlns:p15="http://schemas.microsoft.com/office/powerpoint/2012/main" xmlns:mc="http://schemas.openxmlformats.org/markup-compatibility/2006" type="tx" preserve="1">
+<p:sldLayout xmlns:a="http://schemas.openxmlformats.org/drawingml/2006/main" xmlns:r="http://schemas.openxmlformats.org/officeDocument/2006/relationships" xmlns:p="http://schemas.openxmlformats.org/presentationml/2006/main" type="tx" preserve="1">
   <p:cSld name="Title and Content">
     <p:spTree>
       <p:nvGrpSpPr>
@@ -442,14 +550,15 @@
           </a:ln>
         </p:spPr>
         <p:txBody>
-          <a:bodyPr lIns="0" rIns="0" tIns="0" bIns="0" anchor="ctr">
+          <a:bodyPr lIns="0" tIns="0" rIns="0" bIns="0" anchor="ctr">
             <a:noAutofit/>
           </a:bodyPr>
+          <a:lstStyle/>
           <a:p>
             <a:pPr indent="0">
               <a:buNone/>
             </a:pPr>
-            <a:endParaRPr b="0" lang="en-US" sz="1800" spc="-1" strike="noStrike">
+            <a:endParaRPr lang="en-US" sz="1800" b="0" strike="noStrike" spc="-1">
               <a:solidFill>
                 <a:schemeClr val="dk1"/>
               </a:solidFill>
@@ -482,9 +591,10 @@
           </a:ln>
         </p:spPr>
         <p:txBody>
-          <a:bodyPr lIns="0" rIns="0" tIns="0" bIns="0" anchor="t">
+          <a:bodyPr lIns="0" tIns="0" rIns="0" bIns="0" anchor="t">
             <a:normAutofit/>
           </a:bodyPr>
+          <a:lstStyle/>
           <a:p>
             <a:pPr indent="0">
               <a:lnSpc>
@@ -495,7 +605,7 @@
               </a:spcBef>
               <a:buNone/>
             </a:pPr>
-            <a:endParaRPr b="0" lang="en-US" sz="2800" spc="-1" strike="noStrike">
+            <a:endParaRPr lang="en-US" sz="2800" b="0" strike="noStrike" spc="-1">
               <a:solidFill>
                 <a:schemeClr val="dk1"/>
               </a:solidFill>
@@ -517,6 +627,7 @@
         <p:spPr/>
         <p:txBody>
           <a:bodyPr/>
+          <a:lstStyle/>
           <a:p>
             <a:r>
               <a:t>Footer</a:t>
@@ -537,10 +648,12 @@
         <p:spPr/>
         <p:txBody>
           <a:bodyPr/>
+          <a:lstStyle/>
           <a:p>
             <a:fld id="{10DC6539-0531-4731-A1BE-CF991DE85379}" type="slidenum">
-              <a:t>&lt;#&gt;</a:t>
+              <a:t>‹#›</a:t>
             </a:fld>
+            <a:endParaRPr/>
           </a:p>
         </p:txBody>
       </p:sp>
@@ -557,21 +670,22 @@
         <p:spPr/>
         <p:txBody>
           <a:bodyPr/>
-          <a:p>
-            <a:r>
-              <a:rPr lang="en-US"/>
-              <a:t/>
-            </a:r>
+          <a:lstStyle/>
+          <a:p>
+            <a:endParaRPr/>
           </a:p>
         </p:txBody>
       </p:sp>
     </p:spTree>
   </p:cSld>
+  <p:clrMapOvr>
+    <a:masterClrMapping/>
+  </p:clrMapOvr>
 </p:sldLayout>
 </file>
 
 <file path=ppt/slideLayouts/slideLayout4.xml><?xml version="1.0" encoding="utf-8"?>
-<p:sldLayout xmlns:a="http://schemas.openxmlformats.org/drawingml/2006/main" xmlns:p="http://schemas.openxmlformats.org/presentationml/2006/main" xmlns:r="http://schemas.openxmlformats.org/officeDocument/2006/relationships" xmlns:p14="http://schemas.microsoft.com/office/powerpoint/2010/main" xmlns:p15="http://schemas.microsoft.com/office/powerpoint/2012/main" xmlns:mc="http://schemas.openxmlformats.org/markup-compatibility/2006" type="obj" preserve="1">
+<p:sldLayout xmlns:a="http://schemas.openxmlformats.org/drawingml/2006/main" xmlns:r="http://schemas.openxmlformats.org/officeDocument/2006/relationships" xmlns:p="http://schemas.openxmlformats.org/presentationml/2006/main" type="obj" preserve="1">
   <p:cSld name="Default">
     <p:spTree>
       <p:nvGrpSpPr>
@@ -611,14 +725,15 @@
           </a:ln>
         </p:spPr>
         <p:txBody>
-          <a:bodyPr lIns="0" rIns="0" tIns="0" bIns="0" anchor="ctr">
+          <a:bodyPr lIns="0" tIns="0" rIns="0" bIns="0" anchor="ctr">
             <a:noAutofit/>
           </a:bodyPr>
+          <a:lstStyle/>
           <a:p>
             <a:pPr indent="0">
               <a:buNone/>
             </a:pPr>
-            <a:endParaRPr b="0" lang="en-US" sz="1800" spc="-1" strike="noStrike">
+            <a:endParaRPr lang="en-US" sz="1800" b="0" strike="noStrike" spc="-1">
               <a:solidFill>
                 <a:schemeClr val="dk1"/>
               </a:solidFill>
@@ -651,9 +766,10 @@
           </a:ln>
         </p:spPr>
         <p:txBody>
-          <a:bodyPr lIns="0" rIns="0" tIns="0" bIns="0" anchor="t">
+          <a:bodyPr lIns="0" tIns="0" rIns="0" bIns="0" anchor="t">
             <a:normAutofit/>
           </a:bodyPr>
+          <a:lstStyle/>
           <a:p>
             <a:pPr indent="0">
               <a:lnSpc>
@@ -664,7 +780,7 @@
               </a:spcBef>
               <a:buNone/>
             </a:pPr>
-            <a:endParaRPr b="0" lang="en-US" sz="2800" spc="-1" strike="noStrike">
+            <a:endParaRPr lang="en-US" sz="2800" b="0" strike="noStrike" spc="-1">
               <a:solidFill>
                 <a:schemeClr val="dk1"/>
               </a:solidFill>
@@ -686,6 +802,7 @@
         <p:spPr/>
         <p:txBody>
           <a:bodyPr/>
+          <a:lstStyle/>
           <a:p>
             <a:r>
               <a:t>Footer</a:t>
@@ -706,10 +823,12 @@
         <p:spPr/>
         <p:txBody>
           <a:bodyPr/>
+          <a:lstStyle/>
           <a:p>
             <a:fld id="{77B09A96-1613-449C-956E-E3D1A0BA1964}" type="slidenum">
-              <a:t>&lt;#&gt;</a:t>
+              <a:t>‹#›</a:t>
             </a:fld>
+            <a:endParaRPr/>
           </a:p>
         </p:txBody>
       </p:sp>
@@ -726,27 +845,29 @@
         <p:spPr/>
         <p:txBody>
           <a:bodyPr/>
-          <a:p>
-            <a:r>
-              <a:rPr lang="en-US"/>
-              <a:t/>
-            </a:r>
+          <a:lstStyle/>
+          <a:p>
+            <a:endParaRPr/>
           </a:p>
         </p:txBody>
       </p:sp>
     </p:spTree>
   </p:cSld>
+  <p:clrMapOvr>
+    <a:masterClrMapping/>
+  </p:clrMapOvr>
 </p:sldLayout>
 </file>
 
 <file path=ppt/slideMasters/slideMaster1.xml><?xml version="1.0" encoding="utf-8"?>
-<p:sldMaster xmlns:a="http://schemas.openxmlformats.org/drawingml/2006/main" xmlns:p="http://schemas.openxmlformats.org/presentationml/2006/main" xmlns:r="http://schemas.openxmlformats.org/officeDocument/2006/relationships" xmlns:p14="http://schemas.microsoft.com/office/powerpoint/2010/main" xmlns:p15="http://schemas.microsoft.com/office/powerpoint/2012/main" xmlns:mc="http://schemas.openxmlformats.org/markup-compatibility/2006">
+<p:sldMaster xmlns:a="http://schemas.openxmlformats.org/drawingml/2006/main" xmlns:r="http://schemas.openxmlformats.org/officeDocument/2006/relationships" xmlns:p="http://schemas.openxmlformats.org/presentationml/2006/main">
   <p:cSld>
     <p:bg>
       <p:bgPr>
         <a:solidFill>
-          <a:srgbClr val="f4f6f7"/>
+          <a:srgbClr val="F4F6F7"/>
         </a:solidFill>
+        <a:effectLst/>
       </p:bgPr>
     </p:bg>
     <p:spTree>
@@ -765,12 +886,12 @@
       </p:grpSpPr>
       <p:pic>
         <p:nvPicPr>
-          <p:cNvPr id="0" name="Picture 19" descr=""/>
+          <p:cNvPr id="8" name="Picture 19"/>
           <p:cNvPicPr/>
           <p:nvPr/>
         </p:nvPicPr>
         <p:blipFill>
-          <a:blip r:embed="rId2">
+          <a:blip r:embed="rId3">
             <a:alphaModFix amt="20000"/>
           </a:blip>
           <a:stretch/>
@@ -790,7 +911,7 @@
       </p:pic>
       <p:sp>
         <p:nvSpPr>
-          <p:cNvPr id="1" name="Rectangle 11"/>
+          <p:cNvPr id="9" name="Rectangle 11"/>
           <p:cNvSpPr/>
           <p:nvPr/>
         </p:nvSpPr>
@@ -803,11 +924,11 @@
             <a:avLst/>
           </a:prstGeom>
           <a:solidFill>
-            <a:srgbClr val="17365d"/>
+            <a:srgbClr val="17365D"/>
           </a:solidFill>
           <a:ln>
             <a:solidFill>
-              <a:srgbClr val="092a38"/>
+              <a:srgbClr val="092A38"/>
             </a:solidFill>
           </a:ln>
         </p:spPr>
@@ -826,16 +947,17 @@
           <a:fontRef idx="minor"/>
         </p:style>
         <p:txBody>
-          <a:bodyPr lIns="90000" rIns="90000" tIns="45000" bIns="45000" anchor="ctr">
+          <a:bodyPr lIns="90000" tIns="45000" rIns="90000" bIns="45000" anchor="ctr">
             <a:noAutofit/>
           </a:bodyPr>
+          <a:lstStyle/>
           <a:p>
             <a:pPr algn="ctr" defTabSz="914400">
               <a:lnSpc>
                 <a:spcPct val="100000"/>
               </a:lnSpc>
             </a:pPr>
-            <a:endParaRPr b="0" lang="en-US" sz="1800" spc="-1" strike="noStrike">
+            <a:endParaRPr lang="en-US" sz="1800" b="0" strike="noStrike" spc="-1">
               <a:solidFill>
                 <a:schemeClr val="lt1"/>
               </a:solidFill>
@@ -859,7 +981,7 @@
             <a:avLst/>
           </a:prstGeom>
           <a:solidFill>
-            <a:srgbClr val="c8202f"/>
+            <a:srgbClr val="C8202F"/>
           </a:solidFill>
           <a:ln>
             <a:noFill/>
@@ -880,16 +1002,17 @@
           <a:fontRef idx="minor"/>
         </p:style>
         <p:txBody>
-          <a:bodyPr lIns="90000" rIns="90000" tIns="45000" bIns="45000" anchor="ctr">
+          <a:bodyPr lIns="90000" tIns="45000" rIns="90000" bIns="45000" anchor="ctr">
             <a:noAutofit/>
           </a:bodyPr>
+          <a:lstStyle/>
           <a:p>
             <a:pPr algn="ctr" defTabSz="914400">
               <a:lnSpc>
                 <a:spcPct val="100000"/>
               </a:lnSpc>
             </a:pPr>
-            <a:endParaRPr b="0" lang="en-US" sz="1800" spc="-1" strike="noStrike">
+            <a:endParaRPr lang="en-US" sz="1800" b="0" strike="noStrike" spc="-1">
               <a:solidFill>
                 <a:schemeClr val="lt1"/>
               </a:solidFill>
@@ -922,91 +1045,23 @@
           </a:ln>
         </p:spPr>
         <p:txBody>
-          <a:bodyPr lIns="0" rIns="0" tIns="0" bIns="0" anchor="ctr">
+          <a:bodyPr lIns="0" tIns="0" rIns="0" bIns="0" anchor="ctr">
             <a:noAutofit/>
           </a:bodyPr>
+          <a:lstStyle/>
           <a:p>
             <a:pPr indent="0">
               <a:buNone/>
             </a:pPr>
             <a:r>
-              <a:rPr b="0" lang="en-US" sz="4400" spc="-1" strike="noStrike">
-                <a:solidFill>
-                  <a:schemeClr val="dk1"/>
-                </a:solidFill>
-                <a:latin typeface="Aptos"/>
-              </a:rPr>
-              <a:t>Click </a:t>
-            </a:r>
-            <a:r>
-              <a:rPr b="0" lang="en-US" sz="4400" spc="-1" strike="noStrike">
-                <a:solidFill>
-                  <a:schemeClr val="dk1"/>
-                </a:solidFill>
-                <a:latin typeface="Aptos"/>
-              </a:rPr>
-              <a:t>to </a:t>
-            </a:r>
-            <a:r>
-              <a:rPr b="0" lang="en-US" sz="4400" spc="-1" strike="noStrike">
-                <a:solidFill>
-                  <a:schemeClr val="dk1"/>
-                </a:solidFill>
-                <a:latin typeface="Aptos"/>
-              </a:rPr>
-              <a:t>edit </a:t>
-            </a:r>
-            <a:r>
-              <a:rPr b="0" lang="en-US" sz="4400" spc="-1" strike="noStrike">
-                <a:solidFill>
-                  <a:schemeClr val="dk1"/>
-                </a:solidFill>
-                <a:latin typeface="Aptos"/>
-              </a:rPr>
-              <a:t>the </a:t>
-            </a:r>
-            <a:r>
-              <a:rPr b="0" lang="en-US" sz="4400" spc="-1" strike="noStrike">
-                <a:solidFill>
-                  <a:schemeClr val="dk1"/>
-                </a:solidFill>
-                <a:latin typeface="Aptos"/>
-              </a:rPr>
-              <a:t>title </a:t>
-            </a:r>
-            <a:r>
-              <a:rPr b="0" lang="en-US" sz="4400" spc="-1" strike="noStrike">
-                <a:solidFill>
-                  <a:schemeClr val="dk1"/>
-                </a:solidFill>
-                <a:latin typeface="Aptos"/>
-              </a:rPr>
-              <a:t>text </a:t>
-            </a:r>
-            <a:r>
-              <a:rPr b="0" lang="en-US" sz="4400" spc="-1" strike="noStrike">
-                <a:solidFill>
-                  <a:schemeClr val="dk1"/>
-                </a:solidFill>
-                <a:latin typeface="Aptos"/>
-              </a:rPr>
-              <a:t>form</a:t>
-            </a:r>
-            <a:r>
-              <a:rPr b="0" lang="en-US" sz="4400" spc="-1" strike="noStrike">
-                <a:solidFill>
-                  <a:schemeClr val="dk1"/>
-                </a:solidFill>
-                <a:latin typeface="Aptos"/>
-              </a:rPr>
-              <a:t>at</a:t>
-            </a:r>
-            <a:endParaRPr b="0" lang="en-US" sz="4400" spc="-1" strike="noStrike">
-              <a:solidFill>
-                <a:schemeClr val="dk1"/>
-              </a:solidFill>
-              <a:latin typeface="Aptos"/>
-            </a:endParaRPr>
+              <a:rPr lang="en-US" sz="4400" b="0" strike="noStrike" spc="-1">
+                <a:solidFill>
+                  <a:schemeClr val="dk1"/>
+                </a:solidFill>
+                <a:latin typeface="Aptos"/>
+              </a:rPr>
+              <a:t>Click to edit the title text format</a:t>
+            </a:r>
           </a:p>
         </p:txBody>
       </p:sp>
@@ -1034,7 +1089,7 @@
           </a:ln>
         </p:spPr>
         <p:txBody>
-          <a:bodyPr lIns="91440" rIns="91440" tIns="45720" bIns="45720" anchor="ctr">
+          <a:bodyPr lIns="91440" tIns="45720" rIns="91440" bIns="45720" anchor="ctr">
             <a:noAutofit/>
           </a:bodyPr>
           <a:lstStyle>
@@ -1044,9 +1099,9 @@
               </a:lnSpc>
               <a:buNone/>
               <a:tabLst>
-                <a:tab algn="l" pos="0"/>
+                <a:tab pos="0" algn="l"/>
               </a:tabLst>
-              <a:defRPr b="0" lang="en-US" sz="1200" spc="-1" strike="noStrike">
+              <a:defRPr lang="en-US" sz="1200" b="0" strike="noStrike" spc="-1">
                 <a:solidFill>
                   <a:schemeClr val="dk1">
                     <a:tint val="82000"/>
@@ -1063,11 +1118,11 @@
               </a:lnSpc>
               <a:buNone/>
               <a:tabLst>
-                <a:tab algn="l" pos="0"/>
+                <a:tab pos="0" algn="l"/>
               </a:tabLst>
             </a:pPr>
             <a:r>
-              <a:rPr b="0" lang="en-US" sz="1200" spc="-1" strike="noStrike">
+              <a:rPr lang="en-US" sz="1200" b="0" strike="noStrike" spc="-1">
                 <a:solidFill>
                   <a:schemeClr val="dk1">
                     <a:tint val="82000"/>
@@ -1077,7 +1132,7 @@
               </a:rPr>
               <a:t>&lt;footer&gt;</a:t>
             </a:r>
-            <a:endParaRPr b="0" lang="en-US" sz="1200" spc="-1" strike="noStrike">
+            <a:endParaRPr lang="en-US" sz="1200" b="0" strike="noStrike" spc="-1">
               <a:solidFill>
                 <a:srgbClr val="000000"/>
               </a:solidFill>
@@ -1110,7 +1165,7 @@
           </a:ln>
         </p:spPr>
         <p:txBody>
-          <a:bodyPr lIns="91440" rIns="91440" tIns="45720" bIns="45720" anchor="ctr">
+          <a:bodyPr lIns="91440" tIns="45720" rIns="91440" bIns="45720" anchor="ctr">
             <a:noAutofit/>
           </a:bodyPr>
           <a:lstStyle>
@@ -1120,9 +1175,9 @@
               </a:lnSpc>
               <a:buNone/>
               <a:tabLst>
-                <a:tab algn="l" pos="0"/>
+                <a:tab pos="0" algn="l"/>
               </a:tabLst>
-              <a:defRPr b="0" lang="en-US" sz="1200" spc="-1" strike="noStrike">
+              <a:defRPr lang="en-US" sz="1200" b="0" strike="noStrike" spc="-1">
                 <a:solidFill>
                   <a:schemeClr val="dk1">
                     <a:tint val="82000"/>
@@ -1139,11 +1194,11 @@
               </a:lnSpc>
               <a:buNone/>
               <a:tabLst>
-                <a:tab algn="l" pos="0"/>
+                <a:tab pos="0" algn="l"/>
               </a:tabLst>
             </a:pPr>
             <a:fld id="{FBC8DDC2-63ED-4D69-AB9E-86A9696109BD}" type="slidenum">
-              <a:rPr b="0" lang="en-US" sz="1200" spc="-1" strike="noStrike">
+              <a:rPr lang="en-US" sz="1200" b="0" strike="noStrike" spc="-1">
                 <a:solidFill>
                   <a:schemeClr val="dk1">
                     <a:tint val="82000"/>
@@ -1151,9 +1206,9 @@
                 </a:solidFill>
                 <a:latin typeface="Aptos"/>
               </a:rPr>
-              <a:t>&lt;number&gt;</a:t>
+              <a:t>‹#›</a:t>
             </a:fld>
-            <a:endParaRPr b="0" lang="en-US" sz="1200" spc="-1" strike="noStrike">
+            <a:endParaRPr lang="en-US" sz="1200" b="0" strike="noStrike" spc="-1">
               <a:solidFill>
                 <a:srgbClr val="000000"/>
               </a:solidFill>
@@ -1186,13 +1241,13 @@
           </a:ln>
         </p:spPr>
         <p:txBody>
-          <a:bodyPr lIns="91440" rIns="91440" tIns="45720" bIns="45720" anchor="ctr">
+          <a:bodyPr lIns="91440" tIns="45720" rIns="91440" bIns="45720" anchor="ctr">
             <a:noAutofit/>
           </a:bodyPr>
           <a:lstStyle>
             <a:lvl1pPr indent="0">
               <a:buNone/>
-              <a:defRPr b="0" lang="en-US" sz="1400" spc="-1" strike="noStrike">
+              <a:defRPr lang="en-US" sz="1400" b="0" strike="noStrike" spc="-1">
                 <a:solidFill>
                   <a:srgbClr val="000000"/>
                 </a:solidFill>
@@ -1205,7 +1260,7 @@
               <a:buNone/>
             </a:pPr>
             <a:r>
-              <a:rPr b="0" lang="en-US" sz="1400" spc="-1" strike="noStrike">
+              <a:rPr lang="en-US" sz="1400" b="0" strike="noStrike" spc="-1">
                 <a:solidFill>
                   <a:srgbClr val="000000"/>
                 </a:solidFill>
@@ -1213,12 +1268,6 @@
               </a:rPr>
               <a:t>&lt;date/time&gt;</a:t>
             </a:r>
-            <a:endParaRPr b="0" lang="en-US" sz="1400" spc="-1" strike="noStrike">
-              <a:solidFill>
-                <a:srgbClr val="000000"/>
-              </a:solidFill>
-              <a:latin typeface="Times New Roman"/>
-            </a:endParaRPr>
           </a:p>
         </p:txBody>
       </p:sp>
@@ -1246,9 +1295,10 @@
           </a:ln>
         </p:spPr>
         <p:txBody>
-          <a:bodyPr lIns="0" rIns="0" tIns="0" bIns="0" anchor="t">
+          <a:bodyPr lIns="0" tIns="0" rIns="0" bIns="0" anchor="t">
             <a:normAutofit/>
           </a:bodyPr>
+          <a:lstStyle/>
           <a:p>
             <a:pPr marL="432000" indent="-324000">
               <a:lnSpc>
@@ -1265,7 +1315,7 @@
               <a:buChar char=""/>
             </a:pPr>
             <a:r>
-              <a:rPr b="0" lang="en-US" sz="2800" spc="-1" strike="noStrike">
+              <a:rPr lang="en-US" sz="2800" b="0" strike="noStrike" spc="-1">
                 <a:solidFill>
                   <a:schemeClr val="dk1"/>
                 </a:solidFill>
@@ -1273,15 +1323,9 @@
               </a:rPr>
               <a:t>Click to edit the outline text format</a:t>
             </a:r>
-            <a:endParaRPr b="0" lang="en-US" sz="2800" spc="-1" strike="noStrike">
-              <a:solidFill>
-                <a:schemeClr val="dk1"/>
-              </a:solidFill>
-              <a:latin typeface="Aptos"/>
-            </a:endParaRPr>
-          </a:p>
-          <a:p>
-            <a:pPr lvl="1" marL="864000" indent="-324000">
+          </a:p>
+          <a:p>
+            <a:pPr marL="864000" lvl="1" indent="-324000">
               <a:lnSpc>
                 <a:spcPct val="90000"/>
               </a:lnSpc>
@@ -1296,7 +1340,7 @@
               <a:buChar char=""/>
             </a:pPr>
             <a:r>
-              <a:rPr b="0" lang="en-US" sz="2000" spc="-1" strike="noStrike">
+              <a:rPr lang="en-US" sz="2000" b="0" strike="noStrike" spc="-1">
                 <a:solidFill>
                   <a:schemeClr val="dk1"/>
                 </a:solidFill>
@@ -1304,15 +1348,9 @@
               </a:rPr>
               <a:t>Second Outline Level</a:t>
             </a:r>
-            <a:endParaRPr b="0" lang="en-US" sz="2000" spc="-1" strike="noStrike">
-              <a:solidFill>
-                <a:schemeClr val="dk1"/>
-              </a:solidFill>
-              <a:latin typeface="Aptos"/>
-            </a:endParaRPr>
-          </a:p>
-          <a:p>
-            <a:pPr lvl="2" marL="1296000" indent="-288000">
+          </a:p>
+          <a:p>
+            <a:pPr marL="1296000" lvl="2" indent="-288000">
               <a:lnSpc>
                 <a:spcPct val="90000"/>
               </a:lnSpc>
@@ -1327,7 +1365,7 @@
               <a:buChar char=""/>
             </a:pPr>
             <a:r>
-              <a:rPr b="0" lang="en-US" sz="1800" spc="-1" strike="noStrike">
+              <a:rPr lang="en-US" sz="1800" b="0" strike="noStrike" spc="-1">
                 <a:solidFill>
                   <a:schemeClr val="dk1"/>
                 </a:solidFill>
@@ -1335,15 +1373,9 @@
               </a:rPr>
               <a:t>Third Outline Level</a:t>
             </a:r>
-            <a:endParaRPr b="0" lang="en-US" sz="1800" spc="-1" strike="noStrike">
-              <a:solidFill>
-                <a:schemeClr val="dk1"/>
-              </a:solidFill>
-              <a:latin typeface="Aptos"/>
-            </a:endParaRPr>
-          </a:p>
-          <a:p>
-            <a:pPr lvl="3" marL="1728000" indent="-216000">
+          </a:p>
+          <a:p>
+            <a:pPr marL="1728000" lvl="3" indent="-216000">
               <a:lnSpc>
                 <a:spcPct val="90000"/>
               </a:lnSpc>
@@ -1358,7 +1390,7 @@
               <a:buChar char=""/>
             </a:pPr>
             <a:r>
-              <a:rPr b="0" lang="en-US" sz="1800" spc="-1" strike="noStrike">
+              <a:rPr lang="en-US" sz="1800" b="0" strike="noStrike" spc="-1">
                 <a:solidFill>
                   <a:schemeClr val="dk1"/>
                 </a:solidFill>
@@ -1366,15 +1398,9 @@
               </a:rPr>
               <a:t>Fourth Outline Level</a:t>
             </a:r>
-            <a:endParaRPr b="0" lang="en-US" sz="1800" spc="-1" strike="noStrike">
-              <a:solidFill>
-                <a:schemeClr val="dk1"/>
-              </a:solidFill>
-              <a:latin typeface="Aptos"/>
-            </a:endParaRPr>
-          </a:p>
-          <a:p>
-            <a:pPr lvl="4" marL="2160000" indent="-216000">
+          </a:p>
+          <a:p>
+            <a:pPr marL="2160000" lvl="4" indent="-216000">
               <a:lnSpc>
                 <a:spcPct val="90000"/>
               </a:lnSpc>
@@ -1389,7 +1415,7 @@
               <a:buChar char=""/>
             </a:pPr>
             <a:r>
-              <a:rPr b="0" lang="en-US" sz="2000" spc="-1" strike="noStrike">
+              <a:rPr lang="en-US" sz="2000" b="0" strike="noStrike" spc="-1">
                 <a:solidFill>
                   <a:schemeClr val="dk1"/>
                 </a:solidFill>
@@ -1397,15 +1423,9 @@
               </a:rPr>
               <a:t>Fifth Outline Level</a:t>
             </a:r>
-            <a:endParaRPr b="0" lang="en-US" sz="2000" spc="-1" strike="noStrike">
-              <a:solidFill>
-                <a:schemeClr val="dk1"/>
-              </a:solidFill>
-              <a:latin typeface="Aptos"/>
-            </a:endParaRPr>
-          </a:p>
-          <a:p>
-            <a:pPr lvl="5" marL="2592000" indent="-216000">
+          </a:p>
+          <a:p>
+            <a:pPr marL="2592000" lvl="5" indent="-216000">
               <a:lnSpc>
                 <a:spcPct val="90000"/>
               </a:lnSpc>
@@ -1420,7 +1440,7 @@
               <a:buChar char=""/>
             </a:pPr>
             <a:r>
-              <a:rPr b="0" lang="en-US" sz="2000" spc="-1" strike="noStrike">
+              <a:rPr lang="en-US" sz="2000" b="0" strike="noStrike" spc="-1">
                 <a:solidFill>
                   <a:schemeClr val="dk1"/>
                 </a:solidFill>
@@ -1428,15 +1448,9 @@
               </a:rPr>
               <a:t>Sixth Outline Level</a:t>
             </a:r>
-            <a:endParaRPr b="0" lang="en-US" sz="2000" spc="-1" strike="noStrike">
-              <a:solidFill>
-                <a:schemeClr val="dk1"/>
-              </a:solidFill>
-              <a:latin typeface="Aptos"/>
-            </a:endParaRPr>
-          </a:p>
-          <a:p>
-            <a:pPr lvl="6" marL="3024000" indent="-216000">
+          </a:p>
+          <a:p>
+            <a:pPr marL="3024000" lvl="6" indent="-216000">
               <a:lnSpc>
                 <a:spcPct val="90000"/>
               </a:lnSpc>
@@ -1451,7 +1465,7 @@
               <a:buChar char=""/>
             </a:pPr>
             <a:r>
-              <a:rPr b="0" lang="en-US" sz="2000" spc="-1" strike="noStrike">
+              <a:rPr lang="en-US" sz="2000" b="0" strike="noStrike" spc="-1">
                 <a:solidFill>
                   <a:schemeClr val="dk1"/>
                 </a:solidFill>
@@ -1459,32 +1473,307 @@
               </a:rPr>
               <a:t>Seventh Outline Level</a:t>
             </a:r>
-            <a:endParaRPr b="0" lang="en-US" sz="2000" spc="-1" strike="noStrike">
-              <a:solidFill>
-                <a:schemeClr val="dk1"/>
-              </a:solidFill>
-              <a:latin typeface="Aptos"/>
-            </a:endParaRPr>
           </a:p>
         </p:txBody>
       </p:sp>
     </p:spTree>
   </p:cSld>
-  <p:clrMap bg1="lt1" bg2="lt2" tx1="dk1" tx2="dk2" accent1="accent1" accent2="accent2" accent3="accent3" accent4="accent4" accent5="accent5" accent6="accent6" hlink="hlink" folHlink="folHlink"/>
+  <p:clrMap bg1="lt1" tx1="dk1" bg2="lt2" tx2="dk2" accent1="accent1" accent2="accent2" accent3="accent3" accent4="accent4" accent5="accent5" accent6="accent6" hlink="hlink" folHlink="folHlink"/>
   <p:sldLayoutIdLst>
-    <p:sldLayoutId id="2147483649" r:id="rId3"/>
+    <p:sldLayoutId id="2147483649" r:id="rId1"/>
   </p:sldLayoutIdLst>
+  <p:txStyles>
+    <p:titleStyle>
+      <a:lvl1pPr algn="l" defTabSz="914400" rtl="0" eaLnBrk="1" latinLnBrk="0" hangingPunct="1">
+        <a:lnSpc>
+          <a:spcPct val="90000"/>
+        </a:lnSpc>
+        <a:spcBef>
+          <a:spcPct val="0"/>
+        </a:spcBef>
+        <a:buNone/>
+        <a:defRPr sz="4400" kern="1200">
+          <a:solidFill>
+            <a:schemeClr val="tx1"/>
+          </a:solidFill>
+          <a:latin typeface="+mj-lt"/>
+          <a:ea typeface="+mj-ea"/>
+          <a:cs typeface="+mj-cs"/>
+        </a:defRPr>
+      </a:lvl1pPr>
+    </p:titleStyle>
+    <p:bodyStyle>
+      <a:lvl1pPr marL="228600" indent="-228600" algn="l" defTabSz="914400" rtl="0" eaLnBrk="1" latinLnBrk="0" hangingPunct="1">
+        <a:lnSpc>
+          <a:spcPct val="90000"/>
+        </a:lnSpc>
+        <a:spcBef>
+          <a:spcPts val="1000"/>
+        </a:spcBef>
+        <a:buFont typeface="Arial" panose="020B0604020202020204" pitchFamily="34" charset="0"/>
+        <a:buChar char="•"/>
+        <a:defRPr sz="2800" kern="1200">
+          <a:solidFill>
+            <a:schemeClr val="tx1"/>
+          </a:solidFill>
+          <a:latin typeface="+mn-lt"/>
+          <a:ea typeface="+mn-ea"/>
+          <a:cs typeface="+mn-cs"/>
+        </a:defRPr>
+      </a:lvl1pPr>
+      <a:lvl2pPr marL="685800" indent="-228600" algn="l" defTabSz="914400" rtl="0" eaLnBrk="1" latinLnBrk="0" hangingPunct="1">
+        <a:lnSpc>
+          <a:spcPct val="90000"/>
+        </a:lnSpc>
+        <a:spcBef>
+          <a:spcPts val="500"/>
+        </a:spcBef>
+        <a:buFont typeface="Arial" panose="020B0604020202020204" pitchFamily="34" charset="0"/>
+        <a:buChar char="•"/>
+        <a:defRPr sz="2400" kern="1200">
+          <a:solidFill>
+            <a:schemeClr val="tx1"/>
+          </a:solidFill>
+          <a:latin typeface="+mn-lt"/>
+          <a:ea typeface="+mn-ea"/>
+          <a:cs typeface="+mn-cs"/>
+        </a:defRPr>
+      </a:lvl2pPr>
+      <a:lvl3pPr marL="1143000" indent="-228600" algn="l" defTabSz="914400" rtl="0" eaLnBrk="1" latinLnBrk="0" hangingPunct="1">
+        <a:lnSpc>
+          <a:spcPct val="90000"/>
+        </a:lnSpc>
+        <a:spcBef>
+          <a:spcPts val="500"/>
+        </a:spcBef>
+        <a:buFont typeface="Arial" panose="020B0604020202020204" pitchFamily="34" charset="0"/>
+        <a:buChar char="•"/>
+        <a:defRPr sz="2000" kern="1200">
+          <a:solidFill>
+            <a:schemeClr val="tx1"/>
+          </a:solidFill>
+          <a:latin typeface="+mn-lt"/>
+          <a:ea typeface="+mn-ea"/>
+          <a:cs typeface="+mn-cs"/>
+        </a:defRPr>
+      </a:lvl3pPr>
+      <a:lvl4pPr marL="1600200" indent="-228600" algn="l" defTabSz="914400" rtl="0" eaLnBrk="1" latinLnBrk="0" hangingPunct="1">
+        <a:lnSpc>
+          <a:spcPct val="90000"/>
+        </a:lnSpc>
+        <a:spcBef>
+          <a:spcPts val="500"/>
+        </a:spcBef>
+        <a:buFont typeface="Arial" panose="020B0604020202020204" pitchFamily="34" charset="0"/>
+        <a:buChar char="•"/>
+        <a:defRPr sz="1800" kern="1200">
+          <a:solidFill>
+            <a:schemeClr val="tx1"/>
+          </a:solidFill>
+          <a:latin typeface="+mn-lt"/>
+          <a:ea typeface="+mn-ea"/>
+          <a:cs typeface="+mn-cs"/>
+        </a:defRPr>
+      </a:lvl4pPr>
+      <a:lvl5pPr marL="2057400" indent="-228600" algn="l" defTabSz="914400" rtl="0" eaLnBrk="1" latinLnBrk="0" hangingPunct="1">
+        <a:lnSpc>
+          <a:spcPct val="90000"/>
+        </a:lnSpc>
+        <a:spcBef>
+          <a:spcPts val="500"/>
+        </a:spcBef>
+        <a:buFont typeface="Arial" panose="020B0604020202020204" pitchFamily="34" charset="0"/>
+        <a:buChar char="•"/>
+        <a:defRPr sz="1800" kern="1200">
+          <a:solidFill>
+            <a:schemeClr val="tx1"/>
+          </a:solidFill>
+          <a:latin typeface="+mn-lt"/>
+          <a:ea typeface="+mn-ea"/>
+          <a:cs typeface="+mn-cs"/>
+        </a:defRPr>
+      </a:lvl5pPr>
+      <a:lvl6pPr marL="2514600" indent="-228600" algn="l" defTabSz="914400" rtl="0" eaLnBrk="1" latinLnBrk="0" hangingPunct="1">
+        <a:lnSpc>
+          <a:spcPct val="90000"/>
+        </a:lnSpc>
+        <a:spcBef>
+          <a:spcPts val="500"/>
+        </a:spcBef>
+        <a:buFont typeface="Arial" panose="020B0604020202020204" pitchFamily="34" charset="0"/>
+        <a:buChar char="•"/>
+        <a:defRPr sz="1800" kern="1200">
+          <a:solidFill>
+            <a:schemeClr val="tx1"/>
+          </a:solidFill>
+          <a:latin typeface="+mn-lt"/>
+          <a:ea typeface="+mn-ea"/>
+          <a:cs typeface="+mn-cs"/>
+        </a:defRPr>
+      </a:lvl6pPr>
+      <a:lvl7pPr marL="2971800" indent="-228600" algn="l" defTabSz="914400" rtl="0" eaLnBrk="1" latinLnBrk="0" hangingPunct="1">
+        <a:lnSpc>
+          <a:spcPct val="90000"/>
+        </a:lnSpc>
+        <a:spcBef>
+          <a:spcPts val="500"/>
+        </a:spcBef>
+        <a:buFont typeface="Arial" panose="020B0604020202020204" pitchFamily="34" charset="0"/>
+        <a:buChar char="•"/>
+        <a:defRPr sz="1800" kern="1200">
+          <a:solidFill>
+            <a:schemeClr val="tx1"/>
+          </a:solidFill>
+          <a:latin typeface="+mn-lt"/>
+          <a:ea typeface="+mn-ea"/>
+          <a:cs typeface="+mn-cs"/>
+        </a:defRPr>
+      </a:lvl7pPr>
+      <a:lvl8pPr marL="3429000" indent="-228600" algn="l" defTabSz="914400" rtl="0" eaLnBrk="1" latinLnBrk="0" hangingPunct="1">
+        <a:lnSpc>
+          <a:spcPct val="90000"/>
+        </a:lnSpc>
+        <a:spcBef>
+          <a:spcPts val="500"/>
+        </a:spcBef>
+        <a:buFont typeface="Arial" panose="020B0604020202020204" pitchFamily="34" charset="0"/>
+        <a:buChar char="•"/>
+        <a:defRPr sz="1800" kern="1200">
+          <a:solidFill>
+            <a:schemeClr val="tx1"/>
+          </a:solidFill>
+          <a:latin typeface="+mn-lt"/>
+          <a:ea typeface="+mn-ea"/>
+          <a:cs typeface="+mn-cs"/>
+        </a:defRPr>
+      </a:lvl8pPr>
+      <a:lvl9pPr marL="3886200" indent="-228600" algn="l" defTabSz="914400" rtl="0" eaLnBrk="1" latinLnBrk="0" hangingPunct="1">
+        <a:lnSpc>
+          <a:spcPct val="90000"/>
+        </a:lnSpc>
+        <a:spcBef>
+          <a:spcPts val="500"/>
+        </a:spcBef>
+        <a:buFont typeface="Arial" panose="020B0604020202020204" pitchFamily="34" charset="0"/>
+        <a:buChar char="•"/>
+        <a:defRPr sz="1800" kern="1200">
+          <a:solidFill>
+            <a:schemeClr val="tx1"/>
+          </a:solidFill>
+          <a:latin typeface="+mn-lt"/>
+          <a:ea typeface="+mn-ea"/>
+          <a:cs typeface="+mn-cs"/>
+        </a:defRPr>
+      </a:lvl9pPr>
+    </p:bodyStyle>
+    <p:otherStyle>
+      <a:defPPr>
+        <a:defRPr lang="en-US"/>
+      </a:defPPr>
+      <a:lvl1pPr marL="0" algn="l" defTabSz="914400" rtl="0" eaLnBrk="1" latinLnBrk="0" hangingPunct="1">
+        <a:defRPr sz="1800" kern="1200">
+          <a:solidFill>
+            <a:schemeClr val="tx1"/>
+          </a:solidFill>
+          <a:latin typeface="+mn-lt"/>
+          <a:ea typeface="+mn-ea"/>
+          <a:cs typeface="+mn-cs"/>
+        </a:defRPr>
+      </a:lvl1pPr>
+      <a:lvl2pPr marL="457200" algn="l" defTabSz="914400" rtl="0" eaLnBrk="1" latinLnBrk="0" hangingPunct="1">
+        <a:defRPr sz="1800" kern="1200">
+          <a:solidFill>
+            <a:schemeClr val="tx1"/>
+          </a:solidFill>
+          <a:latin typeface="+mn-lt"/>
+          <a:ea typeface="+mn-ea"/>
+          <a:cs typeface="+mn-cs"/>
+        </a:defRPr>
+      </a:lvl2pPr>
+      <a:lvl3pPr marL="914400" algn="l" defTabSz="914400" rtl="0" eaLnBrk="1" latinLnBrk="0" hangingPunct="1">
+        <a:defRPr sz="1800" kern="1200">
+          <a:solidFill>
+            <a:schemeClr val="tx1"/>
+          </a:solidFill>
+          <a:latin typeface="+mn-lt"/>
+          <a:ea typeface="+mn-ea"/>
+          <a:cs typeface="+mn-cs"/>
+        </a:defRPr>
+      </a:lvl3pPr>
+      <a:lvl4pPr marL="1371600" algn="l" defTabSz="914400" rtl="0" eaLnBrk="1" latinLnBrk="0" hangingPunct="1">
+        <a:defRPr sz="1800" kern="1200">
+          <a:solidFill>
+            <a:schemeClr val="tx1"/>
+          </a:solidFill>
+          <a:latin typeface="+mn-lt"/>
+          <a:ea typeface="+mn-ea"/>
+          <a:cs typeface="+mn-cs"/>
+        </a:defRPr>
+      </a:lvl4pPr>
+      <a:lvl5pPr marL="1828800" algn="l" defTabSz="914400" rtl="0" eaLnBrk="1" latinLnBrk="0" hangingPunct="1">
+        <a:defRPr sz="1800" kern="1200">
+          <a:solidFill>
+            <a:schemeClr val="tx1"/>
+          </a:solidFill>
+          <a:latin typeface="+mn-lt"/>
+          <a:ea typeface="+mn-ea"/>
+          <a:cs typeface="+mn-cs"/>
+        </a:defRPr>
+      </a:lvl5pPr>
+      <a:lvl6pPr marL="2286000" algn="l" defTabSz="914400" rtl="0" eaLnBrk="1" latinLnBrk="0" hangingPunct="1">
+        <a:defRPr sz="1800" kern="1200">
+          <a:solidFill>
+            <a:schemeClr val="tx1"/>
+          </a:solidFill>
+          <a:latin typeface="+mn-lt"/>
+          <a:ea typeface="+mn-ea"/>
+          <a:cs typeface="+mn-cs"/>
+        </a:defRPr>
+      </a:lvl6pPr>
+      <a:lvl7pPr marL="2743200" algn="l" defTabSz="914400" rtl="0" eaLnBrk="1" latinLnBrk="0" hangingPunct="1">
+        <a:defRPr sz="1800" kern="1200">
+          <a:solidFill>
+            <a:schemeClr val="tx1"/>
+          </a:solidFill>
+          <a:latin typeface="+mn-lt"/>
+          <a:ea typeface="+mn-ea"/>
+          <a:cs typeface="+mn-cs"/>
+        </a:defRPr>
+      </a:lvl7pPr>
+      <a:lvl8pPr marL="3200400" algn="l" defTabSz="914400" rtl="0" eaLnBrk="1" latinLnBrk="0" hangingPunct="1">
+        <a:defRPr sz="1800" kern="1200">
+          <a:solidFill>
+            <a:schemeClr val="tx1"/>
+          </a:solidFill>
+          <a:latin typeface="+mn-lt"/>
+          <a:ea typeface="+mn-ea"/>
+          <a:cs typeface="+mn-cs"/>
+        </a:defRPr>
+      </a:lvl8pPr>
+      <a:lvl9pPr marL="3657600" algn="l" defTabSz="914400" rtl="0" eaLnBrk="1" latinLnBrk="0" hangingPunct="1">
+        <a:defRPr sz="1800" kern="1200">
+          <a:solidFill>
+            <a:schemeClr val="tx1"/>
+          </a:solidFill>
+          <a:latin typeface="+mn-lt"/>
+          <a:ea typeface="+mn-ea"/>
+          <a:cs typeface="+mn-cs"/>
+        </a:defRPr>
+      </a:lvl9pPr>
+    </p:otherStyle>
+  </p:txStyles>
 </p:sldMaster>
 </file>
 
 <file path=ppt/slideMasters/slideMaster2.xml><?xml version="1.0" encoding="utf-8"?>
-<p:sldMaster xmlns:a="http://schemas.openxmlformats.org/drawingml/2006/main" xmlns:p="http://schemas.openxmlformats.org/presentationml/2006/main" xmlns:r="http://schemas.openxmlformats.org/officeDocument/2006/relationships" xmlns:p14="http://schemas.microsoft.com/office/powerpoint/2010/main" xmlns:p15="http://schemas.microsoft.com/office/powerpoint/2012/main" xmlns:mc="http://schemas.openxmlformats.org/markup-compatibility/2006">
+<p:sldMaster xmlns:a="http://schemas.openxmlformats.org/drawingml/2006/main" xmlns:r="http://schemas.openxmlformats.org/officeDocument/2006/relationships" xmlns:p="http://schemas.openxmlformats.org/presentationml/2006/main">
   <p:cSld>
     <p:bg>
       <p:bgPr>
         <a:solidFill>
-          <a:srgbClr val="f4f6f7"/>
+          <a:srgbClr val="F4F6F7"/>
         </a:solidFill>
+        <a:effectLst/>
       </p:bgPr>
     </p:bg>
     <p:spTree>
@@ -1503,12 +1792,12 @@
       </p:grpSpPr>
       <p:pic>
         <p:nvPicPr>
-          <p:cNvPr id="10" name="Picture 19" descr=""/>
+          <p:cNvPr id="10" name="Picture 19"/>
           <p:cNvPicPr/>
           <p:nvPr/>
         </p:nvPicPr>
         <p:blipFill>
-          <a:blip r:embed="rId2">
+          <a:blip r:embed="rId4">
             <a:alphaModFix amt="20000"/>
           </a:blip>
           <a:stretch/>
@@ -1541,11 +1830,11 @@
             <a:avLst/>
           </a:prstGeom>
           <a:solidFill>
-            <a:srgbClr val="17365d"/>
+            <a:srgbClr val="17365D"/>
           </a:solidFill>
           <a:ln>
             <a:solidFill>
-              <a:srgbClr val="092a38"/>
+              <a:srgbClr val="092A38"/>
             </a:solidFill>
           </a:ln>
         </p:spPr>
@@ -1564,16 +1853,17 @@
           <a:fontRef idx="minor"/>
         </p:style>
         <p:txBody>
-          <a:bodyPr lIns="90000" rIns="90000" tIns="45000" bIns="45000" anchor="ctr">
+          <a:bodyPr lIns="90000" tIns="45000" rIns="90000" bIns="45000" anchor="ctr">
             <a:noAutofit/>
           </a:bodyPr>
+          <a:lstStyle/>
           <a:p>
             <a:pPr algn="ctr" defTabSz="914400">
               <a:lnSpc>
                 <a:spcPct val="100000"/>
               </a:lnSpc>
             </a:pPr>
-            <a:endParaRPr b="0" lang="en-US" sz="1800" spc="-1" strike="noStrike">
+            <a:endParaRPr lang="en-US" sz="1800" b="0" strike="noStrike" spc="-1">
               <a:solidFill>
                 <a:schemeClr val="lt1"/>
               </a:solidFill>
@@ -1597,7 +1887,7 @@
             <a:avLst/>
           </a:prstGeom>
           <a:solidFill>
-            <a:srgbClr val="c8202f"/>
+            <a:srgbClr val="C8202F"/>
           </a:solidFill>
           <a:ln>
             <a:noFill/>
@@ -1618,16 +1908,17 @@
           <a:fontRef idx="minor"/>
         </p:style>
         <p:txBody>
-          <a:bodyPr lIns="90000" rIns="90000" tIns="45000" bIns="45000" anchor="ctr">
+          <a:bodyPr lIns="90000" tIns="45000" rIns="90000" bIns="45000" anchor="ctr">
             <a:noAutofit/>
           </a:bodyPr>
+          <a:lstStyle/>
           <a:p>
             <a:pPr algn="ctr" defTabSz="914400">
               <a:lnSpc>
                 <a:spcPct val="100000"/>
               </a:lnSpc>
             </a:pPr>
-            <a:endParaRPr b="0" lang="en-US" sz="1800" spc="-1" strike="noStrike">
+            <a:endParaRPr lang="en-US" sz="1800" b="0" strike="noStrike" spc="-1">
               <a:solidFill>
                 <a:schemeClr val="lt1"/>
               </a:solidFill>
@@ -1638,7 +1929,968 @@
       </p:sp>
       <p:pic>
         <p:nvPicPr>
-          <p:cNvPr id="13" name="Picture 8" descr=""/>
+          <p:cNvPr id="13" name="Picture 8"/>
+          <p:cNvPicPr/>
+          <p:nvPr/>
+        </p:nvPicPr>
+        <p:blipFill>
+          <a:blip r:embed="rId4">
+            <a:alphaModFix amt="20000"/>
+          </a:blip>
+          <a:stretch/>
+        </p:blipFill>
+        <p:spPr>
+          <a:xfrm>
+            <a:off x="4267080" y="1444680"/>
+            <a:ext cx="3970440" cy="3656160"/>
+          </a:xfrm>
+          <a:prstGeom prst="rect">
+            <a:avLst/>
+          </a:prstGeom>
+          <a:ln w="0">
+            <a:noFill/>
+          </a:ln>
+        </p:spPr>
+      </p:pic>
+      <p:pic>
+        <p:nvPicPr>
+          <p:cNvPr id="14" name="Graphic 16"/>
+          <p:cNvPicPr/>
+          <p:nvPr/>
+        </p:nvPicPr>
+        <p:blipFill>
+          <a:blip>
+            <a:extLst>
+              <a:ext uri="{96DAC541-7B7A-43D3-8B79-37D633B846F1}">
+                <asvg:svgBlip xmlns:asvg="http://schemas.microsoft.com/office/drawing/2016/SVG/main" r:embed="rId5"/>
+              </a:ext>
+            </a:extLst>
+          </a:blip>
+          <a:stretch/>
+        </p:blipFill>
+        <p:spPr>
+          <a:xfrm>
+            <a:off x="10650960" y="119160"/>
+            <a:ext cx="1324080" cy="1324080"/>
+          </a:xfrm>
+          <a:prstGeom prst="rect">
+            <a:avLst/>
+          </a:prstGeom>
+          <a:ln w="0">
+            <a:noFill/>
+          </a:ln>
+        </p:spPr>
+      </p:pic>
+      <p:sp>
+        <p:nvSpPr>
+          <p:cNvPr id="15" name="PlaceHolder 1"/>
+          <p:cNvSpPr>
+            <a:spLocks noGrp="1"/>
+          </p:cNvSpPr>
+          <p:nvPr>
+            <p:ph type="title"/>
+          </p:nvPr>
+        </p:nvSpPr>
+        <p:spPr>
+          <a:xfrm>
+            <a:off x="838080" y="365040"/>
+            <a:ext cx="10514160" cy="1324080"/>
+          </a:xfrm>
+          <a:prstGeom prst="rect">
+            <a:avLst/>
+          </a:prstGeom>
+          <a:noFill/>
+          <a:ln w="0">
+            <a:noFill/>
+          </a:ln>
+        </p:spPr>
+        <p:txBody>
+          <a:bodyPr lIns="0" tIns="0" rIns="0" bIns="0" anchor="ctr">
+            <a:noAutofit/>
+          </a:bodyPr>
+          <a:lstStyle/>
+          <a:p>
+            <a:pPr indent="0">
+              <a:buNone/>
+            </a:pPr>
+            <a:r>
+              <a:rPr lang="en-US" sz="4400" b="0" strike="noStrike" spc="-1">
+                <a:solidFill>
+                  <a:schemeClr val="dk1"/>
+                </a:solidFill>
+                <a:latin typeface="Aptos"/>
+              </a:rPr>
+              <a:t>Click to edit the title text format</a:t>
+            </a:r>
+          </a:p>
+        </p:txBody>
+      </p:sp>
+      <p:sp>
+        <p:nvSpPr>
+          <p:cNvPr id="16" name="PlaceHolder 2"/>
+          <p:cNvSpPr>
+            <a:spLocks noGrp="1"/>
+          </p:cNvSpPr>
+          <p:nvPr>
+            <p:ph type="body"/>
+          </p:nvPr>
+        </p:nvSpPr>
+        <p:spPr>
+          <a:xfrm>
+            <a:off x="838080" y="1825560"/>
+            <a:ext cx="10514160" cy="4349880"/>
+          </a:xfrm>
+          <a:prstGeom prst="rect">
+            <a:avLst/>
+          </a:prstGeom>
+          <a:noFill/>
+          <a:ln w="0">
+            <a:noFill/>
+          </a:ln>
+        </p:spPr>
+        <p:txBody>
+          <a:bodyPr lIns="0" tIns="0" rIns="0" bIns="0" anchor="t">
+            <a:normAutofit/>
+          </a:bodyPr>
+          <a:lstStyle/>
+          <a:p>
+            <a:pPr marL="432000" indent="-324000">
+              <a:lnSpc>
+                <a:spcPct val="90000"/>
+              </a:lnSpc>
+              <a:spcBef>
+                <a:spcPts val="1417"/>
+              </a:spcBef>
+              <a:buClr>
+                <a:srgbClr val="000000"/>
+              </a:buClr>
+              <a:buSzPct val="45000"/>
+              <a:buFont typeface="Wingdings" charset="2"/>
+              <a:buChar char=""/>
+            </a:pPr>
+            <a:r>
+              <a:rPr lang="en-US" sz="1800" b="0" strike="noStrike" spc="-1">
+                <a:solidFill>
+                  <a:schemeClr val="dk1"/>
+                </a:solidFill>
+                <a:latin typeface="Aptos"/>
+              </a:rPr>
+              <a:t>Click to edit the outline text format</a:t>
+            </a:r>
+          </a:p>
+          <a:p>
+            <a:pPr marL="864000" lvl="1" indent="-324000">
+              <a:lnSpc>
+                <a:spcPct val="90000"/>
+              </a:lnSpc>
+              <a:spcBef>
+                <a:spcPts val="1134"/>
+              </a:spcBef>
+              <a:buClr>
+                <a:srgbClr val="000000"/>
+              </a:buClr>
+              <a:buSzPct val="75000"/>
+              <a:buFont typeface="Symbol" charset="2"/>
+              <a:buChar char=""/>
+            </a:pPr>
+            <a:r>
+              <a:rPr lang="en-US" sz="1800" b="0" strike="noStrike" spc="-1">
+                <a:solidFill>
+                  <a:schemeClr val="dk1"/>
+                </a:solidFill>
+                <a:latin typeface="Aptos"/>
+              </a:rPr>
+              <a:t>Second Outline Level</a:t>
+            </a:r>
+          </a:p>
+          <a:p>
+            <a:pPr marL="1296000" lvl="2" indent="-288000">
+              <a:lnSpc>
+                <a:spcPct val="90000"/>
+              </a:lnSpc>
+              <a:spcBef>
+                <a:spcPts val="850"/>
+              </a:spcBef>
+              <a:buClr>
+                <a:srgbClr val="000000"/>
+              </a:buClr>
+              <a:buSzPct val="45000"/>
+              <a:buFont typeface="Wingdings" charset="2"/>
+              <a:buChar char=""/>
+            </a:pPr>
+            <a:r>
+              <a:rPr lang="en-US" sz="1800" b="0" strike="noStrike" spc="-1">
+                <a:solidFill>
+                  <a:schemeClr val="dk1"/>
+                </a:solidFill>
+                <a:latin typeface="Aptos"/>
+              </a:rPr>
+              <a:t>Third Outline Level</a:t>
+            </a:r>
+          </a:p>
+          <a:p>
+            <a:pPr marL="1728000" lvl="3" indent="-216000">
+              <a:lnSpc>
+                <a:spcPct val="90000"/>
+              </a:lnSpc>
+              <a:spcBef>
+                <a:spcPts val="567"/>
+              </a:spcBef>
+              <a:buClr>
+                <a:srgbClr val="000000"/>
+              </a:buClr>
+              <a:buSzPct val="75000"/>
+              <a:buFont typeface="Symbol" charset="2"/>
+              <a:buChar char=""/>
+            </a:pPr>
+            <a:r>
+              <a:rPr lang="en-US" sz="1800" b="0" strike="noStrike" spc="-1">
+                <a:solidFill>
+                  <a:schemeClr val="dk1"/>
+                </a:solidFill>
+                <a:latin typeface="Aptos"/>
+              </a:rPr>
+              <a:t>Fourth Outline Level</a:t>
+            </a:r>
+          </a:p>
+          <a:p>
+            <a:pPr marL="2160000" lvl="4" indent="-216000">
+              <a:lnSpc>
+                <a:spcPct val="90000"/>
+              </a:lnSpc>
+              <a:spcBef>
+                <a:spcPts val="283"/>
+              </a:spcBef>
+              <a:buClr>
+                <a:srgbClr val="000000"/>
+              </a:buClr>
+              <a:buSzPct val="45000"/>
+              <a:buFont typeface="Wingdings" charset="2"/>
+              <a:buChar char=""/>
+            </a:pPr>
+            <a:r>
+              <a:rPr lang="en-US" sz="1800" b="0" strike="noStrike" spc="-1">
+                <a:solidFill>
+                  <a:schemeClr val="dk1"/>
+                </a:solidFill>
+                <a:latin typeface="Aptos"/>
+              </a:rPr>
+              <a:t>Fifth Outline Level</a:t>
+            </a:r>
+          </a:p>
+          <a:p>
+            <a:pPr marL="2592000" lvl="5" indent="-216000">
+              <a:lnSpc>
+                <a:spcPct val="90000"/>
+              </a:lnSpc>
+              <a:spcBef>
+                <a:spcPts val="283"/>
+              </a:spcBef>
+              <a:buClr>
+                <a:srgbClr val="000000"/>
+              </a:buClr>
+              <a:buSzPct val="45000"/>
+              <a:buFont typeface="Wingdings" charset="2"/>
+              <a:buChar char=""/>
+            </a:pPr>
+            <a:r>
+              <a:rPr lang="en-US" sz="1800" b="0" strike="noStrike" spc="-1">
+                <a:solidFill>
+                  <a:schemeClr val="dk1"/>
+                </a:solidFill>
+                <a:latin typeface="Aptos"/>
+              </a:rPr>
+              <a:t>Sixth Outline Level</a:t>
+            </a:r>
+          </a:p>
+          <a:p>
+            <a:pPr marL="3024000" lvl="6" indent="-216000">
+              <a:lnSpc>
+                <a:spcPct val="90000"/>
+              </a:lnSpc>
+              <a:spcBef>
+                <a:spcPts val="283"/>
+              </a:spcBef>
+              <a:buClr>
+                <a:srgbClr val="000000"/>
+              </a:buClr>
+              <a:buSzPct val="45000"/>
+              <a:buFont typeface="Wingdings" charset="2"/>
+              <a:buChar char=""/>
+            </a:pPr>
+            <a:r>
+              <a:rPr lang="en-US" sz="1800" b="0" strike="noStrike" spc="-1">
+                <a:solidFill>
+                  <a:schemeClr val="dk1"/>
+                </a:solidFill>
+                <a:latin typeface="Aptos"/>
+              </a:rPr>
+              <a:t>Seventh Outline Level</a:t>
+            </a:r>
+          </a:p>
+        </p:txBody>
+      </p:sp>
+      <p:sp>
+        <p:nvSpPr>
+          <p:cNvPr id="17" name="PlaceHolder 3"/>
+          <p:cNvSpPr>
+            <a:spLocks noGrp="1"/>
+          </p:cNvSpPr>
+          <p:nvPr>
+            <p:ph type="ftr" idx="4"/>
+          </p:nvPr>
+        </p:nvSpPr>
+        <p:spPr>
+          <a:xfrm>
+            <a:off x="4038480" y="6356520"/>
+            <a:ext cx="4113360" cy="363600"/>
+          </a:xfrm>
+          <a:prstGeom prst="rect">
+            <a:avLst/>
+          </a:prstGeom>
+          <a:noFill/>
+          <a:ln w="0">
+            <a:noFill/>
+          </a:ln>
+        </p:spPr>
+        <p:txBody>
+          <a:bodyPr lIns="91440" tIns="45720" rIns="91440" bIns="45720" anchor="ctr">
+            <a:noAutofit/>
+          </a:bodyPr>
+          <a:lstStyle>
+            <a:lvl1pPr indent="0" algn="ctr" defTabSz="914400">
+              <a:lnSpc>
+                <a:spcPct val="100000"/>
+              </a:lnSpc>
+              <a:buNone/>
+              <a:tabLst>
+                <a:tab pos="0" algn="l"/>
+              </a:tabLst>
+              <a:defRPr lang="en-US" sz="1200" b="0" strike="noStrike" spc="-1">
+                <a:solidFill>
+                  <a:schemeClr val="dk1">
+                    <a:tint val="82000"/>
+                  </a:schemeClr>
+                </a:solidFill>
+                <a:latin typeface="Aptos"/>
+              </a:defRPr>
+            </a:lvl1pPr>
+          </a:lstStyle>
+          <a:p>
+            <a:pPr indent="0" algn="ctr" defTabSz="914400">
+              <a:lnSpc>
+                <a:spcPct val="100000"/>
+              </a:lnSpc>
+              <a:buNone/>
+              <a:tabLst>
+                <a:tab pos="0" algn="l"/>
+              </a:tabLst>
+            </a:pPr>
+            <a:r>
+              <a:rPr lang="en-US" sz="1200" b="0" strike="noStrike" spc="-1">
+                <a:solidFill>
+                  <a:schemeClr val="dk1">
+                    <a:tint val="82000"/>
+                  </a:schemeClr>
+                </a:solidFill>
+                <a:latin typeface="Aptos"/>
+              </a:rPr>
+              <a:t>&lt;footer&gt;</a:t>
+            </a:r>
+            <a:endParaRPr lang="en-US" sz="1200" b="0" strike="noStrike" spc="-1">
+              <a:solidFill>
+                <a:srgbClr val="000000"/>
+              </a:solidFill>
+              <a:latin typeface="Times New Roman"/>
+            </a:endParaRPr>
+          </a:p>
+        </p:txBody>
+      </p:sp>
+      <p:sp>
+        <p:nvSpPr>
+          <p:cNvPr id="18" name="PlaceHolder 4"/>
+          <p:cNvSpPr>
+            <a:spLocks noGrp="1"/>
+          </p:cNvSpPr>
+          <p:nvPr>
+            <p:ph type="sldNum" idx="5"/>
+          </p:nvPr>
+        </p:nvSpPr>
+        <p:spPr>
+          <a:xfrm>
+            <a:off x="8610480" y="6356520"/>
+            <a:ext cx="2741760" cy="363600"/>
+          </a:xfrm>
+          <a:prstGeom prst="rect">
+            <a:avLst/>
+          </a:prstGeom>
+          <a:noFill/>
+          <a:ln w="0">
+            <a:noFill/>
+          </a:ln>
+        </p:spPr>
+        <p:txBody>
+          <a:bodyPr lIns="91440" tIns="45720" rIns="91440" bIns="45720" anchor="ctr">
+            <a:noAutofit/>
+          </a:bodyPr>
+          <a:lstStyle>
+            <a:lvl1pPr indent="0" algn="r" defTabSz="914400">
+              <a:lnSpc>
+                <a:spcPct val="100000"/>
+              </a:lnSpc>
+              <a:buNone/>
+              <a:tabLst>
+                <a:tab pos="0" algn="l"/>
+              </a:tabLst>
+              <a:defRPr lang="en-US" sz="1200" b="0" strike="noStrike" spc="-1">
+                <a:solidFill>
+                  <a:schemeClr val="dk1">
+                    <a:tint val="82000"/>
+                  </a:schemeClr>
+                </a:solidFill>
+                <a:latin typeface="Aptos"/>
+              </a:defRPr>
+            </a:lvl1pPr>
+          </a:lstStyle>
+          <a:p>
+            <a:pPr indent="0" algn="r" defTabSz="914400">
+              <a:lnSpc>
+                <a:spcPct val="100000"/>
+              </a:lnSpc>
+              <a:buNone/>
+              <a:tabLst>
+                <a:tab pos="0" algn="l"/>
+              </a:tabLst>
+            </a:pPr>
+            <a:fld id="{91D92FAB-4EAF-4921-A84A-D1F12305F3FE}" type="slidenum">
+              <a:rPr lang="en-US" sz="1200" b="0" strike="noStrike" spc="-1">
+                <a:solidFill>
+                  <a:schemeClr val="dk1">
+                    <a:tint val="82000"/>
+                  </a:schemeClr>
+                </a:solidFill>
+                <a:latin typeface="Aptos"/>
+              </a:rPr>
+              <a:t>‹#›</a:t>
+            </a:fld>
+            <a:endParaRPr lang="en-US" sz="1200" b="0" strike="noStrike" spc="-1">
+              <a:solidFill>
+                <a:srgbClr val="000000"/>
+              </a:solidFill>
+              <a:latin typeface="Times New Roman"/>
+            </a:endParaRPr>
+          </a:p>
+        </p:txBody>
+      </p:sp>
+      <p:sp>
+        <p:nvSpPr>
+          <p:cNvPr id="19" name="PlaceHolder 5"/>
+          <p:cNvSpPr>
+            <a:spLocks noGrp="1"/>
+          </p:cNvSpPr>
+          <p:nvPr>
+            <p:ph type="dt" idx="6"/>
+          </p:nvPr>
+        </p:nvSpPr>
+        <p:spPr>
+          <a:xfrm>
+            <a:off x="838080" y="6356520"/>
+            <a:ext cx="2741760" cy="363600"/>
+          </a:xfrm>
+          <a:prstGeom prst="rect">
+            <a:avLst/>
+          </a:prstGeom>
+          <a:noFill/>
+          <a:ln w="0">
+            <a:noFill/>
+          </a:ln>
+        </p:spPr>
+        <p:txBody>
+          <a:bodyPr lIns="91440" tIns="45720" rIns="91440" bIns="45720" anchor="ctr">
+            <a:noAutofit/>
+          </a:bodyPr>
+          <a:lstStyle>
+            <a:lvl1pPr indent="0">
+              <a:buNone/>
+              <a:defRPr lang="en-US" sz="1400" b="0" strike="noStrike" spc="-1">
+                <a:solidFill>
+                  <a:srgbClr val="000000"/>
+                </a:solidFill>
+                <a:latin typeface="Times New Roman"/>
+              </a:defRPr>
+            </a:lvl1pPr>
+          </a:lstStyle>
+          <a:p>
+            <a:pPr indent="0">
+              <a:buNone/>
+            </a:pPr>
+            <a:r>
+              <a:rPr lang="en-US" sz="1400" b="0" strike="noStrike" spc="-1">
+                <a:solidFill>
+                  <a:srgbClr val="000000"/>
+                </a:solidFill>
+                <a:latin typeface="Times New Roman"/>
+              </a:rPr>
+              <a:t>&lt;date/time&gt;</a:t>
+            </a:r>
+          </a:p>
+        </p:txBody>
+      </p:sp>
+    </p:spTree>
+  </p:cSld>
+  <p:clrMap bg1="lt1" tx1="dk1" bg2="lt2" tx2="dk2" accent1="accent1" accent2="accent2" accent3="accent3" accent4="accent4" accent5="accent5" accent6="accent6" hlink="hlink" folHlink="folHlink"/>
+  <p:sldLayoutIdLst>
+    <p:sldLayoutId id="2147483651" r:id="rId1"/>
+    <p:sldLayoutId id="2147483652" r:id="rId2"/>
+  </p:sldLayoutIdLst>
+  <p:txStyles>
+    <p:titleStyle>
+      <a:lvl1pPr algn="l" defTabSz="914400" rtl="0" eaLnBrk="1" latinLnBrk="0" hangingPunct="1">
+        <a:lnSpc>
+          <a:spcPct val="90000"/>
+        </a:lnSpc>
+        <a:spcBef>
+          <a:spcPct val="0"/>
+        </a:spcBef>
+        <a:buNone/>
+        <a:defRPr sz="4400" kern="1200">
+          <a:solidFill>
+            <a:schemeClr val="tx1"/>
+          </a:solidFill>
+          <a:latin typeface="+mj-lt"/>
+          <a:ea typeface="+mj-ea"/>
+          <a:cs typeface="+mj-cs"/>
+        </a:defRPr>
+      </a:lvl1pPr>
+    </p:titleStyle>
+    <p:bodyStyle>
+      <a:lvl1pPr marL="228600" indent="-228600" algn="l" defTabSz="914400" rtl="0" eaLnBrk="1" latinLnBrk="0" hangingPunct="1">
+        <a:lnSpc>
+          <a:spcPct val="90000"/>
+        </a:lnSpc>
+        <a:spcBef>
+          <a:spcPts val="1000"/>
+        </a:spcBef>
+        <a:buFont typeface="Arial" panose="020B0604020202020204" pitchFamily="34" charset="0"/>
+        <a:buChar char="•"/>
+        <a:defRPr sz="2800" kern="1200">
+          <a:solidFill>
+            <a:schemeClr val="tx1"/>
+          </a:solidFill>
+          <a:latin typeface="+mn-lt"/>
+          <a:ea typeface="+mn-ea"/>
+          <a:cs typeface="+mn-cs"/>
+        </a:defRPr>
+      </a:lvl1pPr>
+      <a:lvl2pPr marL="685800" indent="-228600" algn="l" defTabSz="914400" rtl="0" eaLnBrk="1" latinLnBrk="0" hangingPunct="1">
+        <a:lnSpc>
+          <a:spcPct val="90000"/>
+        </a:lnSpc>
+        <a:spcBef>
+          <a:spcPts val="500"/>
+        </a:spcBef>
+        <a:buFont typeface="Arial" panose="020B0604020202020204" pitchFamily="34" charset="0"/>
+        <a:buChar char="•"/>
+        <a:defRPr sz="2400" kern="1200">
+          <a:solidFill>
+            <a:schemeClr val="tx1"/>
+          </a:solidFill>
+          <a:latin typeface="+mn-lt"/>
+          <a:ea typeface="+mn-ea"/>
+          <a:cs typeface="+mn-cs"/>
+        </a:defRPr>
+      </a:lvl2pPr>
+      <a:lvl3pPr marL="1143000" indent="-228600" algn="l" defTabSz="914400" rtl="0" eaLnBrk="1" latinLnBrk="0" hangingPunct="1">
+        <a:lnSpc>
+          <a:spcPct val="90000"/>
+        </a:lnSpc>
+        <a:spcBef>
+          <a:spcPts val="500"/>
+        </a:spcBef>
+        <a:buFont typeface="Arial" panose="020B0604020202020204" pitchFamily="34" charset="0"/>
+        <a:buChar char="•"/>
+        <a:defRPr sz="2000" kern="1200">
+          <a:solidFill>
+            <a:schemeClr val="tx1"/>
+          </a:solidFill>
+          <a:latin typeface="+mn-lt"/>
+          <a:ea typeface="+mn-ea"/>
+          <a:cs typeface="+mn-cs"/>
+        </a:defRPr>
+      </a:lvl3pPr>
+      <a:lvl4pPr marL="1600200" indent="-228600" algn="l" defTabSz="914400" rtl="0" eaLnBrk="1" latinLnBrk="0" hangingPunct="1">
+        <a:lnSpc>
+          <a:spcPct val="90000"/>
+        </a:lnSpc>
+        <a:spcBef>
+          <a:spcPts val="500"/>
+        </a:spcBef>
+        <a:buFont typeface="Arial" panose="020B0604020202020204" pitchFamily="34" charset="0"/>
+        <a:buChar char="•"/>
+        <a:defRPr sz="1800" kern="1200">
+          <a:solidFill>
+            <a:schemeClr val="tx1"/>
+          </a:solidFill>
+          <a:latin typeface="+mn-lt"/>
+          <a:ea typeface="+mn-ea"/>
+          <a:cs typeface="+mn-cs"/>
+        </a:defRPr>
+      </a:lvl4pPr>
+      <a:lvl5pPr marL="2057400" indent="-228600" algn="l" defTabSz="914400" rtl="0" eaLnBrk="1" latinLnBrk="0" hangingPunct="1">
+        <a:lnSpc>
+          <a:spcPct val="90000"/>
+        </a:lnSpc>
+        <a:spcBef>
+          <a:spcPts val="500"/>
+        </a:spcBef>
+        <a:buFont typeface="Arial" panose="020B0604020202020204" pitchFamily="34" charset="0"/>
+        <a:buChar char="•"/>
+        <a:defRPr sz="1800" kern="1200">
+          <a:solidFill>
+            <a:schemeClr val="tx1"/>
+          </a:solidFill>
+          <a:latin typeface="+mn-lt"/>
+          <a:ea typeface="+mn-ea"/>
+          <a:cs typeface="+mn-cs"/>
+        </a:defRPr>
+      </a:lvl5pPr>
+      <a:lvl6pPr marL="2514600" indent="-228600" algn="l" defTabSz="914400" rtl="0" eaLnBrk="1" latinLnBrk="0" hangingPunct="1">
+        <a:lnSpc>
+          <a:spcPct val="90000"/>
+        </a:lnSpc>
+        <a:spcBef>
+          <a:spcPts val="500"/>
+        </a:spcBef>
+        <a:buFont typeface="Arial" panose="020B0604020202020204" pitchFamily="34" charset="0"/>
+        <a:buChar char="•"/>
+        <a:defRPr sz="1800" kern="1200">
+          <a:solidFill>
+            <a:schemeClr val="tx1"/>
+          </a:solidFill>
+          <a:latin typeface="+mn-lt"/>
+          <a:ea typeface="+mn-ea"/>
+          <a:cs typeface="+mn-cs"/>
+        </a:defRPr>
+      </a:lvl6pPr>
+      <a:lvl7pPr marL="2971800" indent="-228600" algn="l" defTabSz="914400" rtl="0" eaLnBrk="1" latinLnBrk="0" hangingPunct="1">
+        <a:lnSpc>
+          <a:spcPct val="90000"/>
+        </a:lnSpc>
+        <a:spcBef>
+          <a:spcPts val="500"/>
+        </a:spcBef>
+        <a:buFont typeface="Arial" panose="020B0604020202020204" pitchFamily="34" charset="0"/>
+        <a:buChar char="•"/>
+        <a:defRPr sz="1800" kern="1200">
+          <a:solidFill>
+            <a:schemeClr val="tx1"/>
+          </a:solidFill>
+          <a:latin typeface="+mn-lt"/>
+          <a:ea typeface="+mn-ea"/>
+          <a:cs typeface="+mn-cs"/>
+        </a:defRPr>
+      </a:lvl7pPr>
+      <a:lvl8pPr marL="3429000" indent="-228600" algn="l" defTabSz="914400" rtl="0" eaLnBrk="1" latinLnBrk="0" hangingPunct="1">
+        <a:lnSpc>
+          <a:spcPct val="90000"/>
+        </a:lnSpc>
+        <a:spcBef>
+          <a:spcPts val="500"/>
+        </a:spcBef>
+        <a:buFont typeface="Arial" panose="020B0604020202020204" pitchFamily="34" charset="0"/>
+        <a:buChar char="•"/>
+        <a:defRPr sz="1800" kern="1200">
+          <a:solidFill>
+            <a:schemeClr val="tx1"/>
+          </a:solidFill>
+          <a:latin typeface="+mn-lt"/>
+          <a:ea typeface="+mn-ea"/>
+          <a:cs typeface="+mn-cs"/>
+        </a:defRPr>
+      </a:lvl8pPr>
+      <a:lvl9pPr marL="3886200" indent="-228600" algn="l" defTabSz="914400" rtl="0" eaLnBrk="1" latinLnBrk="0" hangingPunct="1">
+        <a:lnSpc>
+          <a:spcPct val="90000"/>
+        </a:lnSpc>
+        <a:spcBef>
+          <a:spcPts val="500"/>
+        </a:spcBef>
+        <a:buFont typeface="Arial" panose="020B0604020202020204" pitchFamily="34" charset="0"/>
+        <a:buChar char="•"/>
+        <a:defRPr sz="1800" kern="1200">
+          <a:solidFill>
+            <a:schemeClr val="tx1"/>
+          </a:solidFill>
+          <a:latin typeface="+mn-lt"/>
+          <a:ea typeface="+mn-ea"/>
+          <a:cs typeface="+mn-cs"/>
+        </a:defRPr>
+      </a:lvl9pPr>
+    </p:bodyStyle>
+    <p:otherStyle>
+      <a:defPPr>
+        <a:defRPr lang="en-US"/>
+      </a:defPPr>
+      <a:lvl1pPr marL="0" algn="l" defTabSz="914400" rtl="0" eaLnBrk="1" latinLnBrk="0" hangingPunct="1">
+        <a:defRPr sz="1800" kern="1200">
+          <a:solidFill>
+            <a:schemeClr val="tx1"/>
+          </a:solidFill>
+          <a:latin typeface="+mn-lt"/>
+          <a:ea typeface="+mn-ea"/>
+          <a:cs typeface="+mn-cs"/>
+        </a:defRPr>
+      </a:lvl1pPr>
+      <a:lvl2pPr marL="457200" algn="l" defTabSz="914400" rtl="0" eaLnBrk="1" latinLnBrk="0" hangingPunct="1">
+        <a:defRPr sz="1800" kern="1200">
+          <a:solidFill>
+            <a:schemeClr val="tx1"/>
+          </a:solidFill>
+          <a:latin typeface="+mn-lt"/>
+          <a:ea typeface="+mn-ea"/>
+          <a:cs typeface="+mn-cs"/>
+        </a:defRPr>
+      </a:lvl2pPr>
+      <a:lvl3pPr marL="914400" algn="l" defTabSz="914400" rtl="0" eaLnBrk="1" latinLnBrk="0" hangingPunct="1">
+        <a:defRPr sz="1800" kern="1200">
+          <a:solidFill>
+            <a:schemeClr val="tx1"/>
+          </a:solidFill>
+          <a:latin typeface="+mn-lt"/>
+          <a:ea typeface="+mn-ea"/>
+          <a:cs typeface="+mn-cs"/>
+        </a:defRPr>
+      </a:lvl3pPr>
+      <a:lvl4pPr marL="1371600" algn="l" defTabSz="914400" rtl="0" eaLnBrk="1" latinLnBrk="0" hangingPunct="1">
+        <a:defRPr sz="1800" kern="1200">
+          <a:solidFill>
+            <a:schemeClr val="tx1"/>
+          </a:solidFill>
+          <a:latin typeface="+mn-lt"/>
+          <a:ea typeface="+mn-ea"/>
+          <a:cs typeface="+mn-cs"/>
+        </a:defRPr>
+      </a:lvl4pPr>
+      <a:lvl5pPr marL="1828800" algn="l" defTabSz="914400" rtl="0" eaLnBrk="1" latinLnBrk="0" hangingPunct="1">
+        <a:defRPr sz="1800" kern="1200">
+          <a:solidFill>
+            <a:schemeClr val="tx1"/>
+          </a:solidFill>
+          <a:latin typeface="+mn-lt"/>
+          <a:ea typeface="+mn-ea"/>
+          <a:cs typeface="+mn-cs"/>
+        </a:defRPr>
+      </a:lvl5pPr>
+      <a:lvl6pPr marL="2286000" algn="l" defTabSz="914400" rtl="0" eaLnBrk="1" latinLnBrk="0" hangingPunct="1">
+        <a:defRPr sz="1800" kern="1200">
+          <a:solidFill>
+            <a:schemeClr val="tx1"/>
+          </a:solidFill>
+          <a:latin typeface="+mn-lt"/>
+          <a:ea typeface="+mn-ea"/>
+          <a:cs typeface="+mn-cs"/>
+        </a:defRPr>
+      </a:lvl6pPr>
+      <a:lvl7pPr marL="2743200" algn="l" defTabSz="914400" rtl="0" eaLnBrk="1" latinLnBrk="0" hangingPunct="1">
+        <a:defRPr sz="1800" kern="1200">
+          <a:solidFill>
+            <a:schemeClr val="tx1"/>
+          </a:solidFill>
+          <a:latin typeface="+mn-lt"/>
+          <a:ea typeface="+mn-ea"/>
+          <a:cs typeface="+mn-cs"/>
+        </a:defRPr>
+      </a:lvl7pPr>
+      <a:lvl8pPr marL="3200400" algn="l" defTabSz="914400" rtl="0" eaLnBrk="1" latinLnBrk="0" hangingPunct="1">
+        <a:defRPr sz="1800" kern="1200">
+          <a:solidFill>
+            <a:schemeClr val="tx1"/>
+          </a:solidFill>
+          <a:latin typeface="+mn-lt"/>
+          <a:ea typeface="+mn-ea"/>
+          <a:cs typeface="+mn-cs"/>
+        </a:defRPr>
+      </a:lvl8pPr>
+      <a:lvl9pPr marL="3657600" algn="l" defTabSz="914400" rtl="0" eaLnBrk="1" latinLnBrk="0" hangingPunct="1">
+        <a:defRPr sz="1800" kern="1200">
+          <a:solidFill>
+            <a:schemeClr val="tx1"/>
+          </a:solidFill>
+          <a:latin typeface="+mn-lt"/>
+          <a:ea typeface="+mn-ea"/>
+          <a:cs typeface="+mn-cs"/>
+        </a:defRPr>
+      </a:lvl9pPr>
+    </p:otherStyle>
+  </p:txStyles>
+</p:sldMaster>
+</file>
+
+<file path=ppt/slideMasters/slideMaster3.xml><?xml version="1.0" encoding="utf-8"?>
+<p:sldMaster xmlns:a="http://schemas.openxmlformats.org/drawingml/2006/main" xmlns:r="http://schemas.openxmlformats.org/officeDocument/2006/relationships" xmlns:p="http://schemas.openxmlformats.org/presentationml/2006/main">
+  <p:cSld>
+    <p:bg>
+      <p:bgPr>
+        <a:solidFill>
+          <a:srgbClr val="F4F6F7"/>
+        </a:solidFill>
+        <a:effectLst/>
+      </p:bgPr>
+    </p:bg>
+    <p:spTree>
+      <p:nvGrpSpPr>
+        <p:cNvPr id="1" name=""/>
+        <p:cNvGrpSpPr/>
+        <p:nvPr/>
+      </p:nvGrpSpPr>
+      <p:grpSpPr>
+        <a:xfrm>
+          <a:off x="0" y="0"/>
+          <a:ext cx="0" cy="0"/>
+          <a:chOff x="0" y="0"/>
+          <a:chExt cx="0" cy="0"/>
+        </a:xfrm>
+      </p:grpSpPr>
+      <p:pic>
+        <p:nvPicPr>
+          <p:cNvPr id="25" name="Picture 19"/>
+          <p:cNvPicPr/>
+          <p:nvPr/>
+        </p:nvPicPr>
+        <p:blipFill>
+          <a:blip r:embed="rId3">
+            <a:alphaModFix amt="20000"/>
+          </a:blip>
+          <a:stretch/>
+        </p:blipFill>
+        <p:spPr>
+          <a:xfrm>
+            <a:off x="4267080" y="1444680"/>
+            <a:ext cx="3970440" cy="3656160"/>
+          </a:xfrm>
+          <a:prstGeom prst="rect">
+            <a:avLst/>
+          </a:prstGeom>
+          <a:ln w="0">
+            <a:noFill/>
+          </a:ln>
+        </p:spPr>
+      </p:pic>
+      <p:sp>
+        <p:nvSpPr>
+          <p:cNvPr id="26" name="Rectangle 11"/>
+          <p:cNvSpPr/>
+          <p:nvPr/>
+        </p:nvSpPr>
+        <p:spPr>
+          <a:xfrm>
+            <a:off x="0" y="0"/>
+            <a:ext cx="227160" cy="6856560"/>
+          </a:xfrm>
+          <a:prstGeom prst="rect">
+            <a:avLst/>
+          </a:prstGeom>
+          <a:solidFill>
+            <a:srgbClr val="17365D"/>
+          </a:solidFill>
+          <a:ln>
+            <a:solidFill>
+              <a:srgbClr val="092A38"/>
+            </a:solidFill>
+          </a:ln>
+        </p:spPr>
+        <p:style>
+          <a:lnRef idx="2">
+            <a:schemeClr val="accent1">
+              <a:shade val="15000"/>
+            </a:schemeClr>
+          </a:lnRef>
+          <a:fillRef idx="1">
+            <a:schemeClr val="accent1"/>
+          </a:fillRef>
+          <a:effectRef idx="0">
+            <a:schemeClr val="accent1"/>
+          </a:effectRef>
+          <a:fontRef idx="minor"/>
+        </p:style>
+        <p:txBody>
+          <a:bodyPr lIns="90000" tIns="45000" rIns="90000" bIns="45000" anchor="ctr">
+            <a:noAutofit/>
+          </a:bodyPr>
+          <a:lstStyle/>
+          <a:p>
+            <a:pPr algn="ctr" defTabSz="914400">
+              <a:lnSpc>
+                <a:spcPct val="100000"/>
+              </a:lnSpc>
+            </a:pPr>
+            <a:endParaRPr lang="en-US" sz="1800" b="0" strike="noStrike" spc="-1">
+              <a:solidFill>
+                <a:schemeClr val="lt1"/>
+              </a:solidFill>
+              <a:latin typeface="Aptos"/>
+            </a:endParaRPr>
+          </a:p>
+        </p:txBody>
+      </p:sp>
+      <p:sp>
+        <p:nvSpPr>
+          <p:cNvPr id="27" name="Rectangle 13"/>
+          <p:cNvSpPr/>
+          <p:nvPr/>
+        </p:nvSpPr>
+        <p:spPr>
+          <a:xfrm>
+            <a:off x="228600" y="0"/>
+            <a:ext cx="90000" cy="6856560"/>
+          </a:xfrm>
+          <a:prstGeom prst="rect">
+            <a:avLst/>
+          </a:prstGeom>
+          <a:solidFill>
+            <a:srgbClr val="C8202F"/>
+          </a:solidFill>
+          <a:ln>
+            <a:noFill/>
+          </a:ln>
+        </p:spPr>
+        <p:style>
+          <a:lnRef idx="2">
+            <a:schemeClr val="accent1">
+              <a:shade val="15000"/>
+            </a:schemeClr>
+          </a:lnRef>
+          <a:fillRef idx="1">
+            <a:schemeClr val="accent1"/>
+          </a:fillRef>
+          <a:effectRef idx="0">
+            <a:schemeClr val="accent1"/>
+          </a:effectRef>
+          <a:fontRef idx="minor"/>
+        </p:style>
+        <p:txBody>
+          <a:bodyPr lIns="90000" tIns="45000" rIns="90000" bIns="45000" anchor="ctr">
+            <a:noAutofit/>
+          </a:bodyPr>
+          <a:lstStyle/>
+          <a:p>
+            <a:pPr algn="ctr" defTabSz="914400">
+              <a:lnSpc>
+                <a:spcPct val="100000"/>
+              </a:lnSpc>
+            </a:pPr>
+            <a:endParaRPr lang="en-US" sz="1800" b="0" strike="noStrike" spc="-1">
+              <a:solidFill>
+                <a:schemeClr val="lt1"/>
+              </a:solidFill>
+              <a:latin typeface="Aptos"/>
+            </a:endParaRPr>
+          </a:p>
+        </p:txBody>
+      </p:sp>
+      <p:pic>
+        <p:nvPicPr>
+          <p:cNvPr id="28" name="Picture 8"/>
           <p:cNvPicPr/>
           <p:nvPr/>
         </p:nvPicPr>
@@ -1663,15 +2915,15 @@
       </p:pic>
       <p:pic>
         <p:nvPicPr>
-          <p:cNvPr id="14" name="Graphic 16" descr=""/>
+          <p:cNvPr id="29" name="Graphic 16"/>
           <p:cNvPicPr/>
           <p:nvPr/>
         </p:nvPicPr>
         <p:blipFill>
-          <a:blip r:embed="rId4">
+          <a:blip>
             <a:extLst>
               <a:ext uri="{96DAC541-7B7A-43D3-8B79-37D633B846F1}">
-                <asvg:svgBlip xmlns:asvg="http://schemas.microsoft.com/office/drawing/2016/SVG/main" r:embed="rId5"/>
+                <asvg:svgBlip xmlns:asvg="http://schemas.microsoft.com/office/drawing/2016/SVG/main" r:embed="rId4"/>
               </a:ext>
             </a:extLst>
           </a:blip>
@@ -1692,7 +2944,7 @@
       </p:pic>
       <p:sp>
         <p:nvSpPr>
-          <p:cNvPr id="15" name="PlaceHolder 1"/>
+          <p:cNvPr id="30" name="PlaceHolder 1"/>
           <p:cNvSpPr>
             <a:spLocks noGrp="1"/>
           </p:cNvSpPr>
@@ -1714,15 +2966,16 @@
           </a:ln>
         </p:spPr>
         <p:txBody>
-          <a:bodyPr lIns="0" rIns="0" tIns="0" bIns="0" anchor="ctr">
+          <a:bodyPr lIns="0" tIns="0" rIns="0" bIns="0" anchor="ctr">
             <a:noAutofit/>
           </a:bodyPr>
+          <a:lstStyle/>
           <a:p>
             <a:pPr indent="0">
               <a:buNone/>
             </a:pPr>
             <a:r>
-              <a:rPr b="0" lang="en-US" sz="4400" spc="-1" strike="noStrike">
+              <a:rPr lang="en-US" sz="4400" b="0" strike="noStrike" spc="-1">
                 <a:solidFill>
                   <a:schemeClr val="dk1"/>
                 </a:solidFill>
@@ -1730,18 +2983,12 @@
               </a:rPr>
               <a:t>Click to edit the title text format</a:t>
             </a:r>
-            <a:endParaRPr b="0" lang="en-US" sz="4400" spc="-1" strike="noStrike">
-              <a:solidFill>
-                <a:schemeClr val="dk1"/>
-              </a:solidFill>
-              <a:latin typeface="Aptos"/>
-            </a:endParaRPr>
-          </a:p>
-        </p:txBody>
-      </p:sp>
-      <p:sp>
-        <p:nvSpPr>
-          <p:cNvPr id="16" name="PlaceHolder 2"/>
+          </a:p>
+        </p:txBody>
+      </p:sp>
+      <p:sp>
+        <p:nvSpPr>
+          <p:cNvPr id="31" name="PlaceHolder 2"/>
           <p:cNvSpPr>
             <a:spLocks noGrp="1"/>
           </p:cNvSpPr>
@@ -1763,9 +3010,10 @@
           </a:ln>
         </p:spPr>
         <p:txBody>
-          <a:bodyPr lIns="0" rIns="0" tIns="0" bIns="0" anchor="t">
+          <a:bodyPr lIns="0" tIns="0" rIns="0" bIns="0" anchor="t">
             <a:normAutofit/>
           </a:bodyPr>
+          <a:lstStyle/>
           <a:p>
             <a:pPr marL="432000" indent="-324000">
               <a:lnSpc>
@@ -1782,7 +3030,7 @@
               <a:buChar char=""/>
             </a:pPr>
             <a:r>
-              <a:rPr b="0" lang="en-US" sz="1800" spc="-1" strike="noStrike">
+              <a:rPr lang="en-US" sz="1800" b="0" strike="noStrike" spc="-1">
                 <a:solidFill>
                   <a:schemeClr val="dk1"/>
                 </a:solidFill>
@@ -1790,15 +3038,9 @@
               </a:rPr>
               <a:t>Click to edit the outline text format</a:t>
             </a:r>
-            <a:endParaRPr b="0" lang="en-US" sz="1800" spc="-1" strike="noStrike">
-              <a:solidFill>
-                <a:schemeClr val="dk1"/>
-              </a:solidFill>
-              <a:latin typeface="Aptos"/>
-            </a:endParaRPr>
-          </a:p>
-          <a:p>
-            <a:pPr lvl="1" marL="864000" indent="-324000">
+          </a:p>
+          <a:p>
+            <a:pPr marL="864000" lvl="1" indent="-324000">
               <a:lnSpc>
                 <a:spcPct val="90000"/>
               </a:lnSpc>
@@ -1813,7 +3055,7 @@
               <a:buChar char=""/>
             </a:pPr>
             <a:r>
-              <a:rPr b="0" lang="en-US" sz="1800" spc="-1" strike="noStrike">
+              <a:rPr lang="en-US" sz="1800" b="0" strike="noStrike" spc="-1">
                 <a:solidFill>
                   <a:schemeClr val="dk1"/>
                 </a:solidFill>
@@ -1821,15 +3063,9 @@
               </a:rPr>
               <a:t>Second Outline Level</a:t>
             </a:r>
-            <a:endParaRPr b="0" lang="en-US" sz="1800" spc="-1" strike="noStrike">
-              <a:solidFill>
-                <a:schemeClr val="dk1"/>
-              </a:solidFill>
-              <a:latin typeface="Aptos"/>
-            </a:endParaRPr>
-          </a:p>
-          <a:p>
-            <a:pPr lvl="2" marL="1296000" indent="-288000">
+          </a:p>
+          <a:p>
+            <a:pPr marL="1296000" lvl="2" indent="-288000">
               <a:lnSpc>
                 <a:spcPct val="90000"/>
               </a:lnSpc>
@@ -1844,7 +3080,7 @@
               <a:buChar char=""/>
             </a:pPr>
             <a:r>
-              <a:rPr b="0" lang="en-US" sz="1800" spc="-1" strike="noStrike">
+              <a:rPr lang="en-US" sz="1800" b="0" strike="noStrike" spc="-1">
                 <a:solidFill>
                   <a:schemeClr val="dk1"/>
                 </a:solidFill>
@@ -1852,15 +3088,9 @@
               </a:rPr>
               <a:t>Third Outline Level</a:t>
             </a:r>
-            <a:endParaRPr b="0" lang="en-US" sz="1800" spc="-1" strike="noStrike">
-              <a:solidFill>
-                <a:schemeClr val="dk1"/>
-              </a:solidFill>
-              <a:latin typeface="Aptos"/>
-            </a:endParaRPr>
-          </a:p>
-          <a:p>
-            <a:pPr lvl="3" marL="1728000" indent="-216000">
+          </a:p>
+          <a:p>
+            <a:pPr marL="1728000" lvl="3" indent="-216000">
               <a:lnSpc>
                 <a:spcPct val="90000"/>
               </a:lnSpc>
@@ -1875,7 +3105,7 @@
               <a:buChar char=""/>
             </a:pPr>
             <a:r>
-              <a:rPr b="0" lang="en-US" sz="1800" spc="-1" strike="noStrike">
+              <a:rPr lang="en-US" sz="1800" b="0" strike="noStrike" spc="-1">
                 <a:solidFill>
                   <a:schemeClr val="dk1"/>
                 </a:solidFill>
@@ -1883,15 +3113,9 @@
               </a:rPr>
               <a:t>Fourth Outline Level</a:t>
             </a:r>
-            <a:endParaRPr b="0" lang="en-US" sz="1800" spc="-1" strike="noStrike">
-              <a:solidFill>
-                <a:schemeClr val="dk1"/>
-              </a:solidFill>
-              <a:latin typeface="Aptos"/>
-            </a:endParaRPr>
-          </a:p>
-          <a:p>
-            <a:pPr lvl="4" marL="2160000" indent="-216000">
+          </a:p>
+          <a:p>
+            <a:pPr marL="2160000" lvl="4" indent="-216000">
               <a:lnSpc>
                 <a:spcPct val="90000"/>
               </a:lnSpc>
@@ -1906,7 +3130,7 @@
               <a:buChar char=""/>
             </a:pPr>
             <a:r>
-              <a:rPr b="0" lang="en-US" sz="1800" spc="-1" strike="noStrike">
+              <a:rPr lang="en-US" sz="1800" b="0" strike="noStrike" spc="-1">
                 <a:solidFill>
                   <a:schemeClr val="dk1"/>
                 </a:solidFill>
@@ -1914,15 +3138,9 @@
               </a:rPr>
               <a:t>Fifth Outline Level</a:t>
             </a:r>
-            <a:endParaRPr b="0" lang="en-US" sz="1800" spc="-1" strike="noStrike">
-              <a:solidFill>
-                <a:schemeClr val="dk1"/>
-              </a:solidFill>
-              <a:latin typeface="Aptos"/>
-            </a:endParaRPr>
-          </a:p>
-          <a:p>
-            <a:pPr lvl="5" marL="2592000" indent="-216000">
+          </a:p>
+          <a:p>
+            <a:pPr marL="2592000" lvl="5" indent="-216000">
               <a:lnSpc>
                 <a:spcPct val="90000"/>
               </a:lnSpc>
@@ -1937,7 +3155,7 @@
               <a:buChar char=""/>
             </a:pPr>
             <a:r>
-              <a:rPr b="0" lang="en-US" sz="1800" spc="-1" strike="noStrike">
+              <a:rPr lang="en-US" sz="1800" b="0" strike="noStrike" spc="-1">
                 <a:solidFill>
                   <a:schemeClr val="dk1"/>
                 </a:solidFill>
@@ -1945,15 +3163,9 @@
               </a:rPr>
               <a:t>Sixth Outline Level</a:t>
             </a:r>
-            <a:endParaRPr b="0" lang="en-US" sz="1800" spc="-1" strike="noStrike">
-              <a:solidFill>
-                <a:schemeClr val="dk1"/>
-              </a:solidFill>
-              <a:latin typeface="Aptos"/>
-            </a:endParaRPr>
-          </a:p>
-          <a:p>
-            <a:pPr lvl="6" marL="3024000" indent="-216000">
+          </a:p>
+          <a:p>
+            <a:pPr marL="3024000" lvl="6" indent="-216000">
               <a:lnSpc>
                 <a:spcPct val="90000"/>
               </a:lnSpc>
@@ -1968,7 +3180,7 @@
               <a:buChar char=""/>
             </a:pPr>
             <a:r>
-              <a:rPr b="0" lang="en-US" sz="1800" spc="-1" strike="noStrike">
+              <a:rPr lang="en-US" sz="1800" b="0" strike="noStrike" spc="-1">
                 <a:solidFill>
                   <a:schemeClr val="dk1"/>
                 </a:solidFill>
@@ -1976,23 +3188,17 @@
               </a:rPr>
               <a:t>Seventh Outline Level</a:t>
             </a:r>
-            <a:endParaRPr b="0" lang="en-US" sz="1800" spc="-1" strike="noStrike">
-              <a:solidFill>
-                <a:schemeClr val="dk1"/>
-              </a:solidFill>
-              <a:latin typeface="Aptos"/>
-            </a:endParaRPr>
-          </a:p>
-        </p:txBody>
-      </p:sp>
-      <p:sp>
-        <p:nvSpPr>
-          <p:cNvPr id="17" name="PlaceHolder 3"/>
-          <p:cNvSpPr>
-            <a:spLocks noGrp="1"/>
-          </p:cNvSpPr>
-          <p:nvPr>
-            <p:ph type="ftr" idx="4"/>
+          </a:p>
+        </p:txBody>
+      </p:sp>
+      <p:sp>
+        <p:nvSpPr>
+          <p:cNvPr id="32" name="PlaceHolder 3"/>
+          <p:cNvSpPr>
+            <a:spLocks noGrp="1"/>
+          </p:cNvSpPr>
+          <p:nvPr>
+            <p:ph type="ftr" idx="7"/>
           </p:nvPr>
         </p:nvSpPr>
         <p:spPr>
@@ -2009,7 +3215,7 @@
           </a:ln>
         </p:spPr>
         <p:txBody>
-          <a:bodyPr lIns="91440" rIns="91440" tIns="45720" bIns="45720" anchor="ctr">
+          <a:bodyPr lIns="91440" tIns="45720" rIns="91440" bIns="45720" anchor="ctr">
             <a:noAutofit/>
           </a:bodyPr>
           <a:lstStyle>
@@ -2019,9 +3225,9 @@
               </a:lnSpc>
               <a:buNone/>
               <a:tabLst>
-                <a:tab algn="l" pos="0"/>
+                <a:tab pos="0" algn="l"/>
               </a:tabLst>
-              <a:defRPr b="0" lang="en-US" sz="1200" spc="-1" strike="noStrike">
+              <a:defRPr lang="en-US" sz="1200" b="0" strike="noStrike" spc="-1">
                 <a:solidFill>
                   <a:schemeClr val="dk1">
                     <a:tint val="82000"/>
@@ -2038,11 +3244,11 @@
               </a:lnSpc>
               <a:buNone/>
               <a:tabLst>
-                <a:tab algn="l" pos="0"/>
+                <a:tab pos="0" algn="l"/>
               </a:tabLst>
             </a:pPr>
             <a:r>
-              <a:rPr b="0" lang="en-US" sz="1200" spc="-1" strike="noStrike">
+              <a:rPr lang="en-US" sz="1200" b="0" strike="noStrike" spc="-1">
                 <a:solidFill>
                   <a:schemeClr val="dk1">
                     <a:tint val="82000"/>
@@ -2052,7 +3258,7 @@
               </a:rPr>
               <a:t>&lt;footer&gt;</a:t>
             </a:r>
-            <a:endParaRPr b="0" lang="en-US" sz="1200" spc="-1" strike="noStrike">
+            <a:endParaRPr lang="en-US" sz="1200" b="0" strike="noStrike" spc="-1">
               <a:solidFill>
                 <a:srgbClr val="000000"/>
               </a:solidFill>
@@ -2063,12 +3269,12 @@
       </p:sp>
       <p:sp>
         <p:nvSpPr>
-          <p:cNvPr id="18" name="PlaceHolder 4"/>
-          <p:cNvSpPr>
-            <a:spLocks noGrp="1"/>
-          </p:cNvSpPr>
-          <p:nvPr>
-            <p:ph type="sldNum" idx="5"/>
+          <p:cNvPr id="33" name="PlaceHolder 4"/>
+          <p:cNvSpPr>
+            <a:spLocks noGrp="1"/>
+          </p:cNvSpPr>
+          <p:nvPr>
+            <p:ph type="sldNum" idx="8"/>
           </p:nvPr>
         </p:nvSpPr>
         <p:spPr>
@@ -2085,7 +3291,7 @@
           </a:ln>
         </p:spPr>
         <p:txBody>
-          <a:bodyPr lIns="91440" rIns="91440" tIns="45720" bIns="45720" anchor="ctr">
+          <a:bodyPr lIns="91440" tIns="45720" rIns="91440" bIns="45720" anchor="ctr">
             <a:noAutofit/>
           </a:bodyPr>
           <a:lstStyle>
@@ -2095,9 +3301,9 @@
               </a:lnSpc>
               <a:buNone/>
               <a:tabLst>
-                <a:tab algn="l" pos="0"/>
+                <a:tab pos="0" algn="l"/>
               </a:tabLst>
-              <a:defRPr b="0" lang="en-US" sz="1200" spc="-1" strike="noStrike">
+              <a:defRPr lang="en-US" sz="1200" b="0" strike="noStrike" spc="-1">
                 <a:solidFill>
                   <a:schemeClr val="dk1">
                     <a:tint val="82000"/>
@@ -2114,11 +3320,11 @@
               </a:lnSpc>
               <a:buNone/>
               <a:tabLst>
-                <a:tab algn="l" pos="0"/>
+                <a:tab pos="0" algn="l"/>
               </a:tabLst>
             </a:pPr>
-            <a:fld id="{91D92FAB-4EAF-4921-A84A-D1F12305F3FE}" type="slidenum">
-              <a:rPr b="0" lang="en-US" sz="1200" spc="-1" strike="noStrike">
+            <a:fld id="{2086F42C-E471-4DD4-85E6-E6D36D3B8C85}" type="slidenum">
+              <a:rPr lang="en-US" sz="1200" b="0" strike="noStrike" spc="-1">
                 <a:solidFill>
                   <a:schemeClr val="dk1">
                     <a:tint val="82000"/>
@@ -2126,9 +3332,9 @@
                 </a:solidFill>
                 <a:latin typeface="Aptos"/>
               </a:rPr>
-              <a:t>&lt;number&gt;</a:t>
+              <a:t>‹#›</a:t>
             </a:fld>
-            <a:endParaRPr b="0" lang="en-US" sz="1200" spc="-1" strike="noStrike">
+            <a:endParaRPr lang="en-US" sz="1200" b="0" strike="noStrike" spc="-1">
               <a:solidFill>
                 <a:srgbClr val="000000"/>
               </a:solidFill>
@@ -2139,12 +3345,12 @@
       </p:sp>
       <p:sp>
         <p:nvSpPr>
-          <p:cNvPr id="19" name="PlaceHolder 5"/>
-          <p:cNvSpPr>
-            <a:spLocks noGrp="1"/>
-          </p:cNvSpPr>
-          <p:nvPr>
-            <p:ph type="dt" idx="6"/>
+          <p:cNvPr id="34" name="PlaceHolder 5"/>
+          <p:cNvSpPr>
+            <a:spLocks noGrp="1"/>
+          </p:cNvSpPr>
+          <p:nvPr>
+            <p:ph type="dt" idx="9"/>
           </p:nvPr>
         </p:nvSpPr>
         <p:spPr>
@@ -2161,13 +3367,13 @@
           </a:ln>
         </p:spPr>
         <p:txBody>
-          <a:bodyPr lIns="91440" rIns="91440" tIns="45720" bIns="45720" anchor="ctr">
+          <a:bodyPr lIns="91440" tIns="45720" rIns="91440" bIns="45720" anchor="ctr">
             <a:noAutofit/>
           </a:bodyPr>
           <a:lstStyle>
             <a:lvl1pPr indent="0">
               <a:buNone/>
-              <a:defRPr b="0" lang="en-US" sz="1400" spc="-1" strike="noStrike">
+              <a:defRPr lang="en-US" sz="1400" b="0" strike="noStrike" spc="-1">
                 <a:solidFill>
                   <a:srgbClr val="000000"/>
                 </a:solidFill>
@@ -2180,7 +3386,7 @@
               <a:buNone/>
             </a:pPr>
             <a:r>
-              <a:rPr b="0" lang="en-US" sz="1400" spc="-1" strike="noStrike">
+              <a:rPr lang="en-US" sz="1400" b="0" strike="noStrike" spc="-1">
                 <a:solidFill>
                   <a:srgbClr val="000000"/>
                 </a:solidFill>
@@ -2188,33 +3394,307 @@
               </a:rPr>
               <a:t>&lt;date/time&gt;</a:t>
             </a:r>
-            <a:endParaRPr b="0" lang="en-US" sz="1400" spc="-1" strike="noStrike">
-              <a:solidFill>
-                <a:srgbClr val="000000"/>
-              </a:solidFill>
-              <a:latin typeface="Times New Roman"/>
-            </a:endParaRPr>
           </a:p>
         </p:txBody>
       </p:sp>
     </p:spTree>
   </p:cSld>
-  <p:clrMap bg1="lt1" bg2="lt2" tx1="dk1" tx2="dk2" accent1="accent1" accent2="accent2" accent3="accent3" accent4="accent4" accent5="accent5" accent6="accent6" hlink="hlink" folHlink="folHlink"/>
+  <p:clrMap bg1="lt1" tx1="dk1" bg2="lt2" tx2="dk2" accent1="accent1" accent2="accent2" accent3="accent3" accent4="accent4" accent5="accent5" accent6="accent6" hlink="hlink" folHlink="folHlink"/>
   <p:sldLayoutIdLst>
-    <p:sldLayoutId id="2147483651" r:id="rId6"/>
-    <p:sldLayoutId id="2147483652" r:id="rId7"/>
+    <p:sldLayoutId id="2147483654" r:id="rId1"/>
   </p:sldLayoutIdLst>
+  <p:txStyles>
+    <p:titleStyle>
+      <a:lvl1pPr algn="l" defTabSz="914400" rtl="0" eaLnBrk="1" latinLnBrk="0" hangingPunct="1">
+        <a:lnSpc>
+          <a:spcPct val="90000"/>
+        </a:lnSpc>
+        <a:spcBef>
+          <a:spcPct val="0"/>
+        </a:spcBef>
+        <a:buNone/>
+        <a:defRPr sz="4400" kern="1200">
+          <a:solidFill>
+            <a:schemeClr val="tx1"/>
+          </a:solidFill>
+          <a:latin typeface="+mj-lt"/>
+          <a:ea typeface="+mj-ea"/>
+          <a:cs typeface="+mj-cs"/>
+        </a:defRPr>
+      </a:lvl1pPr>
+    </p:titleStyle>
+    <p:bodyStyle>
+      <a:lvl1pPr marL="228600" indent="-228600" algn="l" defTabSz="914400" rtl="0" eaLnBrk="1" latinLnBrk="0" hangingPunct="1">
+        <a:lnSpc>
+          <a:spcPct val="90000"/>
+        </a:lnSpc>
+        <a:spcBef>
+          <a:spcPts val="1000"/>
+        </a:spcBef>
+        <a:buFont typeface="Arial" panose="020B0604020202020204" pitchFamily="34" charset="0"/>
+        <a:buChar char="•"/>
+        <a:defRPr sz="2800" kern="1200">
+          <a:solidFill>
+            <a:schemeClr val="tx1"/>
+          </a:solidFill>
+          <a:latin typeface="+mn-lt"/>
+          <a:ea typeface="+mn-ea"/>
+          <a:cs typeface="+mn-cs"/>
+        </a:defRPr>
+      </a:lvl1pPr>
+      <a:lvl2pPr marL="685800" indent="-228600" algn="l" defTabSz="914400" rtl="0" eaLnBrk="1" latinLnBrk="0" hangingPunct="1">
+        <a:lnSpc>
+          <a:spcPct val="90000"/>
+        </a:lnSpc>
+        <a:spcBef>
+          <a:spcPts val="500"/>
+        </a:spcBef>
+        <a:buFont typeface="Arial" panose="020B0604020202020204" pitchFamily="34" charset="0"/>
+        <a:buChar char="•"/>
+        <a:defRPr sz="2400" kern="1200">
+          <a:solidFill>
+            <a:schemeClr val="tx1"/>
+          </a:solidFill>
+          <a:latin typeface="+mn-lt"/>
+          <a:ea typeface="+mn-ea"/>
+          <a:cs typeface="+mn-cs"/>
+        </a:defRPr>
+      </a:lvl2pPr>
+      <a:lvl3pPr marL="1143000" indent="-228600" algn="l" defTabSz="914400" rtl="0" eaLnBrk="1" latinLnBrk="0" hangingPunct="1">
+        <a:lnSpc>
+          <a:spcPct val="90000"/>
+        </a:lnSpc>
+        <a:spcBef>
+          <a:spcPts val="500"/>
+        </a:spcBef>
+        <a:buFont typeface="Arial" panose="020B0604020202020204" pitchFamily="34" charset="0"/>
+        <a:buChar char="•"/>
+        <a:defRPr sz="2000" kern="1200">
+          <a:solidFill>
+            <a:schemeClr val="tx1"/>
+          </a:solidFill>
+          <a:latin typeface="+mn-lt"/>
+          <a:ea typeface="+mn-ea"/>
+          <a:cs typeface="+mn-cs"/>
+        </a:defRPr>
+      </a:lvl3pPr>
+      <a:lvl4pPr marL="1600200" indent="-228600" algn="l" defTabSz="914400" rtl="0" eaLnBrk="1" latinLnBrk="0" hangingPunct="1">
+        <a:lnSpc>
+          <a:spcPct val="90000"/>
+        </a:lnSpc>
+        <a:spcBef>
+          <a:spcPts val="500"/>
+        </a:spcBef>
+        <a:buFont typeface="Arial" panose="020B0604020202020204" pitchFamily="34" charset="0"/>
+        <a:buChar char="•"/>
+        <a:defRPr sz="1800" kern="1200">
+          <a:solidFill>
+            <a:schemeClr val="tx1"/>
+          </a:solidFill>
+          <a:latin typeface="+mn-lt"/>
+          <a:ea typeface="+mn-ea"/>
+          <a:cs typeface="+mn-cs"/>
+        </a:defRPr>
+      </a:lvl4pPr>
+      <a:lvl5pPr marL="2057400" indent="-228600" algn="l" defTabSz="914400" rtl="0" eaLnBrk="1" latinLnBrk="0" hangingPunct="1">
+        <a:lnSpc>
+          <a:spcPct val="90000"/>
+        </a:lnSpc>
+        <a:spcBef>
+          <a:spcPts val="500"/>
+        </a:spcBef>
+        <a:buFont typeface="Arial" panose="020B0604020202020204" pitchFamily="34" charset="0"/>
+        <a:buChar char="•"/>
+        <a:defRPr sz="1800" kern="1200">
+          <a:solidFill>
+            <a:schemeClr val="tx1"/>
+          </a:solidFill>
+          <a:latin typeface="+mn-lt"/>
+          <a:ea typeface="+mn-ea"/>
+          <a:cs typeface="+mn-cs"/>
+        </a:defRPr>
+      </a:lvl5pPr>
+      <a:lvl6pPr marL="2514600" indent="-228600" algn="l" defTabSz="914400" rtl="0" eaLnBrk="1" latinLnBrk="0" hangingPunct="1">
+        <a:lnSpc>
+          <a:spcPct val="90000"/>
+        </a:lnSpc>
+        <a:spcBef>
+          <a:spcPts val="500"/>
+        </a:spcBef>
+        <a:buFont typeface="Arial" panose="020B0604020202020204" pitchFamily="34" charset="0"/>
+        <a:buChar char="•"/>
+        <a:defRPr sz="1800" kern="1200">
+          <a:solidFill>
+            <a:schemeClr val="tx1"/>
+          </a:solidFill>
+          <a:latin typeface="+mn-lt"/>
+          <a:ea typeface="+mn-ea"/>
+          <a:cs typeface="+mn-cs"/>
+        </a:defRPr>
+      </a:lvl6pPr>
+      <a:lvl7pPr marL="2971800" indent="-228600" algn="l" defTabSz="914400" rtl="0" eaLnBrk="1" latinLnBrk="0" hangingPunct="1">
+        <a:lnSpc>
+          <a:spcPct val="90000"/>
+        </a:lnSpc>
+        <a:spcBef>
+          <a:spcPts val="500"/>
+        </a:spcBef>
+        <a:buFont typeface="Arial" panose="020B0604020202020204" pitchFamily="34" charset="0"/>
+        <a:buChar char="•"/>
+        <a:defRPr sz="1800" kern="1200">
+          <a:solidFill>
+            <a:schemeClr val="tx1"/>
+          </a:solidFill>
+          <a:latin typeface="+mn-lt"/>
+          <a:ea typeface="+mn-ea"/>
+          <a:cs typeface="+mn-cs"/>
+        </a:defRPr>
+      </a:lvl7pPr>
+      <a:lvl8pPr marL="3429000" indent="-228600" algn="l" defTabSz="914400" rtl="0" eaLnBrk="1" latinLnBrk="0" hangingPunct="1">
+        <a:lnSpc>
+          <a:spcPct val="90000"/>
+        </a:lnSpc>
+        <a:spcBef>
+          <a:spcPts val="500"/>
+        </a:spcBef>
+        <a:buFont typeface="Arial" panose="020B0604020202020204" pitchFamily="34" charset="0"/>
+        <a:buChar char="•"/>
+        <a:defRPr sz="1800" kern="1200">
+          <a:solidFill>
+            <a:schemeClr val="tx1"/>
+          </a:solidFill>
+          <a:latin typeface="+mn-lt"/>
+          <a:ea typeface="+mn-ea"/>
+          <a:cs typeface="+mn-cs"/>
+        </a:defRPr>
+      </a:lvl8pPr>
+      <a:lvl9pPr marL="3886200" indent="-228600" algn="l" defTabSz="914400" rtl="0" eaLnBrk="1" latinLnBrk="0" hangingPunct="1">
+        <a:lnSpc>
+          <a:spcPct val="90000"/>
+        </a:lnSpc>
+        <a:spcBef>
+          <a:spcPts val="500"/>
+        </a:spcBef>
+        <a:buFont typeface="Arial" panose="020B0604020202020204" pitchFamily="34" charset="0"/>
+        <a:buChar char="•"/>
+        <a:defRPr sz="1800" kern="1200">
+          <a:solidFill>
+            <a:schemeClr val="tx1"/>
+          </a:solidFill>
+          <a:latin typeface="+mn-lt"/>
+          <a:ea typeface="+mn-ea"/>
+          <a:cs typeface="+mn-cs"/>
+        </a:defRPr>
+      </a:lvl9pPr>
+    </p:bodyStyle>
+    <p:otherStyle>
+      <a:defPPr>
+        <a:defRPr lang="en-US"/>
+      </a:defPPr>
+      <a:lvl1pPr marL="0" algn="l" defTabSz="914400" rtl="0" eaLnBrk="1" latinLnBrk="0" hangingPunct="1">
+        <a:defRPr sz="1800" kern="1200">
+          <a:solidFill>
+            <a:schemeClr val="tx1"/>
+          </a:solidFill>
+          <a:latin typeface="+mn-lt"/>
+          <a:ea typeface="+mn-ea"/>
+          <a:cs typeface="+mn-cs"/>
+        </a:defRPr>
+      </a:lvl1pPr>
+      <a:lvl2pPr marL="457200" algn="l" defTabSz="914400" rtl="0" eaLnBrk="1" latinLnBrk="0" hangingPunct="1">
+        <a:defRPr sz="1800" kern="1200">
+          <a:solidFill>
+            <a:schemeClr val="tx1"/>
+          </a:solidFill>
+          <a:latin typeface="+mn-lt"/>
+          <a:ea typeface="+mn-ea"/>
+          <a:cs typeface="+mn-cs"/>
+        </a:defRPr>
+      </a:lvl2pPr>
+      <a:lvl3pPr marL="914400" algn="l" defTabSz="914400" rtl="0" eaLnBrk="1" latinLnBrk="0" hangingPunct="1">
+        <a:defRPr sz="1800" kern="1200">
+          <a:solidFill>
+            <a:schemeClr val="tx1"/>
+          </a:solidFill>
+          <a:latin typeface="+mn-lt"/>
+          <a:ea typeface="+mn-ea"/>
+          <a:cs typeface="+mn-cs"/>
+        </a:defRPr>
+      </a:lvl3pPr>
+      <a:lvl4pPr marL="1371600" algn="l" defTabSz="914400" rtl="0" eaLnBrk="1" latinLnBrk="0" hangingPunct="1">
+        <a:defRPr sz="1800" kern="1200">
+          <a:solidFill>
+            <a:schemeClr val="tx1"/>
+          </a:solidFill>
+          <a:latin typeface="+mn-lt"/>
+          <a:ea typeface="+mn-ea"/>
+          <a:cs typeface="+mn-cs"/>
+        </a:defRPr>
+      </a:lvl4pPr>
+      <a:lvl5pPr marL="1828800" algn="l" defTabSz="914400" rtl="0" eaLnBrk="1" latinLnBrk="0" hangingPunct="1">
+        <a:defRPr sz="1800" kern="1200">
+          <a:solidFill>
+            <a:schemeClr val="tx1"/>
+          </a:solidFill>
+          <a:latin typeface="+mn-lt"/>
+          <a:ea typeface="+mn-ea"/>
+          <a:cs typeface="+mn-cs"/>
+        </a:defRPr>
+      </a:lvl5pPr>
+      <a:lvl6pPr marL="2286000" algn="l" defTabSz="914400" rtl="0" eaLnBrk="1" latinLnBrk="0" hangingPunct="1">
+        <a:defRPr sz="1800" kern="1200">
+          <a:solidFill>
+            <a:schemeClr val="tx1"/>
+          </a:solidFill>
+          <a:latin typeface="+mn-lt"/>
+          <a:ea typeface="+mn-ea"/>
+          <a:cs typeface="+mn-cs"/>
+        </a:defRPr>
+      </a:lvl6pPr>
+      <a:lvl7pPr marL="2743200" algn="l" defTabSz="914400" rtl="0" eaLnBrk="1" latinLnBrk="0" hangingPunct="1">
+        <a:defRPr sz="1800" kern="1200">
+          <a:solidFill>
+            <a:schemeClr val="tx1"/>
+          </a:solidFill>
+          <a:latin typeface="+mn-lt"/>
+          <a:ea typeface="+mn-ea"/>
+          <a:cs typeface="+mn-cs"/>
+        </a:defRPr>
+      </a:lvl7pPr>
+      <a:lvl8pPr marL="3200400" algn="l" defTabSz="914400" rtl="0" eaLnBrk="1" latinLnBrk="0" hangingPunct="1">
+        <a:defRPr sz="1800" kern="1200">
+          <a:solidFill>
+            <a:schemeClr val="tx1"/>
+          </a:solidFill>
+          <a:latin typeface="+mn-lt"/>
+          <a:ea typeface="+mn-ea"/>
+          <a:cs typeface="+mn-cs"/>
+        </a:defRPr>
+      </a:lvl8pPr>
+      <a:lvl9pPr marL="3657600" algn="l" defTabSz="914400" rtl="0" eaLnBrk="1" latinLnBrk="0" hangingPunct="1">
+        <a:defRPr sz="1800" kern="1200">
+          <a:solidFill>
+            <a:schemeClr val="tx1"/>
+          </a:solidFill>
+          <a:latin typeface="+mn-lt"/>
+          <a:ea typeface="+mn-ea"/>
+          <a:cs typeface="+mn-cs"/>
+        </a:defRPr>
+      </a:lvl9pPr>
+    </p:otherStyle>
+  </p:txStyles>
 </p:sldMaster>
 </file>
 
-<file path=ppt/slideMasters/slideMaster3.xml><?xml version="1.0" encoding="utf-8"?>
-<p:sldMaster xmlns:a="http://schemas.openxmlformats.org/drawingml/2006/main" xmlns:p="http://schemas.openxmlformats.org/presentationml/2006/main" xmlns:r="http://schemas.openxmlformats.org/officeDocument/2006/relationships" xmlns:p14="http://schemas.microsoft.com/office/powerpoint/2010/main" xmlns:p15="http://schemas.microsoft.com/office/powerpoint/2012/main" xmlns:mc="http://schemas.openxmlformats.org/markup-compatibility/2006">
+<file path=ppt/slides/slide1.xml><?xml version="1.0" encoding="utf-8"?>
+<p:sld xmlns:a="http://schemas.openxmlformats.org/drawingml/2006/main" xmlns:r="http://schemas.openxmlformats.org/officeDocument/2006/relationships" xmlns:p="http://schemas.openxmlformats.org/presentationml/2006/main">
   <p:cSld>
     <p:bg>
       <p:bgPr>
         <a:solidFill>
-          <a:srgbClr val="f4f6f7"/>
+          <a:srgbClr val="F4F6F7"/>
         </a:solidFill>
+        <a:effectLst/>
       </p:bgPr>
     </p:bg>
     <p:spTree>
@@ -2231,735 +3711,6 @@
           <a:chExt cx="0" cy="0"/>
         </a:xfrm>
       </p:grpSpPr>
-      <p:pic>
-        <p:nvPicPr>
-          <p:cNvPr id="25" name="Picture 19" descr=""/>
-          <p:cNvPicPr/>
-          <p:nvPr/>
-        </p:nvPicPr>
-        <p:blipFill>
-          <a:blip r:embed="rId2">
-            <a:alphaModFix amt="20000"/>
-          </a:blip>
-          <a:stretch/>
-        </p:blipFill>
-        <p:spPr>
-          <a:xfrm>
-            <a:off x="4267080" y="1444680"/>
-            <a:ext cx="3970440" cy="3656160"/>
-          </a:xfrm>
-          <a:prstGeom prst="rect">
-            <a:avLst/>
-          </a:prstGeom>
-          <a:ln w="0">
-            <a:noFill/>
-          </a:ln>
-        </p:spPr>
-      </p:pic>
-      <p:sp>
-        <p:nvSpPr>
-          <p:cNvPr id="26" name="Rectangle 11"/>
-          <p:cNvSpPr/>
-          <p:nvPr/>
-        </p:nvSpPr>
-        <p:spPr>
-          <a:xfrm>
-            <a:off x="0" y="0"/>
-            <a:ext cx="227160" cy="6856560"/>
-          </a:xfrm>
-          <a:prstGeom prst="rect">
-            <a:avLst/>
-          </a:prstGeom>
-          <a:solidFill>
-            <a:srgbClr val="17365d"/>
-          </a:solidFill>
-          <a:ln>
-            <a:solidFill>
-              <a:srgbClr val="092a38"/>
-            </a:solidFill>
-          </a:ln>
-        </p:spPr>
-        <p:style>
-          <a:lnRef idx="2">
-            <a:schemeClr val="accent1">
-              <a:shade val="15000"/>
-            </a:schemeClr>
-          </a:lnRef>
-          <a:fillRef idx="1">
-            <a:schemeClr val="accent1"/>
-          </a:fillRef>
-          <a:effectRef idx="0">
-            <a:schemeClr val="accent1"/>
-          </a:effectRef>
-          <a:fontRef idx="minor"/>
-        </p:style>
-        <p:txBody>
-          <a:bodyPr lIns="90000" rIns="90000" tIns="45000" bIns="45000" anchor="ctr">
-            <a:noAutofit/>
-          </a:bodyPr>
-          <a:p>
-            <a:pPr algn="ctr" defTabSz="914400">
-              <a:lnSpc>
-                <a:spcPct val="100000"/>
-              </a:lnSpc>
-            </a:pPr>
-            <a:endParaRPr b="0" lang="en-US" sz="1800" spc="-1" strike="noStrike">
-              <a:solidFill>
-                <a:schemeClr val="lt1"/>
-              </a:solidFill>
-              <a:latin typeface="Aptos"/>
-            </a:endParaRPr>
-          </a:p>
-        </p:txBody>
-      </p:sp>
-      <p:sp>
-        <p:nvSpPr>
-          <p:cNvPr id="27" name="Rectangle 13"/>
-          <p:cNvSpPr/>
-          <p:nvPr/>
-        </p:nvSpPr>
-        <p:spPr>
-          <a:xfrm>
-            <a:off x="228600" y="0"/>
-            <a:ext cx="90000" cy="6856560"/>
-          </a:xfrm>
-          <a:prstGeom prst="rect">
-            <a:avLst/>
-          </a:prstGeom>
-          <a:solidFill>
-            <a:srgbClr val="c8202f"/>
-          </a:solidFill>
-          <a:ln>
-            <a:noFill/>
-          </a:ln>
-        </p:spPr>
-        <p:style>
-          <a:lnRef idx="2">
-            <a:schemeClr val="accent1">
-              <a:shade val="15000"/>
-            </a:schemeClr>
-          </a:lnRef>
-          <a:fillRef idx="1">
-            <a:schemeClr val="accent1"/>
-          </a:fillRef>
-          <a:effectRef idx="0">
-            <a:schemeClr val="accent1"/>
-          </a:effectRef>
-          <a:fontRef idx="minor"/>
-        </p:style>
-        <p:txBody>
-          <a:bodyPr lIns="90000" rIns="90000" tIns="45000" bIns="45000" anchor="ctr">
-            <a:noAutofit/>
-          </a:bodyPr>
-          <a:p>
-            <a:pPr algn="ctr" defTabSz="914400">
-              <a:lnSpc>
-                <a:spcPct val="100000"/>
-              </a:lnSpc>
-            </a:pPr>
-            <a:endParaRPr b="0" lang="en-US" sz="1800" spc="-1" strike="noStrike">
-              <a:solidFill>
-                <a:schemeClr val="lt1"/>
-              </a:solidFill>
-              <a:latin typeface="Aptos"/>
-            </a:endParaRPr>
-          </a:p>
-        </p:txBody>
-      </p:sp>
-      <p:pic>
-        <p:nvPicPr>
-          <p:cNvPr id="28" name="Picture 8" descr=""/>
-          <p:cNvPicPr/>
-          <p:nvPr/>
-        </p:nvPicPr>
-        <p:blipFill>
-          <a:blip r:embed="rId3">
-            <a:alphaModFix amt="20000"/>
-          </a:blip>
-          <a:stretch/>
-        </p:blipFill>
-        <p:spPr>
-          <a:xfrm>
-            <a:off x="4267080" y="1444680"/>
-            <a:ext cx="3970440" cy="3656160"/>
-          </a:xfrm>
-          <a:prstGeom prst="rect">
-            <a:avLst/>
-          </a:prstGeom>
-          <a:ln w="0">
-            <a:noFill/>
-          </a:ln>
-        </p:spPr>
-      </p:pic>
-      <p:pic>
-        <p:nvPicPr>
-          <p:cNvPr id="29" name="Graphic 16" descr=""/>
-          <p:cNvPicPr/>
-          <p:nvPr/>
-        </p:nvPicPr>
-        <p:blipFill>
-          <a:blip r:embed="rId4">
-            <a:extLst>
-              <a:ext uri="{96DAC541-7B7A-43D3-8B79-37D633B846F1}">
-                <asvg:svgBlip xmlns:asvg="http://schemas.microsoft.com/office/drawing/2016/SVG/main" r:embed="rId5"/>
-              </a:ext>
-            </a:extLst>
-          </a:blip>
-          <a:stretch/>
-        </p:blipFill>
-        <p:spPr>
-          <a:xfrm>
-            <a:off x="10650960" y="119160"/>
-            <a:ext cx="1324080" cy="1324080"/>
-          </a:xfrm>
-          <a:prstGeom prst="rect">
-            <a:avLst/>
-          </a:prstGeom>
-          <a:ln w="0">
-            <a:noFill/>
-          </a:ln>
-        </p:spPr>
-      </p:pic>
-      <p:sp>
-        <p:nvSpPr>
-          <p:cNvPr id="30" name="PlaceHolder 1"/>
-          <p:cNvSpPr>
-            <a:spLocks noGrp="1"/>
-          </p:cNvSpPr>
-          <p:nvPr>
-            <p:ph type="title"/>
-          </p:nvPr>
-        </p:nvSpPr>
-        <p:spPr>
-          <a:xfrm>
-            <a:off x="838080" y="365040"/>
-            <a:ext cx="10514160" cy="1324080"/>
-          </a:xfrm>
-          <a:prstGeom prst="rect">
-            <a:avLst/>
-          </a:prstGeom>
-          <a:noFill/>
-          <a:ln w="0">
-            <a:noFill/>
-          </a:ln>
-        </p:spPr>
-        <p:txBody>
-          <a:bodyPr lIns="0" rIns="0" tIns="0" bIns="0" anchor="ctr">
-            <a:noAutofit/>
-          </a:bodyPr>
-          <a:p>
-            <a:pPr indent="0">
-              <a:buNone/>
-            </a:pPr>
-            <a:r>
-              <a:rPr b="0" lang="en-US" sz="4400" spc="-1" strike="noStrike">
-                <a:solidFill>
-                  <a:schemeClr val="dk1"/>
-                </a:solidFill>
-                <a:latin typeface="Aptos"/>
-              </a:rPr>
-              <a:t>Click to edit the title text format</a:t>
-            </a:r>
-            <a:endParaRPr b="0" lang="en-US" sz="4400" spc="-1" strike="noStrike">
-              <a:solidFill>
-                <a:schemeClr val="dk1"/>
-              </a:solidFill>
-              <a:latin typeface="Aptos"/>
-            </a:endParaRPr>
-          </a:p>
-        </p:txBody>
-      </p:sp>
-      <p:sp>
-        <p:nvSpPr>
-          <p:cNvPr id="31" name="PlaceHolder 2"/>
-          <p:cNvSpPr>
-            <a:spLocks noGrp="1"/>
-          </p:cNvSpPr>
-          <p:nvPr>
-            <p:ph type="body"/>
-          </p:nvPr>
-        </p:nvSpPr>
-        <p:spPr>
-          <a:xfrm>
-            <a:off x="838080" y="1825560"/>
-            <a:ext cx="10514160" cy="4349880"/>
-          </a:xfrm>
-          <a:prstGeom prst="rect">
-            <a:avLst/>
-          </a:prstGeom>
-          <a:noFill/>
-          <a:ln w="0">
-            <a:noFill/>
-          </a:ln>
-        </p:spPr>
-        <p:txBody>
-          <a:bodyPr lIns="0" rIns="0" tIns="0" bIns="0" anchor="t">
-            <a:normAutofit/>
-          </a:bodyPr>
-          <a:p>
-            <a:pPr marL="432000" indent="-324000">
-              <a:lnSpc>
-                <a:spcPct val="90000"/>
-              </a:lnSpc>
-              <a:spcBef>
-                <a:spcPts val="1417"/>
-              </a:spcBef>
-              <a:buClr>
-                <a:srgbClr val="000000"/>
-              </a:buClr>
-              <a:buSzPct val="45000"/>
-              <a:buFont typeface="Wingdings" charset="2"/>
-              <a:buChar char=""/>
-            </a:pPr>
-            <a:r>
-              <a:rPr b="0" lang="en-US" sz="1800" spc="-1" strike="noStrike">
-                <a:solidFill>
-                  <a:schemeClr val="dk1"/>
-                </a:solidFill>
-                <a:latin typeface="Aptos"/>
-              </a:rPr>
-              <a:t>Click to edit the outline text format</a:t>
-            </a:r>
-            <a:endParaRPr b="0" lang="en-US" sz="1800" spc="-1" strike="noStrike">
-              <a:solidFill>
-                <a:schemeClr val="dk1"/>
-              </a:solidFill>
-              <a:latin typeface="Aptos"/>
-            </a:endParaRPr>
-          </a:p>
-          <a:p>
-            <a:pPr lvl="1" marL="864000" indent="-324000">
-              <a:lnSpc>
-                <a:spcPct val="90000"/>
-              </a:lnSpc>
-              <a:spcBef>
-                <a:spcPts val="1134"/>
-              </a:spcBef>
-              <a:buClr>
-                <a:srgbClr val="000000"/>
-              </a:buClr>
-              <a:buSzPct val="75000"/>
-              <a:buFont typeface="Symbol" charset="2"/>
-              <a:buChar char=""/>
-            </a:pPr>
-            <a:r>
-              <a:rPr b="0" lang="en-US" sz="1800" spc="-1" strike="noStrike">
-                <a:solidFill>
-                  <a:schemeClr val="dk1"/>
-                </a:solidFill>
-                <a:latin typeface="Aptos"/>
-              </a:rPr>
-              <a:t>Second Outline Level</a:t>
-            </a:r>
-            <a:endParaRPr b="0" lang="en-US" sz="1800" spc="-1" strike="noStrike">
-              <a:solidFill>
-                <a:schemeClr val="dk1"/>
-              </a:solidFill>
-              <a:latin typeface="Aptos"/>
-            </a:endParaRPr>
-          </a:p>
-          <a:p>
-            <a:pPr lvl="2" marL="1296000" indent="-288000">
-              <a:lnSpc>
-                <a:spcPct val="90000"/>
-              </a:lnSpc>
-              <a:spcBef>
-                <a:spcPts val="850"/>
-              </a:spcBef>
-              <a:buClr>
-                <a:srgbClr val="000000"/>
-              </a:buClr>
-              <a:buSzPct val="45000"/>
-              <a:buFont typeface="Wingdings" charset="2"/>
-              <a:buChar char=""/>
-            </a:pPr>
-            <a:r>
-              <a:rPr b="0" lang="en-US" sz="1800" spc="-1" strike="noStrike">
-                <a:solidFill>
-                  <a:schemeClr val="dk1"/>
-                </a:solidFill>
-                <a:latin typeface="Aptos"/>
-              </a:rPr>
-              <a:t>Third Outline Level</a:t>
-            </a:r>
-            <a:endParaRPr b="0" lang="en-US" sz="1800" spc="-1" strike="noStrike">
-              <a:solidFill>
-                <a:schemeClr val="dk1"/>
-              </a:solidFill>
-              <a:latin typeface="Aptos"/>
-            </a:endParaRPr>
-          </a:p>
-          <a:p>
-            <a:pPr lvl="3" marL="1728000" indent="-216000">
-              <a:lnSpc>
-                <a:spcPct val="90000"/>
-              </a:lnSpc>
-              <a:spcBef>
-                <a:spcPts val="567"/>
-              </a:spcBef>
-              <a:buClr>
-                <a:srgbClr val="000000"/>
-              </a:buClr>
-              <a:buSzPct val="75000"/>
-              <a:buFont typeface="Symbol" charset="2"/>
-              <a:buChar char=""/>
-            </a:pPr>
-            <a:r>
-              <a:rPr b="0" lang="en-US" sz="1800" spc="-1" strike="noStrike">
-                <a:solidFill>
-                  <a:schemeClr val="dk1"/>
-                </a:solidFill>
-                <a:latin typeface="Aptos"/>
-              </a:rPr>
-              <a:t>Fourth Outline Level</a:t>
-            </a:r>
-            <a:endParaRPr b="0" lang="en-US" sz="1800" spc="-1" strike="noStrike">
-              <a:solidFill>
-                <a:schemeClr val="dk1"/>
-              </a:solidFill>
-              <a:latin typeface="Aptos"/>
-            </a:endParaRPr>
-          </a:p>
-          <a:p>
-            <a:pPr lvl="4" marL="2160000" indent="-216000">
-              <a:lnSpc>
-                <a:spcPct val="90000"/>
-              </a:lnSpc>
-              <a:spcBef>
-                <a:spcPts val="283"/>
-              </a:spcBef>
-              <a:buClr>
-                <a:srgbClr val="000000"/>
-              </a:buClr>
-              <a:buSzPct val="45000"/>
-              <a:buFont typeface="Wingdings" charset="2"/>
-              <a:buChar char=""/>
-            </a:pPr>
-            <a:r>
-              <a:rPr b="0" lang="en-US" sz="1800" spc="-1" strike="noStrike">
-                <a:solidFill>
-                  <a:schemeClr val="dk1"/>
-                </a:solidFill>
-                <a:latin typeface="Aptos"/>
-              </a:rPr>
-              <a:t>Fifth Outline Level</a:t>
-            </a:r>
-            <a:endParaRPr b="0" lang="en-US" sz="1800" spc="-1" strike="noStrike">
-              <a:solidFill>
-                <a:schemeClr val="dk1"/>
-              </a:solidFill>
-              <a:latin typeface="Aptos"/>
-            </a:endParaRPr>
-          </a:p>
-          <a:p>
-            <a:pPr lvl="5" marL="2592000" indent="-216000">
-              <a:lnSpc>
-                <a:spcPct val="90000"/>
-              </a:lnSpc>
-              <a:spcBef>
-                <a:spcPts val="283"/>
-              </a:spcBef>
-              <a:buClr>
-                <a:srgbClr val="000000"/>
-              </a:buClr>
-              <a:buSzPct val="45000"/>
-              <a:buFont typeface="Wingdings" charset="2"/>
-              <a:buChar char=""/>
-            </a:pPr>
-            <a:r>
-              <a:rPr b="0" lang="en-US" sz="1800" spc="-1" strike="noStrike">
-                <a:solidFill>
-                  <a:schemeClr val="dk1"/>
-                </a:solidFill>
-                <a:latin typeface="Aptos"/>
-              </a:rPr>
-              <a:t>Sixth Outline Level</a:t>
-            </a:r>
-            <a:endParaRPr b="0" lang="en-US" sz="1800" spc="-1" strike="noStrike">
-              <a:solidFill>
-                <a:schemeClr val="dk1"/>
-              </a:solidFill>
-              <a:latin typeface="Aptos"/>
-            </a:endParaRPr>
-          </a:p>
-          <a:p>
-            <a:pPr lvl="6" marL="3024000" indent="-216000">
-              <a:lnSpc>
-                <a:spcPct val="90000"/>
-              </a:lnSpc>
-              <a:spcBef>
-                <a:spcPts val="283"/>
-              </a:spcBef>
-              <a:buClr>
-                <a:srgbClr val="000000"/>
-              </a:buClr>
-              <a:buSzPct val="45000"/>
-              <a:buFont typeface="Wingdings" charset="2"/>
-              <a:buChar char=""/>
-            </a:pPr>
-            <a:r>
-              <a:rPr b="0" lang="en-US" sz="1800" spc="-1" strike="noStrike">
-                <a:solidFill>
-                  <a:schemeClr val="dk1"/>
-                </a:solidFill>
-                <a:latin typeface="Aptos"/>
-              </a:rPr>
-              <a:t>Seventh Outline Level</a:t>
-            </a:r>
-            <a:endParaRPr b="0" lang="en-US" sz="1800" spc="-1" strike="noStrike">
-              <a:solidFill>
-                <a:schemeClr val="dk1"/>
-              </a:solidFill>
-              <a:latin typeface="Aptos"/>
-            </a:endParaRPr>
-          </a:p>
-        </p:txBody>
-      </p:sp>
-      <p:sp>
-        <p:nvSpPr>
-          <p:cNvPr id="32" name="PlaceHolder 3"/>
-          <p:cNvSpPr>
-            <a:spLocks noGrp="1"/>
-          </p:cNvSpPr>
-          <p:nvPr>
-            <p:ph type="ftr" idx="7"/>
-          </p:nvPr>
-        </p:nvSpPr>
-        <p:spPr>
-          <a:xfrm>
-            <a:off x="4038480" y="6356520"/>
-            <a:ext cx="4113360" cy="363600"/>
-          </a:xfrm>
-          <a:prstGeom prst="rect">
-            <a:avLst/>
-          </a:prstGeom>
-          <a:noFill/>
-          <a:ln w="0">
-            <a:noFill/>
-          </a:ln>
-        </p:spPr>
-        <p:txBody>
-          <a:bodyPr lIns="91440" rIns="91440" tIns="45720" bIns="45720" anchor="ctr">
-            <a:noAutofit/>
-          </a:bodyPr>
-          <a:lstStyle>
-            <a:lvl1pPr indent="0" algn="ctr" defTabSz="914400">
-              <a:lnSpc>
-                <a:spcPct val="100000"/>
-              </a:lnSpc>
-              <a:buNone/>
-              <a:tabLst>
-                <a:tab algn="l" pos="0"/>
-              </a:tabLst>
-              <a:defRPr b="0" lang="en-US" sz="1200" spc="-1" strike="noStrike">
-                <a:solidFill>
-                  <a:schemeClr val="dk1">
-                    <a:tint val="82000"/>
-                  </a:schemeClr>
-                </a:solidFill>
-                <a:latin typeface="Aptos"/>
-              </a:defRPr>
-            </a:lvl1pPr>
-          </a:lstStyle>
-          <a:p>
-            <a:pPr indent="0" algn="ctr" defTabSz="914400">
-              <a:lnSpc>
-                <a:spcPct val="100000"/>
-              </a:lnSpc>
-              <a:buNone/>
-              <a:tabLst>
-                <a:tab algn="l" pos="0"/>
-              </a:tabLst>
-            </a:pPr>
-            <a:r>
-              <a:rPr b="0" lang="en-US" sz="1200" spc="-1" strike="noStrike">
-                <a:solidFill>
-                  <a:schemeClr val="dk1">
-                    <a:tint val="82000"/>
-                  </a:schemeClr>
-                </a:solidFill>
-                <a:latin typeface="Aptos"/>
-              </a:rPr>
-              <a:t>&lt;footer&gt;</a:t>
-            </a:r>
-            <a:endParaRPr b="0" lang="en-US" sz="1200" spc="-1" strike="noStrike">
-              <a:solidFill>
-                <a:srgbClr val="000000"/>
-              </a:solidFill>
-              <a:latin typeface="Times New Roman"/>
-            </a:endParaRPr>
-          </a:p>
-        </p:txBody>
-      </p:sp>
-      <p:sp>
-        <p:nvSpPr>
-          <p:cNvPr id="33" name="PlaceHolder 4"/>
-          <p:cNvSpPr>
-            <a:spLocks noGrp="1"/>
-          </p:cNvSpPr>
-          <p:nvPr>
-            <p:ph type="sldNum" idx="8"/>
-          </p:nvPr>
-        </p:nvSpPr>
-        <p:spPr>
-          <a:xfrm>
-            <a:off x="8610480" y="6356520"/>
-            <a:ext cx="2741760" cy="363600"/>
-          </a:xfrm>
-          <a:prstGeom prst="rect">
-            <a:avLst/>
-          </a:prstGeom>
-          <a:noFill/>
-          <a:ln w="0">
-            <a:noFill/>
-          </a:ln>
-        </p:spPr>
-        <p:txBody>
-          <a:bodyPr lIns="91440" rIns="91440" tIns="45720" bIns="45720" anchor="ctr">
-            <a:noAutofit/>
-          </a:bodyPr>
-          <a:lstStyle>
-            <a:lvl1pPr indent="0" algn="r" defTabSz="914400">
-              <a:lnSpc>
-                <a:spcPct val="100000"/>
-              </a:lnSpc>
-              <a:buNone/>
-              <a:tabLst>
-                <a:tab algn="l" pos="0"/>
-              </a:tabLst>
-              <a:defRPr b="0" lang="en-US" sz="1200" spc="-1" strike="noStrike">
-                <a:solidFill>
-                  <a:schemeClr val="dk1">
-                    <a:tint val="82000"/>
-                  </a:schemeClr>
-                </a:solidFill>
-                <a:latin typeface="Aptos"/>
-              </a:defRPr>
-            </a:lvl1pPr>
-          </a:lstStyle>
-          <a:p>
-            <a:pPr indent="0" algn="r" defTabSz="914400">
-              <a:lnSpc>
-                <a:spcPct val="100000"/>
-              </a:lnSpc>
-              <a:buNone/>
-              <a:tabLst>
-                <a:tab algn="l" pos="0"/>
-              </a:tabLst>
-            </a:pPr>
-            <a:fld id="{2086F42C-E471-4DD4-85E6-E6D36D3B8C85}" type="slidenum">
-              <a:rPr b="0" lang="en-US" sz="1200" spc="-1" strike="noStrike">
-                <a:solidFill>
-                  <a:schemeClr val="dk1">
-                    <a:tint val="82000"/>
-                  </a:schemeClr>
-                </a:solidFill>
-                <a:latin typeface="Aptos"/>
-              </a:rPr>
-              <a:t>&lt;number&gt;</a:t>
-            </a:fld>
-            <a:endParaRPr b="0" lang="en-US" sz="1200" spc="-1" strike="noStrike">
-              <a:solidFill>
-                <a:srgbClr val="000000"/>
-              </a:solidFill>
-              <a:latin typeface="Times New Roman"/>
-            </a:endParaRPr>
-          </a:p>
-        </p:txBody>
-      </p:sp>
-      <p:sp>
-        <p:nvSpPr>
-          <p:cNvPr id="34" name="PlaceHolder 5"/>
-          <p:cNvSpPr>
-            <a:spLocks noGrp="1"/>
-          </p:cNvSpPr>
-          <p:nvPr>
-            <p:ph type="dt" idx="9"/>
-          </p:nvPr>
-        </p:nvSpPr>
-        <p:spPr>
-          <a:xfrm>
-            <a:off x="838080" y="6356520"/>
-            <a:ext cx="2741760" cy="363600"/>
-          </a:xfrm>
-          <a:prstGeom prst="rect">
-            <a:avLst/>
-          </a:prstGeom>
-          <a:noFill/>
-          <a:ln w="0">
-            <a:noFill/>
-          </a:ln>
-        </p:spPr>
-        <p:txBody>
-          <a:bodyPr lIns="91440" rIns="91440" tIns="45720" bIns="45720" anchor="ctr">
-            <a:noAutofit/>
-          </a:bodyPr>
-          <a:lstStyle>
-            <a:lvl1pPr indent="0">
-              <a:buNone/>
-              <a:defRPr b="0" lang="en-US" sz="1400" spc="-1" strike="noStrike">
-                <a:solidFill>
-                  <a:srgbClr val="000000"/>
-                </a:solidFill>
-                <a:latin typeface="Times New Roman"/>
-              </a:defRPr>
-            </a:lvl1pPr>
-          </a:lstStyle>
-          <a:p>
-            <a:pPr indent="0">
-              <a:buNone/>
-            </a:pPr>
-            <a:r>
-              <a:rPr b="0" lang="en-US" sz="1400" spc="-1" strike="noStrike">
-                <a:solidFill>
-                  <a:srgbClr val="000000"/>
-                </a:solidFill>
-                <a:latin typeface="Times New Roman"/>
-              </a:rPr>
-              <a:t>&lt;date/time&gt;</a:t>
-            </a:r>
-            <a:endParaRPr b="0" lang="en-US" sz="1400" spc="-1" strike="noStrike">
-              <a:solidFill>
-                <a:srgbClr val="000000"/>
-              </a:solidFill>
-              <a:latin typeface="Times New Roman"/>
-            </a:endParaRPr>
-          </a:p>
-        </p:txBody>
-      </p:sp>
-    </p:spTree>
-  </p:cSld>
-  <p:clrMap bg1="lt1" bg2="lt2" tx1="dk1" tx2="dk2" accent1="accent1" accent2="accent2" accent3="accent3" accent4="accent4" accent5="accent5" accent6="accent6" hlink="hlink" folHlink="folHlink"/>
-  <p:sldLayoutIdLst>
-    <p:sldLayoutId id="2147483654" r:id="rId6"/>
-  </p:sldLayoutIdLst>
-</p:sldMaster>
-</file>
-
-<file path=ppt/slides/slide1.xml><?xml version="1.0" encoding="utf-8"?>
-<p:sld xmlns:a="http://schemas.openxmlformats.org/drawingml/2006/main" xmlns:p="http://schemas.openxmlformats.org/presentationml/2006/main" xmlns:r="http://schemas.openxmlformats.org/officeDocument/2006/relationships" xmlns:p14="http://schemas.microsoft.com/office/powerpoint/2010/main" xmlns:p15="http://schemas.microsoft.com/office/powerpoint/2012/main" xmlns:mc="http://schemas.openxmlformats.org/markup-compatibility/2006">
-  <p:cSld>
-    <p:bg>
-      <p:bgPr>
-        <a:solidFill>
-          <a:srgbClr val="f4f6f7"/>
-        </a:solidFill>
-      </p:bgPr>
-    </p:bg>
-    <p:spTree>
-      <p:nvGrpSpPr>
-        <p:cNvPr id="1" name=""/>
-        <p:cNvGrpSpPr/>
-        <p:nvPr/>
-      </p:nvGrpSpPr>
-      <p:grpSpPr>
-        <a:xfrm>
-          <a:off x="0" y="0"/>
-          <a:ext cx="0" cy="0"/>
-          <a:chOff x="0" y="0"/>
-          <a:chExt cx="0" cy="0"/>
-        </a:xfrm>
-      </p:grpSpPr>
       <p:sp>
         <p:nvSpPr>
           <p:cNvPr id="37" name="PlaceHolder 1"/>
@@ -2984,9 +3735,10 @@
           </a:ln>
         </p:spPr>
         <p:txBody>
-          <a:bodyPr lIns="91440" rIns="91440" tIns="45720" bIns="45720" anchor="b">
+          <a:bodyPr lIns="91440" tIns="45720" rIns="91440" bIns="45720" anchor="b">
             <a:noAutofit/>
           </a:bodyPr>
+          <a:lstStyle/>
           <a:p>
             <a:pPr indent="0" algn="ctr" defTabSz="914400">
               <a:lnSpc>
@@ -2994,11 +3746,11 @@
               </a:lnSpc>
               <a:buNone/>
               <a:tabLst>
-                <a:tab algn="l" pos="0"/>
+                <a:tab pos="0" algn="l"/>
               </a:tabLst>
             </a:pPr>
             <a:r>
-              <a:rPr b="0" lang="en-US" sz="6000" spc="-1" strike="noStrike">
+              <a:rPr lang="en-US" sz="6000" b="0" strike="noStrike" spc="-1">
                 <a:solidFill>
                   <a:schemeClr val="dk1"/>
                 </a:solidFill>
@@ -3010,7 +3762,7 @@
               <a:rPr sz="6000"/>
             </a:br>
             <a:r>
-              <a:rPr b="0" lang="en-US" sz="6000" spc="-1" strike="noStrike">
+              <a:rPr lang="en-US" sz="6000" b="0" strike="noStrike" spc="-1">
                 <a:solidFill>
                   <a:schemeClr val="dk1"/>
                 </a:solidFill>
@@ -3018,7 +3770,7 @@
               </a:rPr>
               <a:t>Warren County</a:t>
             </a:r>
-            <a:endParaRPr b="0" lang="en-US" sz="6000" spc="-1" strike="noStrike">
+            <a:endParaRPr lang="en-US" sz="6000" b="0" strike="noStrike" spc="-1">
               <a:solidFill>
                 <a:schemeClr val="dk1"/>
               </a:solidFill>
@@ -3051,9 +3803,10 @@
           </a:ln>
         </p:spPr>
         <p:txBody>
-          <a:bodyPr lIns="91440" rIns="91440" tIns="45720" bIns="45720" anchor="t">
+          <a:bodyPr lIns="91440" tIns="45720" rIns="91440" bIns="45720" anchor="t">
             <a:noAutofit/>
           </a:bodyPr>
+          <a:lstStyle/>
           <a:p>
             <a:pPr marL="228600" indent="0" algn="ctr" defTabSz="914400">
               <a:lnSpc>
@@ -3064,11 +3817,11 @@
               </a:spcBef>
               <a:buNone/>
               <a:tabLst>
-                <a:tab algn="l" pos="0"/>
+                <a:tab pos="0" algn="l"/>
               </a:tabLst>
             </a:pPr>
             <a:r>
-              <a:rPr b="0" lang="en-US" sz="2400" spc="-1" strike="noStrike">
+              <a:rPr lang="en-US" sz="2400" b="0" strike="noStrike" spc="-1">
                 <a:solidFill>
                   <a:schemeClr val="dk1"/>
                 </a:solidFill>
@@ -3076,7 +3829,7 @@
               </a:rPr>
               <a:t>KCARC Meeting – 2026.09.22</a:t>
             </a:r>
-            <a:endParaRPr b="0" lang="en-US" sz="2400" spc="-1" strike="noStrike">
+            <a:endParaRPr lang="en-US" sz="2400" b="0" strike="noStrike" spc="-1">
               <a:solidFill>
                 <a:srgbClr val="000000"/>
               </a:solidFill>
@@ -3087,12 +3840,12 @@
       </p:sp>
       <p:pic>
         <p:nvPicPr>
-          <p:cNvPr id="39" name="Graphic 4" descr=""/>
+          <p:cNvPr id="39" name="Graphic 4"/>
           <p:cNvPicPr/>
           <p:nvPr/>
         </p:nvPicPr>
         <p:blipFill>
-          <a:blip r:embed="rId1">
+          <a:blip>
             <a:extLst>
               <a:ext uri="{96DAC541-7B7A-43D3-8B79-37D633B846F1}">
                 <asvg:svgBlip xmlns:asvg="http://schemas.microsoft.com/office/drawing/2016/SVG/main" r:embed="rId2"/>
@@ -3116,19 +3869,14 @@
       </p:pic>
     </p:spTree>
   </p:cSld>
-  <mc:AlternateContent>
-    <mc:Choice Requires="p14">
-      <p:transition spd="slow" p14:dur="2000"/>
-    </mc:Choice>
-    <mc:Fallback>
-      <p:transition spd="slow"/>
-    </mc:Fallback>
-  </mc:AlternateContent>
+  <p:clrMapOvr>
+    <a:masterClrMapping/>
+  </p:clrMapOvr>
 </p:sld>
 </file>
 
 <file path=ppt/slides/slide10.xml><?xml version="1.0" encoding="utf-8"?>
-<p:sld xmlns:a="http://schemas.openxmlformats.org/drawingml/2006/main" xmlns:p="http://schemas.openxmlformats.org/presentationml/2006/main" xmlns:r="http://schemas.openxmlformats.org/officeDocument/2006/relationships" xmlns:p14="http://schemas.microsoft.com/office/powerpoint/2010/main" xmlns:p15="http://schemas.microsoft.com/office/powerpoint/2012/main" xmlns:mc="http://schemas.openxmlformats.org/markup-compatibility/2006">
+<p:sld xmlns:a="http://schemas.openxmlformats.org/drawingml/2006/main" xmlns:r="http://schemas.openxmlformats.org/officeDocument/2006/relationships" xmlns:p="http://schemas.openxmlformats.org/presentationml/2006/main">
   <p:cSld>
     <p:spTree>
       <p:nvGrpSpPr>
@@ -3168,9 +3916,10 @@
           </a:ln>
         </p:spPr>
         <p:txBody>
-          <a:bodyPr lIns="0" rIns="0" tIns="0" bIns="0" anchor="ctr">
+          <a:bodyPr lIns="0" tIns="0" rIns="0" bIns="0" anchor="ctr">
             <a:noAutofit/>
           </a:bodyPr>
+          <a:lstStyle/>
           <a:p>
             <a:pPr indent="0" defTabSz="914400">
               <a:lnSpc>
@@ -3178,11 +3927,11 @@
               </a:lnSpc>
               <a:buNone/>
               <a:tabLst>
-                <a:tab algn="l" pos="0"/>
+                <a:tab pos="0" algn="l"/>
               </a:tabLst>
             </a:pPr>
             <a:r>
-              <a:rPr b="0" lang="en-US" sz="4400" spc="-1" strike="noStrike">
+              <a:rPr lang="en-US" sz="4400" b="0" strike="noStrike" spc="-1">
                 <a:solidFill>
                   <a:schemeClr val="dk1"/>
                 </a:solidFill>
@@ -3190,7 +3939,7 @@
               </a:rPr>
               <a:t>Radiograms</a:t>
             </a:r>
-            <a:endParaRPr b="0" lang="en-US" sz="4400" spc="-1" strike="noStrike">
+            <a:endParaRPr lang="en-US" sz="4400" b="0" strike="noStrike" spc="-1">
               <a:solidFill>
                 <a:schemeClr val="dk1"/>
               </a:solidFill>
@@ -3223,9 +3972,10 @@
           </a:ln>
         </p:spPr>
         <p:txBody>
-          <a:bodyPr lIns="0" rIns="0" tIns="0" bIns="0" anchor="t">
+          <a:bodyPr lIns="0" tIns="0" rIns="0" bIns="0" anchor="t">
             <a:normAutofit/>
           </a:bodyPr>
+          <a:lstStyle/>
           <a:p>
             <a:pPr marL="432000" indent="0">
               <a:lnSpc>
@@ -3237,7 +3987,7 @@
               <a:buNone/>
             </a:pPr>
             <a:r>
-              <a:rPr b="0" lang="en-US" sz="2800" spc="-1" strike="noStrike">
+              <a:rPr lang="en-US" sz="2800" b="0" strike="noStrike" spc="-1" dirty="0">
                 <a:solidFill>
                   <a:schemeClr val="dk1"/>
                 </a:solidFill>
@@ -3245,12 +3995,6 @@
               </a:rPr>
               <a:t>By using Radiograms correctly you can play the game telephone over different modes, different nets, a vast number of times, and come out with the correct password in the end.</a:t>
             </a:r>
-            <a:endParaRPr b="0" lang="en-US" sz="2800" spc="-1" strike="noStrike">
-              <a:solidFill>
-                <a:schemeClr val="dk1"/>
-              </a:solidFill>
-              <a:latin typeface="Aptos"/>
-            </a:endParaRPr>
           </a:p>
           <a:p>
             <a:pPr marL="432000" indent="0">
@@ -3263,7 +4007,7 @@
               <a:buNone/>
             </a:pPr>
             <a:r>
-              <a:rPr b="0" lang="en-US" sz="2800" spc="-1" strike="noStrike">
+              <a:rPr lang="en-US" sz="2800" b="0" strike="noStrike" spc="-1" dirty="0">
                 <a:solidFill>
                   <a:schemeClr val="dk1"/>
                 </a:solidFill>
@@ -3271,12 +4015,26 @@
               </a:rPr>
               <a:t>By practicing these operators and traffic handlers can copy accurately and move traffic across various nets as a practical  preparation for public service and emergency communications.</a:t>
             </a:r>
-            <a:endParaRPr b="0" lang="en-US" sz="2800" spc="-1" strike="noStrike">
-              <a:solidFill>
-                <a:schemeClr val="dk1"/>
-              </a:solidFill>
-              <a:latin typeface="Aptos"/>
-            </a:endParaRPr>
+          </a:p>
+          <a:p>
+            <a:pPr marL="432000" indent="0">
+              <a:lnSpc>
+                <a:spcPct val="90000"/>
+              </a:lnSpc>
+              <a:spcBef>
+                <a:spcPts val="1417"/>
+              </a:spcBef>
+              <a:buNone/>
+            </a:pPr>
+            <a:r>
+              <a:rPr lang="en-US" sz="2800" spc="-1" dirty="0">
+                <a:solidFill>
+                  <a:schemeClr val="dk1"/>
+                </a:solidFill>
+                <a:latin typeface="Aptos"/>
+              </a:rPr>
+              <a:t>We will practice recording a Radiogram during the weekly WCKY ARES net 9/24/2026.  Later we will practice transmitting them.</a:t>
+            </a:r>
           </a:p>
         </p:txBody>
       </p:sp>
@@ -3293,6 +4051,7 @@
         <p:spPr/>
         <p:txBody>
           <a:bodyPr/>
+          <a:lstStyle/>
           <a:p>
             <a:r>
               <a:t>Warren County KY ARES • KQ4TIV Emergency Coordinator</a:t>
@@ -3313,10 +4072,13 @@
         <p:spPr/>
         <p:txBody>
           <a:bodyPr/>
+          <a:lstStyle/>
           <a:p>
             <a:fld id="{280FA7BA-0365-49BD-96E4-C598A8375FD6}" type="slidenum">
+              <a:rPr/>
               <a:t>10</a:t>
             </a:fld>
+            <a:endParaRPr/>
           </a:p>
         </p:txBody>
       </p:sp>
@@ -3333,29 +4095,26 @@
         <p:spPr/>
         <p:txBody>
           <a:bodyPr/>
+          <a:lstStyle/>
           <a:p>
             <a:fld id="{08CE262F-3388-4EDA-A52A-691DAAA1B4FF}" type="datetime1">
               <a:rPr lang="en-US"/>
-              <a:t>09/21/2026</a:t>
+              <a:t>9/22/2026</a:t>
             </a:fld>
+            <a:endParaRPr lang="en-US"/>
           </a:p>
         </p:txBody>
       </p:sp>
     </p:spTree>
   </p:cSld>
-  <mc:AlternateContent>
-    <mc:Choice Requires="p14">
-      <p:transition spd="slow" p14:dur="2000"/>
-    </mc:Choice>
-    <mc:Fallback>
-      <p:transition spd="slow"/>
-    </mc:Fallback>
-  </mc:AlternateContent>
+  <p:clrMapOvr>
+    <a:masterClrMapping/>
+  </p:clrMapOvr>
 </p:sld>
 </file>
 
 <file path=ppt/slides/slide2.xml><?xml version="1.0" encoding="utf-8"?>
-<p:sld xmlns:a="http://schemas.openxmlformats.org/drawingml/2006/main" xmlns:p="http://schemas.openxmlformats.org/presentationml/2006/main" xmlns:r="http://schemas.openxmlformats.org/officeDocument/2006/relationships" xmlns:p14="http://schemas.microsoft.com/office/powerpoint/2010/main" xmlns:p15="http://schemas.microsoft.com/office/powerpoint/2012/main" xmlns:mc="http://schemas.openxmlformats.org/markup-compatibility/2006">
+<p:sld xmlns:a="http://schemas.openxmlformats.org/drawingml/2006/main" xmlns:r="http://schemas.openxmlformats.org/officeDocument/2006/relationships" xmlns:p="http://schemas.openxmlformats.org/presentationml/2006/main">
   <p:cSld>
     <p:spTree>
       <p:nvGrpSpPr>
@@ -3395,9 +4154,10 @@
           </a:ln>
         </p:spPr>
         <p:txBody>
-          <a:bodyPr lIns="91440" rIns="91440" tIns="45720" bIns="45720" anchor="ctr">
+          <a:bodyPr lIns="91440" tIns="45720" rIns="91440" bIns="45720" anchor="ctr">
             <a:noAutofit/>
           </a:bodyPr>
+          <a:lstStyle/>
           <a:p>
             <a:pPr indent="0" defTabSz="914400">
               <a:lnSpc>
@@ -3405,11 +4165,11 @@
               </a:lnSpc>
               <a:buNone/>
               <a:tabLst>
-                <a:tab algn="l" pos="0"/>
+                <a:tab pos="0" algn="l"/>
               </a:tabLst>
             </a:pPr>
             <a:r>
-              <a:rPr b="0" lang="en-US" sz="4400" spc="-1" strike="noStrike">
+              <a:rPr lang="en-US" sz="4400" b="0" strike="noStrike" spc="-1">
                 <a:solidFill>
                   <a:schemeClr val="dk1"/>
                 </a:solidFill>
@@ -3417,7 +4177,7 @@
               </a:rPr>
               <a:t>Agenda</a:t>
             </a:r>
-            <a:endParaRPr b="0" lang="en-US" sz="4400" spc="-1" strike="noStrike">
+            <a:endParaRPr lang="en-US" sz="4400" b="0" strike="noStrike" spc="-1">
               <a:solidFill>
                 <a:schemeClr val="dk1"/>
               </a:solidFill>
@@ -3450,9 +4210,10 @@
           </a:ln>
         </p:spPr>
         <p:txBody>
-          <a:bodyPr lIns="91440" rIns="91440" tIns="45720" bIns="45720" anchor="t">
+          <a:bodyPr lIns="91440" tIns="45720" rIns="91440" bIns="45720" anchor="t">
             <a:normAutofit/>
           </a:bodyPr>
+          <a:lstStyle/>
           <a:p>
             <a:pPr marL="228600" indent="-228600" defTabSz="914400">
               <a:lnSpc>
@@ -3468,7 +4229,7 @@
               <a:buChar char="•"/>
             </a:pPr>
             <a:r>
-              <a:rPr b="0" lang="en-US" sz="2800" spc="-1" strike="noStrike">
+              <a:rPr lang="en-US" sz="2800" b="0" strike="noStrike" spc="-1">
                 <a:solidFill>
                   <a:schemeClr val="dk1"/>
                 </a:solidFill>
@@ -3476,12 +4237,6 @@
               </a:rPr>
               <a:t>General Updates</a:t>
             </a:r>
-            <a:endParaRPr b="0" lang="en-US" sz="2800" spc="-1" strike="noStrike">
-              <a:solidFill>
-                <a:schemeClr val="dk1"/>
-              </a:solidFill>
-              <a:latin typeface="Aptos"/>
-            </a:endParaRPr>
           </a:p>
           <a:p>
             <a:pPr marL="228600" indent="-228600" defTabSz="914400">
@@ -3498,7 +4253,7 @@
               <a:buChar char="•"/>
             </a:pPr>
             <a:r>
-              <a:rPr b="0" lang="en-US" sz="2800" spc="-1" strike="noStrike">
+              <a:rPr lang="en-US" sz="2800" b="0" strike="noStrike" spc="-1">
                 <a:solidFill>
                   <a:schemeClr val="dk1"/>
                 </a:solidFill>
@@ -3506,12 +4261,6 @@
               </a:rPr>
               <a:t>Roll Up Dual Band Antenna</a:t>
             </a:r>
-            <a:endParaRPr b="0" lang="en-US" sz="2800" spc="-1" strike="noStrike">
-              <a:solidFill>
-                <a:schemeClr val="dk1"/>
-              </a:solidFill>
-              <a:latin typeface="Aptos"/>
-            </a:endParaRPr>
           </a:p>
           <a:p>
             <a:pPr marL="228600" indent="-228600" defTabSz="914400">
@@ -3528,7 +4277,7 @@
               <a:buChar char="•"/>
             </a:pPr>
             <a:r>
-              <a:rPr b="0" lang="en-US" sz="2800" spc="-1" strike="noStrike">
+              <a:rPr lang="en-US" sz="2800" b="0" strike="noStrike" spc="-1">
                 <a:solidFill>
                   <a:schemeClr val="dk1"/>
                 </a:solidFill>
@@ -3536,12 +4285,6 @@
               </a:rPr>
               <a:t>Radiograms</a:t>
             </a:r>
-            <a:endParaRPr b="0" lang="en-US" sz="2800" spc="-1" strike="noStrike">
-              <a:solidFill>
-                <a:schemeClr val="dk1"/>
-              </a:solidFill>
-              <a:latin typeface="Aptos"/>
-            </a:endParaRPr>
           </a:p>
         </p:txBody>
       </p:sp>
@@ -3558,6 +4301,7 @@
         <p:spPr/>
         <p:txBody>
           <a:bodyPr/>
+          <a:lstStyle/>
           <a:p>
             <a:r>
               <a:t>Warren County KY ARES • KQ4TIV Emergency Coordinator</a:t>
@@ -3578,10 +4322,13 @@
         <p:spPr/>
         <p:txBody>
           <a:bodyPr/>
+          <a:lstStyle/>
           <a:p>
             <a:fld id="{C20AFD5F-741B-404E-86F9-00F4B1A7AD3E}" type="slidenum">
+              <a:rPr/>
               <a:t>2</a:t>
             </a:fld>
+            <a:endParaRPr/>
           </a:p>
         </p:txBody>
       </p:sp>
@@ -3598,29 +4345,26 @@
         <p:spPr/>
         <p:txBody>
           <a:bodyPr/>
+          <a:lstStyle/>
           <a:p>
             <a:fld id="{975789AB-7171-49DC-8F2E-A29D4A65DB23}" type="datetime1">
               <a:rPr lang="en-US"/>
-              <a:t>09/21/2026</a:t>
+              <a:t>9/22/2026</a:t>
             </a:fld>
+            <a:endParaRPr lang="en-US"/>
           </a:p>
         </p:txBody>
       </p:sp>
     </p:spTree>
   </p:cSld>
-  <mc:AlternateContent>
-    <mc:Choice Requires="p14">
-      <p:transition spd="slow" p14:dur="2000"/>
-    </mc:Choice>
-    <mc:Fallback>
-      <p:transition spd="slow"/>
-    </mc:Fallback>
-  </mc:AlternateContent>
+  <p:clrMapOvr>
+    <a:masterClrMapping/>
+  </p:clrMapOvr>
 </p:sld>
 </file>
 
 <file path=ppt/slides/slide3.xml><?xml version="1.0" encoding="utf-8"?>
-<p:sld xmlns:a="http://schemas.openxmlformats.org/drawingml/2006/main" xmlns:p="http://schemas.openxmlformats.org/presentationml/2006/main" xmlns:r="http://schemas.openxmlformats.org/officeDocument/2006/relationships" xmlns:p14="http://schemas.microsoft.com/office/powerpoint/2010/main" xmlns:p15="http://schemas.microsoft.com/office/powerpoint/2012/main" xmlns:mc="http://schemas.openxmlformats.org/markup-compatibility/2006">
+<p:sld xmlns:a="http://schemas.openxmlformats.org/drawingml/2006/main" xmlns:r="http://schemas.openxmlformats.org/officeDocument/2006/relationships" xmlns:p="http://schemas.openxmlformats.org/presentationml/2006/main">
   <p:cSld>
     <p:spTree>
       <p:nvGrpSpPr>
@@ -3660,15 +4404,16 @@
           </a:ln>
         </p:spPr>
         <p:txBody>
-          <a:bodyPr lIns="0" rIns="0" tIns="0" bIns="0" anchor="ctr">
+          <a:bodyPr lIns="0" tIns="0" rIns="0" bIns="0" anchor="ctr">
             <a:noAutofit/>
           </a:bodyPr>
+          <a:lstStyle/>
           <a:p>
             <a:pPr indent="0">
               <a:buNone/>
             </a:pPr>
             <a:r>
-              <a:rPr b="1" lang="en-US" sz="4000" spc="-1" strike="noStrike">
+              <a:rPr lang="en-US" sz="4000" b="1" strike="noStrike" spc="-1">
                 <a:solidFill>
                   <a:schemeClr val="dk1"/>
                 </a:solidFill>
@@ -3676,18 +4421,12 @@
               </a:rPr>
               <a:t>General Updates</a:t>
             </a:r>
-            <a:endParaRPr b="1" lang="en-US" sz="4000" spc="-1" strike="noStrike">
-              <a:solidFill>
-                <a:schemeClr val="dk1"/>
-              </a:solidFill>
-              <a:latin typeface="Aptos"/>
-            </a:endParaRPr>
-          </a:p>
-        </p:txBody>
-      </p:sp>
-      <p:sp>
-        <p:nvSpPr>
-          <p:cNvPr id="43" name=""/>
+          </a:p>
+        </p:txBody>
+      </p:sp>
+      <p:sp>
+        <p:nvSpPr>
+          <p:cNvPr id="43" name="TextBox 42"/>
           <p:cNvSpPr txBox="1"/>
           <p:nvPr/>
         </p:nvSpPr>
@@ -3705,12 +4444,13 @@
           </a:ln>
         </p:spPr>
         <p:txBody>
-          <a:bodyPr lIns="90000" rIns="90000" tIns="45000" bIns="45000" anchor="t">
+          <a:bodyPr lIns="90000" tIns="45000" rIns="90000" bIns="45000" anchor="t">
             <a:noAutofit/>
           </a:bodyPr>
-          <a:p>
-            <a:r>
-              <a:rPr b="0" lang="en-US" sz="1800" spc="-1" strike="noStrike">
+          <a:lstStyle/>
+          <a:p>
+            <a:r>
+              <a:rPr lang="en-US" sz="1800" b="0" strike="noStrike" spc="-1">
                 <a:solidFill>
                   <a:srgbClr val="000000"/>
                 </a:solidFill>
@@ -3719,7 +4459,7 @@
               <a:t>ARES Calendar Added </a:t>
             </a:r>
             <a:r>
-              <a:rPr b="0" i="1" lang="en-US" sz="1400" spc="-1" strike="noStrike">
+              <a:rPr lang="en-US" sz="1400" b="0" i="1" strike="noStrike" spc="-1">
                 <a:solidFill>
                   <a:srgbClr val="000000"/>
                 </a:solidFill>
@@ -3727,7 +4467,7 @@
               </a:rPr>
               <a:t>https://nathanielbutts.github.io/calendar/calendar.html</a:t>
             </a:r>
-            <a:endParaRPr b="0" lang="en-US" sz="1400" spc="-1" strike="noStrike">
+            <a:endParaRPr lang="en-US" sz="1400" b="0" strike="noStrike" spc="-1">
               <a:solidFill>
                 <a:srgbClr val="000000"/>
               </a:solidFill>
@@ -3738,12 +4478,12 @@
       </p:sp>
       <p:pic>
         <p:nvPicPr>
-          <p:cNvPr id="44" name="" descr=""/>
+          <p:cNvPr id="44" name="Picture 43"/>
           <p:cNvPicPr/>
           <p:nvPr/>
         </p:nvPicPr>
         <p:blipFill>
-          <a:blip r:embed="rId1"/>
+          <a:blip r:embed="rId2"/>
           <a:stretch/>
         </p:blipFill>
         <p:spPr>
@@ -3761,12 +4501,12 @@
       </p:pic>
       <p:pic>
         <p:nvPicPr>
-          <p:cNvPr id="45" name="" descr=""/>
+          <p:cNvPr id="45" name="Picture 44"/>
           <p:cNvPicPr/>
           <p:nvPr/>
         </p:nvPicPr>
         <p:blipFill>
-          <a:blip r:embed="rId2"/>
+          <a:blip r:embed="rId3"/>
           <a:stretch/>
         </p:blipFill>
         <p:spPr>
@@ -3784,7 +4524,7 @@
       </p:pic>
       <p:sp>
         <p:nvSpPr>
-          <p:cNvPr id="46" name=""/>
+          <p:cNvPr id="46" name="TextBox 45"/>
           <p:cNvSpPr txBox="1"/>
           <p:nvPr/>
         </p:nvSpPr>
@@ -3802,12 +4542,13 @@
           </a:ln>
         </p:spPr>
         <p:txBody>
-          <a:bodyPr lIns="90000" rIns="90000" tIns="45000" bIns="45000" anchor="t">
+          <a:bodyPr lIns="90000" tIns="45000" rIns="90000" bIns="45000" anchor="t">
             <a:noAutofit/>
           </a:bodyPr>
-          <a:p>
-            <a:r>
-              <a:rPr b="0" lang="en-US" sz="1800" spc="-1" strike="noStrike">
+          <a:lstStyle/>
+          <a:p>
+            <a:r>
+              <a:rPr lang="en-US" sz="1800" b="0" strike="noStrike" spc="-1">
                 <a:solidFill>
                   <a:srgbClr val="000000"/>
                 </a:solidFill>
@@ -3815,12 +4556,6 @@
               </a:rPr>
               <a:t>News Section Added</a:t>
             </a:r>
-            <a:endParaRPr b="0" lang="en-US" sz="1800" spc="-1" strike="noStrike">
-              <a:solidFill>
-                <a:srgbClr val="000000"/>
-              </a:solidFill>
-              <a:latin typeface="Arial"/>
-            </a:endParaRPr>
           </a:p>
         </p:txBody>
       </p:sp>
@@ -3837,6 +4572,7 @@
         <p:spPr/>
         <p:txBody>
           <a:bodyPr/>
+          <a:lstStyle/>
           <a:p>
             <a:r>
               <a:t>Warren County KY ARES • KQ4TIV Emergency Coordinator</a:t>
@@ -3857,10 +4593,12 @@
         <p:spPr/>
         <p:txBody>
           <a:bodyPr/>
+          <a:lstStyle/>
           <a:p>
             <a:fld id="{7271D153-B64E-4E58-BA46-983BAC0885E8}" type="slidenum">
               <a:t>3</a:t>
             </a:fld>
+            <a:endParaRPr/>
           </a:p>
         </p:txBody>
       </p:sp>
@@ -3877,29 +4615,26 @@
         <p:spPr/>
         <p:txBody>
           <a:bodyPr/>
+          <a:lstStyle/>
           <a:p>
             <a:fld id="{271621F6-6654-491D-98E8-3382DE62E9EA}" type="datetime1">
               <a:rPr lang="en-US"/>
-              <a:t>09/21/2026</a:t>
+              <a:t>9/22/2026</a:t>
             </a:fld>
+            <a:endParaRPr lang="en-US"/>
           </a:p>
         </p:txBody>
       </p:sp>
     </p:spTree>
   </p:cSld>
-  <mc:AlternateContent>
-    <mc:Choice Requires="p14">
-      <p:transition spd="slow" p14:dur="2000"/>
-    </mc:Choice>
-    <mc:Fallback>
-      <p:transition spd="slow"/>
-    </mc:Fallback>
-  </mc:AlternateContent>
+  <p:clrMapOvr>
+    <a:masterClrMapping/>
+  </p:clrMapOvr>
 </p:sld>
 </file>
 
 <file path=ppt/slides/slide4.xml><?xml version="1.0" encoding="utf-8"?>
-<p:sld xmlns:a="http://schemas.openxmlformats.org/drawingml/2006/main" xmlns:p="http://schemas.openxmlformats.org/presentationml/2006/main" xmlns:r="http://schemas.openxmlformats.org/officeDocument/2006/relationships" xmlns:p14="http://schemas.microsoft.com/office/powerpoint/2010/main" xmlns:p15="http://schemas.microsoft.com/office/powerpoint/2012/main" xmlns:mc="http://schemas.openxmlformats.org/markup-compatibility/2006">
+<p:sld xmlns:a="http://schemas.openxmlformats.org/drawingml/2006/main" xmlns:r="http://schemas.openxmlformats.org/officeDocument/2006/relationships" xmlns:p="http://schemas.openxmlformats.org/presentationml/2006/main">
   <p:cSld>
     <p:spTree>
       <p:nvGrpSpPr>
@@ -3939,9 +4674,10 @@
           </a:ln>
         </p:spPr>
         <p:txBody>
-          <a:bodyPr lIns="0" rIns="0" tIns="0" bIns="0" anchor="ctr">
+          <a:bodyPr lIns="0" tIns="0" rIns="0" bIns="0" anchor="ctr">
             <a:noAutofit/>
           </a:bodyPr>
+          <a:lstStyle/>
           <a:p>
             <a:pPr indent="0" defTabSz="914400">
               <a:lnSpc>
@@ -3949,11 +4685,11 @@
               </a:lnSpc>
               <a:buNone/>
               <a:tabLst>
-                <a:tab algn="l" pos="0"/>
+                <a:tab pos="0" algn="l"/>
               </a:tabLst>
             </a:pPr>
             <a:r>
-              <a:rPr b="0" lang="en-US" sz="4400" spc="-1" strike="noStrike">
+              <a:rPr lang="en-US" sz="4400" b="0" strike="noStrike" spc="-1">
                 <a:solidFill>
                   <a:srgbClr val="000000"/>
                 </a:solidFill>
@@ -3961,7 +4697,7 @@
               </a:rPr>
               <a:t>Dual Band Roll Up Antenna</a:t>
             </a:r>
-            <a:endParaRPr b="0" lang="en-US" sz="4400" spc="-1" strike="noStrike">
+            <a:endParaRPr lang="en-US" sz="4400" b="0" strike="noStrike" spc="-1">
               <a:solidFill>
                 <a:schemeClr val="dk1"/>
               </a:solidFill>
@@ -3994,9 +4730,10 @@
           </a:ln>
         </p:spPr>
         <p:txBody>
-          <a:bodyPr lIns="0" rIns="0" tIns="0" bIns="0" anchor="t">
+          <a:bodyPr lIns="0" tIns="0" rIns="0" bIns="0" anchor="t">
             <a:normAutofit fontScale="81111"/>
           </a:bodyPr>
+          <a:lstStyle/>
           <a:p>
             <a:pPr marL="432000" indent="-324000" defTabSz="914400">
               <a:lnSpc>
@@ -4013,7 +4750,7 @@
               <a:buChar char=""/>
             </a:pPr>
             <a:r>
-              <a:rPr b="0" lang="en-US" sz="2800" spc="-1" strike="noStrike">
+              <a:rPr lang="en-US" sz="2800" b="0" strike="noStrike" spc="-1">
                 <a:solidFill>
                   <a:schemeClr val="dk1"/>
                 </a:solidFill>
@@ -4021,12 +4758,6 @@
               </a:rPr>
               <a:t>Rubber Duckies often have negative dBi</a:t>
             </a:r>
-            <a:endParaRPr b="0" lang="en-US" sz="2800" spc="-1" strike="noStrike">
-              <a:solidFill>
-                <a:schemeClr val="dk1"/>
-              </a:solidFill>
-              <a:latin typeface="Aptos"/>
-            </a:endParaRPr>
           </a:p>
           <a:p>
             <a:pPr marL="432000" indent="-324000" defTabSz="914400">
@@ -4044,7 +4775,7 @@
               <a:buChar char=""/>
             </a:pPr>
             <a:r>
-              <a:rPr b="0" lang="en-US" sz="2800" spc="-1" strike="noStrike">
+              <a:rPr lang="en-US" sz="2800" b="0" strike="noStrike" spc="-1">
                 <a:solidFill>
                   <a:schemeClr val="dk1"/>
                 </a:solidFill>
@@ -4052,12 +4783,6 @@
               </a:rPr>
               <a:t>Ed Fong WB6IQN (UC Santa Cruz) Design</a:t>
             </a:r>
-            <a:endParaRPr b="0" lang="en-US" sz="2800" spc="-1" strike="noStrike">
-              <a:solidFill>
-                <a:schemeClr val="dk1"/>
-              </a:solidFill>
-              <a:latin typeface="Aptos"/>
-            </a:endParaRPr>
           </a:p>
           <a:p>
             <a:pPr marL="432000" indent="-324000" defTabSz="914400">
@@ -4075,7 +4800,7 @@
               <a:buChar char=""/>
             </a:pPr>
             <a:r>
-              <a:rPr b="0" lang="en-US" sz="2800" spc="-1" strike="noStrike">
+              <a:rPr lang="en-US" sz="2800" b="0" strike="noStrike" spc="-1">
                 <a:solidFill>
                   <a:schemeClr val="dk1"/>
                 </a:solidFill>
@@ -4083,12 +4808,6 @@
               </a:rPr>
               <a:t>Replace 4-1/4” of RG-174A with 5” of RG8X with 5” cut in ladder line to match</a:t>
             </a:r>
-            <a:endParaRPr b="0" lang="en-US" sz="2800" spc="-1" strike="noStrike">
-              <a:solidFill>
-                <a:schemeClr val="dk1"/>
-              </a:solidFill>
-              <a:latin typeface="Aptos"/>
-            </a:endParaRPr>
           </a:p>
           <a:p>
             <a:pPr marL="432000" indent="-324000" defTabSz="914400">
@@ -4106,7 +4825,7 @@
               <a:buChar char=""/>
             </a:pPr>
             <a:r>
-              <a:rPr b="0" lang="en-US" sz="2800" spc="-1" strike="noStrike">
+              <a:rPr lang="en-US" sz="2800" b="0" strike="noStrike" spc="-1">
                 <a:solidFill>
                   <a:schemeClr val="dk1"/>
                 </a:solidFill>
@@ -4114,23 +4833,17 @@
               </a:rPr>
               <a:t>A good chunk of shrink wrap (red box) over the Coax going to radio will secure it to the ladder line and join the stub and ladder line together</a:t>
             </a:r>
-            <a:endParaRPr b="0" lang="en-US" sz="2800" spc="-1" strike="noStrike">
-              <a:solidFill>
-                <a:schemeClr val="dk1"/>
-              </a:solidFill>
-              <a:latin typeface="Aptos"/>
-            </a:endParaRPr>
           </a:p>
         </p:txBody>
       </p:sp>
       <p:pic>
         <p:nvPicPr>
-          <p:cNvPr id="49" name="Picture 123" descr=""/>
+          <p:cNvPr id="49" name="Picture 123"/>
           <p:cNvPicPr/>
           <p:nvPr/>
         </p:nvPicPr>
         <p:blipFill>
-          <a:blip r:embed="rId1"/>
+          <a:blip r:embed="rId2"/>
           <a:stretch/>
         </p:blipFill>
         <p:spPr>
@@ -4163,7 +4876,7 @@
           <a:noFill/>
           <a:ln w="38100">
             <a:solidFill>
-              <a:srgbClr val="ff0000"/>
+              <a:srgbClr val="FF0000"/>
             </a:solidFill>
           </a:ln>
         </p:spPr>
@@ -4182,16 +4895,17 @@
           <a:fontRef idx="minor"/>
         </p:style>
         <p:txBody>
-          <a:bodyPr lIns="90000" rIns="90000" tIns="45000" bIns="45000" anchor="ctr">
+          <a:bodyPr lIns="90000" tIns="45000" rIns="90000" bIns="45000" anchor="ctr">
             <a:noAutofit/>
           </a:bodyPr>
+          <a:lstStyle/>
           <a:p>
             <a:pPr algn="ctr" defTabSz="914400">
               <a:lnSpc>
                 <a:spcPct val="100000"/>
               </a:lnSpc>
             </a:pPr>
-            <a:endParaRPr b="0" lang="en-US" sz="1800" spc="-1" strike="noStrike">
+            <a:endParaRPr lang="en-US" sz="1800" b="0" strike="noStrike" spc="-1">
               <a:solidFill>
                 <a:schemeClr val="lt1"/>
               </a:solidFill>
@@ -4217,7 +4931,7 @@
           <a:noFill/>
           <a:ln w="38100">
             <a:solidFill>
-              <a:srgbClr val="ff0000"/>
+              <a:srgbClr val="FF0000"/>
             </a:solidFill>
           </a:ln>
         </p:spPr>
@@ -4236,16 +4950,17 @@
           <a:fontRef idx="minor"/>
         </p:style>
         <p:txBody>
-          <a:bodyPr lIns="90000" rIns="90000" tIns="45000" bIns="45000" anchor="ctr">
+          <a:bodyPr lIns="90000" tIns="45000" rIns="90000" bIns="45000" anchor="ctr">
             <a:noAutofit/>
           </a:bodyPr>
+          <a:lstStyle/>
           <a:p>
             <a:pPr algn="ctr" defTabSz="914400">
               <a:lnSpc>
                 <a:spcPct val="100000"/>
               </a:lnSpc>
             </a:pPr>
-            <a:endParaRPr b="0" lang="en-US" sz="1800" spc="-1" strike="noStrike">
+            <a:endParaRPr lang="en-US" sz="1800" b="0" strike="noStrike" spc="-1">
               <a:solidFill>
                 <a:schemeClr val="lt1"/>
               </a:solidFill>
@@ -4267,6 +4982,7 @@
         <p:spPr/>
         <p:txBody>
           <a:bodyPr/>
+          <a:lstStyle/>
           <a:p>
             <a:r>
               <a:t>Warren County KY ARES • KQ4TIV Emergency Coordinator</a:t>
@@ -4287,10 +5003,13 @@
         <p:spPr/>
         <p:txBody>
           <a:bodyPr/>
+          <a:lstStyle/>
           <a:p>
             <a:fld id="{939BFCDA-3973-4B86-BC4C-C83E0D2B419D}" type="slidenum">
+              <a:rPr/>
               <a:t>4</a:t>
             </a:fld>
+            <a:endParaRPr/>
           </a:p>
         </p:txBody>
       </p:sp>
@@ -4307,29 +5026,26 @@
         <p:spPr/>
         <p:txBody>
           <a:bodyPr/>
+          <a:lstStyle/>
           <a:p>
             <a:fld id="{211A93EA-A6A3-4159-8AF0-14F961C148E9}" type="datetime1">
               <a:rPr lang="en-US"/>
-              <a:t>09/21/2026</a:t>
+              <a:t>9/22/2026</a:t>
             </a:fld>
+            <a:endParaRPr lang="en-US"/>
           </a:p>
         </p:txBody>
       </p:sp>
     </p:spTree>
   </p:cSld>
-  <mc:AlternateContent>
-    <mc:Choice Requires="p14">
-      <p:transition spd="slow" p14:dur="2000"/>
-    </mc:Choice>
-    <mc:Fallback>
-      <p:transition spd="slow"/>
-    </mc:Fallback>
-  </mc:AlternateContent>
+  <p:clrMapOvr>
+    <a:masterClrMapping/>
+  </p:clrMapOvr>
 </p:sld>
 </file>
 
 <file path=ppt/slides/slide5.xml><?xml version="1.0" encoding="utf-8"?>
-<p:sld xmlns:a="http://schemas.openxmlformats.org/drawingml/2006/main" xmlns:p="http://schemas.openxmlformats.org/presentationml/2006/main" xmlns:r="http://schemas.openxmlformats.org/officeDocument/2006/relationships" xmlns:p14="http://schemas.microsoft.com/office/powerpoint/2010/main" xmlns:p15="http://schemas.microsoft.com/office/powerpoint/2012/main" xmlns:mc="http://schemas.openxmlformats.org/markup-compatibility/2006">
+<p:sld xmlns:a="http://schemas.openxmlformats.org/drawingml/2006/main" xmlns:r="http://schemas.openxmlformats.org/officeDocument/2006/relationships" xmlns:p="http://schemas.openxmlformats.org/presentationml/2006/main">
   <p:cSld>
     <p:spTree>
       <p:nvGrpSpPr>
@@ -4369,9 +5085,10 @@
           </a:ln>
         </p:spPr>
         <p:txBody>
-          <a:bodyPr lIns="0" rIns="0" tIns="0" bIns="0" anchor="ctr">
+          <a:bodyPr lIns="0" tIns="0" rIns="0" bIns="0" anchor="ctr">
             <a:noAutofit/>
           </a:bodyPr>
+          <a:lstStyle/>
           <a:p>
             <a:pPr indent="0" defTabSz="914400">
               <a:lnSpc>
@@ -4379,11 +5096,11 @@
               </a:lnSpc>
               <a:buNone/>
               <a:tabLst>
-                <a:tab algn="l" pos="0"/>
+                <a:tab pos="0" algn="l"/>
               </a:tabLst>
             </a:pPr>
             <a:r>
-              <a:rPr b="0" lang="en-US" sz="4400" spc="-1" strike="noStrike">
+              <a:rPr lang="en-US" sz="4400" b="0" strike="noStrike" spc="-1">
                 <a:solidFill>
                   <a:schemeClr val="dk1"/>
                 </a:solidFill>
@@ -4391,7 +5108,7 @@
               </a:rPr>
               <a:t>Radiograms</a:t>
             </a:r>
-            <a:endParaRPr b="0" lang="en-US" sz="4400" spc="-1" strike="noStrike">
+            <a:endParaRPr lang="en-US" sz="4400" b="0" strike="noStrike" spc="-1">
               <a:solidFill>
                 <a:schemeClr val="dk1"/>
               </a:solidFill>
@@ -4424,9 +5141,10 @@
           </a:ln>
         </p:spPr>
         <p:txBody>
-          <a:bodyPr lIns="0" rIns="0" tIns="0" bIns="0" anchor="t">
+          <a:bodyPr lIns="0" tIns="0" rIns="0" bIns="0" anchor="t">
             <a:normAutofit/>
           </a:bodyPr>
+          <a:lstStyle/>
           <a:p>
             <a:pPr marL="432000" indent="-324000">
               <a:lnSpc>
@@ -4443,7 +5161,7 @@
               <a:buChar char=""/>
             </a:pPr>
             <a:r>
-              <a:rPr b="0" lang="en-US" sz="2800" spc="-1" strike="noStrike">
+              <a:rPr lang="en-US" sz="2800" b="0" strike="noStrike" spc="-1">
                 <a:solidFill>
                   <a:schemeClr val="dk1"/>
                 </a:solidFill>
@@ -4451,15 +5169,9 @@
               </a:rPr>
               <a:t>What is a Radiogram?</a:t>
             </a:r>
-            <a:endParaRPr b="0" lang="en-US" sz="2800" spc="-1" strike="noStrike">
-              <a:solidFill>
-                <a:schemeClr val="dk1"/>
-              </a:solidFill>
-              <a:latin typeface="Aptos"/>
-            </a:endParaRPr>
-          </a:p>
-          <a:p>
-            <a:pPr lvl="1" marL="864000" indent="-324000">
+          </a:p>
+          <a:p>
+            <a:pPr marL="864000" lvl="1" indent="-324000">
               <a:lnSpc>
                 <a:spcPct val="90000"/>
               </a:lnSpc>
@@ -4474,7 +5186,7 @@
               <a:buChar char=""/>
             </a:pPr>
             <a:r>
-              <a:rPr b="0" lang="en-US" sz="2000" spc="-1" strike="noStrike">
+              <a:rPr lang="en-US" sz="2000" b="0" strike="noStrike" spc="-1">
                 <a:solidFill>
                   <a:schemeClr val="dk1"/>
                 </a:solidFill>
@@ -4482,15 +5194,9 @@
               </a:rPr>
               <a:t>Radiograms are a method of communicating formal messages using a standardized format and handling procedure.  They are used when exact wording, reliable relay through multiple operators, documented delivery, or accountability is important.  Each relay operator copies and forwards the message without altering its content.</a:t>
             </a:r>
-            <a:endParaRPr b="0" lang="en-US" sz="2000" spc="-1" strike="noStrike">
-              <a:solidFill>
-                <a:schemeClr val="dk1"/>
-              </a:solidFill>
-              <a:latin typeface="Aptos"/>
-            </a:endParaRPr>
-          </a:p>
-          <a:p>
-            <a:pPr lvl="1" marL="864000" indent="-324000">
+          </a:p>
+          <a:p>
+            <a:pPr marL="864000" lvl="1" indent="-324000">
               <a:lnSpc>
                 <a:spcPct val="90000"/>
               </a:lnSpc>
@@ -4505,7 +5211,7 @@
               <a:buChar char=""/>
             </a:pPr>
             <a:r>
-              <a:rPr b="0" lang="en-US" sz="2000" spc="-1" strike="noStrike">
+              <a:rPr lang="en-US" sz="2000" b="0" strike="noStrike" spc="-1">
                 <a:solidFill>
                   <a:schemeClr val="dk1"/>
                 </a:solidFill>
@@ -4514,7 +5220,7 @@
               <a:t>Created in 1914 as a method of transmitting messages from ship to shore and beyond.  Amateurs started utilizing the method in the 20s and 40s to transmit messages for the general public, but amateur radios of the time were very power limited, requiring messages to be passed through relay stations.  Hence, the method puts the </a:t>
             </a:r>
             <a:r>
-              <a:rPr b="1" lang="en-US" sz="2000" spc="-1" strike="noStrike">
+              <a:rPr lang="en-US" sz="2000" b="1" strike="noStrike" spc="-1">
                 <a:solidFill>
                   <a:schemeClr val="dk1"/>
                 </a:solidFill>
@@ -4523,7 +5229,7 @@
               <a:t>RELAY</a:t>
             </a:r>
             <a:r>
-              <a:rPr b="0" lang="en-US" sz="2000" spc="-1" strike="noStrike">
+              <a:rPr lang="en-US" sz="2000" b="0" strike="noStrike" spc="-1">
                 <a:solidFill>
                   <a:schemeClr val="dk1"/>
                 </a:solidFill>
@@ -4531,12 +5237,6 @@
               </a:rPr>
               <a:t> in American Radio Relay League.</a:t>
             </a:r>
-            <a:endParaRPr b="0" lang="en-US" sz="2000" spc="-1" strike="noStrike">
-              <a:solidFill>
-                <a:schemeClr val="dk1"/>
-              </a:solidFill>
-              <a:latin typeface="Aptos"/>
-            </a:endParaRPr>
           </a:p>
         </p:txBody>
       </p:sp>
@@ -4553,6 +5253,7 @@
         <p:spPr/>
         <p:txBody>
           <a:bodyPr/>
+          <a:lstStyle/>
           <a:p>
             <a:r>
               <a:t>Warren County KY ARES • KQ4TIV Emergency Coordinator</a:t>
@@ -4573,10 +5274,13 @@
         <p:spPr/>
         <p:txBody>
           <a:bodyPr/>
+          <a:lstStyle/>
           <a:p>
             <a:fld id="{EBD91418-2D96-48E0-8F6F-27674B1DA9EE}" type="slidenum">
+              <a:rPr/>
               <a:t>5</a:t>
             </a:fld>
+            <a:endParaRPr/>
           </a:p>
         </p:txBody>
       </p:sp>
@@ -4593,29 +5297,26 @@
         <p:spPr/>
         <p:txBody>
           <a:bodyPr/>
+          <a:lstStyle/>
           <a:p>
             <a:fld id="{B5F58C5F-5152-4DD7-94CB-765AB26AC138}" type="datetime1">
               <a:rPr lang="en-US"/>
-              <a:t>09/21/2026</a:t>
+              <a:t>9/22/2026</a:t>
             </a:fld>
+            <a:endParaRPr lang="en-US"/>
           </a:p>
         </p:txBody>
       </p:sp>
     </p:spTree>
   </p:cSld>
-  <mc:AlternateContent>
-    <mc:Choice Requires="p14">
-      <p:transition spd="slow" p14:dur="2000"/>
-    </mc:Choice>
-    <mc:Fallback>
-      <p:transition spd="slow"/>
-    </mc:Fallback>
-  </mc:AlternateContent>
+  <p:clrMapOvr>
+    <a:masterClrMapping/>
+  </p:clrMapOvr>
 </p:sld>
 </file>
 
 <file path=ppt/slides/slide6.xml><?xml version="1.0" encoding="utf-8"?>
-<p:sld xmlns:a="http://schemas.openxmlformats.org/drawingml/2006/main" xmlns:p="http://schemas.openxmlformats.org/presentationml/2006/main" xmlns:r="http://schemas.openxmlformats.org/officeDocument/2006/relationships" xmlns:p14="http://schemas.microsoft.com/office/powerpoint/2010/main" xmlns:p15="http://schemas.microsoft.com/office/powerpoint/2012/main" xmlns:mc="http://schemas.openxmlformats.org/markup-compatibility/2006">
+<p:sld xmlns:a="http://schemas.openxmlformats.org/drawingml/2006/main" xmlns:r="http://schemas.openxmlformats.org/officeDocument/2006/relationships" xmlns:p="http://schemas.openxmlformats.org/presentationml/2006/main">
   <p:cSld>
     <p:spTree>
       <p:nvGrpSpPr>
@@ -4655,9 +5356,10 @@
           </a:ln>
         </p:spPr>
         <p:txBody>
-          <a:bodyPr lIns="0" rIns="0" tIns="0" bIns="0" anchor="ctr">
+          <a:bodyPr lIns="0" tIns="0" rIns="0" bIns="0" anchor="ctr">
             <a:noAutofit/>
           </a:bodyPr>
+          <a:lstStyle/>
           <a:p>
             <a:pPr indent="0" defTabSz="914400">
               <a:lnSpc>
@@ -4665,11 +5367,11 @@
               </a:lnSpc>
               <a:buNone/>
               <a:tabLst>
-                <a:tab algn="l" pos="0"/>
+                <a:tab pos="0" algn="l"/>
               </a:tabLst>
             </a:pPr>
             <a:r>
-              <a:rPr b="0" lang="en-US" sz="4400" spc="-1" strike="noStrike">
+              <a:rPr lang="en-US" sz="4400" b="0" strike="noStrike" spc="-1">
                 <a:solidFill>
                   <a:schemeClr val="dk1"/>
                 </a:solidFill>
@@ -4677,7 +5379,7 @@
               </a:rPr>
               <a:t>Radiograms</a:t>
             </a:r>
-            <a:endParaRPr b="0" lang="en-US" sz="4400" spc="-1" strike="noStrike">
+            <a:endParaRPr lang="en-US" sz="4400" b="0" strike="noStrike" spc="-1">
               <a:solidFill>
                 <a:schemeClr val="dk1"/>
               </a:solidFill>
@@ -4710,9 +5412,10 @@
           </a:ln>
         </p:spPr>
         <p:txBody>
-          <a:bodyPr lIns="0" rIns="0" tIns="0" bIns="0" anchor="t">
+          <a:bodyPr lIns="0" tIns="0" rIns="0" bIns="0" anchor="t">
             <a:normAutofit fontScale="66770"/>
           </a:bodyPr>
+          <a:lstStyle/>
           <a:p>
             <a:pPr marL="432000" indent="-324000">
               <a:lnSpc>
@@ -4729,7 +5432,7 @@
               <a:buChar char=""/>
             </a:pPr>
             <a:r>
-              <a:rPr b="0" lang="en-US" sz="2800" spc="-1" strike="noStrike">
+              <a:rPr lang="en-US" sz="2800" b="0" strike="noStrike" spc="-1">
                 <a:solidFill>
                   <a:schemeClr val="dk1"/>
                 </a:solidFill>
@@ -4737,15 +5440,9 @@
               </a:rPr>
               <a:t>When to use them</a:t>
             </a:r>
-            <a:endParaRPr b="0" lang="en-US" sz="2800" spc="-1" strike="noStrike">
-              <a:solidFill>
-                <a:schemeClr val="dk1"/>
-              </a:solidFill>
-              <a:latin typeface="Aptos"/>
-            </a:endParaRPr>
-          </a:p>
-          <a:p>
-            <a:pPr lvl="1" marL="864000" indent="-324000">
+          </a:p>
+          <a:p>
+            <a:pPr marL="864000" lvl="1" indent="-324000">
               <a:lnSpc>
                 <a:spcPct val="90000"/>
               </a:lnSpc>
@@ -4760,7 +5457,7 @@
               <a:buChar char=""/>
             </a:pPr>
             <a:r>
-              <a:rPr b="0" lang="en-US" sz="2000" spc="-1" strike="noStrike">
+              <a:rPr lang="en-US" sz="2000" b="0" strike="noStrike" spc="-1">
                 <a:solidFill>
                   <a:schemeClr val="dk1"/>
                 </a:solidFill>
@@ -4768,15 +5465,9 @@
               </a:rPr>
               <a:t>Exact wording must be preserved</a:t>
             </a:r>
-            <a:endParaRPr b="0" lang="en-US" sz="2000" spc="-1" strike="noStrike">
-              <a:solidFill>
-                <a:schemeClr val="dk1"/>
-              </a:solidFill>
-              <a:latin typeface="Aptos"/>
-            </a:endParaRPr>
-          </a:p>
-          <a:p>
-            <a:pPr lvl="1" marL="864000" indent="-324000">
+          </a:p>
+          <a:p>
+            <a:pPr marL="864000" lvl="1" indent="-324000">
               <a:lnSpc>
                 <a:spcPct val="90000"/>
               </a:lnSpc>
@@ -4791,7 +5482,7 @@
               <a:buChar char=""/>
             </a:pPr>
             <a:r>
-              <a:rPr b="0" lang="en-US" sz="2000" spc="-1" strike="noStrike">
+              <a:rPr lang="en-US" sz="2000" b="0" strike="noStrike" spc="-1">
                 <a:solidFill>
                   <a:schemeClr val="dk1"/>
                 </a:solidFill>
@@ -4799,15 +5490,9 @@
               </a:rPr>
               <a:t>Message may pass through multiple operators or nets</a:t>
             </a:r>
-            <a:endParaRPr b="0" lang="en-US" sz="2000" spc="-1" strike="noStrike">
-              <a:solidFill>
-                <a:schemeClr val="dk1"/>
-              </a:solidFill>
-              <a:latin typeface="Aptos"/>
-            </a:endParaRPr>
-          </a:p>
-          <a:p>
-            <a:pPr lvl="1" marL="864000" indent="-324000">
+          </a:p>
+          <a:p>
+            <a:pPr marL="864000" lvl="1" indent="-324000">
               <a:lnSpc>
                 <a:spcPct val="90000"/>
               </a:lnSpc>
@@ -4822,7 +5507,7 @@
               <a:buChar char=""/>
             </a:pPr>
             <a:r>
-              <a:rPr b="0" lang="en-US" sz="2000" spc="-1" strike="noStrike">
+              <a:rPr lang="en-US" sz="2000" b="0" strike="noStrike" spc="-1">
                 <a:solidFill>
                   <a:schemeClr val="dk1"/>
                 </a:solidFill>
@@ -4830,15 +5515,9 @@
               </a:rPr>
               <a:t>Recipient is not immediately available</a:t>
             </a:r>
-            <a:endParaRPr b="0" lang="en-US" sz="2000" spc="-1" strike="noStrike">
-              <a:solidFill>
-                <a:schemeClr val="dk1"/>
-              </a:solidFill>
-              <a:latin typeface="Aptos"/>
-            </a:endParaRPr>
-          </a:p>
-          <a:p>
-            <a:pPr lvl="1" marL="864000" indent="-324000">
+          </a:p>
+          <a:p>
+            <a:pPr marL="864000" lvl="1" indent="-324000">
               <a:lnSpc>
                 <a:spcPct val="90000"/>
               </a:lnSpc>
@@ -4853,7 +5532,7 @@
               <a:buChar char=""/>
             </a:pPr>
             <a:r>
-              <a:rPr b="0" lang="en-US" sz="2000" spc="-1" strike="noStrike">
+              <a:rPr lang="en-US" sz="2000" b="0" strike="noStrike" spc="-1">
                 <a:solidFill>
                   <a:schemeClr val="dk1"/>
                 </a:solidFill>
@@ -4861,15 +5540,9 @@
               </a:rPr>
               <a:t>Delivery and acknowledgment must be documented</a:t>
             </a:r>
-            <a:endParaRPr b="0" lang="en-US" sz="2000" spc="-1" strike="noStrike">
-              <a:solidFill>
-                <a:schemeClr val="dk1"/>
-              </a:solidFill>
-              <a:latin typeface="Aptos"/>
-            </a:endParaRPr>
-          </a:p>
-          <a:p>
-            <a:pPr lvl="1" marL="864000" indent="-324000">
+          </a:p>
+          <a:p>
+            <a:pPr marL="864000" lvl="1" indent="-324000">
               <a:lnSpc>
                 <a:spcPct val="90000"/>
               </a:lnSpc>
@@ -4884,7 +5557,7 @@
               <a:buChar char=""/>
             </a:pPr>
             <a:r>
-              <a:rPr b="0" lang="en-US" sz="2000" spc="-1" strike="noStrike">
+              <a:rPr lang="en-US" sz="2000" b="0" strike="noStrike" spc="-1">
                 <a:solidFill>
                   <a:schemeClr val="dk1"/>
                 </a:solidFill>
@@ -4892,15 +5565,9 @@
               </a:rPr>
               <a:t>Message is a formal report, request, notification, or welfare inquiry</a:t>
             </a:r>
-            <a:endParaRPr b="0" lang="en-US" sz="2000" spc="-1" strike="noStrike">
-              <a:solidFill>
-                <a:schemeClr val="dk1"/>
-              </a:solidFill>
-              <a:latin typeface="Aptos"/>
-            </a:endParaRPr>
-          </a:p>
-          <a:p>
-            <a:pPr lvl="1" marL="864000" indent="-324000">
+          </a:p>
+          <a:p>
+            <a:pPr marL="864000" lvl="1" indent="-324000">
               <a:lnSpc>
                 <a:spcPct val="90000"/>
               </a:lnSpc>
@@ -4915,7 +5582,7 @@
               <a:buChar char=""/>
             </a:pPr>
             <a:r>
-              <a:rPr b="0" lang="en-US" sz="2000" spc="-1" strike="noStrike">
+              <a:rPr lang="en-US" sz="2000" b="0" strike="noStrike" spc="-1">
                 <a:solidFill>
                   <a:schemeClr val="dk1"/>
                 </a:solidFill>
@@ -4923,12 +5590,6 @@
               </a:rPr>
               <a:t>Traffic may need to move outside the local ARES network through NTS</a:t>
             </a:r>
-            <a:endParaRPr b="0" lang="en-US" sz="2000" spc="-1" strike="noStrike">
-              <a:solidFill>
-                <a:schemeClr val="dk1"/>
-              </a:solidFill>
-              <a:latin typeface="Aptos"/>
-            </a:endParaRPr>
           </a:p>
           <a:p>
             <a:pPr marL="432000" indent="-324000">
@@ -4946,7 +5607,7 @@
               <a:buChar char=""/>
             </a:pPr>
             <a:r>
-              <a:rPr b="0" lang="en-US" sz="2800" spc="-1" strike="noStrike">
+              <a:rPr lang="en-US" sz="2800" b="0" strike="noStrike" spc="-1">
                 <a:solidFill>
                   <a:schemeClr val="dk1"/>
                 </a:solidFill>
@@ -4954,15 +5615,9 @@
               </a:rPr>
               <a:t>Examples</a:t>
             </a:r>
-            <a:endParaRPr b="0" lang="en-US" sz="2800" spc="-1" strike="noStrike">
-              <a:solidFill>
-                <a:schemeClr val="dk1"/>
-              </a:solidFill>
-              <a:latin typeface="Aptos"/>
-            </a:endParaRPr>
-          </a:p>
-          <a:p>
-            <a:pPr lvl="1" marL="864000" indent="-324000">
+          </a:p>
+          <a:p>
+            <a:pPr marL="864000" lvl="1" indent="-324000">
               <a:lnSpc>
                 <a:spcPct val="90000"/>
               </a:lnSpc>
@@ -4977,7 +5632,7 @@
               <a:buChar char=""/>
             </a:pPr>
             <a:r>
-              <a:rPr b="0" lang="en-US" sz="2000" spc="-1" strike="noStrike">
+              <a:rPr lang="en-US" sz="2000" b="0" strike="noStrike" spc="-1">
                 <a:solidFill>
                   <a:schemeClr val="dk1"/>
                 </a:solidFill>
@@ -4985,15 +5640,9 @@
               </a:rPr>
               <a:t>Monthly ARES net reports to Section Traffic Manager</a:t>
             </a:r>
-            <a:endParaRPr b="0" lang="en-US" sz="2000" spc="-1" strike="noStrike">
-              <a:solidFill>
-                <a:schemeClr val="dk1"/>
-              </a:solidFill>
-              <a:latin typeface="Aptos"/>
-            </a:endParaRPr>
-          </a:p>
-          <a:p>
-            <a:pPr lvl="1" marL="864000" indent="-324000">
+          </a:p>
+          <a:p>
+            <a:pPr marL="864000" lvl="1" indent="-324000">
               <a:lnSpc>
                 <a:spcPct val="90000"/>
               </a:lnSpc>
@@ -5008,7 +5657,7 @@
               <a:buChar char=""/>
             </a:pPr>
             <a:r>
-              <a:rPr b="0" lang="en-US" sz="2000" spc="-1" strike="noStrike">
+              <a:rPr lang="en-US" sz="2000" b="0" strike="noStrike" spc="-1">
                 <a:solidFill>
                   <a:schemeClr val="dk1"/>
                 </a:solidFill>
@@ -5016,15 +5665,9 @@
               </a:rPr>
               <a:t>Formal request for supplies</a:t>
             </a:r>
-            <a:endParaRPr b="0" lang="en-US" sz="2000" spc="-1" strike="noStrike">
-              <a:solidFill>
-                <a:schemeClr val="dk1"/>
-              </a:solidFill>
-              <a:latin typeface="Aptos"/>
-            </a:endParaRPr>
-          </a:p>
-          <a:p>
-            <a:pPr lvl="1" marL="864000" indent="-324000">
+          </a:p>
+          <a:p>
+            <a:pPr marL="864000" lvl="1" indent="-324000">
               <a:lnSpc>
                 <a:spcPct val="90000"/>
               </a:lnSpc>
@@ -5039,7 +5682,7 @@
               <a:buChar char=""/>
             </a:pPr>
             <a:r>
-              <a:rPr b="0" lang="en-US" sz="2000" spc="-1" strike="noStrike">
+              <a:rPr lang="en-US" sz="2000" b="0" strike="noStrike" spc="-1">
                 <a:solidFill>
                   <a:schemeClr val="dk1"/>
                 </a:solidFill>
@@ -5047,15 +5690,9 @@
               </a:rPr>
               <a:t>Welfare traffic outside the affected area</a:t>
             </a:r>
-            <a:endParaRPr b="0" lang="en-US" sz="2000" spc="-1" strike="noStrike">
-              <a:solidFill>
-                <a:schemeClr val="dk1"/>
-              </a:solidFill>
-              <a:latin typeface="Aptos"/>
-            </a:endParaRPr>
-          </a:p>
-          <a:p>
-            <a:pPr lvl="1" marL="864000" indent="-324000">
+          </a:p>
+          <a:p>
+            <a:pPr marL="864000" lvl="1" indent="-324000">
               <a:lnSpc>
                 <a:spcPct val="90000"/>
               </a:lnSpc>
@@ -5070,7 +5707,7 @@
               <a:buChar char=""/>
             </a:pPr>
             <a:r>
-              <a:rPr b="0" lang="en-US" sz="2000" spc="-1" strike="noStrike">
+              <a:rPr lang="en-US" sz="2000" b="0" strike="noStrike" spc="-1">
                 <a:solidFill>
                   <a:schemeClr val="dk1"/>
                 </a:solidFill>
@@ -5078,12 +5715,6 @@
               </a:rPr>
               <a:t>Official notifications requiring verbatim repeating</a:t>
             </a:r>
-            <a:endParaRPr b="0" lang="en-US" sz="2000" spc="-1" strike="noStrike">
-              <a:solidFill>
-                <a:schemeClr val="dk1"/>
-              </a:solidFill>
-              <a:latin typeface="Aptos"/>
-            </a:endParaRPr>
           </a:p>
         </p:txBody>
       </p:sp>
@@ -5100,6 +5731,7 @@
         <p:spPr/>
         <p:txBody>
           <a:bodyPr/>
+          <a:lstStyle/>
           <a:p>
             <a:r>
               <a:t>Warren County KY ARES • KQ4TIV Emergency Coordinator</a:t>
@@ -5120,10 +5752,12 @@
         <p:spPr/>
         <p:txBody>
           <a:bodyPr/>
+          <a:lstStyle/>
           <a:p>
             <a:fld id="{FEBC8001-82F9-44EF-BDDF-B3F82011F167}" type="slidenum">
               <a:t>6</a:t>
             </a:fld>
+            <a:endParaRPr/>
           </a:p>
         </p:txBody>
       </p:sp>
@@ -5140,29 +5774,26 @@
         <p:spPr/>
         <p:txBody>
           <a:bodyPr/>
+          <a:lstStyle/>
           <a:p>
             <a:fld id="{E406AF52-EE2F-42B5-AF2E-B43AFD5A0EB4}" type="datetime1">
               <a:rPr lang="en-US"/>
-              <a:t>09/21/2026</a:t>
+              <a:t>9/22/2026</a:t>
             </a:fld>
+            <a:endParaRPr lang="en-US"/>
           </a:p>
         </p:txBody>
       </p:sp>
     </p:spTree>
   </p:cSld>
-  <mc:AlternateContent>
-    <mc:Choice Requires="p14">
-      <p:transition spd="slow" p14:dur="2000"/>
-    </mc:Choice>
-    <mc:Fallback>
-      <p:transition spd="slow"/>
-    </mc:Fallback>
-  </mc:AlternateContent>
+  <p:clrMapOvr>
+    <a:masterClrMapping/>
+  </p:clrMapOvr>
 </p:sld>
 </file>
 
 <file path=ppt/slides/slide7.xml><?xml version="1.0" encoding="utf-8"?>
-<p:sld xmlns:a="http://schemas.openxmlformats.org/drawingml/2006/main" xmlns:p="http://schemas.openxmlformats.org/presentationml/2006/main" xmlns:r="http://schemas.openxmlformats.org/officeDocument/2006/relationships" xmlns:p14="http://schemas.microsoft.com/office/powerpoint/2010/main" xmlns:p15="http://schemas.microsoft.com/office/powerpoint/2012/main" xmlns:mc="http://schemas.openxmlformats.org/markup-compatibility/2006">
+<p:sld xmlns:a="http://schemas.openxmlformats.org/drawingml/2006/main" xmlns:r="http://schemas.openxmlformats.org/officeDocument/2006/relationships" xmlns:p="http://schemas.openxmlformats.org/presentationml/2006/main">
   <p:cSld>
     <p:spTree>
       <p:nvGrpSpPr>
@@ -5202,9 +5833,10 @@
           </a:ln>
         </p:spPr>
         <p:txBody>
-          <a:bodyPr lIns="0" rIns="0" tIns="0" bIns="0" anchor="ctr">
+          <a:bodyPr lIns="0" tIns="0" rIns="0" bIns="0" anchor="ctr">
             <a:noAutofit/>
           </a:bodyPr>
+          <a:lstStyle/>
           <a:p>
             <a:pPr indent="0" defTabSz="914400">
               <a:lnSpc>
@@ -5212,11 +5844,11 @@
               </a:lnSpc>
               <a:buNone/>
               <a:tabLst>
-                <a:tab algn="l" pos="0"/>
+                <a:tab pos="0" algn="l"/>
               </a:tabLst>
             </a:pPr>
             <a:r>
-              <a:rPr b="0" lang="en-US" sz="4400" spc="-1" strike="noStrike">
+              <a:rPr lang="en-US" sz="4400" b="0" strike="noStrike" spc="-1">
                 <a:solidFill>
                   <a:schemeClr val="dk1"/>
                 </a:solidFill>
@@ -5224,7 +5856,7 @@
               </a:rPr>
               <a:t>Radiograms</a:t>
             </a:r>
-            <a:endParaRPr b="0" lang="en-US" sz="4400" spc="-1" strike="noStrike">
+            <a:endParaRPr lang="en-US" sz="4400" b="0" strike="noStrike" spc="-1">
               <a:solidFill>
                 <a:schemeClr val="dk1"/>
               </a:solidFill>
@@ -5257,9 +5889,10 @@
           </a:ln>
         </p:spPr>
         <p:txBody>
-          <a:bodyPr lIns="0" rIns="0" tIns="0" bIns="0" anchor="t">
+          <a:bodyPr lIns="0" tIns="0" rIns="0" bIns="0" anchor="t">
             <a:normAutofit fontScale="90336"/>
           </a:bodyPr>
+          <a:lstStyle/>
           <a:p>
             <a:pPr marL="432000" indent="-324000">
               <a:lnSpc>
@@ -5276,7 +5909,7 @@
               <a:buChar char=""/>
             </a:pPr>
             <a:r>
-              <a:rPr b="0" lang="en-US" sz="2800" spc="-1" strike="noStrike">
+              <a:rPr lang="en-US" sz="2800" b="0" strike="noStrike" spc="-1">
                 <a:solidFill>
                   <a:schemeClr val="dk1"/>
                 </a:solidFill>
@@ -5284,15 +5917,9 @@
               </a:rPr>
               <a:t>When NOT to use them</a:t>
             </a:r>
-            <a:endParaRPr b="0" lang="en-US" sz="2800" spc="-1" strike="noStrike">
-              <a:solidFill>
-                <a:schemeClr val="dk1"/>
-              </a:solidFill>
-              <a:latin typeface="Aptos"/>
-            </a:endParaRPr>
-          </a:p>
-          <a:p>
-            <a:pPr lvl="1" marL="864000" indent="-324000">
+          </a:p>
+          <a:p>
+            <a:pPr marL="864000" lvl="1" indent="-324000">
               <a:lnSpc>
                 <a:spcPct val="90000"/>
               </a:lnSpc>
@@ -5307,7 +5934,7 @@
               <a:buChar char=""/>
             </a:pPr>
             <a:r>
-              <a:rPr b="0" lang="en-US" sz="2000" spc="-1" strike="noStrike">
+              <a:rPr lang="en-US" sz="2000" b="0" strike="noStrike" spc="-1">
                 <a:solidFill>
                   <a:schemeClr val="dk1"/>
                 </a:solidFill>
@@ -5315,15 +5942,9 @@
               </a:rPr>
               <a:t>Life-safety message</a:t>
             </a:r>
-            <a:endParaRPr b="0" lang="en-US" sz="2000" spc="-1" strike="noStrike">
-              <a:solidFill>
-                <a:schemeClr val="dk1"/>
-              </a:solidFill>
-              <a:latin typeface="Aptos"/>
-            </a:endParaRPr>
-          </a:p>
-          <a:p>
-            <a:pPr lvl="1" marL="864000" indent="-324000">
+          </a:p>
+          <a:p>
+            <a:pPr marL="864000" lvl="1" indent="-324000">
               <a:lnSpc>
                 <a:spcPct val="90000"/>
               </a:lnSpc>
@@ -5338,7 +5959,7 @@
               <a:buChar char=""/>
             </a:pPr>
             <a:r>
-              <a:rPr b="0" lang="en-US" sz="2000" spc="-1" strike="noStrike">
+              <a:rPr lang="en-US" sz="2000" b="0" strike="noStrike" spc="-1">
                 <a:solidFill>
                   <a:schemeClr val="dk1"/>
                 </a:solidFill>
@@ -5346,15 +5967,9 @@
               </a:rPr>
               <a:t>Requires parties to ask questions/conversation</a:t>
             </a:r>
-            <a:endParaRPr b="0" lang="en-US" sz="2000" spc="-1" strike="noStrike">
-              <a:solidFill>
-                <a:schemeClr val="dk1"/>
-              </a:solidFill>
-              <a:latin typeface="Aptos"/>
-            </a:endParaRPr>
-          </a:p>
-          <a:p>
-            <a:pPr lvl="1" marL="864000" indent="-324000">
+          </a:p>
+          <a:p>
+            <a:pPr marL="864000" lvl="1" indent="-324000">
               <a:lnSpc>
                 <a:spcPct val="90000"/>
               </a:lnSpc>
@@ -5369,7 +5984,7 @@
               <a:buChar char=""/>
             </a:pPr>
             <a:r>
-              <a:rPr b="0" lang="en-US" sz="2000" spc="-1" strike="noStrike">
+              <a:rPr lang="en-US" sz="2000" b="0" strike="noStrike" spc="-1">
                 <a:solidFill>
                   <a:schemeClr val="dk1"/>
                 </a:solidFill>
@@ -5377,15 +5992,9 @@
               </a:rPr>
               <a:t>Exact wording not important</a:t>
             </a:r>
-            <a:endParaRPr b="0" lang="en-US" sz="2000" spc="-1" strike="noStrike">
-              <a:solidFill>
-                <a:schemeClr val="dk1"/>
-              </a:solidFill>
-              <a:latin typeface="Aptos"/>
-            </a:endParaRPr>
-          </a:p>
-          <a:p>
-            <a:pPr lvl="1" marL="864000" indent="-324000">
+          </a:p>
+          <a:p>
+            <a:pPr marL="864000" lvl="1" indent="-324000">
               <a:lnSpc>
                 <a:spcPct val="90000"/>
               </a:lnSpc>
@@ -5400,7 +6009,7 @@
               <a:buChar char=""/>
             </a:pPr>
             <a:r>
-              <a:rPr b="0" lang="en-US" sz="2000" spc="-1" strike="noStrike">
+              <a:rPr lang="en-US" sz="2000" b="0" strike="noStrike" spc="-1">
                 <a:solidFill>
                   <a:schemeClr val="dk1"/>
                 </a:solidFill>
@@ -5408,15 +6017,9 @@
               </a:rPr>
               <a:t>Recipient is available in real time</a:t>
             </a:r>
-            <a:endParaRPr b="0" lang="en-US" sz="2000" spc="-1" strike="noStrike">
-              <a:solidFill>
-                <a:schemeClr val="dk1"/>
-              </a:solidFill>
-              <a:latin typeface="Aptos"/>
-            </a:endParaRPr>
-          </a:p>
-          <a:p>
-            <a:pPr lvl="1" marL="864000" indent="-324000">
+          </a:p>
+          <a:p>
+            <a:pPr marL="864000" lvl="1" indent="-324000">
               <a:lnSpc>
                 <a:spcPct val="90000"/>
               </a:lnSpc>
@@ -5431,7 +6034,7 @@
               <a:buChar char=""/>
             </a:pPr>
             <a:r>
-              <a:rPr b="0" lang="en-US" sz="2000" spc="-1" strike="noStrike">
+              <a:rPr lang="en-US" sz="2000" b="0" strike="noStrike" spc="-1">
                 <a:solidFill>
                   <a:schemeClr val="dk1"/>
                 </a:solidFill>
@@ -5439,12 +6042,6 @@
               </a:rPr>
               <a:t>Delaying message delivery would be harmful</a:t>
             </a:r>
-            <a:endParaRPr b="0" lang="en-US" sz="2000" spc="-1" strike="noStrike">
-              <a:solidFill>
-                <a:schemeClr val="dk1"/>
-              </a:solidFill>
-              <a:latin typeface="Aptos"/>
-            </a:endParaRPr>
           </a:p>
           <a:p>
             <a:pPr marL="432000" indent="-324000">
@@ -5462,7 +6059,7 @@
               <a:buChar char=""/>
             </a:pPr>
             <a:r>
-              <a:rPr b="0" lang="en-US" sz="2800" spc="-1" strike="noStrike">
+              <a:rPr lang="en-US" sz="2800" b="0" strike="noStrike" spc="-1">
                 <a:solidFill>
                   <a:schemeClr val="dk1"/>
                 </a:solidFill>
@@ -5470,15 +6067,9 @@
               </a:rPr>
               <a:t>Examples</a:t>
             </a:r>
-            <a:endParaRPr b="0" lang="en-US" sz="2800" spc="-1" strike="noStrike">
-              <a:solidFill>
-                <a:schemeClr val="dk1"/>
-              </a:solidFill>
-              <a:latin typeface="Aptos"/>
-            </a:endParaRPr>
-          </a:p>
-          <a:p>
-            <a:pPr lvl="1" marL="864000" indent="-324000">
+          </a:p>
+          <a:p>
+            <a:pPr marL="864000" lvl="1" indent="-324000">
               <a:lnSpc>
                 <a:spcPct val="90000"/>
               </a:lnSpc>
@@ -5493,32 +6084,17 @@
               <a:buChar char=""/>
             </a:pPr>
             <a:r>
-              <a:rPr b="0" lang="en-US" sz="2000" spc="-1" strike="noStrike">
-                <a:solidFill>
-                  <a:schemeClr val="dk1"/>
-                </a:solidFill>
-                <a:latin typeface="Aptos"/>
-              </a:rPr>
-              <a:t>“</a:t>
-            </a:r>
-            <a:r>
-              <a:rPr b="0" lang="en-US" sz="2000" spc="-1" strike="noStrike">
-                <a:solidFill>
-                  <a:schemeClr val="dk1"/>
-                </a:solidFill>
-                <a:latin typeface="Aptos"/>
-              </a:rPr>
-              <a:t>Send another shelter worker to the west entrance”</a:t>
-            </a:r>
-            <a:endParaRPr b="0" lang="en-US" sz="2000" spc="-1" strike="noStrike">
-              <a:solidFill>
-                <a:schemeClr val="dk1"/>
-              </a:solidFill>
-              <a:latin typeface="Aptos"/>
-            </a:endParaRPr>
-          </a:p>
-          <a:p>
-            <a:pPr lvl="1" marL="864000" indent="-324000">
+              <a:rPr lang="en-US" sz="2000" b="0" strike="noStrike" spc="-1">
+                <a:solidFill>
+                  <a:schemeClr val="dk1"/>
+                </a:solidFill>
+                <a:latin typeface="Aptos"/>
+              </a:rPr>
+              <a:t>“Send another shelter worker to the west entrance”</a:t>
+            </a:r>
+          </a:p>
+          <a:p>
+            <a:pPr marL="864000" lvl="1" indent="-324000">
               <a:lnSpc>
                 <a:spcPct val="90000"/>
               </a:lnSpc>
@@ -5533,32 +6109,17 @@
               <a:buChar char=""/>
             </a:pPr>
             <a:r>
-              <a:rPr b="0" lang="en-US" sz="2000" spc="-1" strike="noStrike">
-                <a:solidFill>
-                  <a:schemeClr val="dk1"/>
-                </a:solidFill>
-                <a:latin typeface="Aptos"/>
-              </a:rPr>
-              <a:t>“</a:t>
-            </a:r>
-            <a:r>
-              <a:rPr b="0" lang="en-US" sz="2000" spc="-1" strike="noStrike">
-                <a:solidFill>
-                  <a:schemeClr val="dk1"/>
-                </a:solidFill>
-                <a:latin typeface="Aptos"/>
-              </a:rPr>
-              <a:t>Supply truck has arrived”</a:t>
-            </a:r>
-            <a:endParaRPr b="0" lang="en-US" sz="2000" spc="-1" strike="noStrike">
-              <a:solidFill>
-                <a:schemeClr val="dk1"/>
-              </a:solidFill>
-              <a:latin typeface="Aptos"/>
-            </a:endParaRPr>
-          </a:p>
-          <a:p>
-            <a:pPr lvl="1" marL="864000" indent="-324000">
+              <a:rPr lang="en-US" sz="2000" b="0" strike="noStrike" spc="-1">
+                <a:solidFill>
+                  <a:schemeClr val="dk1"/>
+                </a:solidFill>
+                <a:latin typeface="Aptos"/>
+              </a:rPr>
+              <a:t>“Supply truck has arrived”</a:t>
+            </a:r>
+          </a:p>
+          <a:p>
+            <a:pPr marL="864000" lvl="1" indent="-324000">
               <a:lnSpc>
                 <a:spcPct val="90000"/>
               </a:lnSpc>
@@ -5573,7 +6134,7 @@
               <a:buChar char=""/>
             </a:pPr>
             <a:r>
-              <a:rPr b="0" lang="en-US" sz="2000" spc="-1" strike="noStrike">
+              <a:rPr lang="en-US" sz="2000" b="0" strike="noStrike" spc="-1">
                 <a:solidFill>
                   <a:schemeClr val="dk1"/>
                 </a:solidFill>
@@ -5581,12 +6142,6 @@
               </a:rPr>
               <a:t>Coordinating frequencies, assignments, arrival times, or equipment</a:t>
             </a:r>
-            <a:endParaRPr b="0" lang="en-US" sz="2000" spc="-1" strike="noStrike">
-              <a:solidFill>
-                <a:schemeClr val="dk1"/>
-              </a:solidFill>
-              <a:latin typeface="Aptos"/>
-            </a:endParaRPr>
           </a:p>
         </p:txBody>
       </p:sp>
@@ -5603,6 +6158,7 @@
         <p:spPr/>
         <p:txBody>
           <a:bodyPr/>
+          <a:lstStyle/>
           <a:p>
             <a:r>
               <a:t>Warren County KY ARES • KQ4TIV Emergency Coordinator</a:t>
@@ -5623,10 +6179,13 @@
         <p:spPr/>
         <p:txBody>
           <a:bodyPr/>
+          <a:lstStyle/>
           <a:p>
             <a:fld id="{DBE70D15-EF94-4850-8950-68B89E0100C7}" type="slidenum">
+              <a:rPr/>
               <a:t>7</a:t>
             </a:fld>
+            <a:endParaRPr/>
           </a:p>
         </p:txBody>
       </p:sp>
@@ -5643,29 +6202,26 @@
         <p:spPr/>
         <p:txBody>
           <a:bodyPr/>
+          <a:lstStyle/>
           <a:p>
             <a:fld id="{ED07E94D-1AC9-4315-AC85-1FEC71479138}" type="datetime1">
               <a:rPr lang="en-US"/>
-              <a:t>09/21/2026</a:t>
+              <a:t>9/22/2026</a:t>
             </a:fld>
+            <a:endParaRPr lang="en-US"/>
           </a:p>
         </p:txBody>
       </p:sp>
     </p:spTree>
   </p:cSld>
-  <mc:AlternateContent>
-    <mc:Choice Requires="p14">
-      <p:transition spd="slow" p14:dur="2000"/>
-    </mc:Choice>
-    <mc:Fallback>
-      <p:transition spd="slow"/>
-    </mc:Fallback>
-  </mc:AlternateContent>
+  <p:clrMapOvr>
+    <a:masterClrMapping/>
+  </p:clrMapOvr>
 </p:sld>
 </file>
 
 <file path=ppt/slides/slide8.xml><?xml version="1.0" encoding="utf-8"?>
-<p:sld xmlns:a="http://schemas.openxmlformats.org/drawingml/2006/main" xmlns:p="http://schemas.openxmlformats.org/presentationml/2006/main" xmlns:r="http://schemas.openxmlformats.org/officeDocument/2006/relationships" xmlns:p14="http://schemas.microsoft.com/office/powerpoint/2010/main" xmlns:p15="http://schemas.microsoft.com/office/powerpoint/2012/main" xmlns:mc="http://schemas.openxmlformats.org/markup-compatibility/2006">
+<p:sld xmlns:a="http://schemas.openxmlformats.org/drawingml/2006/main" xmlns:r="http://schemas.openxmlformats.org/officeDocument/2006/relationships" xmlns:p="http://schemas.openxmlformats.org/presentationml/2006/main">
   <p:cSld>
     <p:spTree>
       <p:nvGrpSpPr>
@@ -5705,9 +6261,10 @@
           </a:ln>
         </p:spPr>
         <p:txBody>
-          <a:bodyPr lIns="0" rIns="0" tIns="0" bIns="0" anchor="ctr">
+          <a:bodyPr lIns="0" tIns="0" rIns="0" bIns="0" anchor="ctr">
             <a:noAutofit/>
           </a:bodyPr>
+          <a:lstStyle/>
           <a:p>
             <a:pPr indent="0" defTabSz="914400">
               <a:lnSpc>
@@ -5715,11 +6272,11 @@
               </a:lnSpc>
               <a:buNone/>
               <a:tabLst>
-                <a:tab algn="l" pos="0"/>
+                <a:tab pos="0" algn="l"/>
               </a:tabLst>
             </a:pPr>
             <a:r>
-              <a:rPr b="0" lang="en-US" sz="4400" spc="-1" strike="noStrike">
+              <a:rPr lang="en-US" sz="4400" b="0" strike="noStrike" spc="-1">
                 <a:solidFill>
                   <a:schemeClr val="dk1"/>
                 </a:solidFill>
@@ -5727,7 +6284,7 @@
               </a:rPr>
               <a:t>Radiograms</a:t>
             </a:r>
-            <a:endParaRPr b="0" lang="en-US" sz="4400" spc="-1" strike="noStrike">
+            <a:endParaRPr lang="en-US" sz="4400" b="0" strike="noStrike" spc="-1">
               <a:solidFill>
                 <a:schemeClr val="dk1"/>
               </a:solidFill>
@@ -5760,9 +6317,10 @@
           </a:ln>
         </p:spPr>
         <p:txBody>
-          <a:bodyPr lIns="0" rIns="0" tIns="0" bIns="0" anchor="t">
+          <a:bodyPr lIns="0" tIns="0" rIns="0" bIns="0" anchor="t">
             <a:normAutofit/>
           </a:bodyPr>
+          <a:lstStyle/>
           <a:p>
             <a:pPr marL="432000" indent="0">
               <a:lnSpc>
@@ -5774,7 +6332,7 @@
               <a:buNone/>
             </a:pPr>
             <a:r>
-              <a:rPr b="0" lang="en-US" sz="2800" spc="-1" strike="noStrike">
+              <a:rPr lang="en-US" sz="2800" b="0" strike="noStrike" spc="-1">
                 <a:solidFill>
                   <a:schemeClr val="dk1"/>
                 </a:solidFill>
@@ -5782,23 +6340,17 @@
               </a:rPr>
               <a:t>The Document</a:t>
             </a:r>
-            <a:endParaRPr b="0" lang="en-US" sz="2800" spc="-1" strike="noStrike">
-              <a:solidFill>
-                <a:schemeClr val="dk1"/>
-              </a:solidFill>
-              <a:latin typeface="Aptos"/>
-            </a:endParaRPr>
           </a:p>
         </p:txBody>
       </p:sp>
       <p:pic>
         <p:nvPicPr>
-          <p:cNvPr id="60" name="" descr=""/>
+          <p:cNvPr id="60" name="Picture 59"/>
           <p:cNvPicPr/>
           <p:nvPr/>
         </p:nvPicPr>
         <p:blipFill>
-          <a:blip r:embed="rId1"/>
+          <a:blip r:embed="rId2"/>
           <a:stretch/>
         </p:blipFill>
         <p:spPr>
@@ -5816,7 +6368,7 @@
       </p:pic>
       <p:sp>
         <p:nvSpPr>
-          <p:cNvPr id="61" name=""/>
+          <p:cNvPr id="61" name="Rectangle 60"/>
           <p:cNvSpPr/>
           <p:nvPr/>
         </p:nvSpPr>
@@ -5837,17 +6389,24 @@
           </a:ln>
         </p:spPr>
         <p:style>
-          <a:lnRef idx="0"/>
-          <a:fillRef idx="0"/>
-          <a:effectRef idx="0"/>
+          <a:lnRef idx="0">
+            <a:scrgbClr r="0" g="0" b="0"/>
+          </a:lnRef>
+          <a:fillRef idx="0">
+            <a:scrgbClr r="0" g="0" b="0"/>
+          </a:fillRef>
+          <a:effectRef idx="0">
+            <a:scrgbClr r="0" g="0" b="0"/>
+          </a:effectRef>
           <a:fontRef idx="minor"/>
         </p:style>
         <p:txBody>
-          <a:bodyPr lIns="72000" rIns="72000" tIns="27000" bIns="27000" anchor="ctr">
+          <a:bodyPr lIns="72000" tIns="27000" rIns="72000" bIns="27000" anchor="ctr">
             <a:noAutofit/>
           </a:bodyPr>
-          <a:p>
-            <a:endParaRPr b="0" lang="en-US" sz="1800" spc="-1" strike="noStrike">
+          <a:lstStyle/>
+          <a:p>
+            <a:endParaRPr lang="en-US" sz="1800" b="0" strike="noStrike" spc="-1">
               <a:solidFill>
                 <a:srgbClr val="000000"/>
               </a:solidFill>
@@ -5858,7 +6417,7 @@
       </p:sp>
       <p:sp>
         <p:nvSpPr>
-          <p:cNvPr id="62" name=""/>
+          <p:cNvPr id="62" name="Rectangle 61"/>
           <p:cNvSpPr/>
           <p:nvPr/>
         </p:nvSpPr>
@@ -5873,23 +6432,30 @@
           <a:noFill/>
           <a:ln w="36720">
             <a:solidFill>
-              <a:srgbClr val="ff8000"/>
+              <a:srgbClr val="FF8000"/>
             </a:solidFill>
             <a:round/>
           </a:ln>
         </p:spPr>
         <p:style>
-          <a:lnRef idx="0"/>
-          <a:fillRef idx="0"/>
-          <a:effectRef idx="0"/>
+          <a:lnRef idx="0">
+            <a:scrgbClr r="0" g="0" b="0"/>
+          </a:lnRef>
+          <a:fillRef idx="0">
+            <a:scrgbClr r="0" g="0" b="0"/>
+          </a:fillRef>
+          <a:effectRef idx="0">
+            <a:scrgbClr r="0" g="0" b="0"/>
+          </a:effectRef>
           <a:fontRef idx="minor"/>
         </p:style>
         <p:txBody>
-          <a:bodyPr lIns="72000" rIns="72000" tIns="27000" bIns="27000" anchor="ctr">
+          <a:bodyPr lIns="72000" tIns="27000" rIns="72000" bIns="27000" anchor="ctr">
             <a:noAutofit/>
           </a:bodyPr>
-          <a:p>
-            <a:endParaRPr b="0" lang="en-US" sz="1800" spc="-1" strike="noStrike">
+          <a:lstStyle/>
+          <a:p>
+            <a:endParaRPr lang="en-US" sz="1800" b="0" strike="noStrike" spc="-1">
               <a:solidFill>
                 <a:srgbClr val="000000"/>
               </a:solidFill>
@@ -5900,7 +6466,7 @@
       </p:sp>
       <p:sp>
         <p:nvSpPr>
-          <p:cNvPr id="63" name=""/>
+          <p:cNvPr id="63" name="Rectangle 62"/>
           <p:cNvSpPr/>
           <p:nvPr/>
         </p:nvSpPr>
@@ -5915,23 +6481,30 @@
           <a:noFill/>
           <a:ln w="36720">
             <a:solidFill>
-              <a:srgbClr val="5eb91e"/>
+              <a:srgbClr val="5EB91E"/>
             </a:solidFill>
             <a:round/>
           </a:ln>
         </p:spPr>
         <p:style>
-          <a:lnRef idx="0"/>
-          <a:fillRef idx="0"/>
-          <a:effectRef idx="0"/>
+          <a:lnRef idx="0">
+            <a:scrgbClr r="0" g="0" b="0"/>
+          </a:lnRef>
+          <a:fillRef idx="0">
+            <a:scrgbClr r="0" g="0" b="0"/>
+          </a:fillRef>
+          <a:effectRef idx="0">
+            <a:scrgbClr r="0" g="0" b="0"/>
+          </a:effectRef>
           <a:fontRef idx="minor"/>
         </p:style>
         <p:txBody>
-          <a:bodyPr lIns="72000" rIns="72000" tIns="27000" bIns="27000" anchor="ctr">
+          <a:bodyPr lIns="72000" tIns="27000" rIns="72000" bIns="27000" anchor="ctr">
             <a:noAutofit/>
           </a:bodyPr>
-          <a:p>
-            <a:endParaRPr b="0" lang="en-US" sz="1800" spc="-1" strike="noStrike">
+          <a:lstStyle/>
+          <a:p>
+            <a:endParaRPr lang="en-US" sz="1800" b="0" strike="noStrike" spc="-1">
               <a:solidFill>
                 <a:srgbClr val="000000"/>
               </a:solidFill>
@@ -5942,7 +6515,7 @@
       </p:sp>
       <p:sp>
         <p:nvSpPr>
-          <p:cNvPr id="64" name=""/>
+          <p:cNvPr id="64" name="Rectangle 63"/>
           <p:cNvSpPr/>
           <p:nvPr/>
         </p:nvSpPr>
@@ -5957,23 +6530,30 @@
           <a:noFill/>
           <a:ln w="36720">
             <a:solidFill>
-              <a:srgbClr val="e16173"/>
+              <a:srgbClr val="E16173"/>
             </a:solidFill>
             <a:round/>
           </a:ln>
         </p:spPr>
         <p:style>
-          <a:lnRef idx="0"/>
-          <a:fillRef idx="0"/>
-          <a:effectRef idx="0"/>
+          <a:lnRef idx="0">
+            <a:scrgbClr r="0" g="0" b="0"/>
+          </a:lnRef>
+          <a:fillRef idx="0">
+            <a:scrgbClr r="0" g="0" b="0"/>
+          </a:fillRef>
+          <a:effectRef idx="0">
+            <a:scrgbClr r="0" g="0" b="0"/>
+          </a:effectRef>
           <a:fontRef idx="minor"/>
         </p:style>
         <p:txBody>
-          <a:bodyPr lIns="72000" rIns="72000" tIns="27000" bIns="27000" anchor="ctr">
+          <a:bodyPr lIns="72000" tIns="27000" rIns="72000" bIns="27000" anchor="ctr">
             <a:noAutofit/>
           </a:bodyPr>
-          <a:p>
-            <a:endParaRPr b="0" lang="en-US" sz="1800" spc="-1" strike="noStrike">
+          <a:lstStyle/>
+          <a:p>
+            <a:endParaRPr lang="en-US" sz="1800" b="0" strike="noStrike" spc="-1">
               <a:solidFill>
                 <a:srgbClr val="000000"/>
               </a:solidFill>
@@ -5984,7 +6564,7 @@
       </p:sp>
       <p:sp>
         <p:nvSpPr>
-          <p:cNvPr id="65" name=""/>
+          <p:cNvPr id="65" name="Rectangle 64"/>
           <p:cNvSpPr/>
           <p:nvPr/>
         </p:nvSpPr>
@@ -5999,23 +6579,30 @@
           <a:noFill/>
           <a:ln w="36720">
             <a:solidFill>
-              <a:srgbClr val="3465a4"/>
+              <a:srgbClr val="3465A4"/>
             </a:solidFill>
             <a:round/>
           </a:ln>
         </p:spPr>
         <p:style>
-          <a:lnRef idx="0"/>
-          <a:fillRef idx="0"/>
-          <a:effectRef idx="0"/>
+          <a:lnRef idx="0">
+            <a:scrgbClr r="0" g="0" b="0"/>
+          </a:lnRef>
+          <a:fillRef idx="0">
+            <a:scrgbClr r="0" g="0" b="0"/>
+          </a:fillRef>
+          <a:effectRef idx="0">
+            <a:scrgbClr r="0" g="0" b="0"/>
+          </a:effectRef>
           <a:fontRef idx="minor"/>
         </p:style>
         <p:txBody>
-          <a:bodyPr lIns="72000" rIns="72000" tIns="27000" bIns="27000" anchor="ctr">
+          <a:bodyPr lIns="72000" tIns="27000" rIns="72000" bIns="27000" anchor="ctr">
             <a:noAutofit/>
           </a:bodyPr>
-          <a:p>
-            <a:endParaRPr b="0" lang="en-US" sz="1800" spc="-1" strike="noStrike">
+          <a:lstStyle/>
+          <a:p>
+            <a:endParaRPr lang="en-US" sz="1800" b="0" strike="noStrike" spc="-1">
               <a:solidFill>
                 <a:srgbClr val="000000"/>
               </a:solidFill>
@@ -6026,7 +6613,7 @@
       </p:sp>
       <p:sp>
         <p:nvSpPr>
-          <p:cNvPr id="66" name=""/>
+          <p:cNvPr id="66" name="Rectangle 65"/>
           <p:cNvSpPr/>
           <p:nvPr/>
         </p:nvSpPr>
@@ -6041,23 +6628,30 @@
           <a:noFill/>
           <a:ln w="36720">
             <a:solidFill>
-              <a:srgbClr val="ff0000"/>
+              <a:srgbClr val="FF0000"/>
             </a:solidFill>
             <a:round/>
           </a:ln>
         </p:spPr>
         <p:style>
-          <a:lnRef idx="0"/>
-          <a:fillRef idx="0"/>
-          <a:effectRef idx="0"/>
+          <a:lnRef idx="0">
+            <a:scrgbClr r="0" g="0" b="0"/>
+          </a:lnRef>
+          <a:fillRef idx="0">
+            <a:scrgbClr r="0" g="0" b="0"/>
+          </a:fillRef>
+          <a:effectRef idx="0">
+            <a:scrgbClr r="0" g="0" b="0"/>
+          </a:effectRef>
           <a:fontRef idx="minor"/>
         </p:style>
         <p:txBody>
-          <a:bodyPr lIns="72000" rIns="72000" tIns="27000" bIns="27000" anchor="ctr">
+          <a:bodyPr lIns="72000" tIns="27000" rIns="72000" bIns="27000" anchor="ctr">
             <a:noAutofit/>
           </a:bodyPr>
-          <a:p>
-            <a:endParaRPr b="0" lang="en-US" sz="1800" spc="-1" strike="noStrike">
+          <a:lstStyle/>
+          <a:p>
+            <a:endParaRPr lang="en-US" sz="1800" b="0" strike="noStrike" spc="-1">
               <a:solidFill>
                 <a:srgbClr val="000000"/>
               </a:solidFill>
@@ -6068,7 +6662,7 @@
       </p:sp>
       <p:sp>
         <p:nvSpPr>
-          <p:cNvPr id="67" name=""/>
+          <p:cNvPr id="67" name="TextBox 66"/>
           <p:cNvSpPr txBox="1"/>
           <p:nvPr/>
         </p:nvSpPr>
@@ -6086,31 +6680,26 @@
           </a:ln>
         </p:spPr>
         <p:txBody>
-          <a:bodyPr lIns="90000" rIns="90000" tIns="45000" bIns="45000" anchor="t">
+          <a:bodyPr lIns="90000" tIns="45000" rIns="90000" bIns="45000" anchor="t">
             <a:noAutofit/>
           </a:bodyPr>
-          <a:p>
-            <a:r>
-              <a:rPr b="0" lang="en-US" sz="1800" spc="-1" strike="noStrike">
-                <a:solidFill>
-                  <a:srgbClr val="55308d"/>
+          <a:lstStyle/>
+          <a:p>
+            <a:r>
+              <a:rPr lang="en-US" sz="1800" b="0" strike="noStrike" spc="-1">
+                <a:solidFill>
+                  <a:srgbClr val="55308D"/>
                 </a:solidFill>
                 <a:latin typeface="Arial"/>
               </a:rPr>
               <a:t>Preamble</a:t>
             </a:r>
-            <a:endParaRPr b="0" lang="en-US" sz="1800" spc="-1" strike="noStrike">
-              <a:solidFill>
-                <a:srgbClr val="55308d"/>
-              </a:solidFill>
-              <a:latin typeface="Arial"/>
-            </a:endParaRPr>
-          </a:p>
-        </p:txBody>
-      </p:sp>
-      <p:sp>
-        <p:nvSpPr>
-          <p:cNvPr id="68" name=""/>
+          </a:p>
+        </p:txBody>
+      </p:sp>
+      <p:sp>
+        <p:nvSpPr>
+          <p:cNvPr id="68" name="TextBox 67"/>
           <p:cNvSpPr txBox="1"/>
           <p:nvPr/>
         </p:nvSpPr>
@@ -6128,31 +6717,26 @@
           </a:ln>
         </p:spPr>
         <p:txBody>
-          <a:bodyPr lIns="90000" rIns="90000" tIns="45000" bIns="45000" anchor="t">
+          <a:bodyPr lIns="90000" tIns="45000" rIns="90000" bIns="45000" anchor="t">
             <a:noAutofit/>
           </a:bodyPr>
-          <a:p>
-            <a:r>
-              <a:rPr b="0" lang="en-US" sz="1800" spc="-1" strike="noStrike">
-                <a:solidFill>
-                  <a:srgbClr val="ff860d"/>
+          <a:lstStyle/>
+          <a:p>
+            <a:r>
+              <a:rPr lang="en-US" sz="1800" b="0" strike="noStrike" spc="-1">
+                <a:solidFill>
+                  <a:srgbClr val="FF860D"/>
                 </a:solidFill>
                 <a:latin typeface="Arial"/>
               </a:rPr>
               <a:t>Addressee</a:t>
             </a:r>
-            <a:endParaRPr b="0" lang="en-US" sz="1800" spc="-1" strike="noStrike">
-              <a:solidFill>
-                <a:srgbClr val="ff860d"/>
-              </a:solidFill>
-              <a:latin typeface="Arial"/>
-            </a:endParaRPr>
-          </a:p>
-        </p:txBody>
-      </p:sp>
-      <p:sp>
-        <p:nvSpPr>
-          <p:cNvPr id="69" name=""/>
+          </a:p>
+        </p:txBody>
+      </p:sp>
+      <p:sp>
+        <p:nvSpPr>
+          <p:cNvPr id="69" name="TextBox 68"/>
           <p:cNvSpPr txBox="1"/>
           <p:nvPr/>
         </p:nvSpPr>
@@ -6170,48 +6754,43 @@
           </a:ln>
         </p:spPr>
         <p:txBody>
-          <a:bodyPr lIns="90000" rIns="90000" tIns="45000" bIns="45000" anchor="t">
+          <a:bodyPr lIns="90000" tIns="45000" rIns="90000" bIns="45000" anchor="t">
             <a:noAutofit/>
           </a:bodyPr>
-          <a:p>
-            <a:r>
-              <a:rPr b="0" lang="en-US" sz="1800" spc="-1" strike="noStrike">
-                <a:solidFill>
-                  <a:srgbClr val="e16173"/>
+          <a:lstStyle/>
+          <a:p>
+            <a:r>
+              <a:rPr lang="en-US" sz="1800" b="0" strike="noStrike" spc="-1">
+                <a:solidFill>
+                  <a:srgbClr val="E16173"/>
                 </a:solidFill>
                 <a:latin typeface="Arial"/>
               </a:rPr>
               <a:t>Message Text</a:t>
             </a:r>
-            <a:endParaRPr b="0" lang="en-US" sz="1800" spc="-1" strike="noStrike">
+          </a:p>
+          <a:p>
+            <a:r>
+              <a:rPr lang="en-US" sz="1400" b="0" i="1" strike="noStrike" spc="-1">
+                <a:solidFill>
+                  <a:srgbClr val="E16173"/>
+                </a:solidFill>
+                <a:latin typeface="Arial"/>
+              </a:rPr>
+              <a:t>(1 word/line, 25 words, includes punctuation)</a:t>
+            </a:r>
+            <a:endParaRPr lang="en-US" sz="1400" b="0" strike="noStrike" spc="-1">
               <a:solidFill>
-                <a:srgbClr val="e16173"/>
+                <a:srgbClr val="E16173"/>
               </a:solidFill>
               <a:latin typeface="Arial"/>
             </a:endParaRPr>
           </a:p>
-          <a:p>
-            <a:r>
-              <a:rPr b="0" i="1" lang="en-US" sz="1400" spc="-1" strike="noStrike">
-                <a:solidFill>
-                  <a:srgbClr val="e16173"/>
-                </a:solidFill>
-                <a:latin typeface="Arial"/>
-              </a:rPr>
-              <a:t>(1 word/line, 25 words, includes punctuation)</a:t>
-            </a:r>
-            <a:endParaRPr b="0" lang="en-US" sz="1400" spc="-1" strike="noStrike">
-              <a:solidFill>
-                <a:srgbClr val="e16173"/>
-              </a:solidFill>
-              <a:latin typeface="Arial"/>
-            </a:endParaRPr>
-          </a:p>
-        </p:txBody>
-      </p:sp>
-      <p:sp>
-        <p:nvSpPr>
-          <p:cNvPr id="70" name=""/>
+        </p:txBody>
+      </p:sp>
+      <p:sp>
+        <p:nvSpPr>
+          <p:cNvPr id="70" name="TextBox 69"/>
           <p:cNvSpPr txBox="1"/>
           <p:nvPr/>
         </p:nvSpPr>
@@ -6229,31 +6808,26 @@
           </a:ln>
         </p:spPr>
         <p:txBody>
-          <a:bodyPr lIns="90000" rIns="90000" tIns="45000" bIns="45000" anchor="t">
+          <a:bodyPr lIns="90000" tIns="45000" rIns="90000" bIns="45000" anchor="t">
             <a:noAutofit/>
           </a:bodyPr>
-          <a:p>
-            <a:r>
-              <a:rPr b="0" lang="en-US" sz="1800" spc="-1" strike="noStrike">
-                <a:solidFill>
-                  <a:srgbClr val="ff0000"/>
+          <a:lstStyle/>
+          <a:p>
+            <a:r>
+              <a:rPr lang="en-US" sz="1800" b="0" strike="noStrike" spc="-1">
+                <a:solidFill>
+                  <a:srgbClr val="FF0000"/>
                 </a:solidFill>
                 <a:latin typeface="Arial"/>
               </a:rPr>
               <a:t>Signature</a:t>
             </a:r>
-            <a:endParaRPr b="0" lang="en-US" sz="1800" spc="-1" strike="noStrike">
-              <a:solidFill>
-                <a:srgbClr val="ff0000"/>
-              </a:solidFill>
-              <a:latin typeface="Arial"/>
-            </a:endParaRPr>
-          </a:p>
-        </p:txBody>
-      </p:sp>
-      <p:sp>
-        <p:nvSpPr>
-          <p:cNvPr id="71" name=""/>
+          </a:p>
+        </p:txBody>
+      </p:sp>
+      <p:sp>
+        <p:nvSpPr>
+          <p:cNvPr id="71" name="TextBox 70"/>
           <p:cNvSpPr txBox="1"/>
           <p:nvPr/>
         </p:nvSpPr>
@@ -6271,31 +6845,26 @@
           </a:ln>
         </p:spPr>
         <p:txBody>
-          <a:bodyPr lIns="90000" rIns="90000" tIns="45000" bIns="45000" anchor="t">
+          <a:bodyPr lIns="90000" tIns="45000" rIns="90000" bIns="45000" anchor="t">
             <a:noAutofit/>
           </a:bodyPr>
-          <a:p>
-            <a:r>
-              <a:rPr b="0" lang="en-US" sz="1800" spc="-1" strike="noStrike">
-                <a:solidFill>
-                  <a:srgbClr val="3465a4"/>
+          <a:lstStyle/>
+          <a:p>
+            <a:r>
+              <a:rPr lang="en-US" sz="1800" b="0" strike="noStrike" spc="-1">
+                <a:solidFill>
+                  <a:srgbClr val="3465A4"/>
                 </a:solidFill>
                 <a:latin typeface="Arial"/>
               </a:rPr>
               <a:t>Received and Sent by</a:t>
             </a:r>
-            <a:endParaRPr b="0" lang="en-US" sz="1800" spc="-1" strike="noStrike">
-              <a:solidFill>
-                <a:srgbClr val="3465a4"/>
-              </a:solidFill>
-              <a:latin typeface="Arial"/>
-            </a:endParaRPr>
-          </a:p>
-        </p:txBody>
-      </p:sp>
-      <p:sp>
-        <p:nvSpPr>
-          <p:cNvPr id="72" name=""/>
+          </a:p>
+        </p:txBody>
+      </p:sp>
+      <p:sp>
+        <p:nvSpPr>
+          <p:cNvPr id="72" name="TextBox 71"/>
           <p:cNvSpPr txBox="1"/>
           <p:nvPr/>
         </p:nvSpPr>
@@ -6313,43 +6882,38 @@
           </a:ln>
         </p:spPr>
         <p:txBody>
-          <a:bodyPr lIns="90000" rIns="90000" tIns="45000" bIns="45000" anchor="t">
+          <a:bodyPr lIns="90000" tIns="45000" rIns="90000" bIns="45000" anchor="t">
             <a:noAutofit/>
           </a:bodyPr>
-          <a:p>
-            <a:r>
-              <a:rPr b="0" lang="en-US" sz="1800" spc="-1" strike="noStrike">
-                <a:solidFill>
-                  <a:srgbClr val="00a933"/>
+          <a:lstStyle/>
+          <a:p>
+            <a:r>
+              <a:rPr lang="en-US" sz="1800" b="0" strike="noStrike" spc="-1">
+                <a:solidFill>
+                  <a:srgbClr val="00A933"/>
                 </a:solidFill>
                 <a:latin typeface="Arial"/>
               </a:rPr>
               <a:t>Message received at</a:t>
             </a:r>
-            <a:endParaRPr b="0" lang="en-US" sz="1800" spc="-1" strike="noStrike">
+          </a:p>
+          <a:p>
+            <a:r>
+              <a:rPr lang="en-US" sz="1400" b="0" i="1" strike="noStrike" spc="-1">
+                <a:solidFill>
+                  <a:srgbClr val="00A933"/>
+                </a:solidFill>
+                <a:latin typeface="Arial"/>
+              </a:rPr>
+              <a:t>(almost never used)</a:t>
+            </a:r>
+            <a:endParaRPr lang="en-US" sz="1400" b="0" strike="noStrike" spc="-1">
               <a:solidFill>
-                <a:srgbClr val="00a933"/>
+                <a:srgbClr val="00A933"/>
               </a:solidFill>
               <a:latin typeface="Arial"/>
             </a:endParaRPr>
           </a:p>
-          <a:p>
-            <a:r>
-              <a:rPr b="0" i="1" lang="en-US" sz="1400" spc="-1" strike="noStrike">
-                <a:solidFill>
-                  <a:srgbClr val="00a933"/>
-                </a:solidFill>
-                <a:latin typeface="Arial"/>
-              </a:rPr>
-              <a:t>(almost never used)</a:t>
-            </a:r>
-            <a:endParaRPr b="0" lang="en-US" sz="1400" spc="-1" strike="noStrike">
-              <a:solidFill>
-                <a:srgbClr val="00a933"/>
-              </a:solidFill>
-              <a:latin typeface="Arial"/>
-            </a:endParaRPr>
-          </a:p>
         </p:txBody>
       </p:sp>
       <p:sp>
@@ -6365,6 +6929,7 @@
         <p:spPr/>
         <p:txBody>
           <a:bodyPr/>
+          <a:lstStyle/>
           <a:p>
             <a:r>
               <a:t>Warren County KY ARES • KQ4TIV Emergency Coordinator</a:t>
@@ -6385,10 +6950,12 @@
         <p:spPr/>
         <p:txBody>
           <a:bodyPr/>
+          <a:lstStyle/>
           <a:p>
             <a:fld id="{F53BC375-3761-4E49-9DDC-3CD4A44AEDFE}" type="slidenum">
               <a:t>8</a:t>
             </a:fld>
+            <a:endParaRPr/>
           </a:p>
         </p:txBody>
       </p:sp>
@@ -6405,29 +6972,26 @@
         <p:spPr/>
         <p:txBody>
           <a:bodyPr/>
+          <a:lstStyle/>
           <a:p>
             <a:fld id="{C278394A-BF8E-4FE8-B766-FD8AEAFBB1DB}" type="datetime1">
               <a:rPr lang="en-US"/>
-              <a:t>09/21/2026</a:t>
+              <a:t>9/22/2026</a:t>
             </a:fld>
+            <a:endParaRPr lang="en-US"/>
           </a:p>
         </p:txBody>
       </p:sp>
     </p:spTree>
   </p:cSld>
-  <mc:AlternateContent>
-    <mc:Choice Requires="p14">
-      <p:transition spd="slow" p14:dur="2000"/>
-    </mc:Choice>
-    <mc:Fallback>
-      <p:transition spd="slow"/>
-    </mc:Fallback>
-  </mc:AlternateContent>
+  <p:clrMapOvr>
+    <a:masterClrMapping/>
+  </p:clrMapOvr>
 </p:sld>
 </file>
 
 <file path=ppt/slides/slide9.xml><?xml version="1.0" encoding="utf-8"?>
-<p:sld xmlns:a="http://schemas.openxmlformats.org/drawingml/2006/main" xmlns:p="http://schemas.openxmlformats.org/presentationml/2006/main" xmlns:r="http://schemas.openxmlformats.org/officeDocument/2006/relationships" xmlns:p14="http://schemas.microsoft.com/office/powerpoint/2010/main" xmlns:p15="http://schemas.microsoft.com/office/powerpoint/2012/main" xmlns:mc="http://schemas.openxmlformats.org/markup-compatibility/2006">
+<p:sld xmlns:a="http://schemas.openxmlformats.org/drawingml/2006/main" xmlns:r="http://schemas.openxmlformats.org/officeDocument/2006/relationships" xmlns:p="http://schemas.openxmlformats.org/presentationml/2006/main">
   <p:cSld>
     <p:spTree>
       <p:nvGrpSpPr>
@@ -6467,9 +7031,10 @@
           </a:ln>
         </p:spPr>
         <p:txBody>
-          <a:bodyPr lIns="0" rIns="0" tIns="0" bIns="0" anchor="ctr">
+          <a:bodyPr lIns="0" tIns="0" rIns="0" bIns="0" anchor="ctr">
             <a:noAutofit/>
           </a:bodyPr>
+          <a:lstStyle/>
           <a:p>
             <a:pPr indent="0" defTabSz="914400">
               <a:lnSpc>
@@ -6477,11 +7042,11 @@
               </a:lnSpc>
               <a:buNone/>
               <a:tabLst>
-                <a:tab algn="l" pos="0"/>
+                <a:tab pos="0" algn="l"/>
               </a:tabLst>
             </a:pPr>
             <a:r>
-              <a:rPr b="0" lang="en-US" sz="4400" spc="-1" strike="noStrike">
+              <a:rPr lang="en-US" sz="4400" b="0" strike="noStrike" spc="-1">
                 <a:solidFill>
                   <a:schemeClr val="dk1"/>
                 </a:solidFill>
@@ -6489,7 +7054,7 @@
               </a:rPr>
               <a:t>Radiograms</a:t>
             </a:r>
-            <a:endParaRPr b="0" lang="en-US" sz="4400" spc="-1" strike="noStrike">
+            <a:endParaRPr lang="en-US" sz="4400" b="0" strike="noStrike" spc="-1">
               <a:solidFill>
                 <a:schemeClr val="dk1"/>
               </a:solidFill>
@@ -6522,9 +7087,10 @@
           </a:ln>
         </p:spPr>
         <p:txBody>
-          <a:bodyPr lIns="0" rIns="0" tIns="0" bIns="0" anchor="t">
+          <a:bodyPr lIns="0" tIns="0" rIns="0" bIns="0" anchor="t">
             <a:normAutofit/>
           </a:bodyPr>
+          <a:lstStyle/>
           <a:p>
             <a:pPr marL="432000" indent="0">
               <a:lnSpc>
@@ -6536,7 +7102,7 @@
               <a:buNone/>
             </a:pPr>
             <a:r>
-              <a:rPr b="0" lang="en-US" sz="2800" spc="-1" strike="noStrike">
+              <a:rPr lang="en-US" sz="2800" b="0" strike="noStrike" spc="-1">
                 <a:solidFill>
                   <a:schemeClr val="dk1"/>
                 </a:solidFill>
@@ -6544,12 +7110,6 @@
               </a:rPr>
               <a:t>When reading a Radiogram over phone, you will use very specific conventions which are designed to transmit the information correctly the first time</a:t>
             </a:r>
-            <a:endParaRPr b="0" lang="en-US" sz="2800" spc="-1" strike="noStrike">
-              <a:solidFill>
-                <a:schemeClr val="dk1"/>
-              </a:solidFill>
-              <a:latin typeface="Aptos"/>
-            </a:endParaRPr>
           </a:p>
           <a:p>
             <a:pPr marL="432000" indent="-324000">
@@ -6567,7 +7127,7 @@
               <a:buChar char=""/>
             </a:pPr>
             <a:r>
-              <a:rPr b="0" lang="en-US" sz="2800" spc="-1" strike="noStrike">
+              <a:rPr lang="en-US" sz="2800" b="0" strike="noStrike" spc="-1">
                 <a:solidFill>
                   <a:schemeClr val="dk1"/>
                 </a:solidFill>
@@ -6575,15 +7135,9 @@
               </a:rPr>
               <a:t>Complicated/specific words and names</a:t>
             </a:r>
-            <a:endParaRPr b="0" lang="en-US" sz="2800" spc="-1" strike="noStrike">
-              <a:solidFill>
-                <a:schemeClr val="dk1"/>
-              </a:solidFill>
-              <a:latin typeface="Aptos"/>
-            </a:endParaRPr>
-          </a:p>
-          <a:p>
-            <a:pPr lvl="1" marL="864000" indent="-324000">
+          </a:p>
+          <a:p>
+            <a:pPr marL="864000" lvl="1" indent="-324000">
               <a:lnSpc>
                 <a:spcPct val="90000"/>
               </a:lnSpc>
@@ -6598,25 +7152,16 @@
               <a:buChar char=""/>
             </a:pPr>
             <a:r>
-              <a:rPr b="0" lang="en-US" sz="2000" spc="-1" strike="noStrike">
-                <a:solidFill>
-                  <a:schemeClr val="dk1"/>
-                </a:solidFill>
-                <a:latin typeface="Aptos"/>
-              </a:rPr>
-              <a:t>“</a:t>
-            </a:r>
-            <a:r>
-              <a:rPr b="0" lang="en-US" sz="2000" spc="-1" strike="noStrike">
-                <a:solidFill>
-                  <a:schemeClr val="dk1"/>
-                </a:solidFill>
-                <a:latin typeface="Aptos"/>
-              </a:rPr>
-              <a:t>RADIOGRAM </a:t>
-            </a:r>
-            <a:r>
-              <a:rPr b="0" i="1" lang="en-US" sz="2000" spc="-1" strike="noStrike">
+              <a:rPr lang="en-US" sz="2000" b="0" strike="noStrike" spc="-1">
+                <a:solidFill>
+                  <a:schemeClr val="dk1"/>
+                </a:solidFill>
+                <a:latin typeface="Aptos"/>
+              </a:rPr>
+              <a:t>“RADIOGRAM </a:t>
+            </a:r>
+            <a:r>
+              <a:rPr lang="en-US" sz="2000" b="0" i="1" strike="noStrike" spc="-1">
                 <a:solidFill>
                   <a:schemeClr val="dk1"/>
                 </a:solidFill>
@@ -6624,7 +7169,7 @@
               </a:rPr>
               <a:t>I SPELL RADIO ALPHA DELTA INDIA OSCAR GERMANY RADIO ALPHA MIKE”</a:t>
             </a:r>
-            <a:endParaRPr b="0" lang="en-US" sz="2000" spc="-1" strike="noStrike">
+            <a:endParaRPr lang="en-US" sz="2000" b="0" strike="noStrike" spc="-1">
               <a:solidFill>
                 <a:schemeClr val="dk1"/>
               </a:solidFill>
@@ -6647,7 +7192,7 @@
               <a:buChar char=""/>
             </a:pPr>
             <a:r>
-              <a:rPr b="0" lang="en-US" sz="2800" spc="-1" strike="noStrike">
+              <a:rPr lang="en-US" sz="2800" b="0" strike="noStrike" spc="-1">
                 <a:solidFill>
                   <a:schemeClr val="dk1"/>
                 </a:solidFill>
@@ -6655,15 +7200,9 @@
               </a:rPr>
               <a:t>Numbers/Initials/Mixed Groups</a:t>
             </a:r>
-            <a:endParaRPr b="0" lang="en-US" sz="2800" spc="-1" strike="noStrike">
-              <a:solidFill>
-                <a:schemeClr val="dk1"/>
-              </a:solidFill>
-              <a:latin typeface="Aptos"/>
-            </a:endParaRPr>
-          </a:p>
-          <a:p>
-            <a:pPr lvl="1" marL="864000" indent="-324000">
+          </a:p>
+          <a:p>
+            <a:pPr marL="864000" lvl="1" indent="-324000">
               <a:lnSpc>
                 <a:spcPct val="90000"/>
               </a:lnSpc>
@@ -6678,7 +7217,7 @@
               <a:buChar char=""/>
             </a:pPr>
             <a:r>
-              <a:rPr b="0" lang="en-US" sz="2000" spc="-1" strike="noStrike">
+              <a:rPr lang="en-US" sz="2000" b="0" strike="noStrike" spc="-1">
                 <a:solidFill>
                   <a:schemeClr val="dk1"/>
                 </a:solidFill>
@@ -6687,7 +7226,7 @@
               <a:t>123 Somewhere St read </a:t>
             </a:r>
             <a:r>
-              <a:rPr b="0" i="1" lang="en-US" sz="2000" spc="-1" strike="noStrike">
+              <a:rPr lang="en-US" sz="2000" b="0" i="1" strike="noStrike" spc="-1">
                 <a:solidFill>
                   <a:schemeClr val="dk1"/>
                 </a:solidFill>
@@ -6695,7 +7234,7 @@
               </a:rPr>
               <a:t>“FIGURES ONE TWO THREE SOMEWHERE INTIALS SIERRA TANGO”</a:t>
             </a:r>
-            <a:endParaRPr b="0" lang="en-US" sz="2000" spc="-1" strike="noStrike">
+            <a:endParaRPr lang="en-US" sz="2000" b="0" strike="noStrike" spc="-1">
               <a:solidFill>
                 <a:schemeClr val="dk1"/>
               </a:solidFill>
@@ -6713,7 +7252,7 @@
               <a:buNone/>
             </a:pPr>
             <a:r>
-              <a:rPr b="0" i="1" lang="en-US" sz="2800" spc="-1" strike="noStrike">
+              <a:rPr lang="en-US" sz="2800" b="0" i="1" strike="noStrike" spc="-1">
                 <a:solidFill>
                   <a:schemeClr val="dk1"/>
                 </a:solidFill>
@@ -6721,7 +7260,7 @@
               </a:rPr>
               <a:t> </a:t>
             </a:r>
-            <a:endParaRPr b="0" lang="en-US" sz="2800" spc="-1" strike="noStrike">
+            <a:endParaRPr lang="en-US" sz="2800" b="0" strike="noStrike" spc="-1">
               <a:solidFill>
                 <a:schemeClr val="dk1"/>
               </a:solidFill>
@@ -6743,6 +7282,7 @@
         <p:spPr/>
         <p:txBody>
           <a:bodyPr/>
+          <a:lstStyle/>
           <a:p>
             <a:r>
               <a:t>Warren County KY ARES • KQ4TIV Emergency Coordinator</a:t>
@@ -6763,10 +7303,12 @@
         <p:spPr/>
         <p:txBody>
           <a:bodyPr/>
+          <a:lstStyle/>
           <a:p>
             <a:fld id="{6CC1FA02-0020-4FB4-B3DF-522DBE6EC7F8}" type="slidenum">
               <a:t>9</a:t>
             </a:fld>
+            <a:endParaRPr/>
           </a:p>
         </p:txBody>
       </p:sp>
@@ -6783,76 +7325,73 @@
         <p:spPr/>
         <p:txBody>
           <a:bodyPr/>
+          <a:lstStyle/>
           <a:p>
             <a:fld id="{2BD86942-F6AD-448F-8D54-9BD9FBD988FE}" type="datetime1">
               <a:rPr lang="en-US"/>
-              <a:t>09/21/2026</a:t>
+              <a:t>9/22/2026</a:t>
             </a:fld>
+            <a:endParaRPr lang="en-US"/>
           </a:p>
         </p:txBody>
       </p:sp>
     </p:spTree>
   </p:cSld>
-  <mc:AlternateContent>
-    <mc:Choice Requires="p14">
-      <p:transition spd="slow" p14:dur="2000"/>
-    </mc:Choice>
-    <mc:Fallback>
-      <p:transition spd="slow"/>
-    </mc:Fallback>
-  </mc:AlternateContent>
+  <p:clrMapOvr>
+    <a:masterClrMapping/>
+  </p:clrMapOvr>
 </p:sld>
 </file>
 
 <file path=ppt/theme/theme1.xml><?xml version="1.0" encoding="utf-8"?>
-<a:theme xmlns:a="http://schemas.openxmlformats.org/drawingml/2006/main" xmlns:r="http://schemas.openxmlformats.org/officeDocument/2006/relationships" name="Office Theme">
+<a:theme xmlns:a="http://schemas.openxmlformats.org/drawingml/2006/main" name="Office Theme">
   <a:themeElements>
     <a:clrScheme name="Office">
       <a:dk1>
         <a:srgbClr val="000000"/>
       </a:dk1>
       <a:lt1>
-        <a:srgbClr val="ffffff"/>
+        <a:srgbClr val="FFFFFF"/>
       </a:lt1>
       <a:dk2>
-        <a:srgbClr val="0e2841"/>
+        <a:srgbClr val="0E2841"/>
       </a:dk2>
       <a:lt2>
-        <a:srgbClr val="e8e8e8"/>
+        <a:srgbClr val="E8E8E8"/>
       </a:lt2>
       <a:accent1>
         <a:srgbClr val="156082"/>
       </a:accent1>
       <a:accent2>
-        <a:srgbClr val="e97132"/>
+        <a:srgbClr val="E97132"/>
       </a:accent2>
       <a:accent3>
-        <a:srgbClr val="196b24"/>
+        <a:srgbClr val="196B24"/>
       </a:accent3>
       <a:accent4>
-        <a:srgbClr val="0f9ed5"/>
+        <a:srgbClr val="0F9ED5"/>
       </a:accent4>
       <a:accent5>
-        <a:srgbClr val="a02b93"/>
+        <a:srgbClr val="A02B93"/>
       </a:accent5>
       <a:accent6>
-        <a:srgbClr val="4ea72e"/>
+        <a:srgbClr val="4EA72E"/>
       </a:accent6>
       <a:hlink>
         <a:srgbClr val="467886"/>
       </a:hlink>
       <a:folHlink>
-        <a:srgbClr val="96607d"/>
+        <a:srgbClr val="96607D"/>
       </a:folHlink>
     </a:clrScheme>
     <a:fontScheme name="Office">
       <a:majorFont>
-        <a:latin typeface="Aptos Display" panose="02110004020202020204" pitchFamily="0" charset="1"/>
+        <a:latin typeface="Aptos Display" panose="02110004020202020204"/>
         <a:ea typeface=""/>
         <a:cs typeface=""/>
       </a:majorFont>
       <a:minorFont>
-        <a:latin typeface="Aptos" panose="02110004020202020204" pitchFamily="0" charset="1"/>
+        <a:latin typeface="Aptos" panose="02110004020202020204"/>
         <a:ea typeface=""/>
         <a:cs typeface=""/>
       </a:minorFont>
@@ -6884,7 +7423,7 @@
             </a:gs>
           </a:gsLst>
           <a:lin ang="5400000" scaled="0"/>
-          <a:tileRect l="0" t="0" r="0" b="0"/>
+          <a:tileRect/>
         </a:gradFill>
         <a:gradFill>
           <a:gsLst>
@@ -6908,7 +7447,7 @@
             </a:gs>
           </a:gsLst>
           <a:lin ang="5400000" scaled="0"/>
-          <a:tileRect l="0" t="0" r="0" b="0"/>
+          <a:tileRect/>
         </a:gradFill>
       </a:fillStyleLst>
       <a:lnStyleLst>
@@ -6968,63 +7507,65 @@
             </a:gs>
           </a:gsLst>
           <a:lin ang="5400000" scaled="0"/>
-          <a:tileRect l="0" t="0" r="0" b="0"/>
+          <a:tileRect/>
         </a:gradFill>
       </a:bgFillStyleLst>
     </a:fmtScheme>
   </a:themeElements>
+  <a:objectDefaults/>
+  <a:extraClrSchemeLst/>
 </a:theme>
 </file>
 
 <file path=ppt/theme/theme2.xml><?xml version="1.0" encoding="utf-8"?>
-<a:theme xmlns:a="http://schemas.openxmlformats.org/drawingml/2006/main" xmlns:r="http://schemas.openxmlformats.org/officeDocument/2006/relationships" name="Office Theme">
+<a:theme xmlns:a="http://schemas.openxmlformats.org/drawingml/2006/main" name="Office Theme">
   <a:themeElements>
     <a:clrScheme name="Office">
       <a:dk1>
         <a:srgbClr val="000000"/>
       </a:dk1>
       <a:lt1>
-        <a:srgbClr val="ffffff"/>
+        <a:srgbClr val="FFFFFF"/>
       </a:lt1>
       <a:dk2>
-        <a:srgbClr val="0e2841"/>
+        <a:srgbClr val="0E2841"/>
       </a:dk2>
       <a:lt2>
-        <a:srgbClr val="e8e8e8"/>
+        <a:srgbClr val="E8E8E8"/>
       </a:lt2>
       <a:accent1>
         <a:srgbClr val="156082"/>
       </a:accent1>
       <a:accent2>
-        <a:srgbClr val="e97132"/>
+        <a:srgbClr val="E97132"/>
       </a:accent2>
       <a:accent3>
-        <a:srgbClr val="196b24"/>
+        <a:srgbClr val="196B24"/>
       </a:accent3>
       <a:accent4>
-        <a:srgbClr val="0f9ed5"/>
+        <a:srgbClr val="0F9ED5"/>
       </a:accent4>
       <a:accent5>
-        <a:srgbClr val="a02b93"/>
+        <a:srgbClr val="A02B93"/>
       </a:accent5>
       <a:accent6>
-        <a:srgbClr val="4ea72e"/>
+        <a:srgbClr val="4EA72E"/>
       </a:accent6>
       <a:hlink>
         <a:srgbClr val="467886"/>
       </a:hlink>
       <a:folHlink>
-        <a:srgbClr val="96607d"/>
+        <a:srgbClr val="96607D"/>
       </a:folHlink>
     </a:clrScheme>
     <a:fontScheme name="Office">
       <a:majorFont>
-        <a:latin typeface="Aptos Display" panose="02110004020202020204" pitchFamily="0" charset="1"/>
+        <a:latin typeface="Aptos Display" panose="02110004020202020204"/>
         <a:ea typeface=""/>
         <a:cs typeface=""/>
       </a:majorFont>
       <a:minorFont>
-        <a:latin typeface="Aptos" panose="02110004020202020204" pitchFamily="0" charset="1"/>
+        <a:latin typeface="Aptos" panose="02110004020202020204"/>
         <a:ea typeface=""/>
         <a:cs typeface=""/>
       </a:minorFont>
@@ -7056,7 +7597,7 @@
             </a:gs>
           </a:gsLst>
           <a:lin ang="5400000" scaled="0"/>
-          <a:tileRect l="0" t="0" r="0" b="0"/>
+          <a:tileRect/>
         </a:gradFill>
         <a:gradFill>
           <a:gsLst>
@@ -7080,7 +7621,7 @@
             </a:gs>
           </a:gsLst>
           <a:lin ang="5400000" scaled="0"/>
-          <a:tileRect l="0" t="0" r="0" b="0"/>
+          <a:tileRect/>
         </a:gradFill>
       </a:fillStyleLst>
       <a:lnStyleLst>
@@ -7140,63 +7681,65 @@
             </a:gs>
           </a:gsLst>
           <a:lin ang="5400000" scaled="0"/>
-          <a:tileRect l="0" t="0" r="0" b="0"/>
+          <a:tileRect/>
         </a:gradFill>
       </a:bgFillStyleLst>
     </a:fmtScheme>
   </a:themeElements>
+  <a:objectDefaults/>
+  <a:extraClrSchemeLst/>
 </a:theme>
 </file>
 
 <file path=ppt/theme/theme3.xml><?xml version="1.0" encoding="utf-8"?>
-<a:theme xmlns:a="http://schemas.openxmlformats.org/drawingml/2006/main" xmlns:r="http://schemas.openxmlformats.org/officeDocument/2006/relationships" name="Office Theme">
+<a:theme xmlns:a="http://schemas.openxmlformats.org/drawingml/2006/main" name="Office Theme">
   <a:themeElements>
     <a:clrScheme name="Office">
       <a:dk1>
         <a:srgbClr val="000000"/>
       </a:dk1>
       <a:lt1>
-        <a:srgbClr val="ffffff"/>
+        <a:srgbClr val="FFFFFF"/>
       </a:lt1>
       <a:dk2>
-        <a:srgbClr val="0e2841"/>
+        <a:srgbClr val="0E2841"/>
       </a:dk2>
       <a:lt2>
-        <a:srgbClr val="e8e8e8"/>
+        <a:srgbClr val="E8E8E8"/>
       </a:lt2>
       <a:accent1>
         <a:srgbClr val="156082"/>
       </a:accent1>
       <a:accent2>
-        <a:srgbClr val="e97132"/>
+        <a:srgbClr val="E97132"/>
       </a:accent2>
       <a:accent3>
-        <a:srgbClr val="196b24"/>
+        <a:srgbClr val="196B24"/>
       </a:accent3>
       <a:accent4>
-        <a:srgbClr val="0f9ed5"/>
+        <a:srgbClr val="0F9ED5"/>
       </a:accent4>
       <a:accent5>
-        <a:srgbClr val="a02b93"/>
+        <a:srgbClr val="A02B93"/>
       </a:accent5>
       <a:accent6>
-        <a:srgbClr val="4ea72e"/>
+        <a:srgbClr val="4EA72E"/>
       </a:accent6>
       <a:hlink>
         <a:srgbClr val="467886"/>
       </a:hlink>
       <a:folHlink>
-        <a:srgbClr val="96607d"/>
+        <a:srgbClr val="96607D"/>
       </a:folHlink>
     </a:clrScheme>
     <a:fontScheme name="Office">
       <a:majorFont>
-        <a:latin typeface="Aptos Display" panose="02110004020202020204" pitchFamily="0" charset="1"/>
+        <a:latin typeface="Aptos Display" panose="02110004020202020204"/>
         <a:ea typeface=""/>
         <a:cs typeface=""/>
       </a:majorFont>
       <a:minorFont>
-        <a:latin typeface="Aptos" panose="02110004020202020204" pitchFamily="0" charset="1"/>
+        <a:latin typeface="Aptos" panose="02110004020202020204"/>
         <a:ea typeface=""/>
         <a:cs typeface=""/>
       </a:minorFont>
@@ -7228,7 +7771,7 @@
             </a:gs>
           </a:gsLst>
           <a:lin ang="5400000" scaled="0"/>
-          <a:tileRect l="0" t="0" r="0" b="0"/>
+          <a:tileRect/>
         </a:gradFill>
         <a:gradFill>
           <a:gsLst>
@@ -7252,7 +7795,7 @@
             </a:gs>
           </a:gsLst>
           <a:lin ang="5400000" scaled="0"/>
-          <a:tileRect l="0" t="0" r="0" b="0"/>
+          <a:tileRect/>
         </a:gradFill>
       </a:fillStyleLst>
       <a:lnStyleLst>
@@ -7312,10 +7855,12 @@
             </a:gs>
           </a:gsLst>
           <a:lin ang="5400000" scaled="0"/>
-          <a:tileRect l="0" t="0" r="0" b="0"/>
+          <a:tileRect/>
         </a:gradFill>
       </a:bgFillStyleLst>
     </a:fmtScheme>
   </a:themeElements>
+  <a:objectDefaults/>
+  <a:extraClrSchemeLst/>
 </a:theme>
 </file>